--- a/docs/pptx/auc3/jx-auc3-linsubhr-ratio-grade2.pptx
+++ b/docs/pptx/auc3/jx-auc3-linsubhr-ratio-grade2.pptx
@@ -2271,7 +2271,7 @@
           </p:nvSpPr>
           <p:spPr>
             <a:xfrm>
-              <a:off x="817517" y="5114368"/>
+              <a:off x="817517" y="5142518"/>
               <a:ext cx="7799693" cy="0"/>
             </a:xfrm>
             <a:custGeom>
@@ -2314,7 +2314,7 @@
           </p:nvSpPr>
           <p:spPr>
             <a:xfrm>
-              <a:off x="817517" y="4244691"/>
+              <a:off x="817517" y="4313054"/>
               <a:ext cx="7799693" cy="0"/>
             </a:xfrm>
             <a:custGeom>
@@ -2357,7 +2357,7 @@
           </p:nvSpPr>
           <p:spPr>
             <a:xfrm>
-              <a:off x="817517" y="3375014"/>
+              <a:off x="817517" y="3483591"/>
               <a:ext cx="7799693" cy="0"/>
             </a:xfrm>
             <a:custGeom>
@@ -2400,7 +2400,7 @@
           </p:nvSpPr>
           <p:spPr>
             <a:xfrm>
-              <a:off x="817517" y="2505337"/>
+              <a:off x="817517" y="2654127"/>
               <a:ext cx="7799693" cy="0"/>
             </a:xfrm>
             <a:custGeom>
@@ -2443,15 +2443,15 @@
           </p:nvSpPr>
           <p:spPr>
             <a:xfrm>
-              <a:off x="1615213" y="1896563"/>
-              <a:ext cx="0" cy="3826579"/>
+              <a:off x="1615213" y="2073503"/>
+              <a:ext cx="0" cy="3649639"/>
             </a:xfrm>
             <a:custGeom>
               <a:avLst/>
               <a:pathLst>
-                <a:path w="0" h="3826579">
+                <a:path w="0" h="3649639">
                   <a:moveTo>
-                    <a:pt x="0" y="3826579"/>
+                    <a:pt x="0" y="3649639"/>
                   </a:moveTo>
                   <a:lnTo>
                     <a:pt x="0" y="0"/>
@@ -2486,15 +2486,15 @@
           </p:nvSpPr>
           <p:spPr>
             <a:xfrm>
-              <a:off x="3387871" y="1896563"/>
-              <a:ext cx="0" cy="3826579"/>
+              <a:off x="3387871" y="2073503"/>
+              <a:ext cx="0" cy="3649639"/>
             </a:xfrm>
             <a:custGeom>
               <a:avLst/>
               <a:pathLst>
-                <a:path w="0" h="3826579">
+                <a:path w="0" h="3649639">
                   <a:moveTo>
-                    <a:pt x="0" y="3826579"/>
+                    <a:pt x="0" y="3649639"/>
                   </a:moveTo>
                   <a:lnTo>
                     <a:pt x="0" y="0"/>
@@ -2529,15 +2529,15 @@
           </p:nvSpPr>
           <p:spPr>
             <a:xfrm>
-              <a:off x="5160528" y="1896563"/>
-              <a:ext cx="0" cy="3826579"/>
+              <a:off x="5160528" y="2073503"/>
+              <a:ext cx="0" cy="3649639"/>
             </a:xfrm>
             <a:custGeom>
               <a:avLst/>
               <a:pathLst>
-                <a:path w="0" h="3826579">
+                <a:path w="0" h="3649639">
                   <a:moveTo>
-                    <a:pt x="0" y="3826579"/>
+                    <a:pt x="0" y="3649639"/>
                   </a:moveTo>
                   <a:lnTo>
                     <a:pt x="0" y="0"/>
@@ -2572,15 +2572,15 @@
           </p:nvSpPr>
           <p:spPr>
             <a:xfrm>
-              <a:off x="6933186" y="1896563"/>
-              <a:ext cx="0" cy="3826579"/>
+              <a:off x="6933186" y="2073503"/>
+              <a:ext cx="0" cy="3649639"/>
             </a:xfrm>
             <a:custGeom>
               <a:avLst/>
               <a:pathLst>
-                <a:path w="0" h="3826579">
+                <a:path w="0" h="3649639">
                   <a:moveTo>
-                    <a:pt x="0" y="3826579"/>
+                    <a:pt x="0" y="3649639"/>
                   </a:moveTo>
                   <a:lnTo>
                     <a:pt x="0" y="0"/>
@@ -2615,7 +2615,7 @@
           </p:nvSpPr>
           <p:spPr>
             <a:xfrm>
-              <a:off x="817517" y="5549207"/>
+              <a:off x="817517" y="5557249"/>
               <a:ext cx="7799693" cy="0"/>
             </a:xfrm>
             <a:custGeom>
@@ -2658,7 +2658,7 @@
           </p:nvSpPr>
           <p:spPr>
             <a:xfrm>
-              <a:off x="817517" y="4679530"/>
+              <a:off x="817517" y="4727786"/>
               <a:ext cx="7799693" cy="0"/>
             </a:xfrm>
             <a:custGeom>
@@ -2701,7 +2701,7 @@
           </p:nvSpPr>
           <p:spPr>
             <a:xfrm>
-              <a:off x="817517" y="3809853"/>
+              <a:off x="817517" y="3898322"/>
               <a:ext cx="7799693" cy="0"/>
             </a:xfrm>
             <a:custGeom>
@@ -2744,7 +2744,7 @@
           </p:nvSpPr>
           <p:spPr>
             <a:xfrm>
-              <a:off x="817517" y="2940175"/>
+              <a:off x="817517" y="3068859"/>
               <a:ext cx="7799693" cy="0"/>
             </a:xfrm>
             <a:custGeom>
@@ -2787,7 +2787,7 @@
           </p:nvSpPr>
           <p:spPr>
             <a:xfrm>
-              <a:off x="817517" y="2070498"/>
+              <a:off x="817517" y="2239395"/>
               <a:ext cx="7799693" cy="0"/>
             </a:xfrm>
             <a:custGeom>
@@ -2830,15 +2830,15 @@
           </p:nvSpPr>
           <p:spPr>
             <a:xfrm>
-              <a:off x="2501542" y="1896563"/>
-              <a:ext cx="0" cy="3826579"/>
+              <a:off x="2501542" y="2073503"/>
+              <a:ext cx="0" cy="3649639"/>
             </a:xfrm>
             <a:custGeom>
               <a:avLst/>
               <a:pathLst>
-                <a:path w="0" h="3826579">
+                <a:path w="0" h="3649639">
                   <a:moveTo>
-                    <a:pt x="0" y="3826579"/>
+                    <a:pt x="0" y="3649639"/>
                   </a:moveTo>
                   <a:lnTo>
                     <a:pt x="0" y="0"/>
@@ -2873,15 +2873,15 @@
           </p:nvSpPr>
           <p:spPr>
             <a:xfrm>
-              <a:off x="4274200" y="1896563"/>
-              <a:ext cx="0" cy="3826579"/>
+              <a:off x="4274200" y="2073503"/>
+              <a:ext cx="0" cy="3649639"/>
             </a:xfrm>
             <a:custGeom>
               <a:avLst/>
               <a:pathLst>
-                <a:path w="0" h="3826579">
+                <a:path w="0" h="3649639">
                   <a:moveTo>
-                    <a:pt x="0" y="3826579"/>
+                    <a:pt x="0" y="3649639"/>
                   </a:moveTo>
                   <a:lnTo>
                     <a:pt x="0" y="0"/>
@@ -2916,15 +2916,15 @@
           </p:nvSpPr>
           <p:spPr>
             <a:xfrm>
-              <a:off x="6046857" y="1896563"/>
-              <a:ext cx="0" cy="3826579"/>
+              <a:off x="6046857" y="2073503"/>
+              <a:ext cx="0" cy="3649639"/>
             </a:xfrm>
             <a:custGeom>
               <a:avLst/>
               <a:pathLst>
-                <a:path w="0" h="3826579">
+                <a:path w="0" h="3649639">
                   <a:moveTo>
-                    <a:pt x="0" y="3826579"/>
+                    <a:pt x="0" y="3649639"/>
                   </a:moveTo>
                   <a:lnTo>
                     <a:pt x="0" y="0"/>
@@ -2959,15 +2959,15 @@
           </p:nvSpPr>
           <p:spPr>
             <a:xfrm>
-              <a:off x="7819515" y="1896563"/>
-              <a:ext cx="0" cy="3826579"/>
+              <a:off x="7819515" y="2073503"/>
+              <a:ext cx="0" cy="3649639"/>
             </a:xfrm>
             <a:custGeom>
               <a:avLst/>
               <a:pathLst>
-                <a:path w="0" h="3826579">
+                <a:path w="0" h="3649639">
                   <a:moveTo>
-                    <a:pt x="0" y="3826579"/>
+                    <a:pt x="0" y="3649639"/>
                   </a:moveTo>
                   <a:lnTo>
                     <a:pt x="0" y="0"/>
@@ -3002,594 +3002,594 @@
           </p:nvSpPr>
           <p:spPr>
             <a:xfrm>
-              <a:off x="817517" y="2393130"/>
-              <a:ext cx="7392041" cy="2980182"/>
+              <a:off x="817517" y="2547109"/>
+              <a:ext cx="7392041" cy="2842380"/>
             </a:xfrm>
             <a:custGeom>
               <a:avLst/>
               <a:pathLst>
-                <a:path w="7392041" h="2980182">
+                <a:path w="7392041" h="2842380">
                   <a:moveTo>
                     <a:pt x="0" y="0"/>
                   </a:moveTo>
                   <a:lnTo>
-                    <a:pt x="53901" y="66044"/>
-                  </a:lnTo>
-                  <a:lnTo>
-                    <a:pt x="131145" y="157875"/>
-                  </a:lnTo>
-                  <a:lnTo>
-                    <a:pt x="208389" y="246977"/>
-                  </a:lnTo>
-                  <a:lnTo>
-                    <a:pt x="285632" y="333431"/>
-                  </a:lnTo>
-                  <a:lnTo>
-                    <a:pt x="362876" y="417315"/>
-                  </a:lnTo>
-                  <a:lnTo>
-                    <a:pt x="440119" y="498707"/>
-                  </a:lnTo>
-                  <a:lnTo>
-                    <a:pt x="517363" y="577680"/>
-                  </a:lnTo>
-                  <a:lnTo>
-                    <a:pt x="594606" y="654306"/>
-                  </a:lnTo>
-                  <a:lnTo>
-                    <a:pt x="671850" y="728655"/>
-                  </a:lnTo>
-                  <a:lnTo>
-                    <a:pt x="749094" y="800794"/>
-                  </a:lnTo>
-                  <a:lnTo>
-                    <a:pt x="826337" y="870789"/>
-                  </a:lnTo>
-                  <a:lnTo>
-                    <a:pt x="903581" y="938705"/>
-                  </a:lnTo>
-                  <a:lnTo>
-                    <a:pt x="980824" y="1004601"/>
-                  </a:lnTo>
-                  <a:lnTo>
-                    <a:pt x="1058068" y="1068540"/>
-                  </a:lnTo>
-                  <a:lnTo>
-                    <a:pt x="1135311" y="1130578"/>
-                  </a:lnTo>
-                  <a:lnTo>
-                    <a:pt x="1212555" y="1190773"/>
-                  </a:lnTo>
-                  <a:lnTo>
-                    <a:pt x="1289799" y="1249179"/>
-                  </a:lnTo>
-                  <a:lnTo>
-                    <a:pt x="1367042" y="1305849"/>
-                  </a:lnTo>
-                  <a:lnTo>
-                    <a:pt x="1444286" y="1360835"/>
-                  </a:lnTo>
-                  <a:lnTo>
-                    <a:pt x="1521529" y="1414187"/>
-                  </a:lnTo>
-                  <a:lnTo>
-                    <a:pt x="1598773" y="1465953"/>
-                  </a:lnTo>
-                  <a:lnTo>
-                    <a:pt x="1676016" y="1516181"/>
-                  </a:lnTo>
-                  <a:lnTo>
-                    <a:pt x="1753260" y="1564916"/>
-                  </a:lnTo>
-                  <a:lnTo>
-                    <a:pt x="1830504" y="1612203"/>
-                  </a:lnTo>
-                  <a:lnTo>
-                    <a:pt x="1907747" y="1658084"/>
-                  </a:lnTo>
-                  <a:lnTo>
-                    <a:pt x="1984991" y="1702602"/>
-                  </a:lnTo>
-                  <a:lnTo>
-                    <a:pt x="2062234" y="1745797"/>
-                  </a:lnTo>
-                  <a:lnTo>
-                    <a:pt x="2139478" y="1787709"/>
-                  </a:lnTo>
-                  <a:lnTo>
-                    <a:pt x="2216721" y="1828374"/>
-                  </a:lnTo>
-                  <a:lnTo>
-                    <a:pt x="2293965" y="1867832"/>
-                  </a:lnTo>
-                  <a:lnTo>
-                    <a:pt x="2371209" y="1906116"/>
-                  </a:lnTo>
-                  <a:lnTo>
-                    <a:pt x="2448452" y="1943263"/>
-                  </a:lnTo>
-                  <a:lnTo>
-                    <a:pt x="2525696" y="1979306"/>
-                  </a:lnTo>
-                  <a:lnTo>
-                    <a:pt x="2602939" y="2014278"/>
-                  </a:lnTo>
-                  <a:lnTo>
-                    <a:pt x="2680183" y="2048211"/>
-                  </a:lnTo>
-                  <a:lnTo>
-                    <a:pt x="2757426" y="2081135"/>
-                  </a:lnTo>
-                  <a:lnTo>
-                    <a:pt x="2834670" y="2113080"/>
-                  </a:lnTo>
-                  <a:lnTo>
-                    <a:pt x="2911914" y="2144076"/>
-                  </a:lnTo>
-                  <a:lnTo>
-                    <a:pt x="2989157" y="2174152"/>
-                  </a:lnTo>
-                  <a:lnTo>
-                    <a:pt x="3066401" y="2203333"/>
-                  </a:lnTo>
-                  <a:lnTo>
-                    <a:pt x="3143644" y="2231647"/>
-                  </a:lnTo>
-                  <a:lnTo>
-                    <a:pt x="3220888" y="2259120"/>
-                  </a:lnTo>
-                  <a:lnTo>
-                    <a:pt x="3298131" y="2285776"/>
-                  </a:lnTo>
-                  <a:lnTo>
-                    <a:pt x="3375375" y="2297036"/>
-                  </a:lnTo>
-                  <a:lnTo>
-                    <a:pt x="3452619" y="2307798"/>
-                  </a:lnTo>
-                  <a:lnTo>
-                    <a:pt x="3529862" y="2318424"/>
-                  </a:lnTo>
-                  <a:lnTo>
-                    <a:pt x="3607106" y="2328917"/>
-                  </a:lnTo>
-                  <a:lnTo>
-                    <a:pt x="3684349" y="2339279"/>
-                  </a:lnTo>
-                  <a:lnTo>
-                    <a:pt x="3761593" y="2349511"/>
-                  </a:lnTo>
-                  <a:lnTo>
-                    <a:pt x="3838836" y="2359615"/>
-                  </a:lnTo>
-                  <a:lnTo>
-                    <a:pt x="3916080" y="2369592"/>
-                  </a:lnTo>
-                  <a:lnTo>
-                    <a:pt x="3993324" y="2379445"/>
-                  </a:lnTo>
-                  <a:lnTo>
-                    <a:pt x="4070567" y="2389174"/>
-                  </a:lnTo>
-                  <a:lnTo>
-                    <a:pt x="4147811" y="2398781"/>
-                  </a:lnTo>
-                  <a:lnTo>
-                    <a:pt x="4225054" y="2408267"/>
-                  </a:lnTo>
-                  <a:lnTo>
-                    <a:pt x="4302298" y="2417635"/>
-                  </a:lnTo>
-                  <a:lnTo>
-                    <a:pt x="4379541" y="2426886"/>
-                  </a:lnTo>
-                  <a:lnTo>
-                    <a:pt x="4456785" y="2436020"/>
-                  </a:lnTo>
-                  <a:lnTo>
-                    <a:pt x="4534029" y="2445040"/>
-                  </a:lnTo>
-                  <a:lnTo>
-                    <a:pt x="4611272" y="2453948"/>
-                  </a:lnTo>
-                  <a:lnTo>
-                    <a:pt x="4688516" y="2462743"/>
-                  </a:lnTo>
-                  <a:lnTo>
-                    <a:pt x="4765759" y="2471429"/>
-                  </a:lnTo>
-                  <a:lnTo>
-                    <a:pt x="4843003" y="2480005"/>
-                  </a:lnTo>
-                  <a:lnTo>
-                    <a:pt x="4920246" y="2488474"/>
-                  </a:lnTo>
-                  <a:lnTo>
-                    <a:pt x="4997490" y="2496837"/>
-                  </a:lnTo>
-                  <a:lnTo>
-                    <a:pt x="5074734" y="2505096"/>
-                  </a:lnTo>
-                  <a:lnTo>
-                    <a:pt x="5151977" y="2513251"/>
-                  </a:lnTo>
-                  <a:lnTo>
-                    <a:pt x="5229221" y="2521303"/>
-                  </a:lnTo>
-                  <a:lnTo>
-                    <a:pt x="5306464" y="2529255"/>
-                  </a:lnTo>
-                  <a:lnTo>
-                    <a:pt x="5383708" y="2537107"/>
-                  </a:lnTo>
-                  <a:lnTo>
-                    <a:pt x="5460951" y="2544861"/>
-                  </a:lnTo>
-                  <a:lnTo>
-                    <a:pt x="5538195" y="2552518"/>
-                  </a:lnTo>
-                  <a:lnTo>
-                    <a:pt x="5615439" y="2560079"/>
-                  </a:lnTo>
-                  <a:lnTo>
-                    <a:pt x="5692682" y="2567545"/>
-                  </a:lnTo>
-                  <a:lnTo>
-                    <a:pt x="5769926" y="2574917"/>
-                  </a:lnTo>
-                  <a:lnTo>
-                    <a:pt x="5847169" y="2582198"/>
-                  </a:lnTo>
-                  <a:lnTo>
-                    <a:pt x="5924413" y="2589387"/>
-                  </a:lnTo>
-                  <a:lnTo>
-                    <a:pt x="6001656" y="2596486"/>
-                  </a:lnTo>
-                  <a:lnTo>
-                    <a:pt x="6078900" y="2603496"/>
-                  </a:lnTo>
-                  <a:lnTo>
-                    <a:pt x="6156144" y="2610418"/>
-                  </a:lnTo>
-                  <a:lnTo>
-                    <a:pt x="6233387" y="2617253"/>
-                  </a:lnTo>
-                  <a:lnTo>
-                    <a:pt x="6310631" y="2624003"/>
-                  </a:lnTo>
-                  <a:lnTo>
-                    <a:pt x="6387874" y="2630668"/>
-                  </a:lnTo>
-                  <a:lnTo>
-                    <a:pt x="6465118" y="2637250"/>
-                  </a:lnTo>
-                  <a:lnTo>
-                    <a:pt x="6542361" y="2643750"/>
-                  </a:lnTo>
-                  <a:lnTo>
-                    <a:pt x="6619605" y="2650168"/>
-                  </a:lnTo>
-                  <a:lnTo>
-                    <a:pt x="6696849" y="2656505"/>
-                  </a:lnTo>
-                  <a:lnTo>
-                    <a:pt x="6774092" y="2662763"/>
-                  </a:lnTo>
-                  <a:lnTo>
-                    <a:pt x="6851336" y="2668943"/>
-                  </a:lnTo>
-                  <a:lnTo>
-                    <a:pt x="6928579" y="2675045"/>
-                  </a:lnTo>
-                  <a:lnTo>
-                    <a:pt x="7005823" y="2681071"/>
-                  </a:lnTo>
-                  <a:lnTo>
-                    <a:pt x="7083066" y="2687022"/>
-                  </a:lnTo>
-                  <a:lnTo>
-                    <a:pt x="7160310" y="2692897"/>
-                  </a:lnTo>
-                  <a:lnTo>
-                    <a:pt x="7237554" y="2698700"/>
-                  </a:lnTo>
-                  <a:lnTo>
-                    <a:pt x="7314797" y="2704429"/>
-                  </a:lnTo>
-                  <a:lnTo>
-                    <a:pt x="7392041" y="2710087"/>
-                  </a:lnTo>
-                  <a:lnTo>
-                    <a:pt x="7392041" y="2980182"/>
-                  </a:lnTo>
-                  <a:lnTo>
-                    <a:pt x="7314797" y="2974795"/>
-                  </a:lnTo>
-                  <a:lnTo>
-                    <a:pt x="7237554" y="2969242"/>
-                  </a:lnTo>
-                  <a:lnTo>
-                    <a:pt x="7160310" y="2963520"/>
-                  </a:lnTo>
-                  <a:lnTo>
-                    <a:pt x="7083066" y="2957622"/>
-                  </a:lnTo>
-                  <a:lnTo>
-                    <a:pt x="7005823" y="2951544"/>
-                  </a:lnTo>
-                  <a:lnTo>
-                    <a:pt x="6928579" y="2945279"/>
-                  </a:lnTo>
-                  <a:lnTo>
-                    <a:pt x="6851336" y="2938823"/>
-                  </a:lnTo>
-                  <a:lnTo>
-                    <a:pt x="6774092" y="2932169"/>
-                  </a:lnTo>
-                  <a:lnTo>
-                    <a:pt x="6696849" y="2925311"/>
-                  </a:lnTo>
-                  <a:lnTo>
-                    <a:pt x="6619605" y="2918243"/>
-                  </a:lnTo>
-                  <a:lnTo>
-                    <a:pt x="6542361" y="2910958"/>
-                  </a:lnTo>
-                  <a:lnTo>
-                    <a:pt x="6465118" y="2903450"/>
-                  </a:lnTo>
-                  <a:lnTo>
-                    <a:pt x="6387874" y="2895713"/>
-                  </a:lnTo>
-                  <a:lnTo>
-                    <a:pt x="6310631" y="2887738"/>
-                  </a:lnTo>
-                  <a:lnTo>
-                    <a:pt x="6233387" y="2879519"/>
-                  </a:lnTo>
-                  <a:lnTo>
-                    <a:pt x="6156144" y="2871049"/>
-                  </a:lnTo>
-                  <a:lnTo>
-                    <a:pt x="6078900" y="2862319"/>
-                  </a:lnTo>
-                  <a:lnTo>
-                    <a:pt x="6001656" y="2853321"/>
-                  </a:lnTo>
-                  <a:lnTo>
-                    <a:pt x="5924413" y="2844048"/>
-                  </a:lnTo>
-                  <a:lnTo>
-                    <a:pt x="5847169" y="2834491"/>
-                  </a:lnTo>
-                  <a:lnTo>
-                    <a:pt x="5769926" y="2824642"/>
-                  </a:lnTo>
-                  <a:lnTo>
-                    <a:pt x="5692682" y="2814490"/>
-                  </a:lnTo>
-                  <a:lnTo>
-                    <a:pt x="5615439" y="2804028"/>
-                  </a:lnTo>
-                  <a:lnTo>
-                    <a:pt x="5538195" y="2793245"/>
-                  </a:lnTo>
-                  <a:lnTo>
-                    <a:pt x="5460951" y="2782132"/>
-                  </a:lnTo>
-                  <a:lnTo>
-                    <a:pt x="5383708" y="2770679"/>
-                  </a:lnTo>
-                  <a:lnTo>
-                    <a:pt x="5306464" y="2758874"/>
-                  </a:lnTo>
-                  <a:lnTo>
-                    <a:pt x="5229221" y="2746709"/>
-                  </a:lnTo>
-                  <a:lnTo>
-                    <a:pt x="5151977" y="2734170"/>
-                  </a:lnTo>
-                  <a:lnTo>
-                    <a:pt x="5074734" y="2721248"/>
-                  </a:lnTo>
-                  <a:lnTo>
-                    <a:pt x="4997490" y="2707930"/>
-                  </a:lnTo>
-                  <a:lnTo>
-                    <a:pt x="4920246" y="2694203"/>
-                  </a:lnTo>
-                  <a:lnTo>
-                    <a:pt x="4843003" y="2680057"/>
-                  </a:lnTo>
-                  <a:lnTo>
-                    <a:pt x="4765759" y="2665477"/>
-                  </a:lnTo>
-                  <a:lnTo>
-                    <a:pt x="4688516" y="2650451"/>
-                  </a:lnTo>
-                  <a:lnTo>
-                    <a:pt x="4611272" y="2634964"/>
-                  </a:lnTo>
-                  <a:lnTo>
-                    <a:pt x="4534029" y="2619003"/>
-                  </a:lnTo>
-                  <a:lnTo>
-                    <a:pt x="4456785" y="2602553"/>
-                  </a:lnTo>
-                  <a:lnTo>
-                    <a:pt x="4379541" y="2585599"/>
-                  </a:lnTo>
-                  <a:lnTo>
-                    <a:pt x="4302298" y="2568126"/>
-                  </a:lnTo>
-                  <a:lnTo>
-                    <a:pt x="4225054" y="2550118"/>
-                  </a:lnTo>
-                  <a:lnTo>
-                    <a:pt x="4147811" y="2531559"/>
-                  </a:lnTo>
-                  <a:lnTo>
-                    <a:pt x="4070567" y="2512430"/>
-                  </a:lnTo>
-                  <a:lnTo>
-                    <a:pt x="3993324" y="2492716"/>
-                  </a:lnTo>
-                  <a:lnTo>
-                    <a:pt x="3916080" y="2472399"/>
-                  </a:lnTo>
-                  <a:lnTo>
-                    <a:pt x="3838836" y="2451458"/>
-                  </a:lnTo>
-                  <a:lnTo>
-                    <a:pt x="3761593" y="2429877"/>
-                  </a:lnTo>
-                  <a:lnTo>
-                    <a:pt x="3684349" y="2407634"/>
-                  </a:lnTo>
-                  <a:lnTo>
-                    <a:pt x="3607106" y="2384711"/>
-                  </a:lnTo>
-                  <a:lnTo>
-                    <a:pt x="3529862" y="2361085"/>
-                  </a:lnTo>
-                  <a:lnTo>
-                    <a:pt x="3452619" y="2336735"/>
-                  </a:lnTo>
-                  <a:lnTo>
-                    <a:pt x="3375375" y="2311640"/>
-                  </a:lnTo>
-                  <a:lnTo>
-                    <a:pt x="3298131" y="2286139"/>
-                  </a:lnTo>
-                  <a:lnTo>
-                    <a:pt x="3220888" y="2275103"/>
-                  </a:lnTo>
-                  <a:lnTo>
-                    <a:pt x="3143644" y="2263927"/>
-                  </a:lnTo>
-                  <a:lnTo>
-                    <a:pt x="3066401" y="2252609"/>
-                  </a:lnTo>
-                  <a:lnTo>
-                    <a:pt x="2989157" y="2241148"/>
-                  </a:lnTo>
-                  <a:lnTo>
-                    <a:pt x="2911914" y="2229541"/>
-                  </a:lnTo>
-                  <a:lnTo>
-                    <a:pt x="2834670" y="2217787"/>
-                  </a:lnTo>
-                  <a:lnTo>
-                    <a:pt x="2757426" y="2205884"/>
-                  </a:lnTo>
-                  <a:lnTo>
-                    <a:pt x="2680183" y="2193830"/>
-                  </a:lnTo>
-                  <a:lnTo>
-                    <a:pt x="2602939" y="2181623"/>
-                  </a:lnTo>
-                  <a:lnTo>
-                    <a:pt x="2525696" y="2169261"/>
-                  </a:lnTo>
-                  <a:lnTo>
-                    <a:pt x="2448452" y="2156742"/>
-                  </a:lnTo>
-                  <a:lnTo>
-                    <a:pt x="2371209" y="2144064"/>
-                  </a:lnTo>
-                  <a:lnTo>
-                    <a:pt x="2293965" y="2131226"/>
-                  </a:lnTo>
-                  <a:lnTo>
-                    <a:pt x="2216721" y="2118225"/>
-                  </a:lnTo>
-                  <a:lnTo>
-                    <a:pt x="2139478" y="2105059"/>
-                  </a:lnTo>
-                  <a:lnTo>
-                    <a:pt x="2062234" y="2091726"/>
-                  </a:lnTo>
-                  <a:lnTo>
-                    <a:pt x="1984991" y="2078223"/>
-                  </a:lnTo>
-                  <a:lnTo>
-                    <a:pt x="1907747" y="2064550"/>
-                  </a:lnTo>
-                  <a:lnTo>
-                    <a:pt x="1830504" y="2050703"/>
-                  </a:lnTo>
-                  <a:lnTo>
-                    <a:pt x="1753260" y="2036680"/>
-                  </a:lnTo>
-                  <a:lnTo>
-                    <a:pt x="1676016" y="2022479"/>
-                  </a:lnTo>
-                  <a:lnTo>
-                    <a:pt x="1598773" y="2008099"/>
-                  </a:lnTo>
-                  <a:lnTo>
-                    <a:pt x="1521529" y="1993535"/>
-                  </a:lnTo>
-                  <a:lnTo>
-                    <a:pt x="1444286" y="1978787"/>
-                  </a:lnTo>
-                  <a:lnTo>
-                    <a:pt x="1367042" y="1963852"/>
-                  </a:lnTo>
-                  <a:lnTo>
-                    <a:pt x="1289799" y="1948728"/>
-                  </a:lnTo>
-                  <a:lnTo>
-                    <a:pt x="1212555" y="1933411"/>
-                  </a:lnTo>
-                  <a:lnTo>
-                    <a:pt x="1135311" y="1917901"/>
-                  </a:lnTo>
-                  <a:lnTo>
-                    <a:pt x="1058068" y="1902193"/>
-                  </a:lnTo>
-                  <a:lnTo>
-                    <a:pt x="980824" y="1886287"/>
-                  </a:lnTo>
-                  <a:lnTo>
-                    <a:pt x="903581" y="1870178"/>
-                  </a:lnTo>
-                  <a:lnTo>
-                    <a:pt x="826337" y="1853865"/>
-                  </a:lnTo>
-                  <a:lnTo>
-                    <a:pt x="749094" y="1837346"/>
-                  </a:lnTo>
-                  <a:lnTo>
-                    <a:pt x="671850" y="1820616"/>
-                  </a:lnTo>
-                  <a:lnTo>
-                    <a:pt x="594606" y="1803675"/>
-                  </a:lnTo>
-                  <a:lnTo>
-                    <a:pt x="517363" y="1786518"/>
-                  </a:lnTo>
-                  <a:lnTo>
-                    <a:pt x="440119" y="1769144"/>
-                  </a:lnTo>
-                  <a:lnTo>
-                    <a:pt x="362876" y="1751549"/>
-                  </a:lnTo>
-                  <a:lnTo>
-                    <a:pt x="285632" y="1733732"/>
-                  </a:lnTo>
-                  <a:lnTo>
-                    <a:pt x="208389" y="1715688"/>
-                  </a:lnTo>
-                  <a:lnTo>
-                    <a:pt x="131145" y="1697415"/>
-                  </a:lnTo>
-                  <a:lnTo>
-                    <a:pt x="53901" y="1678911"/>
-                  </a:lnTo>
-                  <a:lnTo>
-                    <a:pt x="0" y="1665834"/>
+                    <a:pt x="53901" y="62990"/>
+                  </a:lnTo>
+                  <a:lnTo>
+                    <a:pt x="131145" y="150574"/>
+                  </a:lnTo>
+                  <a:lnTo>
+                    <a:pt x="208389" y="235556"/>
+                  </a:lnTo>
+                  <a:lnTo>
+                    <a:pt x="285632" y="318013"/>
+                  </a:lnTo>
+                  <a:lnTo>
+                    <a:pt x="362876" y="398019"/>
+                  </a:lnTo>
+                  <a:lnTo>
+                    <a:pt x="440119" y="475647"/>
+                  </a:lnTo>
+                  <a:lnTo>
+                    <a:pt x="517363" y="550968"/>
+                  </a:lnTo>
+                  <a:lnTo>
+                    <a:pt x="594606" y="624051"/>
+                  </a:lnTo>
+                  <a:lnTo>
+                    <a:pt x="671850" y="694962"/>
+                  </a:lnTo>
+                  <a:lnTo>
+                    <a:pt x="749094" y="763765"/>
+                  </a:lnTo>
+                  <a:lnTo>
+                    <a:pt x="826337" y="830524"/>
+                  </a:lnTo>
+                  <a:lnTo>
+                    <a:pt x="903581" y="895299"/>
+                  </a:lnTo>
+                  <a:lnTo>
+                    <a:pt x="980824" y="958149"/>
+                  </a:lnTo>
+                  <a:lnTo>
+                    <a:pt x="1058068" y="1019131"/>
+                  </a:lnTo>
+                  <a:lnTo>
+                    <a:pt x="1135311" y="1078301"/>
+                  </a:lnTo>
+                  <a:lnTo>
+                    <a:pt x="1212555" y="1135712"/>
+                  </a:lnTo>
+                  <a:lnTo>
+                    <a:pt x="1289799" y="1191417"/>
+                  </a:lnTo>
+                  <a:lnTo>
+                    <a:pt x="1367042" y="1245467"/>
+                  </a:lnTo>
+                  <a:lnTo>
+                    <a:pt x="1444286" y="1297910"/>
+                  </a:lnTo>
+                  <a:lnTo>
+                    <a:pt x="1521529" y="1348795"/>
+                  </a:lnTo>
+                  <a:lnTo>
+                    <a:pt x="1598773" y="1398168"/>
+                  </a:lnTo>
+                  <a:lnTo>
+                    <a:pt x="1676016" y="1446073"/>
+                  </a:lnTo>
+                  <a:lnTo>
+                    <a:pt x="1753260" y="1492555"/>
+                  </a:lnTo>
+                  <a:lnTo>
+                    <a:pt x="1830504" y="1537655"/>
+                  </a:lnTo>
+                  <a:lnTo>
+                    <a:pt x="1907747" y="1581415"/>
+                  </a:lnTo>
+                  <a:lnTo>
+                    <a:pt x="1984991" y="1623875"/>
+                  </a:lnTo>
+                  <a:lnTo>
+                    <a:pt x="2062234" y="1665072"/>
+                  </a:lnTo>
+                  <a:lnTo>
+                    <a:pt x="2139478" y="1705046"/>
+                  </a:lnTo>
+                  <a:lnTo>
+                    <a:pt x="2216721" y="1743831"/>
+                  </a:lnTo>
+                  <a:lnTo>
+                    <a:pt x="2293965" y="1781464"/>
+                  </a:lnTo>
+                  <a:lnTo>
+                    <a:pt x="2371209" y="1817978"/>
+                  </a:lnTo>
+                  <a:lnTo>
+                    <a:pt x="2448452" y="1853407"/>
+                  </a:lnTo>
+                  <a:lnTo>
+                    <a:pt x="2525696" y="1887784"/>
+                  </a:lnTo>
+                  <a:lnTo>
+                    <a:pt x="2602939" y="1921139"/>
+                  </a:lnTo>
+                  <a:lnTo>
+                    <a:pt x="2680183" y="1953502"/>
+                  </a:lnTo>
+                  <a:lnTo>
+                    <a:pt x="2757426" y="1984904"/>
+                  </a:lnTo>
+                  <a:lnTo>
+                    <a:pt x="2834670" y="2015372"/>
+                  </a:lnTo>
+                  <a:lnTo>
+                    <a:pt x="2911914" y="2044935"/>
+                  </a:lnTo>
+                  <a:lnTo>
+                    <a:pt x="2989157" y="2073620"/>
+                  </a:lnTo>
+                  <a:lnTo>
+                    <a:pt x="3066401" y="2101452"/>
+                  </a:lnTo>
+                  <a:lnTo>
+                    <a:pt x="3143644" y="2128456"/>
+                  </a:lnTo>
+                  <a:lnTo>
+                    <a:pt x="3220888" y="2154659"/>
+                  </a:lnTo>
+                  <a:lnTo>
+                    <a:pt x="3298131" y="2180082"/>
+                  </a:lnTo>
+                  <a:lnTo>
+                    <a:pt x="3375375" y="2190822"/>
+                  </a:lnTo>
+                  <a:lnTo>
+                    <a:pt x="3452619" y="2201086"/>
+                  </a:lnTo>
+                  <a:lnTo>
+                    <a:pt x="3529862" y="2211221"/>
+                  </a:lnTo>
+                  <a:lnTo>
+                    <a:pt x="3607106" y="2221229"/>
+                  </a:lnTo>
+                  <a:lnTo>
+                    <a:pt x="3684349" y="2231112"/>
+                  </a:lnTo>
+                  <a:lnTo>
+                    <a:pt x="3761593" y="2240871"/>
+                  </a:lnTo>
+                  <a:lnTo>
+                    <a:pt x="3838836" y="2250507"/>
+                  </a:lnTo>
+                  <a:lnTo>
+                    <a:pt x="3916080" y="2260023"/>
+                  </a:lnTo>
+                  <a:lnTo>
+                    <a:pt x="3993324" y="2269420"/>
+                  </a:lnTo>
+                  <a:lnTo>
+                    <a:pt x="4070567" y="2278699"/>
+                  </a:lnTo>
+                  <a:lnTo>
+                    <a:pt x="4147811" y="2287862"/>
+                  </a:lnTo>
+                  <a:lnTo>
+                    <a:pt x="4225054" y="2296910"/>
+                  </a:lnTo>
+                  <a:lnTo>
+                    <a:pt x="4302298" y="2305845"/>
+                  </a:lnTo>
+                  <a:lnTo>
+                    <a:pt x="4379541" y="2314667"/>
+                  </a:lnTo>
+                  <a:lnTo>
+                    <a:pt x="4456785" y="2323380"/>
+                  </a:lnTo>
+                  <a:lnTo>
+                    <a:pt x="4534029" y="2331983"/>
+                  </a:lnTo>
+                  <a:lnTo>
+                    <a:pt x="4611272" y="2340478"/>
+                  </a:lnTo>
+                  <a:lnTo>
+                    <a:pt x="4688516" y="2348867"/>
+                  </a:lnTo>
+                  <a:lnTo>
+                    <a:pt x="4765759" y="2357151"/>
+                  </a:lnTo>
+                  <a:lnTo>
+                    <a:pt x="4843003" y="2365331"/>
+                  </a:lnTo>
+                  <a:lnTo>
+                    <a:pt x="4920246" y="2373408"/>
+                  </a:lnTo>
+                  <a:lnTo>
+                    <a:pt x="4997490" y="2381385"/>
+                  </a:lnTo>
+                  <a:lnTo>
+                    <a:pt x="5074734" y="2389261"/>
+                  </a:lnTo>
+                  <a:lnTo>
+                    <a:pt x="5151977" y="2397039"/>
+                  </a:lnTo>
+                  <a:lnTo>
+                    <a:pt x="5229221" y="2404719"/>
+                  </a:lnTo>
+                  <a:lnTo>
+                    <a:pt x="5306464" y="2412303"/>
+                  </a:lnTo>
+                  <a:lnTo>
+                    <a:pt x="5383708" y="2419792"/>
+                  </a:lnTo>
+                  <a:lnTo>
+                    <a:pt x="5460951" y="2427188"/>
+                  </a:lnTo>
+                  <a:lnTo>
+                    <a:pt x="5538195" y="2434490"/>
+                  </a:lnTo>
+                  <a:lnTo>
+                    <a:pt x="5615439" y="2441702"/>
+                  </a:lnTo>
+                  <a:lnTo>
+                    <a:pt x="5692682" y="2448822"/>
+                  </a:lnTo>
+                  <a:lnTo>
+                    <a:pt x="5769926" y="2455854"/>
+                  </a:lnTo>
+                  <a:lnTo>
+                    <a:pt x="5847169" y="2462798"/>
+                  </a:lnTo>
+                  <a:lnTo>
+                    <a:pt x="5924413" y="2469654"/>
+                  </a:lnTo>
+                  <a:lnTo>
+                    <a:pt x="6001656" y="2476425"/>
+                  </a:lnTo>
+                  <a:lnTo>
+                    <a:pt x="6078900" y="2483111"/>
+                  </a:lnTo>
+                  <a:lnTo>
+                    <a:pt x="6156144" y="2489713"/>
+                  </a:lnTo>
+                  <a:lnTo>
+                    <a:pt x="6233387" y="2496232"/>
+                  </a:lnTo>
+                  <a:lnTo>
+                    <a:pt x="6310631" y="2502670"/>
+                  </a:lnTo>
+                  <a:lnTo>
+                    <a:pt x="6387874" y="2509027"/>
+                  </a:lnTo>
+                  <a:lnTo>
+                    <a:pt x="6465118" y="2515305"/>
+                  </a:lnTo>
+                  <a:lnTo>
+                    <a:pt x="6542361" y="2521504"/>
+                  </a:lnTo>
+                  <a:lnTo>
+                    <a:pt x="6619605" y="2527625"/>
+                  </a:lnTo>
+                  <a:lnTo>
+                    <a:pt x="6696849" y="2533669"/>
+                  </a:lnTo>
+                  <a:lnTo>
+                    <a:pt x="6774092" y="2539638"/>
+                  </a:lnTo>
+                  <a:lnTo>
+                    <a:pt x="6851336" y="2545532"/>
+                  </a:lnTo>
+                  <a:lnTo>
+                    <a:pt x="6928579" y="2551352"/>
+                  </a:lnTo>
+                  <a:lnTo>
+                    <a:pt x="7005823" y="2557099"/>
+                  </a:lnTo>
+                  <a:lnTo>
+                    <a:pt x="7083066" y="2562775"/>
+                  </a:lnTo>
+                  <a:lnTo>
+                    <a:pt x="7160310" y="2568379"/>
+                  </a:lnTo>
+                  <a:lnTo>
+                    <a:pt x="7237554" y="2573913"/>
+                  </a:lnTo>
+                  <a:lnTo>
+                    <a:pt x="7314797" y="2579377"/>
+                  </a:lnTo>
+                  <a:lnTo>
+                    <a:pt x="7392041" y="2584774"/>
+                  </a:lnTo>
+                  <a:lnTo>
+                    <a:pt x="7392041" y="2842380"/>
+                  </a:lnTo>
+                  <a:lnTo>
+                    <a:pt x="7314797" y="2837241"/>
+                  </a:lnTo>
+                  <a:lnTo>
+                    <a:pt x="7237554" y="2831946"/>
+                  </a:lnTo>
+                  <a:lnTo>
+                    <a:pt x="7160310" y="2826488"/>
+                  </a:lnTo>
+                  <a:lnTo>
+                    <a:pt x="7083066" y="2820863"/>
+                  </a:lnTo>
+                  <a:lnTo>
+                    <a:pt x="7005823" y="2815066"/>
+                  </a:lnTo>
+                  <a:lnTo>
+                    <a:pt x="6928579" y="2809091"/>
+                  </a:lnTo>
+                  <a:lnTo>
+                    <a:pt x="6851336" y="2802933"/>
+                  </a:lnTo>
+                  <a:lnTo>
+                    <a:pt x="6774092" y="2796586"/>
+                  </a:lnTo>
+                  <a:lnTo>
+                    <a:pt x="6696849" y="2790045"/>
+                  </a:lnTo>
+                  <a:lnTo>
+                    <a:pt x="6619605" y="2783304"/>
+                  </a:lnTo>
+                  <a:lnTo>
+                    <a:pt x="6542361" y="2776356"/>
+                  </a:lnTo>
+                  <a:lnTo>
+                    <a:pt x="6465118" y="2769196"/>
+                  </a:lnTo>
+                  <a:lnTo>
+                    <a:pt x="6387874" y="2761816"/>
+                  </a:lnTo>
+                  <a:lnTo>
+                    <a:pt x="6310631" y="2754210"/>
+                  </a:lnTo>
+                  <a:lnTo>
+                    <a:pt x="6233387" y="2746371"/>
+                  </a:lnTo>
+                  <a:lnTo>
+                    <a:pt x="6156144" y="2738293"/>
+                  </a:lnTo>
+                  <a:lnTo>
+                    <a:pt x="6078900" y="2729966"/>
+                  </a:lnTo>
+                  <a:lnTo>
+                    <a:pt x="6001656" y="2721385"/>
+                  </a:lnTo>
+                  <a:lnTo>
+                    <a:pt x="5924413" y="2712541"/>
+                  </a:lnTo>
+                  <a:lnTo>
+                    <a:pt x="5847169" y="2703426"/>
+                  </a:lnTo>
+                  <a:lnTo>
+                    <a:pt x="5769926" y="2694031"/>
+                  </a:lnTo>
+                  <a:lnTo>
+                    <a:pt x="5692682" y="2684349"/>
+                  </a:lnTo>
+                  <a:lnTo>
+                    <a:pt x="5615439" y="2674371"/>
+                  </a:lnTo>
+                  <a:lnTo>
+                    <a:pt x="5538195" y="2664087"/>
+                  </a:lnTo>
+                  <a:lnTo>
+                    <a:pt x="5460951" y="2653487"/>
+                  </a:lnTo>
+                  <a:lnTo>
+                    <a:pt x="5383708" y="2642563"/>
+                  </a:lnTo>
+                  <a:lnTo>
+                    <a:pt x="5306464" y="2631305"/>
+                  </a:lnTo>
+                  <a:lnTo>
+                    <a:pt x="5229221" y="2619702"/>
+                  </a:lnTo>
+                  <a:lnTo>
+                    <a:pt x="5151977" y="2607743"/>
+                  </a:lnTo>
+                  <a:lnTo>
+                    <a:pt x="5074734" y="2595418"/>
+                  </a:lnTo>
+                  <a:lnTo>
+                    <a:pt x="4997490" y="2582716"/>
+                  </a:lnTo>
+                  <a:lnTo>
+                    <a:pt x="4920246" y="2569624"/>
+                  </a:lnTo>
+                  <a:lnTo>
+                    <a:pt x="4843003" y="2556132"/>
+                  </a:lnTo>
+                  <a:lnTo>
+                    <a:pt x="4765759" y="2542226"/>
+                  </a:lnTo>
+                  <a:lnTo>
+                    <a:pt x="4688516" y="2527895"/>
+                  </a:lnTo>
+                  <a:lnTo>
+                    <a:pt x="4611272" y="2513124"/>
+                  </a:lnTo>
+                  <a:lnTo>
+                    <a:pt x="4534029" y="2497901"/>
+                  </a:lnTo>
+                  <a:lnTo>
+                    <a:pt x="4456785" y="2482212"/>
+                  </a:lnTo>
+                  <a:lnTo>
+                    <a:pt x="4379541" y="2466042"/>
+                  </a:lnTo>
+                  <a:lnTo>
+                    <a:pt x="4302298" y="2449377"/>
+                  </a:lnTo>
+                  <a:lnTo>
+                    <a:pt x="4225054" y="2432202"/>
+                  </a:lnTo>
+                  <a:lnTo>
+                    <a:pt x="4147811" y="2414500"/>
+                  </a:lnTo>
+                  <a:lnTo>
+                    <a:pt x="4070567" y="2396257"/>
+                  </a:lnTo>
+                  <a:lnTo>
+                    <a:pt x="3993324" y="2377454"/>
+                  </a:lnTo>
+                  <a:lnTo>
+                    <a:pt x="3916080" y="2358076"/>
+                  </a:lnTo>
+                  <a:lnTo>
+                    <a:pt x="3838836" y="2338104"/>
+                  </a:lnTo>
+                  <a:lnTo>
+                    <a:pt x="3761593" y="2317520"/>
+                  </a:lnTo>
+                  <a:lnTo>
+                    <a:pt x="3684349" y="2296306"/>
+                  </a:lnTo>
+                  <a:lnTo>
+                    <a:pt x="3607106" y="2274442"/>
+                  </a:lnTo>
+                  <a:lnTo>
+                    <a:pt x="3529862" y="2251909"/>
+                  </a:lnTo>
+                  <a:lnTo>
+                    <a:pt x="3452619" y="2228685"/>
+                  </a:lnTo>
+                  <a:lnTo>
+                    <a:pt x="3375375" y="2204750"/>
+                  </a:lnTo>
+                  <a:lnTo>
+                    <a:pt x="3298131" y="2180428"/>
+                  </a:lnTo>
+                  <a:lnTo>
+                    <a:pt x="3220888" y="2169903"/>
+                  </a:lnTo>
+                  <a:lnTo>
+                    <a:pt x="3143644" y="2159244"/>
+                  </a:lnTo>
+                  <a:lnTo>
+                    <a:pt x="3066401" y="2148449"/>
+                  </a:lnTo>
+                  <a:lnTo>
+                    <a:pt x="2989157" y="2137518"/>
+                  </a:lnTo>
+                  <a:lnTo>
+                    <a:pt x="2911914" y="2126448"/>
+                  </a:lnTo>
+                  <a:lnTo>
+                    <a:pt x="2834670" y="2115237"/>
+                  </a:lnTo>
+                  <a:lnTo>
+                    <a:pt x="2757426" y="2103884"/>
+                  </a:lnTo>
+                  <a:lnTo>
+                    <a:pt x="2680183" y="2092388"/>
+                  </a:lnTo>
+                  <a:lnTo>
+                    <a:pt x="2602939" y="2080745"/>
+                  </a:lnTo>
+                  <a:lnTo>
+                    <a:pt x="2525696" y="2068955"/>
+                  </a:lnTo>
+                  <a:lnTo>
+                    <a:pt x="2448452" y="2057015"/>
+                  </a:lnTo>
+                  <a:lnTo>
+                    <a:pt x="2371209" y="2044924"/>
+                  </a:lnTo>
+                  <a:lnTo>
+                    <a:pt x="2293965" y="2032679"/>
+                  </a:lnTo>
+                  <a:lnTo>
+                    <a:pt x="2216721" y="2020279"/>
+                  </a:lnTo>
+                  <a:lnTo>
+                    <a:pt x="2139478" y="2007722"/>
+                  </a:lnTo>
+                  <a:lnTo>
+                    <a:pt x="2062234" y="1995005"/>
+                  </a:lnTo>
+                  <a:lnTo>
+                    <a:pt x="1984991" y="1982127"/>
+                  </a:lnTo>
+                  <a:lnTo>
+                    <a:pt x="1907747" y="1969086"/>
+                  </a:lnTo>
+                  <a:lnTo>
+                    <a:pt x="1830504" y="1955879"/>
+                  </a:lnTo>
+                  <a:lnTo>
+                    <a:pt x="1753260" y="1942505"/>
+                  </a:lnTo>
+                  <a:lnTo>
+                    <a:pt x="1676016" y="1928961"/>
+                  </a:lnTo>
+                  <a:lnTo>
+                    <a:pt x="1598773" y="1915245"/>
+                  </a:lnTo>
+                  <a:lnTo>
+                    <a:pt x="1521529" y="1901355"/>
+                  </a:lnTo>
+                  <a:lnTo>
+                    <a:pt x="1444286" y="1887289"/>
+                  </a:lnTo>
+                  <a:lnTo>
+                    <a:pt x="1367042" y="1873045"/>
+                  </a:lnTo>
+                  <a:lnTo>
+                    <a:pt x="1289799" y="1858619"/>
+                  </a:lnTo>
+                  <a:lnTo>
+                    <a:pt x="1212555" y="1844011"/>
+                  </a:lnTo>
+                  <a:lnTo>
+                    <a:pt x="1135311" y="1829218"/>
+                  </a:lnTo>
+                  <a:lnTo>
+                    <a:pt x="1058068" y="1814237"/>
+                  </a:lnTo>
+                  <a:lnTo>
+                    <a:pt x="980824" y="1799065"/>
+                  </a:lnTo>
+                  <a:lnTo>
+                    <a:pt x="903581" y="1783702"/>
+                  </a:lnTo>
+                  <a:lnTo>
+                    <a:pt x="826337" y="1768143"/>
+                  </a:lnTo>
+                  <a:lnTo>
+                    <a:pt x="749094" y="1752387"/>
+                  </a:lnTo>
+                  <a:lnTo>
+                    <a:pt x="671850" y="1736432"/>
+                  </a:lnTo>
+                  <a:lnTo>
+                    <a:pt x="594606" y="1720273"/>
+                  </a:lnTo>
+                  <a:lnTo>
+                    <a:pt x="517363" y="1703910"/>
+                  </a:lnTo>
+                  <a:lnTo>
+                    <a:pt x="440119" y="1687339"/>
+                  </a:lnTo>
+                  <a:lnTo>
+                    <a:pt x="362876" y="1670558"/>
+                  </a:lnTo>
+                  <a:lnTo>
+                    <a:pt x="285632" y="1653564"/>
+                  </a:lnTo>
+                  <a:lnTo>
+                    <a:pt x="208389" y="1636355"/>
+                  </a:lnTo>
+                  <a:lnTo>
+                    <a:pt x="131145" y="1618927"/>
+                  </a:lnTo>
+                  <a:lnTo>
+                    <a:pt x="53901" y="1601278"/>
+                  </a:lnTo>
+                  <a:lnTo>
+                    <a:pt x="0" y="1588806"/>
                   </a:lnTo>
                   <a:close/>
                 </a:path>
@@ -3615,303 +3615,303 @@
           </p:nvSpPr>
           <p:spPr>
             <a:xfrm>
-              <a:off x="817517" y="2393130"/>
-              <a:ext cx="7392041" cy="2710087"/>
+              <a:off x="817517" y="2547109"/>
+              <a:ext cx="7392041" cy="2584774"/>
             </a:xfrm>
             <a:custGeom>
               <a:avLst/>
               <a:pathLst>
-                <a:path w="7392041" h="2710087">
+                <a:path w="7392041" h="2584774">
                   <a:moveTo>
                     <a:pt x="0" y="0"/>
                   </a:moveTo>
                   <a:lnTo>
-                    <a:pt x="53901" y="66044"/>
-                  </a:lnTo>
-                  <a:lnTo>
-                    <a:pt x="131145" y="157875"/>
-                  </a:lnTo>
-                  <a:lnTo>
-                    <a:pt x="208389" y="246977"/>
-                  </a:lnTo>
-                  <a:lnTo>
-                    <a:pt x="285632" y="333431"/>
-                  </a:lnTo>
-                  <a:lnTo>
-                    <a:pt x="362876" y="417315"/>
-                  </a:lnTo>
-                  <a:lnTo>
-                    <a:pt x="440119" y="498707"/>
-                  </a:lnTo>
-                  <a:lnTo>
-                    <a:pt x="517363" y="577680"/>
-                  </a:lnTo>
-                  <a:lnTo>
-                    <a:pt x="594606" y="654306"/>
-                  </a:lnTo>
-                  <a:lnTo>
-                    <a:pt x="671850" y="728655"/>
-                  </a:lnTo>
-                  <a:lnTo>
-                    <a:pt x="749094" y="800794"/>
-                  </a:lnTo>
-                  <a:lnTo>
-                    <a:pt x="826337" y="870789"/>
-                  </a:lnTo>
-                  <a:lnTo>
-                    <a:pt x="903581" y="938705"/>
-                  </a:lnTo>
-                  <a:lnTo>
-                    <a:pt x="980824" y="1004601"/>
-                  </a:lnTo>
-                  <a:lnTo>
-                    <a:pt x="1058068" y="1068540"/>
-                  </a:lnTo>
-                  <a:lnTo>
-                    <a:pt x="1135311" y="1130578"/>
-                  </a:lnTo>
-                  <a:lnTo>
-                    <a:pt x="1212555" y="1190773"/>
-                  </a:lnTo>
-                  <a:lnTo>
-                    <a:pt x="1289799" y="1249179"/>
-                  </a:lnTo>
-                  <a:lnTo>
-                    <a:pt x="1367042" y="1305849"/>
-                  </a:lnTo>
-                  <a:lnTo>
-                    <a:pt x="1444286" y="1360835"/>
-                  </a:lnTo>
-                  <a:lnTo>
-                    <a:pt x="1521529" y="1414187"/>
-                  </a:lnTo>
-                  <a:lnTo>
-                    <a:pt x="1598773" y="1465953"/>
-                  </a:lnTo>
-                  <a:lnTo>
-                    <a:pt x="1676016" y="1516181"/>
-                  </a:lnTo>
-                  <a:lnTo>
-                    <a:pt x="1753260" y="1564916"/>
-                  </a:lnTo>
-                  <a:lnTo>
-                    <a:pt x="1830504" y="1612203"/>
-                  </a:lnTo>
-                  <a:lnTo>
-                    <a:pt x="1907747" y="1658084"/>
-                  </a:lnTo>
-                  <a:lnTo>
-                    <a:pt x="1984991" y="1702602"/>
-                  </a:lnTo>
-                  <a:lnTo>
-                    <a:pt x="2062234" y="1745797"/>
-                  </a:lnTo>
-                  <a:lnTo>
-                    <a:pt x="2139478" y="1787709"/>
-                  </a:lnTo>
-                  <a:lnTo>
-                    <a:pt x="2216721" y="1828374"/>
-                  </a:lnTo>
-                  <a:lnTo>
-                    <a:pt x="2293965" y="1867832"/>
-                  </a:lnTo>
-                  <a:lnTo>
-                    <a:pt x="2371209" y="1906116"/>
-                  </a:lnTo>
-                  <a:lnTo>
-                    <a:pt x="2448452" y="1943263"/>
-                  </a:lnTo>
-                  <a:lnTo>
-                    <a:pt x="2525696" y="1979306"/>
-                  </a:lnTo>
-                  <a:lnTo>
-                    <a:pt x="2602939" y="2014278"/>
-                  </a:lnTo>
-                  <a:lnTo>
-                    <a:pt x="2680183" y="2048211"/>
-                  </a:lnTo>
-                  <a:lnTo>
-                    <a:pt x="2757426" y="2081135"/>
-                  </a:lnTo>
-                  <a:lnTo>
-                    <a:pt x="2834670" y="2113080"/>
-                  </a:lnTo>
-                  <a:lnTo>
-                    <a:pt x="2911914" y="2144076"/>
-                  </a:lnTo>
-                  <a:lnTo>
-                    <a:pt x="2989157" y="2174152"/>
-                  </a:lnTo>
-                  <a:lnTo>
-                    <a:pt x="3066401" y="2203333"/>
-                  </a:lnTo>
-                  <a:lnTo>
-                    <a:pt x="3143644" y="2231647"/>
-                  </a:lnTo>
-                  <a:lnTo>
-                    <a:pt x="3220888" y="2259120"/>
-                  </a:lnTo>
-                  <a:lnTo>
-                    <a:pt x="3298131" y="2285776"/>
-                  </a:lnTo>
-                  <a:lnTo>
-                    <a:pt x="3375375" y="2297036"/>
-                  </a:lnTo>
-                  <a:lnTo>
-                    <a:pt x="3452619" y="2307798"/>
-                  </a:lnTo>
-                  <a:lnTo>
-                    <a:pt x="3529862" y="2318424"/>
-                  </a:lnTo>
-                  <a:lnTo>
-                    <a:pt x="3607106" y="2328917"/>
-                  </a:lnTo>
-                  <a:lnTo>
-                    <a:pt x="3684349" y="2339279"/>
-                  </a:lnTo>
-                  <a:lnTo>
-                    <a:pt x="3761593" y="2349511"/>
-                  </a:lnTo>
-                  <a:lnTo>
-                    <a:pt x="3838836" y="2359615"/>
-                  </a:lnTo>
-                  <a:lnTo>
-                    <a:pt x="3916080" y="2369592"/>
-                  </a:lnTo>
-                  <a:lnTo>
-                    <a:pt x="3993324" y="2379445"/>
-                  </a:lnTo>
-                  <a:lnTo>
-                    <a:pt x="4070567" y="2389174"/>
-                  </a:lnTo>
-                  <a:lnTo>
-                    <a:pt x="4147811" y="2398781"/>
-                  </a:lnTo>
-                  <a:lnTo>
-                    <a:pt x="4225054" y="2408267"/>
-                  </a:lnTo>
-                  <a:lnTo>
-                    <a:pt x="4302298" y="2417635"/>
-                  </a:lnTo>
-                  <a:lnTo>
-                    <a:pt x="4379541" y="2426886"/>
-                  </a:lnTo>
-                  <a:lnTo>
-                    <a:pt x="4456785" y="2436020"/>
-                  </a:lnTo>
-                  <a:lnTo>
-                    <a:pt x="4534029" y="2445040"/>
-                  </a:lnTo>
-                  <a:lnTo>
-                    <a:pt x="4611272" y="2453948"/>
-                  </a:lnTo>
-                  <a:lnTo>
-                    <a:pt x="4688516" y="2462743"/>
-                  </a:lnTo>
-                  <a:lnTo>
-                    <a:pt x="4765759" y="2471429"/>
-                  </a:lnTo>
-                  <a:lnTo>
-                    <a:pt x="4843003" y="2480005"/>
-                  </a:lnTo>
-                  <a:lnTo>
-                    <a:pt x="4920246" y="2488474"/>
-                  </a:lnTo>
-                  <a:lnTo>
-                    <a:pt x="4997490" y="2496837"/>
-                  </a:lnTo>
-                  <a:lnTo>
-                    <a:pt x="5074734" y="2505096"/>
-                  </a:lnTo>
-                  <a:lnTo>
-                    <a:pt x="5151977" y="2513251"/>
-                  </a:lnTo>
-                  <a:lnTo>
-                    <a:pt x="5229221" y="2521303"/>
-                  </a:lnTo>
-                  <a:lnTo>
-                    <a:pt x="5306464" y="2529255"/>
-                  </a:lnTo>
-                  <a:lnTo>
-                    <a:pt x="5383708" y="2537107"/>
-                  </a:lnTo>
-                  <a:lnTo>
-                    <a:pt x="5460951" y="2544861"/>
-                  </a:lnTo>
-                  <a:lnTo>
-                    <a:pt x="5538195" y="2552518"/>
-                  </a:lnTo>
-                  <a:lnTo>
-                    <a:pt x="5615439" y="2560079"/>
-                  </a:lnTo>
-                  <a:lnTo>
-                    <a:pt x="5692682" y="2567545"/>
-                  </a:lnTo>
-                  <a:lnTo>
-                    <a:pt x="5769926" y="2574917"/>
-                  </a:lnTo>
-                  <a:lnTo>
-                    <a:pt x="5847169" y="2582198"/>
-                  </a:lnTo>
-                  <a:lnTo>
-                    <a:pt x="5924413" y="2589387"/>
-                  </a:lnTo>
-                  <a:lnTo>
-                    <a:pt x="6001656" y="2596486"/>
-                  </a:lnTo>
-                  <a:lnTo>
-                    <a:pt x="6078900" y="2603496"/>
-                  </a:lnTo>
-                  <a:lnTo>
-                    <a:pt x="6156144" y="2610418"/>
-                  </a:lnTo>
-                  <a:lnTo>
-                    <a:pt x="6233387" y="2617253"/>
-                  </a:lnTo>
-                  <a:lnTo>
-                    <a:pt x="6310631" y="2624003"/>
-                  </a:lnTo>
-                  <a:lnTo>
-                    <a:pt x="6387874" y="2630668"/>
-                  </a:lnTo>
-                  <a:lnTo>
-                    <a:pt x="6465118" y="2637250"/>
-                  </a:lnTo>
-                  <a:lnTo>
-                    <a:pt x="6542361" y="2643750"/>
-                  </a:lnTo>
-                  <a:lnTo>
-                    <a:pt x="6619605" y="2650168"/>
-                  </a:lnTo>
-                  <a:lnTo>
-                    <a:pt x="6696849" y="2656505"/>
-                  </a:lnTo>
-                  <a:lnTo>
-                    <a:pt x="6774092" y="2662763"/>
-                  </a:lnTo>
-                  <a:lnTo>
-                    <a:pt x="6851336" y="2668943"/>
-                  </a:lnTo>
-                  <a:lnTo>
-                    <a:pt x="6928579" y="2675045"/>
-                  </a:lnTo>
-                  <a:lnTo>
-                    <a:pt x="7005823" y="2681071"/>
-                  </a:lnTo>
-                  <a:lnTo>
-                    <a:pt x="7083066" y="2687022"/>
-                  </a:lnTo>
-                  <a:lnTo>
-                    <a:pt x="7160310" y="2692897"/>
-                  </a:lnTo>
-                  <a:lnTo>
-                    <a:pt x="7237554" y="2698700"/>
-                  </a:lnTo>
-                  <a:lnTo>
-                    <a:pt x="7314797" y="2704429"/>
-                  </a:lnTo>
-                  <a:lnTo>
-                    <a:pt x="7392041" y="2710087"/>
+                    <a:pt x="53901" y="62990"/>
+                  </a:lnTo>
+                  <a:lnTo>
+                    <a:pt x="131145" y="150574"/>
+                  </a:lnTo>
+                  <a:lnTo>
+                    <a:pt x="208389" y="235556"/>
+                  </a:lnTo>
+                  <a:lnTo>
+                    <a:pt x="285632" y="318013"/>
+                  </a:lnTo>
+                  <a:lnTo>
+                    <a:pt x="362876" y="398019"/>
+                  </a:lnTo>
+                  <a:lnTo>
+                    <a:pt x="440119" y="475647"/>
+                  </a:lnTo>
+                  <a:lnTo>
+                    <a:pt x="517363" y="550968"/>
+                  </a:lnTo>
+                  <a:lnTo>
+                    <a:pt x="594606" y="624051"/>
+                  </a:lnTo>
+                  <a:lnTo>
+                    <a:pt x="671850" y="694962"/>
+                  </a:lnTo>
+                  <a:lnTo>
+                    <a:pt x="749094" y="763765"/>
+                  </a:lnTo>
+                  <a:lnTo>
+                    <a:pt x="826337" y="830524"/>
+                  </a:lnTo>
+                  <a:lnTo>
+                    <a:pt x="903581" y="895299"/>
+                  </a:lnTo>
+                  <a:lnTo>
+                    <a:pt x="980824" y="958149"/>
+                  </a:lnTo>
+                  <a:lnTo>
+                    <a:pt x="1058068" y="1019131"/>
+                  </a:lnTo>
+                  <a:lnTo>
+                    <a:pt x="1135311" y="1078301"/>
+                  </a:lnTo>
+                  <a:lnTo>
+                    <a:pt x="1212555" y="1135712"/>
+                  </a:lnTo>
+                  <a:lnTo>
+                    <a:pt x="1289799" y="1191417"/>
+                  </a:lnTo>
+                  <a:lnTo>
+                    <a:pt x="1367042" y="1245467"/>
+                  </a:lnTo>
+                  <a:lnTo>
+                    <a:pt x="1444286" y="1297910"/>
+                  </a:lnTo>
+                  <a:lnTo>
+                    <a:pt x="1521529" y="1348795"/>
+                  </a:lnTo>
+                  <a:lnTo>
+                    <a:pt x="1598773" y="1398168"/>
+                  </a:lnTo>
+                  <a:lnTo>
+                    <a:pt x="1676016" y="1446073"/>
+                  </a:lnTo>
+                  <a:lnTo>
+                    <a:pt x="1753260" y="1492555"/>
+                  </a:lnTo>
+                  <a:lnTo>
+                    <a:pt x="1830504" y="1537655"/>
+                  </a:lnTo>
+                  <a:lnTo>
+                    <a:pt x="1907747" y="1581415"/>
+                  </a:lnTo>
+                  <a:lnTo>
+                    <a:pt x="1984991" y="1623875"/>
+                  </a:lnTo>
+                  <a:lnTo>
+                    <a:pt x="2062234" y="1665072"/>
+                  </a:lnTo>
+                  <a:lnTo>
+                    <a:pt x="2139478" y="1705046"/>
+                  </a:lnTo>
+                  <a:lnTo>
+                    <a:pt x="2216721" y="1743831"/>
+                  </a:lnTo>
+                  <a:lnTo>
+                    <a:pt x="2293965" y="1781464"/>
+                  </a:lnTo>
+                  <a:lnTo>
+                    <a:pt x="2371209" y="1817978"/>
+                  </a:lnTo>
+                  <a:lnTo>
+                    <a:pt x="2448452" y="1853407"/>
+                  </a:lnTo>
+                  <a:lnTo>
+                    <a:pt x="2525696" y="1887784"/>
+                  </a:lnTo>
+                  <a:lnTo>
+                    <a:pt x="2602939" y="1921139"/>
+                  </a:lnTo>
+                  <a:lnTo>
+                    <a:pt x="2680183" y="1953502"/>
+                  </a:lnTo>
+                  <a:lnTo>
+                    <a:pt x="2757426" y="1984904"/>
+                  </a:lnTo>
+                  <a:lnTo>
+                    <a:pt x="2834670" y="2015372"/>
+                  </a:lnTo>
+                  <a:lnTo>
+                    <a:pt x="2911914" y="2044935"/>
+                  </a:lnTo>
+                  <a:lnTo>
+                    <a:pt x="2989157" y="2073620"/>
+                  </a:lnTo>
+                  <a:lnTo>
+                    <a:pt x="3066401" y="2101452"/>
+                  </a:lnTo>
+                  <a:lnTo>
+                    <a:pt x="3143644" y="2128456"/>
+                  </a:lnTo>
+                  <a:lnTo>
+                    <a:pt x="3220888" y="2154659"/>
+                  </a:lnTo>
+                  <a:lnTo>
+                    <a:pt x="3298131" y="2180082"/>
+                  </a:lnTo>
+                  <a:lnTo>
+                    <a:pt x="3375375" y="2190822"/>
+                  </a:lnTo>
+                  <a:lnTo>
+                    <a:pt x="3452619" y="2201086"/>
+                  </a:lnTo>
+                  <a:lnTo>
+                    <a:pt x="3529862" y="2211221"/>
+                  </a:lnTo>
+                  <a:lnTo>
+                    <a:pt x="3607106" y="2221229"/>
+                  </a:lnTo>
+                  <a:lnTo>
+                    <a:pt x="3684349" y="2231112"/>
+                  </a:lnTo>
+                  <a:lnTo>
+                    <a:pt x="3761593" y="2240871"/>
+                  </a:lnTo>
+                  <a:lnTo>
+                    <a:pt x="3838836" y="2250507"/>
+                  </a:lnTo>
+                  <a:lnTo>
+                    <a:pt x="3916080" y="2260023"/>
+                  </a:lnTo>
+                  <a:lnTo>
+                    <a:pt x="3993324" y="2269420"/>
+                  </a:lnTo>
+                  <a:lnTo>
+                    <a:pt x="4070567" y="2278699"/>
+                  </a:lnTo>
+                  <a:lnTo>
+                    <a:pt x="4147811" y="2287862"/>
+                  </a:lnTo>
+                  <a:lnTo>
+                    <a:pt x="4225054" y="2296910"/>
+                  </a:lnTo>
+                  <a:lnTo>
+                    <a:pt x="4302298" y="2305845"/>
+                  </a:lnTo>
+                  <a:lnTo>
+                    <a:pt x="4379541" y="2314667"/>
+                  </a:lnTo>
+                  <a:lnTo>
+                    <a:pt x="4456785" y="2323380"/>
+                  </a:lnTo>
+                  <a:lnTo>
+                    <a:pt x="4534029" y="2331983"/>
+                  </a:lnTo>
+                  <a:lnTo>
+                    <a:pt x="4611272" y="2340478"/>
+                  </a:lnTo>
+                  <a:lnTo>
+                    <a:pt x="4688516" y="2348867"/>
+                  </a:lnTo>
+                  <a:lnTo>
+                    <a:pt x="4765759" y="2357151"/>
+                  </a:lnTo>
+                  <a:lnTo>
+                    <a:pt x="4843003" y="2365331"/>
+                  </a:lnTo>
+                  <a:lnTo>
+                    <a:pt x="4920246" y="2373408"/>
+                  </a:lnTo>
+                  <a:lnTo>
+                    <a:pt x="4997490" y="2381385"/>
+                  </a:lnTo>
+                  <a:lnTo>
+                    <a:pt x="5074734" y="2389261"/>
+                  </a:lnTo>
+                  <a:lnTo>
+                    <a:pt x="5151977" y="2397039"/>
+                  </a:lnTo>
+                  <a:lnTo>
+                    <a:pt x="5229221" y="2404719"/>
+                  </a:lnTo>
+                  <a:lnTo>
+                    <a:pt x="5306464" y="2412303"/>
+                  </a:lnTo>
+                  <a:lnTo>
+                    <a:pt x="5383708" y="2419792"/>
+                  </a:lnTo>
+                  <a:lnTo>
+                    <a:pt x="5460951" y="2427188"/>
+                  </a:lnTo>
+                  <a:lnTo>
+                    <a:pt x="5538195" y="2434490"/>
+                  </a:lnTo>
+                  <a:lnTo>
+                    <a:pt x="5615439" y="2441702"/>
+                  </a:lnTo>
+                  <a:lnTo>
+                    <a:pt x="5692682" y="2448822"/>
+                  </a:lnTo>
+                  <a:lnTo>
+                    <a:pt x="5769926" y="2455854"/>
+                  </a:lnTo>
+                  <a:lnTo>
+                    <a:pt x="5847169" y="2462798"/>
+                  </a:lnTo>
+                  <a:lnTo>
+                    <a:pt x="5924413" y="2469654"/>
+                  </a:lnTo>
+                  <a:lnTo>
+                    <a:pt x="6001656" y="2476425"/>
+                  </a:lnTo>
+                  <a:lnTo>
+                    <a:pt x="6078900" y="2483111"/>
+                  </a:lnTo>
+                  <a:lnTo>
+                    <a:pt x="6156144" y="2489713"/>
+                  </a:lnTo>
+                  <a:lnTo>
+                    <a:pt x="6233387" y="2496232"/>
+                  </a:lnTo>
+                  <a:lnTo>
+                    <a:pt x="6310631" y="2502670"/>
+                  </a:lnTo>
+                  <a:lnTo>
+                    <a:pt x="6387874" y="2509027"/>
+                  </a:lnTo>
+                  <a:lnTo>
+                    <a:pt x="6465118" y="2515305"/>
+                  </a:lnTo>
+                  <a:lnTo>
+                    <a:pt x="6542361" y="2521504"/>
+                  </a:lnTo>
+                  <a:lnTo>
+                    <a:pt x="6619605" y="2527625"/>
+                  </a:lnTo>
+                  <a:lnTo>
+                    <a:pt x="6696849" y="2533669"/>
+                  </a:lnTo>
+                  <a:lnTo>
+                    <a:pt x="6774092" y="2539638"/>
+                  </a:lnTo>
+                  <a:lnTo>
+                    <a:pt x="6851336" y="2545532"/>
+                  </a:lnTo>
+                  <a:lnTo>
+                    <a:pt x="6928579" y="2551352"/>
+                  </a:lnTo>
+                  <a:lnTo>
+                    <a:pt x="7005823" y="2557099"/>
+                  </a:lnTo>
+                  <a:lnTo>
+                    <a:pt x="7083066" y="2562775"/>
+                  </a:lnTo>
+                  <a:lnTo>
+                    <a:pt x="7160310" y="2568379"/>
+                  </a:lnTo>
+                  <a:lnTo>
+                    <a:pt x="7237554" y="2573913"/>
+                  </a:lnTo>
+                  <a:lnTo>
+                    <a:pt x="7314797" y="2579377"/>
+                  </a:lnTo>
+                  <a:lnTo>
+                    <a:pt x="7392041" y="2584774"/>
                   </a:lnTo>
                 </a:path>
               </a:pathLst>
@@ -3931,300 +3931,300 @@
           </p:nvSpPr>
           <p:spPr>
             <a:xfrm>
-              <a:off x="817517" y="4058964"/>
-              <a:ext cx="7392041" cy="1314348"/>
+              <a:off x="817517" y="4135915"/>
+              <a:ext cx="7392041" cy="1253573"/>
             </a:xfrm>
             <a:custGeom>
               <a:avLst/>
               <a:pathLst>
-                <a:path w="7392041" h="1314348">
+                <a:path w="7392041" h="1253573">
                   <a:moveTo>
-                    <a:pt x="7392041" y="1314348"/>
+                    <a:pt x="7392041" y="1253573"/>
                   </a:moveTo>
                   <a:lnTo>
-                    <a:pt x="7314797" y="1308960"/>
-                  </a:lnTo>
-                  <a:lnTo>
-                    <a:pt x="7237554" y="1303408"/>
-                  </a:lnTo>
-                  <a:lnTo>
-                    <a:pt x="7160310" y="1297686"/>
-                  </a:lnTo>
-                  <a:lnTo>
-                    <a:pt x="7083066" y="1291788"/>
-                  </a:lnTo>
-                  <a:lnTo>
-                    <a:pt x="7005823" y="1285709"/>
-                  </a:lnTo>
-                  <a:lnTo>
-                    <a:pt x="6928579" y="1279445"/>
-                  </a:lnTo>
-                  <a:lnTo>
-                    <a:pt x="6851336" y="1272988"/>
-                  </a:lnTo>
-                  <a:lnTo>
-                    <a:pt x="6774092" y="1266334"/>
-                  </a:lnTo>
-                  <a:lnTo>
-                    <a:pt x="6696849" y="1259476"/>
-                  </a:lnTo>
-                  <a:lnTo>
-                    <a:pt x="6619605" y="1252408"/>
-                  </a:lnTo>
-                  <a:lnTo>
-                    <a:pt x="6542361" y="1245124"/>
-                  </a:lnTo>
-                  <a:lnTo>
-                    <a:pt x="6465118" y="1237616"/>
-                  </a:lnTo>
-                  <a:lnTo>
-                    <a:pt x="6387874" y="1229878"/>
-                  </a:lnTo>
-                  <a:lnTo>
-                    <a:pt x="6310631" y="1221904"/>
-                  </a:lnTo>
-                  <a:lnTo>
-                    <a:pt x="6233387" y="1213685"/>
-                  </a:lnTo>
-                  <a:lnTo>
-                    <a:pt x="6156144" y="1205214"/>
-                  </a:lnTo>
-                  <a:lnTo>
-                    <a:pt x="6078900" y="1196484"/>
-                  </a:lnTo>
-                  <a:lnTo>
-                    <a:pt x="6001656" y="1187487"/>
-                  </a:lnTo>
-                  <a:lnTo>
-                    <a:pt x="5924413" y="1178214"/>
-                  </a:lnTo>
-                  <a:lnTo>
-                    <a:pt x="5847169" y="1168657"/>
-                  </a:lnTo>
-                  <a:lnTo>
-                    <a:pt x="5769926" y="1158807"/>
-                  </a:lnTo>
-                  <a:lnTo>
-                    <a:pt x="5692682" y="1148656"/>
-                  </a:lnTo>
-                  <a:lnTo>
-                    <a:pt x="5615439" y="1138194"/>
-                  </a:lnTo>
-                  <a:lnTo>
-                    <a:pt x="5538195" y="1127411"/>
-                  </a:lnTo>
-                  <a:lnTo>
-                    <a:pt x="5460951" y="1116298"/>
-                  </a:lnTo>
-                  <a:lnTo>
-                    <a:pt x="5383708" y="1104844"/>
-                  </a:lnTo>
-                  <a:lnTo>
-                    <a:pt x="5306464" y="1093040"/>
-                  </a:lnTo>
-                  <a:lnTo>
-                    <a:pt x="5229221" y="1080874"/>
-                  </a:lnTo>
-                  <a:lnTo>
-                    <a:pt x="5151977" y="1068336"/>
-                  </a:lnTo>
-                  <a:lnTo>
-                    <a:pt x="5074734" y="1055413"/>
-                  </a:lnTo>
-                  <a:lnTo>
-                    <a:pt x="4997490" y="1042095"/>
-                  </a:lnTo>
-                  <a:lnTo>
-                    <a:pt x="4920246" y="1028369"/>
-                  </a:lnTo>
-                  <a:lnTo>
-                    <a:pt x="4843003" y="1014222"/>
-                  </a:lnTo>
-                  <a:lnTo>
-                    <a:pt x="4765759" y="999643"/>
-                  </a:lnTo>
-                  <a:lnTo>
-                    <a:pt x="4688516" y="984616"/>
-                  </a:lnTo>
-                  <a:lnTo>
-                    <a:pt x="4611272" y="969130"/>
-                  </a:lnTo>
-                  <a:lnTo>
-                    <a:pt x="4534029" y="953169"/>
-                  </a:lnTo>
-                  <a:lnTo>
-                    <a:pt x="4456785" y="936719"/>
-                  </a:lnTo>
-                  <a:lnTo>
-                    <a:pt x="4379541" y="919765"/>
-                  </a:lnTo>
-                  <a:lnTo>
-                    <a:pt x="4302298" y="902292"/>
-                  </a:lnTo>
-                  <a:lnTo>
-                    <a:pt x="4225054" y="884284"/>
-                  </a:lnTo>
-                  <a:lnTo>
-                    <a:pt x="4147811" y="865724"/>
-                  </a:lnTo>
-                  <a:lnTo>
-                    <a:pt x="4070567" y="846596"/>
-                  </a:lnTo>
-                  <a:lnTo>
-                    <a:pt x="3993324" y="826882"/>
-                  </a:lnTo>
-                  <a:lnTo>
-                    <a:pt x="3916080" y="806564"/>
-                  </a:lnTo>
-                  <a:lnTo>
-                    <a:pt x="3838836" y="785624"/>
-                  </a:lnTo>
-                  <a:lnTo>
-                    <a:pt x="3761593" y="764042"/>
-                  </a:lnTo>
-                  <a:lnTo>
-                    <a:pt x="3684349" y="741800"/>
-                  </a:lnTo>
-                  <a:lnTo>
-                    <a:pt x="3607106" y="718876"/>
-                  </a:lnTo>
-                  <a:lnTo>
-                    <a:pt x="3529862" y="695250"/>
-                  </a:lnTo>
-                  <a:lnTo>
-                    <a:pt x="3452619" y="670901"/>
-                  </a:lnTo>
-                  <a:lnTo>
-                    <a:pt x="3375375" y="645805"/>
-                  </a:lnTo>
-                  <a:lnTo>
-                    <a:pt x="3298131" y="620304"/>
-                  </a:lnTo>
-                  <a:lnTo>
-                    <a:pt x="3220888" y="609268"/>
-                  </a:lnTo>
-                  <a:lnTo>
-                    <a:pt x="3143644" y="598092"/>
-                  </a:lnTo>
-                  <a:lnTo>
-                    <a:pt x="3066401" y="586774"/>
-                  </a:lnTo>
-                  <a:lnTo>
-                    <a:pt x="2989157" y="575313"/>
-                  </a:lnTo>
-                  <a:lnTo>
-                    <a:pt x="2911914" y="563706"/>
-                  </a:lnTo>
-                  <a:lnTo>
-                    <a:pt x="2834670" y="551952"/>
-                  </a:lnTo>
-                  <a:lnTo>
-                    <a:pt x="2757426" y="540049"/>
-                  </a:lnTo>
-                  <a:lnTo>
-                    <a:pt x="2680183" y="527995"/>
-                  </a:lnTo>
-                  <a:lnTo>
-                    <a:pt x="2602939" y="515788"/>
-                  </a:lnTo>
-                  <a:lnTo>
-                    <a:pt x="2525696" y="503426"/>
-                  </a:lnTo>
-                  <a:lnTo>
-                    <a:pt x="2448452" y="490908"/>
-                  </a:lnTo>
-                  <a:lnTo>
-                    <a:pt x="2371209" y="478230"/>
-                  </a:lnTo>
-                  <a:lnTo>
-                    <a:pt x="2293965" y="465392"/>
-                  </a:lnTo>
-                  <a:lnTo>
-                    <a:pt x="2216721" y="452391"/>
-                  </a:lnTo>
-                  <a:lnTo>
-                    <a:pt x="2139478" y="439224"/>
-                  </a:lnTo>
-                  <a:lnTo>
-                    <a:pt x="2062234" y="425891"/>
-                  </a:lnTo>
-                  <a:lnTo>
-                    <a:pt x="1984991" y="412389"/>
-                  </a:lnTo>
-                  <a:lnTo>
-                    <a:pt x="1907747" y="398715"/>
-                  </a:lnTo>
-                  <a:lnTo>
-                    <a:pt x="1830504" y="384868"/>
-                  </a:lnTo>
-                  <a:lnTo>
-                    <a:pt x="1753260" y="370846"/>
-                  </a:lnTo>
-                  <a:lnTo>
-                    <a:pt x="1676016" y="356645"/>
-                  </a:lnTo>
-                  <a:lnTo>
-                    <a:pt x="1598773" y="342264"/>
-                  </a:lnTo>
-                  <a:lnTo>
-                    <a:pt x="1521529" y="327701"/>
-                  </a:lnTo>
-                  <a:lnTo>
-                    <a:pt x="1444286" y="312953"/>
-                  </a:lnTo>
-                  <a:lnTo>
-                    <a:pt x="1367042" y="298018"/>
-                  </a:lnTo>
-                  <a:lnTo>
-                    <a:pt x="1289799" y="282893"/>
-                  </a:lnTo>
-                  <a:lnTo>
-                    <a:pt x="1212555" y="267577"/>
-                  </a:lnTo>
-                  <a:lnTo>
-                    <a:pt x="1135311" y="252066"/>
-                  </a:lnTo>
-                  <a:lnTo>
-                    <a:pt x="1058068" y="236359"/>
-                  </a:lnTo>
-                  <a:lnTo>
-                    <a:pt x="980824" y="220452"/>
-                  </a:lnTo>
-                  <a:lnTo>
-                    <a:pt x="903581" y="204344"/>
-                  </a:lnTo>
-                  <a:lnTo>
-                    <a:pt x="826337" y="188031"/>
-                  </a:lnTo>
-                  <a:lnTo>
-                    <a:pt x="749094" y="171511"/>
-                  </a:lnTo>
-                  <a:lnTo>
-                    <a:pt x="671850" y="154782"/>
-                  </a:lnTo>
-                  <a:lnTo>
-                    <a:pt x="594606" y="137840"/>
-                  </a:lnTo>
-                  <a:lnTo>
-                    <a:pt x="517363" y="120684"/>
-                  </a:lnTo>
-                  <a:lnTo>
-                    <a:pt x="440119" y="103309"/>
-                  </a:lnTo>
-                  <a:lnTo>
-                    <a:pt x="362876" y="85715"/>
-                  </a:lnTo>
-                  <a:lnTo>
-                    <a:pt x="285632" y="67897"/>
-                  </a:lnTo>
-                  <a:lnTo>
-                    <a:pt x="208389" y="49853"/>
-                  </a:lnTo>
-                  <a:lnTo>
-                    <a:pt x="131145" y="31581"/>
-                  </a:lnTo>
-                  <a:lnTo>
-                    <a:pt x="53901" y="13076"/>
+                    <a:pt x="7314797" y="1248435"/>
+                  </a:lnTo>
+                  <a:lnTo>
+                    <a:pt x="7237554" y="1243139"/>
+                  </a:lnTo>
+                  <a:lnTo>
+                    <a:pt x="7160310" y="1237681"/>
+                  </a:lnTo>
+                  <a:lnTo>
+                    <a:pt x="7083066" y="1232056"/>
+                  </a:lnTo>
+                  <a:lnTo>
+                    <a:pt x="7005823" y="1226259"/>
+                  </a:lnTo>
+                  <a:lnTo>
+                    <a:pt x="6928579" y="1220284"/>
+                  </a:lnTo>
+                  <a:lnTo>
+                    <a:pt x="6851336" y="1214126"/>
+                  </a:lnTo>
+                  <a:lnTo>
+                    <a:pt x="6774092" y="1207779"/>
+                  </a:lnTo>
+                  <a:lnTo>
+                    <a:pt x="6696849" y="1201239"/>
+                  </a:lnTo>
+                  <a:lnTo>
+                    <a:pt x="6619605" y="1194497"/>
+                  </a:lnTo>
+                  <a:lnTo>
+                    <a:pt x="6542361" y="1187550"/>
+                  </a:lnTo>
+                  <a:lnTo>
+                    <a:pt x="6465118" y="1180389"/>
+                  </a:lnTo>
+                  <a:lnTo>
+                    <a:pt x="6387874" y="1173009"/>
+                  </a:lnTo>
+                  <a:lnTo>
+                    <a:pt x="6310631" y="1165403"/>
+                  </a:lnTo>
+                  <a:lnTo>
+                    <a:pt x="6233387" y="1157565"/>
+                  </a:lnTo>
+                  <a:lnTo>
+                    <a:pt x="6156144" y="1149486"/>
+                  </a:lnTo>
+                  <a:lnTo>
+                    <a:pt x="6078900" y="1141159"/>
+                  </a:lnTo>
+                  <a:lnTo>
+                    <a:pt x="6001656" y="1132578"/>
+                  </a:lnTo>
+                  <a:lnTo>
+                    <a:pt x="5924413" y="1123734"/>
+                  </a:lnTo>
+                  <a:lnTo>
+                    <a:pt x="5847169" y="1114619"/>
+                  </a:lnTo>
+                  <a:lnTo>
+                    <a:pt x="5769926" y="1105224"/>
+                  </a:lnTo>
+                  <a:lnTo>
+                    <a:pt x="5692682" y="1095542"/>
+                  </a:lnTo>
+                  <a:lnTo>
+                    <a:pt x="5615439" y="1085564"/>
+                  </a:lnTo>
+                  <a:lnTo>
+                    <a:pt x="5538195" y="1075280"/>
+                  </a:lnTo>
+                  <a:lnTo>
+                    <a:pt x="5460951" y="1064680"/>
+                  </a:lnTo>
+                  <a:lnTo>
+                    <a:pt x="5383708" y="1053757"/>
+                  </a:lnTo>
+                  <a:lnTo>
+                    <a:pt x="5306464" y="1042498"/>
+                  </a:lnTo>
+                  <a:lnTo>
+                    <a:pt x="5229221" y="1030895"/>
+                  </a:lnTo>
+                  <a:lnTo>
+                    <a:pt x="5151977" y="1018936"/>
+                  </a:lnTo>
+                  <a:lnTo>
+                    <a:pt x="5074734" y="1006611"/>
+                  </a:lnTo>
+                  <a:lnTo>
+                    <a:pt x="4997490" y="993909"/>
+                  </a:lnTo>
+                  <a:lnTo>
+                    <a:pt x="4920246" y="980818"/>
+                  </a:lnTo>
+                  <a:lnTo>
+                    <a:pt x="4843003" y="967325"/>
+                  </a:lnTo>
+                  <a:lnTo>
+                    <a:pt x="4765759" y="953419"/>
+                  </a:lnTo>
+                  <a:lnTo>
+                    <a:pt x="4688516" y="939088"/>
+                  </a:lnTo>
+                  <a:lnTo>
+                    <a:pt x="4611272" y="924317"/>
+                  </a:lnTo>
+                  <a:lnTo>
+                    <a:pt x="4534029" y="909094"/>
+                  </a:lnTo>
+                  <a:lnTo>
+                    <a:pt x="4456785" y="893405"/>
+                  </a:lnTo>
+                  <a:lnTo>
+                    <a:pt x="4379541" y="877235"/>
+                  </a:lnTo>
+                  <a:lnTo>
+                    <a:pt x="4302298" y="860570"/>
+                  </a:lnTo>
+                  <a:lnTo>
+                    <a:pt x="4225054" y="843395"/>
+                  </a:lnTo>
+                  <a:lnTo>
+                    <a:pt x="4147811" y="825693"/>
+                  </a:lnTo>
+                  <a:lnTo>
+                    <a:pt x="4070567" y="807450"/>
+                  </a:lnTo>
+                  <a:lnTo>
+                    <a:pt x="3993324" y="788647"/>
+                  </a:lnTo>
+                  <a:lnTo>
+                    <a:pt x="3916080" y="769269"/>
+                  </a:lnTo>
+                  <a:lnTo>
+                    <a:pt x="3838836" y="749297"/>
+                  </a:lnTo>
+                  <a:lnTo>
+                    <a:pt x="3761593" y="728713"/>
+                  </a:lnTo>
+                  <a:lnTo>
+                    <a:pt x="3684349" y="707499"/>
+                  </a:lnTo>
+                  <a:lnTo>
+                    <a:pt x="3607106" y="685636"/>
+                  </a:lnTo>
+                  <a:lnTo>
+                    <a:pt x="3529862" y="663102"/>
+                  </a:lnTo>
+                  <a:lnTo>
+                    <a:pt x="3452619" y="639878"/>
+                  </a:lnTo>
+                  <a:lnTo>
+                    <a:pt x="3375375" y="615943"/>
+                  </a:lnTo>
+                  <a:lnTo>
+                    <a:pt x="3298131" y="591622"/>
+                  </a:lnTo>
+                  <a:lnTo>
+                    <a:pt x="3220888" y="581096"/>
+                  </a:lnTo>
+                  <a:lnTo>
+                    <a:pt x="3143644" y="570437"/>
+                  </a:lnTo>
+                  <a:lnTo>
+                    <a:pt x="3066401" y="559642"/>
+                  </a:lnTo>
+                  <a:lnTo>
+                    <a:pt x="2989157" y="548711"/>
+                  </a:lnTo>
+                  <a:lnTo>
+                    <a:pt x="2911914" y="537641"/>
+                  </a:lnTo>
+                  <a:lnTo>
+                    <a:pt x="2834670" y="526430"/>
+                  </a:lnTo>
+                  <a:lnTo>
+                    <a:pt x="2757426" y="515078"/>
+                  </a:lnTo>
+                  <a:lnTo>
+                    <a:pt x="2680183" y="503581"/>
+                  </a:lnTo>
+                  <a:lnTo>
+                    <a:pt x="2602939" y="491938"/>
+                  </a:lnTo>
+                  <a:lnTo>
+                    <a:pt x="2525696" y="480148"/>
+                  </a:lnTo>
+                  <a:lnTo>
+                    <a:pt x="2448452" y="468208"/>
+                  </a:lnTo>
+                  <a:lnTo>
+                    <a:pt x="2371209" y="456117"/>
+                  </a:lnTo>
+                  <a:lnTo>
+                    <a:pt x="2293965" y="443872"/>
+                  </a:lnTo>
+                  <a:lnTo>
+                    <a:pt x="2216721" y="431472"/>
+                  </a:lnTo>
+                  <a:lnTo>
+                    <a:pt x="2139478" y="418915"/>
+                  </a:lnTo>
+                  <a:lnTo>
+                    <a:pt x="2062234" y="406198"/>
+                  </a:lnTo>
+                  <a:lnTo>
+                    <a:pt x="1984991" y="393320"/>
+                  </a:lnTo>
+                  <a:lnTo>
+                    <a:pt x="1907747" y="380279"/>
+                  </a:lnTo>
+                  <a:lnTo>
+                    <a:pt x="1830504" y="367072"/>
+                  </a:lnTo>
+                  <a:lnTo>
+                    <a:pt x="1753260" y="353698"/>
+                  </a:lnTo>
+                  <a:lnTo>
+                    <a:pt x="1676016" y="340154"/>
+                  </a:lnTo>
+                  <a:lnTo>
+                    <a:pt x="1598773" y="326438"/>
+                  </a:lnTo>
+                  <a:lnTo>
+                    <a:pt x="1521529" y="312548"/>
+                  </a:lnTo>
+                  <a:lnTo>
+                    <a:pt x="1444286" y="298482"/>
+                  </a:lnTo>
+                  <a:lnTo>
+                    <a:pt x="1367042" y="284238"/>
+                  </a:lnTo>
+                  <a:lnTo>
+                    <a:pt x="1289799" y="269813"/>
+                  </a:lnTo>
+                  <a:lnTo>
+                    <a:pt x="1212555" y="255204"/>
+                  </a:lnTo>
+                  <a:lnTo>
+                    <a:pt x="1135311" y="240411"/>
+                  </a:lnTo>
+                  <a:lnTo>
+                    <a:pt x="1058068" y="225430"/>
+                  </a:lnTo>
+                  <a:lnTo>
+                    <a:pt x="980824" y="210259"/>
+                  </a:lnTo>
+                  <a:lnTo>
+                    <a:pt x="903581" y="194895"/>
+                  </a:lnTo>
+                  <a:lnTo>
+                    <a:pt x="826337" y="179336"/>
+                  </a:lnTo>
+                  <a:lnTo>
+                    <a:pt x="749094" y="163580"/>
+                  </a:lnTo>
+                  <a:lnTo>
+                    <a:pt x="671850" y="147625"/>
+                  </a:lnTo>
+                  <a:lnTo>
+                    <a:pt x="594606" y="131466"/>
+                  </a:lnTo>
+                  <a:lnTo>
+                    <a:pt x="517363" y="115103"/>
+                  </a:lnTo>
+                  <a:lnTo>
+                    <a:pt x="440119" y="98532"/>
+                  </a:lnTo>
+                  <a:lnTo>
+                    <a:pt x="362876" y="81751"/>
+                  </a:lnTo>
+                  <a:lnTo>
+                    <a:pt x="285632" y="64758"/>
+                  </a:lnTo>
+                  <a:lnTo>
+                    <a:pt x="208389" y="47548"/>
+                  </a:lnTo>
+                  <a:lnTo>
+                    <a:pt x="131145" y="30120"/>
+                  </a:lnTo>
+                  <a:lnTo>
+                    <a:pt x="53901" y="12471"/>
                   </a:lnTo>
                   <a:lnTo>
                     <a:pt x="0" y="0"/>
@@ -4247,303 +4247,303 @@
           </p:nvSpPr>
           <p:spPr>
             <a:xfrm>
-              <a:off x="817517" y="3380511"/>
-              <a:ext cx="7392041" cy="1888612"/>
+              <a:off x="817517" y="3488833"/>
+              <a:ext cx="7392041" cy="1801283"/>
             </a:xfrm>
             <a:custGeom>
               <a:avLst/>
               <a:pathLst>
-                <a:path w="7392041" h="1888612">
+                <a:path w="7392041" h="1801283">
                   <a:moveTo>
                     <a:pt x="0" y="0"/>
                   </a:moveTo>
                   <a:lnTo>
-                    <a:pt x="53901" y="32229"/>
-                  </a:lnTo>
-                  <a:lnTo>
-                    <a:pt x="131145" y="77438"/>
-                  </a:lnTo>
-                  <a:lnTo>
-                    <a:pt x="208389" y="121690"/>
-                  </a:lnTo>
-                  <a:lnTo>
-                    <a:pt x="285632" y="165005"/>
-                  </a:lnTo>
-                  <a:lnTo>
-                    <a:pt x="362876" y="207404"/>
-                  </a:lnTo>
-                  <a:lnTo>
-                    <a:pt x="440119" y="248906"/>
-                  </a:lnTo>
-                  <a:lnTo>
-                    <a:pt x="517363" y="289530"/>
-                  </a:lnTo>
-                  <a:lnTo>
-                    <a:pt x="594606" y="329294"/>
-                  </a:lnTo>
-                  <a:lnTo>
-                    <a:pt x="671850" y="368217"/>
-                  </a:lnTo>
-                  <a:lnTo>
-                    <a:pt x="749094" y="406316"/>
-                  </a:lnTo>
-                  <a:lnTo>
-                    <a:pt x="826337" y="443609"/>
-                  </a:lnTo>
-                  <a:lnTo>
-                    <a:pt x="903581" y="480112"/>
-                  </a:lnTo>
-                  <a:lnTo>
-                    <a:pt x="980824" y="515844"/>
-                  </a:lnTo>
-                  <a:lnTo>
-                    <a:pt x="1058068" y="550819"/>
-                  </a:lnTo>
-                  <a:lnTo>
-                    <a:pt x="1135311" y="585054"/>
-                  </a:lnTo>
-                  <a:lnTo>
-                    <a:pt x="1212555" y="618564"/>
-                  </a:lnTo>
-                  <a:lnTo>
-                    <a:pt x="1289799" y="651366"/>
-                  </a:lnTo>
-                  <a:lnTo>
-                    <a:pt x="1367042" y="683473"/>
-                  </a:lnTo>
-                  <a:lnTo>
-                    <a:pt x="1444286" y="714901"/>
-                  </a:lnTo>
-                  <a:lnTo>
-                    <a:pt x="1521529" y="745664"/>
-                  </a:lnTo>
-                  <a:lnTo>
-                    <a:pt x="1598773" y="775777"/>
-                  </a:lnTo>
-                  <a:lnTo>
-                    <a:pt x="1676016" y="805251"/>
-                  </a:lnTo>
-                  <a:lnTo>
-                    <a:pt x="1753260" y="834103"/>
-                  </a:lnTo>
-                  <a:lnTo>
-                    <a:pt x="1830504" y="862343"/>
-                  </a:lnTo>
-                  <a:lnTo>
-                    <a:pt x="1907747" y="889986"/>
-                  </a:lnTo>
-                  <a:lnTo>
-                    <a:pt x="1984991" y="917044"/>
-                  </a:lnTo>
-                  <a:lnTo>
-                    <a:pt x="2062234" y="943530"/>
-                  </a:lnTo>
-                  <a:lnTo>
-                    <a:pt x="2139478" y="969455"/>
-                  </a:lnTo>
-                  <a:lnTo>
-                    <a:pt x="2216721" y="994832"/>
-                  </a:lnTo>
-                  <a:lnTo>
-                    <a:pt x="2293965" y="1019671"/>
-                  </a:lnTo>
-                  <a:lnTo>
-                    <a:pt x="2371209" y="1043985"/>
-                  </a:lnTo>
-                  <a:lnTo>
-                    <a:pt x="2448452" y="1067784"/>
-                  </a:lnTo>
-                  <a:lnTo>
-                    <a:pt x="2525696" y="1091080"/>
-                  </a:lnTo>
-                  <a:lnTo>
-                    <a:pt x="2602939" y="1113883"/>
-                  </a:lnTo>
-                  <a:lnTo>
-                    <a:pt x="2680183" y="1136204"/>
-                  </a:lnTo>
-                  <a:lnTo>
-                    <a:pt x="2757426" y="1158052"/>
-                  </a:lnTo>
-                  <a:lnTo>
-                    <a:pt x="2834670" y="1179437"/>
-                  </a:lnTo>
-                  <a:lnTo>
-                    <a:pt x="2911914" y="1200371"/>
-                  </a:lnTo>
-                  <a:lnTo>
-                    <a:pt x="2989157" y="1220861"/>
-                  </a:lnTo>
-                  <a:lnTo>
-                    <a:pt x="3066401" y="1240917"/>
-                  </a:lnTo>
-                  <a:lnTo>
-                    <a:pt x="3143644" y="1260550"/>
-                  </a:lnTo>
-                  <a:lnTo>
-                    <a:pt x="3220888" y="1279766"/>
-                  </a:lnTo>
-                  <a:lnTo>
-                    <a:pt x="3298131" y="1298577"/>
-                  </a:lnTo>
-                  <a:lnTo>
-                    <a:pt x="3375375" y="1316989"/>
-                  </a:lnTo>
-                  <a:lnTo>
-                    <a:pt x="3452619" y="1335011"/>
-                  </a:lnTo>
-                  <a:lnTo>
-                    <a:pt x="3529862" y="1352653"/>
-                  </a:lnTo>
-                  <a:lnTo>
-                    <a:pt x="3607106" y="1369920"/>
-                  </a:lnTo>
-                  <a:lnTo>
-                    <a:pt x="3684349" y="1386823"/>
-                  </a:lnTo>
-                  <a:lnTo>
-                    <a:pt x="3761593" y="1403368"/>
-                  </a:lnTo>
-                  <a:lnTo>
-                    <a:pt x="3838836" y="1419562"/>
-                  </a:lnTo>
-                  <a:lnTo>
-                    <a:pt x="3916080" y="1435414"/>
-                  </a:lnTo>
-                  <a:lnTo>
-                    <a:pt x="3993324" y="1450931"/>
-                  </a:lnTo>
-                  <a:lnTo>
-                    <a:pt x="4070567" y="1466119"/>
-                  </a:lnTo>
-                  <a:lnTo>
-                    <a:pt x="4147811" y="1480986"/>
-                  </a:lnTo>
-                  <a:lnTo>
-                    <a:pt x="4225054" y="1495538"/>
-                  </a:lnTo>
-                  <a:lnTo>
-                    <a:pt x="4302298" y="1509783"/>
-                  </a:lnTo>
-                  <a:lnTo>
-                    <a:pt x="4379541" y="1523726"/>
-                  </a:lnTo>
-                  <a:lnTo>
-                    <a:pt x="4456785" y="1537374"/>
-                  </a:lnTo>
-                  <a:lnTo>
-                    <a:pt x="4534029" y="1550733"/>
-                  </a:lnTo>
-                  <a:lnTo>
-                    <a:pt x="4611272" y="1563809"/>
-                  </a:lnTo>
-                  <a:lnTo>
-                    <a:pt x="4688516" y="1576609"/>
-                  </a:lnTo>
-                  <a:lnTo>
-                    <a:pt x="4765759" y="1589138"/>
-                  </a:lnTo>
-                  <a:lnTo>
-                    <a:pt x="4843003" y="1601401"/>
-                  </a:lnTo>
-                  <a:lnTo>
-                    <a:pt x="4920246" y="1613406"/>
-                  </a:lnTo>
-                  <a:lnTo>
-                    <a:pt x="4997490" y="1625156"/>
-                  </a:lnTo>
-                  <a:lnTo>
-                    <a:pt x="5074734" y="1636657"/>
-                  </a:lnTo>
-                  <a:lnTo>
-                    <a:pt x="5151977" y="1647916"/>
-                  </a:lnTo>
-                  <a:lnTo>
-                    <a:pt x="5229221" y="1658936"/>
-                  </a:lnTo>
-                  <a:lnTo>
-                    <a:pt x="5306464" y="1669722"/>
-                  </a:lnTo>
-                  <a:lnTo>
-                    <a:pt x="5383708" y="1680281"/>
-                  </a:lnTo>
-                  <a:lnTo>
-                    <a:pt x="5460951" y="1690616"/>
-                  </a:lnTo>
-                  <a:lnTo>
-                    <a:pt x="5538195" y="1700732"/>
-                  </a:lnTo>
-                  <a:lnTo>
-                    <a:pt x="5615439" y="1710635"/>
-                  </a:lnTo>
-                  <a:lnTo>
-                    <a:pt x="5692682" y="1720327"/>
-                  </a:lnTo>
-                  <a:lnTo>
-                    <a:pt x="5769926" y="1729815"/>
-                  </a:lnTo>
-                  <a:lnTo>
-                    <a:pt x="5847169" y="1739102"/>
-                  </a:lnTo>
-                  <a:lnTo>
-                    <a:pt x="5924413" y="1748193"/>
-                  </a:lnTo>
-                  <a:lnTo>
-                    <a:pt x="6001656" y="1757091"/>
-                  </a:lnTo>
-                  <a:lnTo>
-                    <a:pt x="6078900" y="1765800"/>
-                  </a:lnTo>
-                  <a:lnTo>
-                    <a:pt x="6156144" y="1774326"/>
-                  </a:lnTo>
-                  <a:lnTo>
-                    <a:pt x="6233387" y="1782671"/>
-                  </a:lnTo>
-                  <a:lnTo>
-                    <a:pt x="6310631" y="1790839"/>
-                  </a:lnTo>
-                  <a:lnTo>
-                    <a:pt x="6387874" y="1798835"/>
-                  </a:lnTo>
-                  <a:lnTo>
-                    <a:pt x="6465118" y="1806661"/>
-                  </a:lnTo>
-                  <a:lnTo>
-                    <a:pt x="6542361" y="1814322"/>
-                  </a:lnTo>
-                  <a:lnTo>
-                    <a:pt x="6619605" y="1821821"/>
-                  </a:lnTo>
-                  <a:lnTo>
-                    <a:pt x="6696849" y="1829161"/>
-                  </a:lnTo>
-                  <a:lnTo>
-                    <a:pt x="6774092" y="1836346"/>
-                  </a:lnTo>
-                  <a:lnTo>
-                    <a:pt x="6851336" y="1843378"/>
-                  </a:lnTo>
-                  <a:lnTo>
-                    <a:pt x="6928579" y="1850262"/>
-                  </a:lnTo>
-                  <a:lnTo>
-                    <a:pt x="7005823" y="1857000"/>
-                  </a:lnTo>
-                  <a:lnTo>
-                    <a:pt x="7083066" y="1863596"/>
-                  </a:lnTo>
-                  <a:lnTo>
-                    <a:pt x="7160310" y="1870052"/>
-                  </a:lnTo>
-                  <a:lnTo>
-                    <a:pt x="7237554" y="1876372"/>
-                  </a:lnTo>
-                  <a:lnTo>
-                    <a:pt x="7314797" y="1882557"/>
-                  </a:lnTo>
-                  <a:lnTo>
-                    <a:pt x="7392041" y="1888612"/>
+                    <a:pt x="53901" y="30739"/>
+                  </a:lnTo>
+                  <a:lnTo>
+                    <a:pt x="131145" y="73857"/>
+                  </a:lnTo>
+                  <a:lnTo>
+                    <a:pt x="208389" y="116063"/>
+                  </a:lnTo>
+                  <a:lnTo>
+                    <a:pt x="285632" y="157376"/>
+                  </a:lnTo>
+                  <a:lnTo>
+                    <a:pt x="362876" y="197814"/>
+                  </a:lnTo>
+                  <a:lnTo>
+                    <a:pt x="440119" y="237397"/>
+                  </a:lnTo>
+                  <a:lnTo>
+                    <a:pt x="517363" y="276142"/>
+                  </a:lnTo>
+                  <a:lnTo>
+                    <a:pt x="594606" y="314068"/>
+                  </a:lnTo>
+                  <a:lnTo>
+                    <a:pt x="671850" y="351191"/>
+                  </a:lnTo>
+                  <a:lnTo>
+                    <a:pt x="749094" y="387528"/>
+                  </a:lnTo>
+                  <a:lnTo>
+                    <a:pt x="826337" y="423096"/>
+                  </a:lnTo>
+                  <a:lnTo>
+                    <a:pt x="903581" y="457912"/>
+                  </a:lnTo>
+                  <a:lnTo>
+                    <a:pt x="980824" y="491991"/>
+                  </a:lnTo>
+                  <a:lnTo>
+                    <a:pt x="1058068" y="525349"/>
+                  </a:lnTo>
+                  <a:lnTo>
+                    <a:pt x="1135311" y="558001"/>
+                  </a:lnTo>
+                  <a:lnTo>
+                    <a:pt x="1212555" y="589962"/>
+                  </a:lnTo>
+                  <a:lnTo>
+                    <a:pt x="1289799" y="621247"/>
+                  </a:lnTo>
+                  <a:lnTo>
+                    <a:pt x="1367042" y="651870"/>
+                  </a:lnTo>
+                  <a:lnTo>
+                    <a:pt x="1444286" y="681845"/>
+                  </a:lnTo>
+                  <a:lnTo>
+                    <a:pt x="1521529" y="711185"/>
+                  </a:lnTo>
+                  <a:lnTo>
+                    <a:pt x="1598773" y="739905"/>
+                  </a:lnTo>
+                  <a:lnTo>
+                    <a:pt x="1676016" y="768017"/>
+                  </a:lnTo>
+                  <a:lnTo>
+                    <a:pt x="1753260" y="795534"/>
+                  </a:lnTo>
+                  <a:lnTo>
+                    <a:pt x="1830504" y="822469"/>
+                  </a:lnTo>
+                  <a:lnTo>
+                    <a:pt x="1907747" y="848834"/>
+                  </a:lnTo>
+                  <a:lnTo>
+                    <a:pt x="1984991" y="874641"/>
+                  </a:lnTo>
+                  <a:lnTo>
+                    <a:pt x="2062234" y="899901"/>
+                  </a:lnTo>
+                  <a:lnTo>
+                    <a:pt x="2139478" y="924628"/>
+                  </a:lnTo>
+                  <a:lnTo>
+                    <a:pt x="2216721" y="948831"/>
+                  </a:lnTo>
+                  <a:lnTo>
+                    <a:pt x="2293965" y="972522"/>
+                  </a:lnTo>
+                  <a:lnTo>
+                    <a:pt x="2371209" y="995712"/>
+                  </a:lnTo>
+                  <a:lnTo>
+                    <a:pt x="2448452" y="1018411"/>
+                  </a:lnTo>
+                  <a:lnTo>
+                    <a:pt x="2525696" y="1040629"/>
+                  </a:lnTo>
+                  <a:lnTo>
+                    <a:pt x="2602939" y="1062378"/>
+                  </a:lnTo>
+                  <a:lnTo>
+                    <a:pt x="2680183" y="1083666"/>
+                  </a:lnTo>
+                  <a:lnTo>
+                    <a:pt x="2757426" y="1104504"/>
+                  </a:lnTo>
+                  <a:lnTo>
+                    <a:pt x="2834670" y="1124901"/>
+                  </a:lnTo>
+                  <a:lnTo>
+                    <a:pt x="2911914" y="1144866"/>
+                  </a:lnTo>
+                  <a:lnTo>
+                    <a:pt x="2989157" y="1164409"/>
+                  </a:lnTo>
+                  <a:lnTo>
+                    <a:pt x="3066401" y="1183538"/>
+                  </a:lnTo>
+                  <a:lnTo>
+                    <a:pt x="3143644" y="1202262"/>
+                  </a:lnTo>
+                  <a:lnTo>
+                    <a:pt x="3220888" y="1220591"/>
+                  </a:lnTo>
+                  <a:lnTo>
+                    <a:pt x="3298131" y="1238531"/>
+                  </a:lnTo>
+                  <a:lnTo>
+                    <a:pt x="3375375" y="1256092"/>
+                  </a:lnTo>
+                  <a:lnTo>
+                    <a:pt x="3452619" y="1273281"/>
+                  </a:lnTo>
+                  <a:lnTo>
+                    <a:pt x="3529862" y="1290106"/>
+                  </a:lnTo>
+                  <a:lnTo>
+                    <a:pt x="3607106" y="1306576"/>
+                  </a:lnTo>
+                  <a:lnTo>
+                    <a:pt x="3684349" y="1322697"/>
+                  </a:lnTo>
+                  <a:lnTo>
+                    <a:pt x="3761593" y="1338476"/>
+                  </a:lnTo>
+                  <a:lnTo>
+                    <a:pt x="3838836" y="1353922"/>
+                  </a:lnTo>
+                  <a:lnTo>
+                    <a:pt x="3916080" y="1369041"/>
+                  </a:lnTo>
+                  <a:lnTo>
+                    <a:pt x="3993324" y="1383841"/>
+                  </a:lnTo>
+                  <a:lnTo>
+                    <a:pt x="4070567" y="1398326"/>
+                  </a:lnTo>
+                  <a:lnTo>
+                    <a:pt x="4147811" y="1412506"/>
+                  </a:lnTo>
+                  <a:lnTo>
+                    <a:pt x="4225054" y="1426385"/>
+                  </a:lnTo>
+                  <a:lnTo>
+                    <a:pt x="4302298" y="1439971"/>
+                  </a:lnTo>
+                  <a:lnTo>
+                    <a:pt x="4379541" y="1453269"/>
+                  </a:lnTo>
+                  <a:lnTo>
+                    <a:pt x="4456785" y="1466286"/>
+                  </a:lnTo>
+                  <a:lnTo>
+                    <a:pt x="4534029" y="1479027"/>
+                  </a:lnTo>
+                  <a:lnTo>
+                    <a:pt x="4611272" y="1491499"/>
+                  </a:lnTo>
+                  <a:lnTo>
+                    <a:pt x="4688516" y="1503707"/>
+                  </a:lnTo>
+                  <a:lnTo>
+                    <a:pt x="4765759" y="1515656"/>
+                  </a:lnTo>
+                  <a:lnTo>
+                    <a:pt x="4843003" y="1527353"/>
+                  </a:lnTo>
+                  <a:lnTo>
+                    <a:pt x="4920246" y="1538802"/>
+                  </a:lnTo>
+                  <a:lnTo>
+                    <a:pt x="4997490" y="1550009"/>
+                  </a:lnTo>
+                  <a:lnTo>
+                    <a:pt x="5074734" y="1560979"/>
+                  </a:lnTo>
+                  <a:lnTo>
+                    <a:pt x="5151977" y="1571717"/>
+                  </a:lnTo>
+                  <a:lnTo>
+                    <a:pt x="5229221" y="1582227"/>
+                  </a:lnTo>
+                  <a:lnTo>
+                    <a:pt x="5306464" y="1592515"/>
+                  </a:lnTo>
+                  <a:lnTo>
+                    <a:pt x="5383708" y="1602585"/>
+                  </a:lnTo>
+                  <a:lnTo>
+                    <a:pt x="5460951" y="1612442"/>
+                  </a:lnTo>
+                  <a:lnTo>
+                    <a:pt x="5538195" y="1622091"/>
+                  </a:lnTo>
+                  <a:lnTo>
+                    <a:pt x="5615439" y="1631536"/>
+                  </a:lnTo>
+                  <a:lnTo>
+                    <a:pt x="5692682" y="1640780"/>
+                  </a:lnTo>
+                  <a:lnTo>
+                    <a:pt x="5769926" y="1649829"/>
+                  </a:lnTo>
+                  <a:lnTo>
+                    <a:pt x="5847169" y="1658687"/>
+                  </a:lnTo>
+                  <a:lnTo>
+                    <a:pt x="5924413" y="1667357"/>
+                  </a:lnTo>
+                  <a:lnTo>
+                    <a:pt x="6001656" y="1675843"/>
+                  </a:lnTo>
+                  <a:lnTo>
+                    <a:pt x="6078900" y="1684150"/>
+                  </a:lnTo>
+                  <a:lnTo>
+                    <a:pt x="6156144" y="1692282"/>
+                  </a:lnTo>
+                  <a:lnTo>
+                    <a:pt x="6233387" y="1700241"/>
+                  </a:lnTo>
+                  <a:lnTo>
+                    <a:pt x="6310631" y="1708032"/>
+                  </a:lnTo>
+                  <a:lnTo>
+                    <a:pt x="6387874" y="1715657"/>
+                  </a:lnTo>
+                  <a:lnTo>
+                    <a:pt x="6465118" y="1723122"/>
+                  </a:lnTo>
+                  <a:lnTo>
+                    <a:pt x="6542361" y="1730429"/>
+                  </a:lnTo>
+                  <a:lnTo>
+                    <a:pt x="6619605" y="1737581"/>
+                  </a:lnTo>
+                  <a:lnTo>
+                    <a:pt x="6696849" y="1744581"/>
+                  </a:lnTo>
+                  <a:lnTo>
+                    <a:pt x="6774092" y="1751434"/>
+                  </a:lnTo>
+                  <a:lnTo>
+                    <a:pt x="6851336" y="1758141"/>
+                  </a:lnTo>
+                  <a:lnTo>
+                    <a:pt x="6928579" y="1764707"/>
+                  </a:lnTo>
+                  <a:lnTo>
+                    <a:pt x="7005823" y="1771133"/>
+                  </a:lnTo>
+                  <a:lnTo>
+                    <a:pt x="7083066" y="1777424"/>
+                  </a:lnTo>
+                  <a:lnTo>
+                    <a:pt x="7160310" y="1783582"/>
+                  </a:lnTo>
+                  <a:lnTo>
+                    <a:pt x="7237554" y="1789609"/>
+                  </a:lnTo>
+                  <a:lnTo>
+                    <a:pt x="7314797" y="1795509"/>
+                  </a:lnTo>
+                  <a:lnTo>
+                    <a:pt x="7392041" y="1801283"/>
                   </a:lnTo>
                 </a:path>
               </a:pathLst>
@@ -4572,7 +4572,7 @@
           </p:nvSpPr>
           <p:spPr>
             <a:xfrm>
-              <a:off x="817517" y="4679530"/>
+              <a:off x="817517" y="4727786"/>
               <a:ext cx="7799693" cy="0"/>
             </a:xfrm>
             <a:custGeom>
@@ -4615,15 +4615,15 @@
           </p:nvSpPr>
           <p:spPr>
             <a:xfrm>
-              <a:off x="4117484" y="1896563"/>
-              <a:ext cx="0" cy="3826579"/>
+              <a:off x="4117484" y="2073503"/>
+              <a:ext cx="0" cy="3649639"/>
             </a:xfrm>
             <a:custGeom>
               <a:avLst/>
               <a:pathLst>
-                <a:path w="0" h="3826579">
+                <a:path w="0" h="3649639">
                   <a:moveTo>
-                    <a:pt x="0" y="3826579"/>
+                    <a:pt x="0" y="3649639"/>
                   </a:moveTo>
                   <a:lnTo>
                     <a:pt x="0" y="0"/>
@@ -4658,7 +4658,7 @@
           </p:nvSpPr>
           <p:spPr>
             <a:xfrm>
-              <a:off x="692708" y="5509156"/>
+              <a:off x="692708" y="5517199"/>
               <a:ext cx="62179" cy="80101"/>
             </a:xfrm>
             <a:prstGeom prst="rect">
@@ -4704,7 +4704,7 @@
           </p:nvSpPr>
           <p:spPr>
             <a:xfrm>
-              <a:off x="692708" y="4639479"/>
+              <a:off x="692708" y="4687735"/>
               <a:ext cx="62179" cy="80101"/>
             </a:xfrm>
             <a:prstGeom prst="rect">
@@ -4750,7 +4750,7 @@
           </p:nvSpPr>
           <p:spPr>
             <a:xfrm>
-              <a:off x="692708" y="3769802"/>
+              <a:off x="692708" y="3858272"/>
               <a:ext cx="62179" cy="80101"/>
             </a:xfrm>
             <a:prstGeom prst="rect">
@@ -4796,7 +4796,7 @@
           </p:nvSpPr>
           <p:spPr>
             <a:xfrm>
-              <a:off x="692708" y="2900125"/>
+              <a:off x="692708" y="3028808"/>
               <a:ext cx="62179" cy="80101"/>
             </a:xfrm>
             <a:prstGeom prst="rect">
@@ -4842,7 +4842,7 @@
           </p:nvSpPr>
           <p:spPr>
             <a:xfrm>
-              <a:off x="692708" y="2030448"/>
+              <a:off x="692708" y="2199345"/>
               <a:ext cx="62179" cy="80101"/>
             </a:xfrm>
             <a:prstGeom prst="rect">
@@ -5118,7 +5118,7 @@
           </p:nvSpPr>
           <p:spPr>
             <a:xfrm rot="-5400000">
-              <a:off x="68446" y="3759743"/>
+              <a:off x="68446" y="3848213"/>
               <a:ext cx="1016904" cy="100218"/>
             </a:xfrm>
             <a:prstGeom prst="rect">
@@ -5159,6 +5159,52 @@
         <p:sp>
           <p:nvSpPr>
             <p:cNvPr id="38" name="tx38"/>
+            <p:cNvSpPr/>
+            <p:nvPr/>
+          </p:nvSpPr>
+          <p:spPr>
+            <a:xfrm>
+              <a:off x="817517" y="1896563"/>
+              <a:ext cx="5626211" cy="82021"/>
+            </a:xfrm>
+            <a:prstGeom prst="rect">
+              <a:avLst/>
+            </a:prstGeom>
+            <a:noFill/>
+          </p:spPr>
+          <p:txBody>
+            <a:bodyPr lIns="0" rIns="0" tIns="0" bIns="0" anchorCtr="1" anchor="ctr" wrap="none"/>
+            <a:lstStyle/>
+            <a:p>
+              <a:pPr algn="l" marL="0" marR="0" indent="0">
+                <a:lnSpc>
+                  <a:spcPts val="900"/>
+                </a:lnSpc>
+                <a:spcBef>
+                  <a:spcPts val="0"/>
+                </a:spcBef>
+                <a:spcAft>
+                  <a:spcPts val="0"/>
+                </a:spcAft>
+              </a:pPr>
+              <a:r>
+                <a:rPr sz="900">
+                  <a:solidFill>
+                    <a:srgbClr val="404040">
+                      <a:alpha val="100000"/>
+                    </a:srgbClr>
+                  </a:solidFill>
+                  <a:latin typeface="Helvetica"/>
+                  <a:cs typeface="Helvetica"/>
+                </a:rPr>
+                <a:t>subHR per 0.1 ratio decline: 1.28 (1.16-1.41)  |  per IQR decline (Δ = 0.30): 2.06 (1.53-2.78)  |  IQR: [0.84, 1.14]</a:t>
+              </a:r>
+            </a:p>
+          </p:txBody>
+        </p:sp>
+        <p:sp>
+          <p:nvSpPr>
+            <p:cNvPr id="39" name="tx39"/>
             <p:cNvSpPr/>
             <p:nvPr/>
           </p:nvSpPr>

--- a/docs/pptx/auc3/jx-auc3-linsubhr-ratio-grade2.pptx
+++ b/docs/pptx/auc3/jx-auc3-linsubhr-ratio-grade2.pptx
@@ -5165,7 +5165,7 @@
           <p:spPr>
             <a:xfrm>
               <a:off x="817517" y="1896563"/>
-              <a:ext cx="5626211" cy="82021"/>
+              <a:ext cx="6236116" cy="82021"/>
             </a:xfrm>
             <a:prstGeom prst="rect">
               <a:avLst/>
@@ -5197,7 +5197,7 @@
                   <a:latin typeface="Helvetica"/>
                   <a:cs typeface="Helvetica"/>
                 </a:rPr>
-                <a:t>subHR per 0.1 ratio decline: 1.28 (1.16-1.41)  |  per IQR decline (Δ = 0.30): 2.06 (1.53-2.78)  |  IQR: [0.84, 1.14]</a:t>
+                <a:t>subHR per 0.1 ratio decline: 1.28 (1.16-1.41), p = &lt;0.001  |  per IQR decline (Δ = 0.30): 2.06 (1.53-2.78)  |  IQR: [0.84, 1.14]</a:t>
               </a:r>
             </a:p>
           </p:txBody>

--- a/docs/pptx/auc3/jx-auc3-linsubhr-ratio-grade2.pptx
+++ b/docs/pptx/auc3/jx-auc3-linsubhr-ratio-grade2.pptx
@@ -5165,7 +5165,7 @@
           <p:spPr>
             <a:xfrm>
               <a:off x="817517" y="1896563"/>
-              <a:ext cx="6236116" cy="82021"/>
+              <a:ext cx="6899879" cy="82021"/>
             </a:xfrm>
             <a:prstGeom prst="rect">
               <a:avLst/>
@@ -5197,7 +5197,7 @@
                   <a:latin typeface="Helvetica"/>
                   <a:cs typeface="Helvetica"/>
                 </a:rPr>
-                <a:t>subHR per 0.1 ratio decline: 1.28 (1.16-1.41), p = &lt;0.001  |  per IQR decline (Δ = 0.30): 2.06 (1.53-2.78)  |  IQR: [0.84, 1.14]</a:t>
+                <a:t>subHR per 0.1 ratio decline: 1.28 (1.16-1.41), p_Bonf = &lt;0.001 (n = 6)  |  per IQR decline (Δ = 0.30): 2.06 (1.53-2.78)  |  IQR: [0.84, 1.14]</a:t>
               </a:r>
             </a:p>
           </p:txBody>

--- a/docs/pptx/auc3/jx-auc3-linsubhr-ratio-grade2.pptx
+++ b/docs/pptx/auc3/jx-auc3-linsubhr-ratio-grade2.pptx
@@ -2443,7 +2443,7 @@
           </p:nvSpPr>
           <p:spPr>
             <a:xfrm>
-              <a:off x="1615213" y="2073503"/>
+              <a:off x="1531834" y="2073503"/>
               <a:ext cx="0" cy="3649639"/>
             </a:xfrm>
             <a:custGeom>
@@ -2486,7 +2486,7 @@
           </p:nvSpPr>
           <p:spPr>
             <a:xfrm>
-              <a:off x="3387871" y="2073503"/>
+              <a:off x="3586410" y="2073503"/>
               <a:ext cx="0" cy="3649639"/>
             </a:xfrm>
             <a:custGeom>
@@ -2529,7 +2529,7 @@
           </p:nvSpPr>
           <p:spPr>
             <a:xfrm>
-              <a:off x="5160528" y="2073503"/>
+              <a:off x="5640985" y="2073503"/>
               <a:ext cx="0" cy="3649639"/>
             </a:xfrm>
             <a:custGeom>
@@ -2572,7 +2572,7 @@
           </p:nvSpPr>
           <p:spPr>
             <a:xfrm>
-              <a:off x="6933186" y="2073503"/>
+              <a:off x="7695561" y="2073503"/>
               <a:ext cx="0" cy="3649639"/>
             </a:xfrm>
             <a:custGeom>
@@ -2830,7 +2830,7 @@
           </p:nvSpPr>
           <p:spPr>
             <a:xfrm>
-              <a:off x="2501542" y="2073503"/>
+              <a:off x="2559122" y="2073503"/>
               <a:ext cx="0" cy="3649639"/>
             </a:xfrm>
             <a:custGeom>
@@ -2873,7 +2873,7 @@
           </p:nvSpPr>
           <p:spPr>
             <a:xfrm>
-              <a:off x="4274200" y="2073503"/>
+              <a:off x="4613698" y="2073503"/>
               <a:ext cx="0" cy="3649639"/>
             </a:xfrm>
             <a:custGeom>
@@ -2916,7 +2916,7 @@
           </p:nvSpPr>
           <p:spPr>
             <a:xfrm>
-              <a:off x="6046857" y="2073503"/>
+              <a:off x="6668273" y="2073503"/>
               <a:ext cx="0" cy="3649639"/>
             </a:xfrm>
             <a:custGeom>
@@ -2953,643 +2953,618 @@
         </p:sp>
         <p:sp>
           <p:nvSpPr>
-            <p:cNvPr id="20" name="pl20"/>
+            <p:cNvPr id="20" name="pg20"/>
             <p:cNvSpPr/>
             <p:nvPr/>
           </p:nvSpPr>
           <p:spPr>
             <a:xfrm>
-              <a:off x="7819515" y="2073503"/>
-              <a:ext cx="0" cy="3649639"/>
+              <a:off x="1172049" y="2232099"/>
+              <a:ext cx="7090630" cy="3157389"/>
             </a:xfrm>
             <a:custGeom>
               <a:avLst/>
               <a:pathLst>
-                <a:path w="0" h="3649639">
-                  <a:moveTo>
-                    <a:pt x="0" y="3649639"/>
-                  </a:moveTo>
-                  <a:lnTo>
-                    <a:pt x="0" y="0"/>
-                  </a:lnTo>
-                  <a:lnTo>
-                    <a:pt x="0" y="0"/>
-                  </a:lnTo>
-                </a:path>
-              </a:pathLst>
-            </a:custGeom>
-            <a:ln w="13550" cap="flat">
-              <a:solidFill>
-                <a:srgbClr val="EBEBEB">
-                  <a:alpha val="100000"/>
-                </a:srgbClr>
-              </a:solidFill>
-              <a:prstDash val="solid"/>
-              <a:round/>
-            </a:ln>
-          </p:spPr>
-          <p:txBody>
-            <a:bodyPr/>
-            <a:lstStyle/>
-            <a:p/>
-          </p:txBody>
-        </p:sp>
-        <p:sp>
-          <p:nvSpPr>
-            <p:cNvPr id="21" name="pg21"/>
-            <p:cNvSpPr/>
-            <p:nvPr/>
-          </p:nvSpPr>
-          <p:spPr>
-            <a:xfrm>
-              <a:off x="817517" y="2547109"/>
-              <a:ext cx="7392041" cy="2842380"/>
-            </a:xfrm>
-            <a:custGeom>
-              <a:avLst/>
-              <a:pathLst>
-                <a:path w="7392041" h="2842380">
+                <a:path w="7090630" h="3157389">
                   <a:moveTo>
                     <a:pt x="0" y="0"/>
                   </a:moveTo>
                   <a:lnTo>
-                    <a:pt x="53901" y="62990"/>
-                  </a:lnTo>
-                  <a:lnTo>
-                    <a:pt x="131145" y="150574"/>
-                  </a:lnTo>
-                  <a:lnTo>
-                    <a:pt x="208389" y="235556"/>
-                  </a:lnTo>
-                  <a:lnTo>
-                    <a:pt x="285632" y="318013"/>
-                  </a:lnTo>
-                  <a:lnTo>
-                    <a:pt x="362876" y="398019"/>
-                  </a:lnTo>
-                  <a:lnTo>
-                    <a:pt x="440119" y="475647"/>
-                  </a:lnTo>
-                  <a:lnTo>
-                    <a:pt x="517363" y="550968"/>
-                  </a:lnTo>
-                  <a:lnTo>
-                    <a:pt x="594606" y="624051"/>
-                  </a:lnTo>
-                  <a:lnTo>
-                    <a:pt x="671850" y="694962"/>
-                  </a:lnTo>
-                  <a:lnTo>
-                    <a:pt x="749094" y="763765"/>
-                  </a:lnTo>
-                  <a:lnTo>
-                    <a:pt x="826337" y="830524"/>
-                  </a:lnTo>
-                  <a:lnTo>
-                    <a:pt x="903581" y="895299"/>
-                  </a:lnTo>
-                  <a:lnTo>
-                    <a:pt x="980824" y="958149"/>
-                  </a:lnTo>
-                  <a:lnTo>
-                    <a:pt x="1058068" y="1019131"/>
-                  </a:lnTo>
-                  <a:lnTo>
-                    <a:pt x="1135311" y="1078301"/>
-                  </a:lnTo>
-                  <a:lnTo>
-                    <a:pt x="1212555" y="1135712"/>
-                  </a:lnTo>
-                  <a:lnTo>
-                    <a:pt x="1289799" y="1191417"/>
-                  </a:lnTo>
-                  <a:lnTo>
-                    <a:pt x="1367042" y="1245467"/>
-                  </a:lnTo>
-                  <a:lnTo>
-                    <a:pt x="1444286" y="1297910"/>
-                  </a:lnTo>
-                  <a:lnTo>
-                    <a:pt x="1521529" y="1348795"/>
-                  </a:lnTo>
-                  <a:lnTo>
-                    <a:pt x="1598773" y="1398168"/>
-                  </a:lnTo>
-                  <a:lnTo>
-                    <a:pt x="1676016" y="1446073"/>
-                  </a:lnTo>
-                  <a:lnTo>
-                    <a:pt x="1753260" y="1492555"/>
-                  </a:lnTo>
-                  <a:lnTo>
-                    <a:pt x="1830504" y="1537655"/>
-                  </a:lnTo>
-                  <a:lnTo>
-                    <a:pt x="1907747" y="1581415"/>
-                  </a:lnTo>
-                  <a:lnTo>
-                    <a:pt x="1984991" y="1623875"/>
-                  </a:lnTo>
-                  <a:lnTo>
-                    <a:pt x="2062234" y="1665072"/>
-                  </a:lnTo>
-                  <a:lnTo>
-                    <a:pt x="2139478" y="1705046"/>
-                  </a:lnTo>
-                  <a:lnTo>
-                    <a:pt x="2216721" y="1743831"/>
-                  </a:lnTo>
-                  <a:lnTo>
-                    <a:pt x="2293965" y="1781464"/>
-                  </a:lnTo>
-                  <a:lnTo>
-                    <a:pt x="2371209" y="1817978"/>
-                  </a:lnTo>
-                  <a:lnTo>
-                    <a:pt x="2448452" y="1853407"/>
-                  </a:lnTo>
-                  <a:lnTo>
-                    <a:pt x="2525696" y="1887784"/>
-                  </a:lnTo>
-                  <a:lnTo>
-                    <a:pt x="2602939" y="1921139"/>
-                  </a:lnTo>
-                  <a:lnTo>
-                    <a:pt x="2680183" y="1953502"/>
-                  </a:lnTo>
-                  <a:lnTo>
-                    <a:pt x="2757426" y="1984904"/>
-                  </a:lnTo>
-                  <a:lnTo>
-                    <a:pt x="2834670" y="2015372"/>
-                  </a:lnTo>
-                  <a:lnTo>
-                    <a:pt x="2911914" y="2044935"/>
-                  </a:lnTo>
-                  <a:lnTo>
-                    <a:pt x="2989157" y="2073620"/>
-                  </a:lnTo>
-                  <a:lnTo>
-                    <a:pt x="3066401" y="2101452"/>
-                  </a:lnTo>
-                  <a:lnTo>
-                    <a:pt x="3143644" y="2128456"/>
-                  </a:lnTo>
-                  <a:lnTo>
-                    <a:pt x="3220888" y="2154659"/>
-                  </a:lnTo>
-                  <a:lnTo>
-                    <a:pt x="3298131" y="2180082"/>
-                  </a:lnTo>
-                  <a:lnTo>
-                    <a:pt x="3375375" y="2190822"/>
-                  </a:lnTo>
-                  <a:lnTo>
-                    <a:pt x="3452619" y="2201086"/>
-                  </a:lnTo>
-                  <a:lnTo>
-                    <a:pt x="3529862" y="2211221"/>
-                  </a:lnTo>
-                  <a:lnTo>
-                    <a:pt x="3607106" y="2221229"/>
-                  </a:lnTo>
-                  <a:lnTo>
-                    <a:pt x="3684349" y="2231112"/>
-                  </a:lnTo>
-                  <a:lnTo>
-                    <a:pt x="3761593" y="2240871"/>
-                  </a:lnTo>
-                  <a:lnTo>
-                    <a:pt x="3838836" y="2250507"/>
-                  </a:lnTo>
-                  <a:lnTo>
-                    <a:pt x="3916080" y="2260023"/>
-                  </a:lnTo>
-                  <a:lnTo>
-                    <a:pt x="3993324" y="2269420"/>
-                  </a:lnTo>
-                  <a:lnTo>
-                    <a:pt x="4070567" y="2278699"/>
-                  </a:lnTo>
-                  <a:lnTo>
-                    <a:pt x="4147811" y="2287862"/>
-                  </a:lnTo>
-                  <a:lnTo>
-                    <a:pt x="4225054" y="2296910"/>
-                  </a:lnTo>
-                  <a:lnTo>
-                    <a:pt x="4302298" y="2305845"/>
-                  </a:lnTo>
-                  <a:lnTo>
-                    <a:pt x="4379541" y="2314667"/>
-                  </a:lnTo>
-                  <a:lnTo>
-                    <a:pt x="4456785" y="2323380"/>
-                  </a:lnTo>
-                  <a:lnTo>
-                    <a:pt x="4534029" y="2331983"/>
-                  </a:lnTo>
-                  <a:lnTo>
-                    <a:pt x="4611272" y="2340478"/>
-                  </a:lnTo>
-                  <a:lnTo>
-                    <a:pt x="4688516" y="2348867"/>
-                  </a:lnTo>
-                  <a:lnTo>
-                    <a:pt x="4765759" y="2357151"/>
-                  </a:lnTo>
-                  <a:lnTo>
-                    <a:pt x="4843003" y="2365331"/>
-                  </a:lnTo>
-                  <a:lnTo>
-                    <a:pt x="4920246" y="2373408"/>
-                  </a:lnTo>
-                  <a:lnTo>
-                    <a:pt x="4997490" y="2381385"/>
-                  </a:lnTo>
-                  <a:lnTo>
-                    <a:pt x="5074734" y="2389261"/>
-                  </a:lnTo>
-                  <a:lnTo>
-                    <a:pt x="5151977" y="2397039"/>
-                  </a:lnTo>
-                  <a:lnTo>
-                    <a:pt x="5229221" y="2404719"/>
-                  </a:lnTo>
-                  <a:lnTo>
-                    <a:pt x="5306464" y="2412303"/>
-                  </a:lnTo>
-                  <a:lnTo>
-                    <a:pt x="5383708" y="2419792"/>
-                  </a:lnTo>
-                  <a:lnTo>
-                    <a:pt x="5460951" y="2427188"/>
-                  </a:lnTo>
-                  <a:lnTo>
-                    <a:pt x="5538195" y="2434490"/>
-                  </a:lnTo>
-                  <a:lnTo>
-                    <a:pt x="5615439" y="2441702"/>
-                  </a:lnTo>
-                  <a:lnTo>
-                    <a:pt x="5692682" y="2448822"/>
-                  </a:lnTo>
-                  <a:lnTo>
-                    <a:pt x="5769926" y="2455854"/>
-                  </a:lnTo>
-                  <a:lnTo>
-                    <a:pt x="5847169" y="2462798"/>
-                  </a:lnTo>
-                  <a:lnTo>
-                    <a:pt x="5924413" y="2469654"/>
-                  </a:lnTo>
-                  <a:lnTo>
-                    <a:pt x="6001656" y="2476425"/>
-                  </a:lnTo>
-                  <a:lnTo>
-                    <a:pt x="6078900" y="2483111"/>
-                  </a:lnTo>
-                  <a:lnTo>
-                    <a:pt x="6156144" y="2489713"/>
-                  </a:lnTo>
-                  <a:lnTo>
-                    <a:pt x="6233387" y="2496232"/>
-                  </a:lnTo>
-                  <a:lnTo>
-                    <a:pt x="6310631" y="2502670"/>
-                  </a:lnTo>
-                  <a:lnTo>
-                    <a:pt x="6387874" y="2509027"/>
-                  </a:lnTo>
-                  <a:lnTo>
-                    <a:pt x="6465118" y="2515305"/>
-                  </a:lnTo>
-                  <a:lnTo>
-                    <a:pt x="6542361" y="2521504"/>
-                  </a:lnTo>
-                  <a:lnTo>
-                    <a:pt x="6619605" y="2527625"/>
-                  </a:lnTo>
-                  <a:lnTo>
-                    <a:pt x="6696849" y="2533669"/>
-                  </a:lnTo>
-                  <a:lnTo>
-                    <a:pt x="6774092" y="2539638"/>
-                  </a:lnTo>
-                  <a:lnTo>
-                    <a:pt x="6851336" y="2545532"/>
-                  </a:lnTo>
-                  <a:lnTo>
-                    <a:pt x="6928579" y="2551352"/>
-                  </a:lnTo>
-                  <a:lnTo>
-                    <a:pt x="7005823" y="2557099"/>
-                  </a:lnTo>
-                  <a:lnTo>
-                    <a:pt x="7083066" y="2562775"/>
-                  </a:lnTo>
-                  <a:lnTo>
-                    <a:pt x="7160310" y="2568379"/>
-                  </a:lnTo>
-                  <a:lnTo>
-                    <a:pt x="7237554" y="2573913"/>
-                  </a:lnTo>
-                  <a:lnTo>
-                    <a:pt x="7314797" y="2579377"/>
-                  </a:lnTo>
-                  <a:lnTo>
-                    <a:pt x="7392041" y="2584774"/>
-                  </a:lnTo>
-                  <a:lnTo>
-                    <a:pt x="7392041" y="2842380"/>
-                  </a:lnTo>
-                  <a:lnTo>
-                    <a:pt x="7314797" y="2837241"/>
-                  </a:lnTo>
-                  <a:lnTo>
-                    <a:pt x="7237554" y="2831946"/>
-                  </a:lnTo>
-                  <a:lnTo>
-                    <a:pt x="7160310" y="2826488"/>
-                  </a:lnTo>
-                  <a:lnTo>
-                    <a:pt x="7083066" y="2820863"/>
-                  </a:lnTo>
-                  <a:lnTo>
-                    <a:pt x="7005823" y="2815066"/>
-                  </a:lnTo>
-                  <a:lnTo>
-                    <a:pt x="6928579" y="2809091"/>
-                  </a:lnTo>
-                  <a:lnTo>
-                    <a:pt x="6851336" y="2802933"/>
-                  </a:lnTo>
-                  <a:lnTo>
-                    <a:pt x="6774092" y="2796586"/>
-                  </a:lnTo>
-                  <a:lnTo>
-                    <a:pt x="6696849" y="2790045"/>
-                  </a:lnTo>
-                  <a:lnTo>
-                    <a:pt x="6619605" y="2783304"/>
-                  </a:lnTo>
-                  <a:lnTo>
-                    <a:pt x="6542361" y="2776356"/>
-                  </a:lnTo>
-                  <a:lnTo>
-                    <a:pt x="6465118" y="2769196"/>
-                  </a:lnTo>
-                  <a:lnTo>
-                    <a:pt x="6387874" y="2761816"/>
-                  </a:lnTo>
-                  <a:lnTo>
-                    <a:pt x="6310631" y="2754210"/>
-                  </a:lnTo>
-                  <a:lnTo>
-                    <a:pt x="6233387" y="2746371"/>
-                  </a:lnTo>
-                  <a:lnTo>
-                    <a:pt x="6156144" y="2738293"/>
-                  </a:lnTo>
-                  <a:lnTo>
-                    <a:pt x="6078900" y="2729966"/>
-                  </a:lnTo>
-                  <a:lnTo>
-                    <a:pt x="6001656" y="2721385"/>
-                  </a:lnTo>
-                  <a:lnTo>
-                    <a:pt x="5924413" y="2712541"/>
-                  </a:lnTo>
-                  <a:lnTo>
-                    <a:pt x="5847169" y="2703426"/>
-                  </a:lnTo>
-                  <a:lnTo>
-                    <a:pt x="5769926" y="2694031"/>
-                  </a:lnTo>
-                  <a:lnTo>
-                    <a:pt x="5692682" y="2684349"/>
-                  </a:lnTo>
-                  <a:lnTo>
-                    <a:pt x="5615439" y="2674371"/>
-                  </a:lnTo>
-                  <a:lnTo>
-                    <a:pt x="5538195" y="2664087"/>
-                  </a:lnTo>
-                  <a:lnTo>
-                    <a:pt x="5460951" y="2653487"/>
-                  </a:lnTo>
-                  <a:lnTo>
-                    <a:pt x="5383708" y="2642563"/>
-                  </a:lnTo>
-                  <a:lnTo>
-                    <a:pt x="5306464" y="2631305"/>
-                  </a:lnTo>
-                  <a:lnTo>
-                    <a:pt x="5229221" y="2619702"/>
-                  </a:lnTo>
-                  <a:lnTo>
-                    <a:pt x="5151977" y="2607743"/>
-                  </a:lnTo>
-                  <a:lnTo>
-                    <a:pt x="5074734" y="2595418"/>
-                  </a:lnTo>
-                  <a:lnTo>
-                    <a:pt x="4997490" y="2582716"/>
-                  </a:lnTo>
-                  <a:lnTo>
-                    <a:pt x="4920246" y="2569624"/>
-                  </a:lnTo>
-                  <a:lnTo>
-                    <a:pt x="4843003" y="2556132"/>
-                  </a:lnTo>
-                  <a:lnTo>
-                    <a:pt x="4765759" y="2542226"/>
-                  </a:lnTo>
-                  <a:lnTo>
-                    <a:pt x="4688516" y="2527895"/>
-                  </a:lnTo>
-                  <a:lnTo>
-                    <a:pt x="4611272" y="2513124"/>
-                  </a:lnTo>
-                  <a:lnTo>
-                    <a:pt x="4534029" y="2497901"/>
-                  </a:lnTo>
-                  <a:lnTo>
-                    <a:pt x="4456785" y="2482212"/>
-                  </a:lnTo>
-                  <a:lnTo>
-                    <a:pt x="4379541" y="2466042"/>
-                  </a:lnTo>
-                  <a:lnTo>
-                    <a:pt x="4302298" y="2449377"/>
-                  </a:lnTo>
-                  <a:lnTo>
-                    <a:pt x="4225054" y="2432202"/>
-                  </a:lnTo>
-                  <a:lnTo>
-                    <a:pt x="4147811" y="2414500"/>
-                  </a:lnTo>
-                  <a:lnTo>
-                    <a:pt x="4070567" y="2396257"/>
-                  </a:lnTo>
-                  <a:lnTo>
-                    <a:pt x="3993324" y="2377454"/>
-                  </a:lnTo>
-                  <a:lnTo>
-                    <a:pt x="3916080" y="2358076"/>
-                  </a:lnTo>
-                  <a:lnTo>
-                    <a:pt x="3838836" y="2338104"/>
-                  </a:lnTo>
-                  <a:lnTo>
-                    <a:pt x="3761593" y="2317520"/>
-                  </a:lnTo>
-                  <a:lnTo>
-                    <a:pt x="3684349" y="2296306"/>
-                  </a:lnTo>
-                  <a:lnTo>
-                    <a:pt x="3607106" y="2274442"/>
-                  </a:lnTo>
-                  <a:lnTo>
-                    <a:pt x="3529862" y="2251909"/>
-                  </a:lnTo>
-                  <a:lnTo>
-                    <a:pt x="3452619" y="2228685"/>
-                  </a:lnTo>
-                  <a:lnTo>
-                    <a:pt x="3375375" y="2204750"/>
-                  </a:lnTo>
-                  <a:lnTo>
-                    <a:pt x="3298131" y="2180428"/>
-                  </a:lnTo>
-                  <a:lnTo>
-                    <a:pt x="3220888" y="2169903"/>
-                  </a:lnTo>
-                  <a:lnTo>
-                    <a:pt x="3143644" y="2159244"/>
-                  </a:lnTo>
-                  <a:lnTo>
-                    <a:pt x="3066401" y="2148449"/>
-                  </a:lnTo>
-                  <a:lnTo>
-                    <a:pt x="2989157" y="2137518"/>
-                  </a:lnTo>
-                  <a:lnTo>
-                    <a:pt x="2911914" y="2126448"/>
-                  </a:lnTo>
-                  <a:lnTo>
-                    <a:pt x="2834670" y="2115237"/>
-                  </a:lnTo>
-                  <a:lnTo>
-                    <a:pt x="2757426" y="2103884"/>
-                  </a:lnTo>
-                  <a:lnTo>
-                    <a:pt x="2680183" y="2092388"/>
-                  </a:lnTo>
-                  <a:lnTo>
-                    <a:pt x="2602939" y="2080745"/>
-                  </a:lnTo>
-                  <a:lnTo>
-                    <a:pt x="2525696" y="2068955"/>
-                  </a:lnTo>
-                  <a:lnTo>
-                    <a:pt x="2448452" y="2057015"/>
-                  </a:lnTo>
-                  <a:lnTo>
-                    <a:pt x="2371209" y="2044924"/>
-                  </a:lnTo>
-                  <a:lnTo>
-                    <a:pt x="2293965" y="2032679"/>
-                  </a:lnTo>
-                  <a:lnTo>
-                    <a:pt x="2216721" y="2020279"/>
-                  </a:lnTo>
-                  <a:lnTo>
-                    <a:pt x="2139478" y="2007722"/>
-                  </a:lnTo>
-                  <a:lnTo>
-                    <a:pt x="2062234" y="1995005"/>
-                  </a:lnTo>
-                  <a:lnTo>
-                    <a:pt x="1984991" y="1982127"/>
-                  </a:lnTo>
-                  <a:lnTo>
-                    <a:pt x="1907747" y="1969086"/>
-                  </a:lnTo>
-                  <a:lnTo>
-                    <a:pt x="1830504" y="1955879"/>
-                  </a:lnTo>
-                  <a:lnTo>
-                    <a:pt x="1753260" y="1942505"/>
-                  </a:lnTo>
-                  <a:lnTo>
-                    <a:pt x="1676016" y="1928961"/>
-                  </a:lnTo>
-                  <a:lnTo>
-                    <a:pt x="1598773" y="1915245"/>
-                  </a:lnTo>
-                  <a:lnTo>
-                    <a:pt x="1521529" y="1901355"/>
-                  </a:lnTo>
-                  <a:lnTo>
-                    <a:pt x="1444286" y="1887289"/>
-                  </a:lnTo>
-                  <a:lnTo>
-                    <a:pt x="1367042" y="1873045"/>
-                  </a:lnTo>
-                  <a:lnTo>
-                    <a:pt x="1289799" y="1858619"/>
-                  </a:lnTo>
-                  <a:lnTo>
-                    <a:pt x="1212555" y="1844011"/>
-                  </a:lnTo>
-                  <a:lnTo>
-                    <a:pt x="1135311" y="1829218"/>
-                  </a:lnTo>
-                  <a:lnTo>
-                    <a:pt x="1058068" y="1814237"/>
-                  </a:lnTo>
-                  <a:lnTo>
-                    <a:pt x="980824" y="1799065"/>
-                  </a:lnTo>
-                  <a:lnTo>
-                    <a:pt x="903581" y="1783702"/>
-                  </a:lnTo>
-                  <a:lnTo>
-                    <a:pt x="826337" y="1768143"/>
-                  </a:lnTo>
-                  <a:lnTo>
-                    <a:pt x="749094" y="1752387"/>
-                  </a:lnTo>
-                  <a:lnTo>
-                    <a:pt x="671850" y="1736432"/>
-                  </a:lnTo>
-                  <a:lnTo>
-                    <a:pt x="594606" y="1720273"/>
-                  </a:lnTo>
-                  <a:lnTo>
-                    <a:pt x="517363" y="1703910"/>
-                  </a:lnTo>
-                  <a:lnTo>
-                    <a:pt x="440119" y="1687339"/>
-                  </a:lnTo>
-                  <a:lnTo>
-                    <a:pt x="362876" y="1670558"/>
-                  </a:lnTo>
-                  <a:lnTo>
-                    <a:pt x="285632" y="1653564"/>
-                  </a:lnTo>
-                  <a:lnTo>
-                    <a:pt x="208389" y="1636355"/>
-                  </a:lnTo>
-                  <a:lnTo>
-                    <a:pt x="131145" y="1618927"/>
-                  </a:lnTo>
-                  <a:lnTo>
-                    <a:pt x="53901" y="1601278"/>
-                  </a:lnTo>
-                  <a:lnTo>
-                    <a:pt x="0" y="1588806"/>
+                    <a:pt x="71622" y="98818"/>
+                  </a:lnTo>
+                  <a:lnTo>
+                    <a:pt x="143245" y="194700"/>
+                  </a:lnTo>
+                  <a:lnTo>
+                    <a:pt x="214867" y="287732"/>
+                  </a:lnTo>
+                  <a:lnTo>
+                    <a:pt x="286490" y="377999"/>
+                  </a:lnTo>
+                  <a:lnTo>
+                    <a:pt x="358112" y="465584"/>
+                  </a:lnTo>
+                  <a:lnTo>
+                    <a:pt x="429735" y="550566"/>
+                  </a:lnTo>
+                  <a:lnTo>
+                    <a:pt x="501357" y="633022"/>
+                  </a:lnTo>
+                  <a:lnTo>
+                    <a:pt x="572980" y="713028"/>
+                  </a:lnTo>
+                  <a:lnTo>
+                    <a:pt x="644602" y="790656"/>
+                  </a:lnTo>
+                  <a:lnTo>
+                    <a:pt x="716225" y="865978"/>
+                  </a:lnTo>
+                  <a:lnTo>
+                    <a:pt x="787847" y="939060"/>
+                  </a:lnTo>
+                  <a:lnTo>
+                    <a:pt x="859470" y="1009971"/>
+                  </a:lnTo>
+                  <a:lnTo>
+                    <a:pt x="931092" y="1078775"/>
+                  </a:lnTo>
+                  <a:lnTo>
+                    <a:pt x="1002715" y="1145534"/>
+                  </a:lnTo>
+                  <a:lnTo>
+                    <a:pt x="1074337" y="1210309"/>
+                  </a:lnTo>
+                  <a:lnTo>
+                    <a:pt x="1145960" y="1273158"/>
+                  </a:lnTo>
+                  <a:lnTo>
+                    <a:pt x="1217582" y="1334140"/>
+                  </a:lnTo>
+                  <a:lnTo>
+                    <a:pt x="1289205" y="1393310"/>
+                  </a:lnTo>
+                  <a:lnTo>
+                    <a:pt x="1360827" y="1450721"/>
+                  </a:lnTo>
+                  <a:lnTo>
+                    <a:pt x="1432450" y="1506427"/>
+                  </a:lnTo>
+                  <a:lnTo>
+                    <a:pt x="1504073" y="1560476"/>
+                  </a:lnTo>
+                  <a:lnTo>
+                    <a:pt x="1575695" y="1612920"/>
+                  </a:lnTo>
+                  <a:lnTo>
+                    <a:pt x="1647318" y="1663805"/>
+                  </a:lnTo>
+                  <a:lnTo>
+                    <a:pt x="1718940" y="1713177"/>
+                  </a:lnTo>
+                  <a:lnTo>
+                    <a:pt x="1790563" y="1761083"/>
+                  </a:lnTo>
+                  <a:lnTo>
+                    <a:pt x="1862185" y="1807564"/>
+                  </a:lnTo>
+                  <a:lnTo>
+                    <a:pt x="1933808" y="1852665"/>
+                  </a:lnTo>
+                  <a:lnTo>
+                    <a:pt x="2005430" y="1896425"/>
+                  </a:lnTo>
+                  <a:lnTo>
+                    <a:pt x="2077053" y="1938884"/>
+                  </a:lnTo>
+                  <a:lnTo>
+                    <a:pt x="2148675" y="1980082"/>
+                  </a:lnTo>
+                  <a:lnTo>
+                    <a:pt x="2220298" y="2020055"/>
+                  </a:lnTo>
+                  <a:lnTo>
+                    <a:pt x="2291920" y="2058840"/>
+                  </a:lnTo>
+                  <a:lnTo>
+                    <a:pt x="2363543" y="2096473"/>
+                  </a:lnTo>
+                  <a:lnTo>
+                    <a:pt x="2435165" y="2132988"/>
+                  </a:lnTo>
+                  <a:lnTo>
+                    <a:pt x="2506788" y="2168417"/>
+                  </a:lnTo>
+                  <a:lnTo>
+                    <a:pt x="2578410" y="2202793"/>
+                  </a:lnTo>
+                  <a:lnTo>
+                    <a:pt x="2650033" y="2236148"/>
+                  </a:lnTo>
+                  <a:lnTo>
+                    <a:pt x="2721655" y="2268511"/>
+                  </a:lnTo>
+                  <a:lnTo>
+                    <a:pt x="2793278" y="2299913"/>
+                  </a:lnTo>
+                  <a:lnTo>
+                    <a:pt x="2864901" y="2330382"/>
+                  </a:lnTo>
+                  <a:lnTo>
+                    <a:pt x="2936523" y="2359945"/>
+                  </a:lnTo>
+                  <a:lnTo>
+                    <a:pt x="3008146" y="2388629"/>
+                  </a:lnTo>
+                  <a:lnTo>
+                    <a:pt x="3079768" y="2416461"/>
+                  </a:lnTo>
+                  <a:lnTo>
+                    <a:pt x="3151391" y="2443466"/>
+                  </a:lnTo>
+                  <a:lnTo>
+                    <a:pt x="3223013" y="2469668"/>
+                  </a:lnTo>
+                  <a:lnTo>
+                    <a:pt x="3294636" y="2495092"/>
+                  </a:lnTo>
+                  <a:lnTo>
+                    <a:pt x="3366258" y="2505832"/>
+                  </a:lnTo>
+                  <a:lnTo>
+                    <a:pt x="3437881" y="2516095"/>
+                  </a:lnTo>
+                  <a:lnTo>
+                    <a:pt x="3509503" y="2526230"/>
+                  </a:lnTo>
+                  <a:lnTo>
+                    <a:pt x="3581126" y="2536238"/>
+                  </a:lnTo>
+                  <a:lnTo>
+                    <a:pt x="3652748" y="2546121"/>
+                  </a:lnTo>
+                  <a:lnTo>
+                    <a:pt x="3724371" y="2555880"/>
+                  </a:lnTo>
+                  <a:lnTo>
+                    <a:pt x="3795993" y="2565517"/>
+                  </a:lnTo>
+                  <a:lnTo>
+                    <a:pt x="3867616" y="2575033"/>
+                  </a:lnTo>
+                  <a:lnTo>
+                    <a:pt x="3939238" y="2584429"/>
+                  </a:lnTo>
+                  <a:lnTo>
+                    <a:pt x="4010861" y="2593709"/>
+                  </a:lnTo>
+                  <a:lnTo>
+                    <a:pt x="4082483" y="2602871"/>
+                  </a:lnTo>
+                  <a:lnTo>
+                    <a:pt x="4154106" y="2611919"/>
+                  </a:lnTo>
+                  <a:lnTo>
+                    <a:pt x="4225729" y="2620854"/>
+                  </a:lnTo>
+                  <a:lnTo>
+                    <a:pt x="4297351" y="2629677"/>
+                  </a:lnTo>
+                  <a:lnTo>
+                    <a:pt x="4368974" y="2638389"/>
+                  </a:lnTo>
+                  <a:lnTo>
+                    <a:pt x="4440596" y="2646992"/>
+                  </a:lnTo>
+                  <a:lnTo>
+                    <a:pt x="4512219" y="2655487"/>
+                  </a:lnTo>
+                  <a:lnTo>
+                    <a:pt x="4583841" y="2663876"/>
+                  </a:lnTo>
+                  <a:lnTo>
+                    <a:pt x="4655464" y="2672160"/>
+                  </a:lnTo>
+                  <a:lnTo>
+                    <a:pt x="4727086" y="2680340"/>
+                  </a:lnTo>
+                  <a:lnTo>
+                    <a:pt x="4798709" y="2688418"/>
+                  </a:lnTo>
+                  <a:lnTo>
+                    <a:pt x="4870331" y="2696394"/>
+                  </a:lnTo>
+                  <a:lnTo>
+                    <a:pt x="4941954" y="2704270"/>
+                  </a:lnTo>
+                  <a:lnTo>
+                    <a:pt x="5013576" y="2712048"/>
+                  </a:lnTo>
+                  <a:lnTo>
+                    <a:pt x="5085199" y="2719729"/>
+                  </a:lnTo>
+                  <a:lnTo>
+                    <a:pt x="5156821" y="2727313"/>
+                  </a:lnTo>
+                  <a:lnTo>
+                    <a:pt x="5228444" y="2734802"/>
+                  </a:lnTo>
+                  <a:lnTo>
+                    <a:pt x="5300066" y="2742197"/>
+                  </a:lnTo>
+                  <a:lnTo>
+                    <a:pt x="5371689" y="2749500"/>
+                  </a:lnTo>
+                  <a:lnTo>
+                    <a:pt x="5443311" y="2756711"/>
+                  </a:lnTo>
+                  <a:lnTo>
+                    <a:pt x="5514934" y="2763832"/>
+                  </a:lnTo>
+                  <a:lnTo>
+                    <a:pt x="5586557" y="2770864"/>
+                  </a:lnTo>
+                  <a:lnTo>
+                    <a:pt x="5658179" y="2777807"/>
+                  </a:lnTo>
+                  <a:lnTo>
+                    <a:pt x="5729802" y="2784664"/>
+                  </a:lnTo>
+                  <a:lnTo>
+                    <a:pt x="5801424" y="2791434"/>
+                  </a:lnTo>
+                  <a:lnTo>
+                    <a:pt x="5873047" y="2798120"/>
+                  </a:lnTo>
+                  <a:lnTo>
+                    <a:pt x="5944669" y="2804722"/>
+                  </a:lnTo>
+                  <a:lnTo>
+                    <a:pt x="6016292" y="2811242"/>
+                  </a:lnTo>
+                  <a:lnTo>
+                    <a:pt x="6087914" y="2817680"/>
+                  </a:lnTo>
+                  <a:lnTo>
+                    <a:pt x="6159537" y="2824037"/>
+                  </a:lnTo>
+                  <a:lnTo>
+                    <a:pt x="6231159" y="2830314"/>
+                  </a:lnTo>
+                  <a:lnTo>
+                    <a:pt x="6302782" y="2836513"/>
+                  </a:lnTo>
+                  <a:lnTo>
+                    <a:pt x="6374404" y="2842634"/>
+                  </a:lnTo>
+                  <a:lnTo>
+                    <a:pt x="6446027" y="2848679"/>
+                  </a:lnTo>
+                  <a:lnTo>
+                    <a:pt x="6517649" y="2854647"/>
+                  </a:lnTo>
+                  <a:lnTo>
+                    <a:pt x="6589272" y="2860541"/>
+                  </a:lnTo>
+                  <a:lnTo>
+                    <a:pt x="6660894" y="2866362"/>
+                  </a:lnTo>
+                  <a:lnTo>
+                    <a:pt x="6732517" y="2872109"/>
+                  </a:lnTo>
+                  <a:lnTo>
+                    <a:pt x="6804139" y="2877784"/>
+                  </a:lnTo>
+                  <a:lnTo>
+                    <a:pt x="6875762" y="2883388"/>
+                  </a:lnTo>
+                  <a:lnTo>
+                    <a:pt x="6947385" y="2888922"/>
+                  </a:lnTo>
+                  <a:lnTo>
+                    <a:pt x="7019007" y="2894387"/>
+                  </a:lnTo>
+                  <a:lnTo>
+                    <a:pt x="7090630" y="2899783"/>
+                  </a:lnTo>
+                  <a:lnTo>
+                    <a:pt x="7090630" y="3157389"/>
+                  </a:lnTo>
+                  <a:lnTo>
+                    <a:pt x="7019007" y="3152251"/>
+                  </a:lnTo>
+                  <a:lnTo>
+                    <a:pt x="6947385" y="3146955"/>
+                  </a:lnTo>
+                  <a:lnTo>
+                    <a:pt x="6875762" y="3141497"/>
+                  </a:lnTo>
+                  <a:lnTo>
+                    <a:pt x="6804139" y="3135872"/>
+                  </a:lnTo>
+                  <a:lnTo>
+                    <a:pt x="6732517" y="3130075"/>
+                  </a:lnTo>
+                  <a:lnTo>
+                    <a:pt x="6660894" y="3124100"/>
+                  </a:lnTo>
+                  <a:lnTo>
+                    <a:pt x="6589272" y="3117942"/>
+                  </a:lnTo>
+                  <a:lnTo>
+                    <a:pt x="6517649" y="3111596"/>
+                  </a:lnTo>
+                  <a:lnTo>
+                    <a:pt x="6446027" y="3105055"/>
+                  </a:lnTo>
+                  <a:lnTo>
+                    <a:pt x="6374404" y="3098314"/>
+                  </a:lnTo>
+                  <a:lnTo>
+                    <a:pt x="6302782" y="3091366"/>
+                  </a:lnTo>
+                  <a:lnTo>
+                    <a:pt x="6231159" y="3084205"/>
+                  </a:lnTo>
+                  <a:lnTo>
+                    <a:pt x="6159537" y="3076826"/>
+                  </a:lnTo>
+                  <a:lnTo>
+                    <a:pt x="6087914" y="3069220"/>
+                  </a:lnTo>
+                  <a:lnTo>
+                    <a:pt x="6016292" y="3061381"/>
+                  </a:lnTo>
+                  <a:lnTo>
+                    <a:pt x="5944669" y="3053302"/>
+                  </a:lnTo>
+                  <a:lnTo>
+                    <a:pt x="5873047" y="3044976"/>
+                  </a:lnTo>
+                  <a:lnTo>
+                    <a:pt x="5801424" y="3036394"/>
+                  </a:lnTo>
+                  <a:lnTo>
+                    <a:pt x="5729802" y="3027550"/>
+                  </a:lnTo>
+                  <a:lnTo>
+                    <a:pt x="5658179" y="3018435"/>
+                  </a:lnTo>
+                  <a:lnTo>
+                    <a:pt x="5586557" y="3009041"/>
+                  </a:lnTo>
+                  <a:lnTo>
+                    <a:pt x="5514934" y="2999359"/>
+                  </a:lnTo>
+                  <a:lnTo>
+                    <a:pt x="5443311" y="2989380"/>
+                  </a:lnTo>
+                  <a:lnTo>
+                    <a:pt x="5371689" y="2979096"/>
+                  </a:lnTo>
+                  <a:lnTo>
+                    <a:pt x="5300066" y="2968497"/>
+                  </a:lnTo>
+                  <a:lnTo>
+                    <a:pt x="5228444" y="2957573"/>
+                  </a:lnTo>
+                  <a:lnTo>
+                    <a:pt x="5156821" y="2946314"/>
+                  </a:lnTo>
+                  <a:lnTo>
+                    <a:pt x="5085199" y="2934711"/>
+                  </a:lnTo>
+                  <a:lnTo>
+                    <a:pt x="5013576" y="2922753"/>
+                  </a:lnTo>
+                  <a:lnTo>
+                    <a:pt x="4941954" y="2910428"/>
+                  </a:lnTo>
+                  <a:lnTo>
+                    <a:pt x="4870331" y="2897725"/>
+                  </a:lnTo>
+                  <a:lnTo>
+                    <a:pt x="4798709" y="2884634"/>
+                  </a:lnTo>
+                  <a:lnTo>
+                    <a:pt x="4727086" y="2871141"/>
+                  </a:lnTo>
+                  <a:lnTo>
+                    <a:pt x="4655464" y="2857236"/>
+                  </a:lnTo>
+                  <a:lnTo>
+                    <a:pt x="4583841" y="2842904"/>
+                  </a:lnTo>
+                  <a:lnTo>
+                    <a:pt x="4512219" y="2828134"/>
+                  </a:lnTo>
+                  <a:lnTo>
+                    <a:pt x="4440596" y="2812911"/>
+                  </a:lnTo>
+                  <a:lnTo>
+                    <a:pt x="4368974" y="2797221"/>
+                  </a:lnTo>
+                  <a:lnTo>
+                    <a:pt x="4297351" y="2781052"/>
+                  </a:lnTo>
+                  <a:lnTo>
+                    <a:pt x="4225729" y="2764387"/>
+                  </a:lnTo>
+                  <a:lnTo>
+                    <a:pt x="4154106" y="2747211"/>
+                  </a:lnTo>
+                  <a:lnTo>
+                    <a:pt x="4082483" y="2729510"/>
+                  </a:lnTo>
+                  <a:lnTo>
+                    <a:pt x="4010861" y="2711266"/>
+                  </a:lnTo>
+                  <a:lnTo>
+                    <a:pt x="3939238" y="2692464"/>
+                  </a:lnTo>
+                  <a:lnTo>
+                    <a:pt x="3867616" y="2673085"/>
+                  </a:lnTo>
+                  <a:lnTo>
+                    <a:pt x="3795993" y="2653113"/>
+                  </a:lnTo>
+                  <a:lnTo>
+                    <a:pt x="3724371" y="2632530"/>
+                  </a:lnTo>
+                  <a:lnTo>
+                    <a:pt x="3652748" y="2611316"/>
+                  </a:lnTo>
+                  <a:lnTo>
+                    <a:pt x="3581126" y="2589452"/>
+                  </a:lnTo>
+                  <a:lnTo>
+                    <a:pt x="3509503" y="2566918"/>
+                  </a:lnTo>
+                  <a:lnTo>
+                    <a:pt x="3437881" y="2543695"/>
+                  </a:lnTo>
+                  <a:lnTo>
+                    <a:pt x="3366258" y="2519760"/>
+                  </a:lnTo>
+                  <a:lnTo>
+                    <a:pt x="3294636" y="2495438"/>
+                  </a:lnTo>
+                  <a:lnTo>
+                    <a:pt x="3223013" y="2484912"/>
+                  </a:lnTo>
+                  <a:lnTo>
+                    <a:pt x="3151391" y="2474253"/>
+                  </a:lnTo>
+                  <a:lnTo>
+                    <a:pt x="3079768" y="2463458"/>
+                  </a:lnTo>
+                  <a:lnTo>
+                    <a:pt x="3008146" y="2452527"/>
+                  </a:lnTo>
+                  <a:lnTo>
+                    <a:pt x="2936523" y="2441457"/>
+                  </a:lnTo>
+                  <a:lnTo>
+                    <a:pt x="2864901" y="2430247"/>
+                  </a:lnTo>
+                  <a:lnTo>
+                    <a:pt x="2793278" y="2418894"/>
+                  </a:lnTo>
+                  <a:lnTo>
+                    <a:pt x="2721655" y="2407397"/>
+                  </a:lnTo>
+                  <a:lnTo>
+                    <a:pt x="2650033" y="2395755"/>
+                  </a:lnTo>
+                  <a:lnTo>
+                    <a:pt x="2578410" y="2383964"/>
+                  </a:lnTo>
+                  <a:lnTo>
+                    <a:pt x="2506788" y="2372024"/>
+                  </a:lnTo>
+                  <a:lnTo>
+                    <a:pt x="2435165" y="2359933"/>
+                  </a:lnTo>
+                  <a:lnTo>
+                    <a:pt x="2363543" y="2347688"/>
+                  </a:lnTo>
+                  <a:lnTo>
+                    <a:pt x="2291920" y="2335288"/>
+                  </a:lnTo>
+                  <a:lnTo>
+                    <a:pt x="2220298" y="2322731"/>
+                  </a:lnTo>
+                  <a:lnTo>
+                    <a:pt x="2148675" y="2310014"/>
+                  </a:lnTo>
+                  <a:lnTo>
+                    <a:pt x="2077053" y="2297136"/>
+                  </a:lnTo>
+                  <a:lnTo>
+                    <a:pt x="2005430" y="2284095"/>
+                  </a:lnTo>
+                  <a:lnTo>
+                    <a:pt x="1933808" y="2270888"/>
+                  </a:lnTo>
+                  <a:lnTo>
+                    <a:pt x="1862185" y="2257514"/>
+                  </a:lnTo>
+                  <a:lnTo>
+                    <a:pt x="1790563" y="2243970"/>
+                  </a:lnTo>
+                  <a:lnTo>
+                    <a:pt x="1718940" y="2230254"/>
+                  </a:lnTo>
+                  <a:lnTo>
+                    <a:pt x="1647318" y="2216364"/>
+                  </a:lnTo>
+                  <a:lnTo>
+                    <a:pt x="1575695" y="2202298"/>
+                  </a:lnTo>
+                  <a:lnTo>
+                    <a:pt x="1504073" y="2188054"/>
+                  </a:lnTo>
+                  <a:lnTo>
+                    <a:pt x="1432450" y="2173629"/>
+                  </a:lnTo>
+                  <a:lnTo>
+                    <a:pt x="1360827" y="2159021"/>
+                  </a:lnTo>
+                  <a:lnTo>
+                    <a:pt x="1289205" y="2144227"/>
+                  </a:lnTo>
+                  <a:lnTo>
+                    <a:pt x="1217582" y="2129246"/>
+                  </a:lnTo>
+                  <a:lnTo>
+                    <a:pt x="1145960" y="2114075"/>
+                  </a:lnTo>
+                  <a:lnTo>
+                    <a:pt x="1074337" y="2098711"/>
+                  </a:lnTo>
+                  <a:lnTo>
+                    <a:pt x="1002715" y="2083153"/>
+                  </a:lnTo>
+                  <a:lnTo>
+                    <a:pt x="931092" y="2067397"/>
+                  </a:lnTo>
+                  <a:lnTo>
+                    <a:pt x="859470" y="2051441"/>
+                  </a:lnTo>
+                  <a:lnTo>
+                    <a:pt x="787847" y="2035283"/>
+                  </a:lnTo>
+                  <a:lnTo>
+                    <a:pt x="716225" y="2018919"/>
+                  </a:lnTo>
+                  <a:lnTo>
+                    <a:pt x="644602" y="2002349"/>
+                  </a:lnTo>
+                  <a:lnTo>
+                    <a:pt x="572980" y="1985568"/>
+                  </a:lnTo>
+                  <a:lnTo>
+                    <a:pt x="501357" y="1968574"/>
+                  </a:lnTo>
+                  <a:lnTo>
+                    <a:pt x="429735" y="1951364"/>
+                  </a:lnTo>
+                  <a:lnTo>
+                    <a:pt x="358112" y="1933937"/>
+                  </a:lnTo>
+                  <a:lnTo>
+                    <a:pt x="286490" y="1916288"/>
+                  </a:lnTo>
+                  <a:lnTo>
+                    <a:pt x="214867" y="1898415"/>
+                  </a:lnTo>
+                  <a:lnTo>
+                    <a:pt x="143245" y="1880315"/>
+                  </a:lnTo>
+                  <a:lnTo>
+                    <a:pt x="71622" y="1861986"/>
+                  </a:lnTo>
+                  <a:lnTo>
+                    <a:pt x="0" y="1843425"/>
                   </a:lnTo>
                   <a:close/>
                 </a:path>
@@ -3609,309 +3584,643 @@
         </p:sp>
         <p:sp>
           <p:nvSpPr>
+            <p:cNvPr id="21" name="pl21"/>
+            <p:cNvSpPr/>
+            <p:nvPr/>
+          </p:nvSpPr>
+          <p:spPr>
+            <a:xfrm>
+              <a:off x="1172049" y="2232099"/>
+              <a:ext cx="7090630" cy="2899783"/>
+            </a:xfrm>
+            <a:custGeom>
+              <a:avLst/>
+              <a:pathLst>
+                <a:path w="7090630" h="2899783">
+                  <a:moveTo>
+                    <a:pt x="0" y="0"/>
+                  </a:moveTo>
+                  <a:lnTo>
+                    <a:pt x="71622" y="98818"/>
+                  </a:lnTo>
+                  <a:lnTo>
+                    <a:pt x="143245" y="194700"/>
+                  </a:lnTo>
+                  <a:lnTo>
+                    <a:pt x="214867" y="287732"/>
+                  </a:lnTo>
+                  <a:lnTo>
+                    <a:pt x="286490" y="377999"/>
+                  </a:lnTo>
+                  <a:lnTo>
+                    <a:pt x="358112" y="465584"/>
+                  </a:lnTo>
+                  <a:lnTo>
+                    <a:pt x="429735" y="550566"/>
+                  </a:lnTo>
+                  <a:lnTo>
+                    <a:pt x="501357" y="633022"/>
+                  </a:lnTo>
+                  <a:lnTo>
+                    <a:pt x="572980" y="713028"/>
+                  </a:lnTo>
+                  <a:lnTo>
+                    <a:pt x="644602" y="790656"/>
+                  </a:lnTo>
+                  <a:lnTo>
+                    <a:pt x="716225" y="865978"/>
+                  </a:lnTo>
+                  <a:lnTo>
+                    <a:pt x="787847" y="939060"/>
+                  </a:lnTo>
+                  <a:lnTo>
+                    <a:pt x="859470" y="1009971"/>
+                  </a:lnTo>
+                  <a:lnTo>
+                    <a:pt x="931092" y="1078775"/>
+                  </a:lnTo>
+                  <a:lnTo>
+                    <a:pt x="1002715" y="1145534"/>
+                  </a:lnTo>
+                  <a:lnTo>
+                    <a:pt x="1074337" y="1210309"/>
+                  </a:lnTo>
+                  <a:lnTo>
+                    <a:pt x="1145960" y="1273158"/>
+                  </a:lnTo>
+                  <a:lnTo>
+                    <a:pt x="1217582" y="1334140"/>
+                  </a:lnTo>
+                  <a:lnTo>
+                    <a:pt x="1289205" y="1393310"/>
+                  </a:lnTo>
+                  <a:lnTo>
+                    <a:pt x="1360827" y="1450721"/>
+                  </a:lnTo>
+                  <a:lnTo>
+                    <a:pt x="1432450" y="1506427"/>
+                  </a:lnTo>
+                  <a:lnTo>
+                    <a:pt x="1504073" y="1560476"/>
+                  </a:lnTo>
+                  <a:lnTo>
+                    <a:pt x="1575695" y="1612920"/>
+                  </a:lnTo>
+                  <a:lnTo>
+                    <a:pt x="1647318" y="1663805"/>
+                  </a:lnTo>
+                  <a:lnTo>
+                    <a:pt x="1718940" y="1713177"/>
+                  </a:lnTo>
+                  <a:lnTo>
+                    <a:pt x="1790563" y="1761083"/>
+                  </a:lnTo>
+                  <a:lnTo>
+                    <a:pt x="1862185" y="1807564"/>
+                  </a:lnTo>
+                  <a:lnTo>
+                    <a:pt x="1933808" y="1852665"/>
+                  </a:lnTo>
+                  <a:lnTo>
+                    <a:pt x="2005430" y="1896425"/>
+                  </a:lnTo>
+                  <a:lnTo>
+                    <a:pt x="2077053" y="1938884"/>
+                  </a:lnTo>
+                  <a:lnTo>
+                    <a:pt x="2148675" y="1980082"/>
+                  </a:lnTo>
+                  <a:lnTo>
+                    <a:pt x="2220298" y="2020055"/>
+                  </a:lnTo>
+                  <a:lnTo>
+                    <a:pt x="2291920" y="2058840"/>
+                  </a:lnTo>
+                  <a:lnTo>
+                    <a:pt x="2363543" y="2096473"/>
+                  </a:lnTo>
+                  <a:lnTo>
+                    <a:pt x="2435165" y="2132988"/>
+                  </a:lnTo>
+                  <a:lnTo>
+                    <a:pt x="2506788" y="2168417"/>
+                  </a:lnTo>
+                  <a:lnTo>
+                    <a:pt x="2578410" y="2202793"/>
+                  </a:lnTo>
+                  <a:lnTo>
+                    <a:pt x="2650033" y="2236148"/>
+                  </a:lnTo>
+                  <a:lnTo>
+                    <a:pt x="2721655" y="2268511"/>
+                  </a:lnTo>
+                  <a:lnTo>
+                    <a:pt x="2793278" y="2299913"/>
+                  </a:lnTo>
+                  <a:lnTo>
+                    <a:pt x="2864901" y="2330382"/>
+                  </a:lnTo>
+                  <a:lnTo>
+                    <a:pt x="2936523" y="2359945"/>
+                  </a:lnTo>
+                  <a:lnTo>
+                    <a:pt x="3008146" y="2388629"/>
+                  </a:lnTo>
+                  <a:lnTo>
+                    <a:pt x="3079768" y="2416461"/>
+                  </a:lnTo>
+                  <a:lnTo>
+                    <a:pt x="3151391" y="2443466"/>
+                  </a:lnTo>
+                  <a:lnTo>
+                    <a:pt x="3223013" y="2469668"/>
+                  </a:lnTo>
+                  <a:lnTo>
+                    <a:pt x="3294636" y="2495092"/>
+                  </a:lnTo>
+                  <a:lnTo>
+                    <a:pt x="3366258" y="2505832"/>
+                  </a:lnTo>
+                  <a:lnTo>
+                    <a:pt x="3437881" y="2516095"/>
+                  </a:lnTo>
+                  <a:lnTo>
+                    <a:pt x="3509503" y="2526230"/>
+                  </a:lnTo>
+                  <a:lnTo>
+                    <a:pt x="3581126" y="2536238"/>
+                  </a:lnTo>
+                  <a:lnTo>
+                    <a:pt x="3652748" y="2546121"/>
+                  </a:lnTo>
+                  <a:lnTo>
+                    <a:pt x="3724371" y="2555880"/>
+                  </a:lnTo>
+                  <a:lnTo>
+                    <a:pt x="3795993" y="2565517"/>
+                  </a:lnTo>
+                  <a:lnTo>
+                    <a:pt x="3867616" y="2575033"/>
+                  </a:lnTo>
+                  <a:lnTo>
+                    <a:pt x="3939238" y="2584429"/>
+                  </a:lnTo>
+                  <a:lnTo>
+                    <a:pt x="4010861" y="2593709"/>
+                  </a:lnTo>
+                  <a:lnTo>
+                    <a:pt x="4082483" y="2602871"/>
+                  </a:lnTo>
+                  <a:lnTo>
+                    <a:pt x="4154106" y="2611919"/>
+                  </a:lnTo>
+                  <a:lnTo>
+                    <a:pt x="4225729" y="2620854"/>
+                  </a:lnTo>
+                  <a:lnTo>
+                    <a:pt x="4297351" y="2629677"/>
+                  </a:lnTo>
+                  <a:lnTo>
+                    <a:pt x="4368974" y="2638389"/>
+                  </a:lnTo>
+                  <a:lnTo>
+                    <a:pt x="4440596" y="2646992"/>
+                  </a:lnTo>
+                  <a:lnTo>
+                    <a:pt x="4512219" y="2655487"/>
+                  </a:lnTo>
+                  <a:lnTo>
+                    <a:pt x="4583841" y="2663876"/>
+                  </a:lnTo>
+                  <a:lnTo>
+                    <a:pt x="4655464" y="2672160"/>
+                  </a:lnTo>
+                  <a:lnTo>
+                    <a:pt x="4727086" y="2680340"/>
+                  </a:lnTo>
+                  <a:lnTo>
+                    <a:pt x="4798709" y="2688418"/>
+                  </a:lnTo>
+                  <a:lnTo>
+                    <a:pt x="4870331" y="2696394"/>
+                  </a:lnTo>
+                  <a:lnTo>
+                    <a:pt x="4941954" y="2704270"/>
+                  </a:lnTo>
+                  <a:lnTo>
+                    <a:pt x="5013576" y="2712048"/>
+                  </a:lnTo>
+                  <a:lnTo>
+                    <a:pt x="5085199" y="2719729"/>
+                  </a:lnTo>
+                  <a:lnTo>
+                    <a:pt x="5156821" y="2727313"/>
+                  </a:lnTo>
+                  <a:lnTo>
+                    <a:pt x="5228444" y="2734802"/>
+                  </a:lnTo>
+                  <a:lnTo>
+                    <a:pt x="5300066" y="2742197"/>
+                  </a:lnTo>
+                  <a:lnTo>
+                    <a:pt x="5371689" y="2749500"/>
+                  </a:lnTo>
+                  <a:lnTo>
+                    <a:pt x="5443311" y="2756711"/>
+                  </a:lnTo>
+                  <a:lnTo>
+                    <a:pt x="5514934" y="2763832"/>
+                  </a:lnTo>
+                  <a:lnTo>
+                    <a:pt x="5586557" y="2770864"/>
+                  </a:lnTo>
+                  <a:lnTo>
+                    <a:pt x="5658179" y="2777807"/>
+                  </a:lnTo>
+                  <a:lnTo>
+                    <a:pt x="5729802" y="2784664"/>
+                  </a:lnTo>
+                  <a:lnTo>
+                    <a:pt x="5801424" y="2791434"/>
+                  </a:lnTo>
+                  <a:lnTo>
+                    <a:pt x="5873047" y="2798120"/>
+                  </a:lnTo>
+                  <a:lnTo>
+                    <a:pt x="5944669" y="2804722"/>
+                  </a:lnTo>
+                  <a:lnTo>
+                    <a:pt x="6016292" y="2811242"/>
+                  </a:lnTo>
+                  <a:lnTo>
+                    <a:pt x="6087914" y="2817680"/>
+                  </a:lnTo>
+                  <a:lnTo>
+                    <a:pt x="6159537" y="2824037"/>
+                  </a:lnTo>
+                  <a:lnTo>
+                    <a:pt x="6231159" y="2830314"/>
+                  </a:lnTo>
+                  <a:lnTo>
+                    <a:pt x="6302782" y="2836513"/>
+                  </a:lnTo>
+                  <a:lnTo>
+                    <a:pt x="6374404" y="2842634"/>
+                  </a:lnTo>
+                  <a:lnTo>
+                    <a:pt x="6446027" y="2848679"/>
+                  </a:lnTo>
+                  <a:lnTo>
+                    <a:pt x="6517649" y="2854647"/>
+                  </a:lnTo>
+                  <a:lnTo>
+                    <a:pt x="6589272" y="2860541"/>
+                  </a:lnTo>
+                  <a:lnTo>
+                    <a:pt x="6660894" y="2866362"/>
+                  </a:lnTo>
+                  <a:lnTo>
+                    <a:pt x="6732517" y="2872109"/>
+                  </a:lnTo>
+                  <a:lnTo>
+                    <a:pt x="6804139" y="2877784"/>
+                  </a:lnTo>
+                  <a:lnTo>
+                    <a:pt x="6875762" y="2883388"/>
+                  </a:lnTo>
+                  <a:lnTo>
+                    <a:pt x="6947385" y="2888922"/>
+                  </a:lnTo>
+                  <a:lnTo>
+                    <a:pt x="7019007" y="2894387"/>
+                  </a:lnTo>
+                  <a:lnTo>
+                    <a:pt x="7090630" y="2899783"/>
+                  </a:lnTo>
+                </a:path>
+              </a:pathLst>
+            </a:custGeom>
+          </p:spPr>
+          <p:txBody>
+            <a:bodyPr/>
+            <a:lstStyle/>
+            <a:p/>
+          </p:txBody>
+        </p:sp>
+        <p:sp>
+          <p:nvSpPr>
             <p:cNvPr id="22" name="pl22"/>
             <p:cNvSpPr/>
             <p:nvPr/>
           </p:nvSpPr>
           <p:spPr>
             <a:xfrm>
-              <a:off x="817517" y="2547109"/>
-              <a:ext cx="7392041" cy="2584774"/>
+              <a:off x="1172049" y="4075524"/>
+              <a:ext cx="7090630" cy="1313964"/>
             </a:xfrm>
             <a:custGeom>
               <a:avLst/>
               <a:pathLst>
-                <a:path w="7392041" h="2584774">
+                <a:path w="7090630" h="1313964">
                   <a:moveTo>
+                    <a:pt x="7090630" y="1313964"/>
+                  </a:moveTo>
+                  <a:lnTo>
+                    <a:pt x="7019007" y="1308826"/>
+                  </a:lnTo>
+                  <a:lnTo>
+                    <a:pt x="6947385" y="1303530"/>
+                  </a:lnTo>
+                  <a:lnTo>
+                    <a:pt x="6875762" y="1298072"/>
+                  </a:lnTo>
+                  <a:lnTo>
+                    <a:pt x="6804139" y="1292447"/>
+                  </a:lnTo>
+                  <a:lnTo>
+                    <a:pt x="6732517" y="1286650"/>
+                  </a:lnTo>
+                  <a:lnTo>
+                    <a:pt x="6660894" y="1280675"/>
+                  </a:lnTo>
+                  <a:lnTo>
+                    <a:pt x="6589272" y="1274517"/>
+                  </a:lnTo>
+                  <a:lnTo>
+                    <a:pt x="6517649" y="1268170"/>
+                  </a:lnTo>
+                  <a:lnTo>
+                    <a:pt x="6446027" y="1261630"/>
+                  </a:lnTo>
+                  <a:lnTo>
+                    <a:pt x="6374404" y="1254888"/>
+                  </a:lnTo>
+                  <a:lnTo>
+                    <a:pt x="6302782" y="1247941"/>
+                  </a:lnTo>
+                  <a:lnTo>
+                    <a:pt x="6231159" y="1240780"/>
+                  </a:lnTo>
+                  <a:lnTo>
+                    <a:pt x="6159537" y="1233400"/>
+                  </a:lnTo>
+                  <a:lnTo>
+                    <a:pt x="6087914" y="1225794"/>
+                  </a:lnTo>
+                  <a:lnTo>
+                    <a:pt x="6016292" y="1217956"/>
+                  </a:lnTo>
+                  <a:lnTo>
+                    <a:pt x="5944669" y="1209877"/>
+                  </a:lnTo>
+                  <a:lnTo>
+                    <a:pt x="5873047" y="1201550"/>
+                  </a:lnTo>
+                  <a:lnTo>
+                    <a:pt x="5801424" y="1192969"/>
+                  </a:lnTo>
+                  <a:lnTo>
+                    <a:pt x="5729802" y="1184125"/>
+                  </a:lnTo>
+                  <a:lnTo>
+                    <a:pt x="5658179" y="1175010"/>
+                  </a:lnTo>
+                  <a:lnTo>
+                    <a:pt x="5586557" y="1165615"/>
+                  </a:lnTo>
+                  <a:lnTo>
+                    <a:pt x="5514934" y="1155933"/>
+                  </a:lnTo>
+                  <a:lnTo>
+                    <a:pt x="5443311" y="1145955"/>
+                  </a:lnTo>
+                  <a:lnTo>
+                    <a:pt x="5371689" y="1135671"/>
+                  </a:lnTo>
+                  <a:lnTo>
+                    <a:pt x="5300066" y="1125072"/>
+                  </a:lnTo>
+                  <a:lnTo>
+                    <a:pt x="5228444" y="1114148"/>
+                  </a:lnTo>
+                  <a:lnTo>
+                    <a:pt x="5156821" y="1102889"/>
+                  </a:lnTo>
+                  <a:lnTo>
+                    <a:pt x="5085199" y="1091286"/>
+                  </a:lnTo>
+                  <a:lnTo>
+                    <a:pt x="5013576" y="1079327"/>
+                  </a:lnTo>
+                  <a:lnTo>
+                    <a:pt x="4941954" y="1067003"/>
+                  </a:lnTo>
+                  <a:lnTo>
+                    <a:pt x="4870331" y="1054300"/>
+                  </a:lnTo>
+                  <a:lnTo>
+                    <a:pt x="4798709" y="1041209"/>
+                  </a:lnTo>
+                  <a:lnTo>
+                    <a:pt x="4727086" y="1027716"/>
+                  </a:lnTo>
+                  <a:lnTo>
+                    <a:pt x="4655464" y="1013811"/>
+                  </a:lnTo>
+                  <a:lnTo>
+                    <a:pt x="4583841" y="999479"/>
+                  </a:lnTo>
+                  <a:lnTo>
+                    <a:pt x="4512219" y="984708"/>
+                  </a:lnTo>
+                  <a:lnTo>
+                    <a:pt x="4440596" y="969485"/>
+                  </a:lnTo>
+                  <a:lnTo>
+                    <a:pt x="4368974" y="953796"/>
+                  </a:lnTo>
+                  <a:lnTo>
+                    <a:pt x="4297351" y="937626"/>
+                  </a:lnTo>
+                  <a:lnTo>
+                    <a:pt x="4225729" y="920961"/>
+                  </a:lnTo>
+                  <a:lnTo>
+                    <a:pt x="4154106" y="903786"/>
+                  </a:lnTo>
+                  <a:lnTo>
+                    <a:pt x="4082483" y="886084"/>
+                  </a:lnTo>
+                  <a:lnTo>
+                    <a:pt x="4010861" y="867841"/>
+                  </a:lnTo>
+                  <a:lnTo>
+                    <a:pt x="3939238" y="849038"/>
+                  </a:lnTo>
+                  <a:lnTo>
+                    <a:pt x="3867616" y="829660"/>
+                  </a:lnTo>
+                  <a:lnTo>
+                    <a:pt x="3795993" y="809688"/>
+                  </a:lnTo>
+                  <a:lnTo>
+                    <a:pt x="3724371" y="789104"/>
+                  </a:lnTo>
+                  <a:lnTo>
+                    <a:pt x="3652748" y="767890"/>
+                  </a:lnTo>
+                  <a:lnTo>
+                    <a:pt x="3581126" y="746027"/>
+                  </a:lnTo>
+                  <a:lnTo>
+                    <a:pt x="3509503" y="723493"/>
+                  </a:lnTo>
+                  <a:lnTo>
+                    <a:pt x="3437881" y="700269"/>
+                  </a:lnTo>
+                  <a:lnTo>
+                    <a:pt x="3366258" y="676335"/>
+                  </a:lnTo>
+                  <a:lnTo>
+                    <a:pt x="3294636" y="652013"/>
+                  </a:lnTo>
+                  <a:lnTo>
+                    <a:pt x="3223013" y="641487"/>
+                  </a:lnTo>
+                  <a:lnTo>
+                    <a:pt x="3151391" y="630828"/>
+                  </a:lnTo>
+                  <a:lnTo>
+                    <a:pt x="3079768" y="620033"/>
+                  </a:lnTo>
+                  <a:lnTo>
+                    <a:pt x="3008146" y="609102"/>
+                  </a:lnTo>
+                  <a:lnTo>
+                    <a:pt x="2936523" y="598032"/>
+                  </a:lnTo>
+                  <a:lnTo>
+                    <a:pt x="2864901" y="586821"/>
+                  </a:lnTo>
+                  <a:lnTo>
+                    <a:pt x="2793278" y="575469"/>
+                  </a:lnTo>
+                  <a:lnTo>
+                    <a:pt x="2721655" y="563972"/>
+                  </a:lnTo>
+                  <a:lnTo>
+                    <a:pt x="2650033" y="552329"/>
+                  </a:lnTo>
+                  <a:lnTo>
+                    <a:pt x="2578410" y="540539"/>
+                  </a:lnTo>
+                  <a:lnTo>
+                    <a:pt x="2506788" y="528599"/>
+                  </a:lnTo>
+                  <a:lnTo>
+                    <a:pt x="2435165" y="516508"/>
+                  </a:lnTo>
+                  <a:lnTo>
+                    <a:pt x="2363543" y="504263"/>
+                  </a:lnTo>
+                  <a:lnTo>
+                    <a:pt x="2291920" y="491863"/>
+                  </a:lnTo>
+                  <a:lnTo>
+                    <a:pt x="2220298" y="479306"/>
+                  </a:lnTo>
+                  <a:lnTo>
+                    <a:pt x="2148675" y="466589"/>
+                  </a:lnTo>
+                  <a:lnTo>
+                    <a:pt x="2077053" y="453711"/>
+                  </a:lnTo>
+                  <a:lnTo>
+                    <a:pt x="2005430" y="440670"/>
+                  </a:lnTo>
+                  <a:lnTo>
+                    <a:pt x="1933808" y="427463"/>
+                  </a:lnTo>
+                  <a:lnTo>
+                    <a:pt x="1862185" y="414089"/>
+                  </a:lnTo>
+                  <a:lnTo>
+                    <a:pt x="1790563" y="400545"/>
+                  </a:lnTo>
+                  <a:lnTo>
+                    <a:pt x="1718940" y="386829"/>
+                  </a:lnTo>
+                  <a:lnTo>
+                    <a:pt x="1647318" y="372939"/>
+                  </a:lnTo>
+                  <a:lnTo>
+                    <a:pt x="1575695" y="358873"/>
+                  </a:lnTo>
+                  <a:lnTo>
+                    <a:pt x="1504073" y="344629"/>
+                  </a:lnTo>
+                  <a:lnTo>
+                    <a:pt x="1432450" y="330204"/>
+                  </a:lnTo>
+                  <a:lnTo>
+                    <a:pt x="1360827" y="315595"/>
+                  </a:lnTo>
+                  <a:lnTo>
+                    <a:pt x="1289205" y="300802"/>
+                  </a:lnTo>
+                  <a:lnTo>
+                    <a:pt x="1217582" y="285821"/>
+                  </a:lnTo>
+                  <a:lnTo>
+                    <a:pt x="1145960" y="270650"/>
+                  </a:lnTo>
+                  <a:lnTo>
+                    <a:pt x="1074337" y="255286"/>
+                  </a:lnTo>
+                  <a:lnTo>
+                    <a:pt x="1002715" y="239727"/>
+                  </a:lnTo>
+                  <a:lnTo>
+                    <a:pt x="931092" y="223972"/>
+                  </a:lnTo>
+                  <a:lnTo>
+                    <a:pt x="859470" y="208016"/>
+                  </a:lnTo>
+                  <a:lnTo>
+                    <a:pt x="787847" y="191858"/>
+                  </a:lnTo>
+                  <a:lnTo>
+                    <a:pt x="716225" y="175494"/>
+                  </a:lnTo>
+                  <a:lnTo>
+                    <a:pt x="644602" y="158924"/>
+                  </a:lnTo>
+                  <a:lnTo>
+                    <a:pt x="572980" y="142143"/>
+                  </a:lnTo>
+                  <a:lnTo>
+                    <a:pt x="501357" y="125149"/>
+                  </a:lnTo>
+                  <a:lnTo>
+                    <a:pt x="429735" y="107939"/>
+                  </a:lnTo>
+                  <a:lnTo>
+                    <a:pt x="358112" y="90511"/>
+                  </a:lnTo>
+                  <a:lnTo>
+                    <a:pt x="286490" y="72863"/>
+                  </a:lnTo>
+                  <a:lnTo>
+                    <a:pt x="214867" y="54990"/>
+                  </a:lnTo>
+                  <a:lnTo>
+                    <a:pt x="143245" y="36890"/>
+                  </a:lnTo>
+                  <a:lnTo>
+                    <a:pt x="71622" y="18561"/>
+                  </a:lnTo>
+                  <a:lnTo>
                     <a:pt x="0" y="0"/>
-                  </a:moveTo>
-                  <a:lnTo>
-                    <a:pt x="53901" y="62990"/>
-                  </a:lnTo>
-                  <a:lnTo>
-                    <a:pt x="131145" y="150574"/>
-                  </a:lnTo>
-                  <a:lnTo>
-                    <a:pt x="208389" y="235556"/>
-                  </a:lnTo>
-                  <a:lnTo>
-                    <a:pt x="285632" y="318013"/>
-                  </a:lnTo>
-                  <a:lnTo>
-                    <a:pt x="362876" y="398019"/>
-                  </a:lnTo>
-                  <a:lnTo>
-                    <a:pt x="440119" y="475647"/>
-                  </a:lnTo>
-                  <a:lnTo>
-                    <a:pt x="517363" y="550968"/>
-                  </a:lnTo>
-                  <a:lnTo>
-                    <a:pt x="594606" y="624051"/>
-                  </a:lnTo>
-                  <a:lnTo>
-                    <a:pt x="671850" y="694962"/>
-                  </a:lnTo>
-                  <a:lnTo>
-                    <a:pt x="749094" y="763765"/>
-                  </a:lnTo>
-                  <a:lnTo>
-                    <a:pt x="826337" y="830524"/>
-                  </a:lnTo>
-                  <a:lnTo>
-                    <a:pt x="903581" y="895299"/>
-                  </a:lnTo>
-                  <a:lnTo>
-                    <a:pt x="980824" y="958149"/>
-                  </a:lnTo>
-                  <a:lnTo>
-                    <a:pt x="1058068" y="1019131"/>
-                  </a:lnTo>
-                  <a:lnTo>
-                    <a:pt x="1135311" y="1078301"/>
-                  </a:lnTo>
-                  <a:lnTo>
-                    <a:pt x="1212555" y="1135712"/>
-                  </a:lnTo>
-                  <a:lnTo>
-                    <a:pt x="1289799" y="1191417"/>
-                  </a:lnTo>
-                  <a:lnTo>
-                    <a:pt x="1367042" y="1245467"/>
-                  </a:lnTo>
-                  <a:lnTo>
-                    <a:pt x="1444286" y="1297910"/>
-                  </a:lnTo>
-                  <a:lnTo>
-                    <a:pt x="1521529" y="1348795"/>
-                  </a:lnTo>
-                  <a:lnTo>
-                    <a:pt x="1598773" y="1398168"/>
-                  </a:lnTo>
-                  <a:lnTo>
-                    <a:pt x="1676016" y="1446073"/>
-                  </a:lnTo>
-                  <a:lnTo>
-                    <a:pt x="1753260" y="1492555"/>
-                  </a:lnTo>
-                  <a:lnTo>
-                    <a:pt x="1830504" y="1537655"/>
-                  </a:lnTo>
-                  <a:lnTo>
-                    <a:pt x="1907747" y="1581415"/>
-                  </a:lnTo>
-                  <a:lnTo>
-                    <a:pt x="1984991" y="1623875"/>
-                  </a:lnTo>
-                  <a:lnTo>
-                    <a:pt x="2062234" y="1665072"/>
-                  </a:lnTo>
-                  <a:lnTo>
-                    <a:pt x="2139478" y="1705046"/>
-                  </a:lnTo>
-                  <a:lnTo>
-                    <a:pt x="2216721" y="1743831"/>
-                  </a:lnTo>
-                  <a:lnTo>
-                    <a:pt x="2293965" y="1781464"/>
-                  </a:lnTo>
-                  <a:lnTo>
-                    <a:pt x="2371209" y="1817978"/>
-                  </a:lnTo>
-                  <a:lnTo>
-                    <a:pt x="2448452" y="1853407"/>
-                  </a:lnTo>
-                  <a:lnTo>
-                    <a:pt x="2525696" y="1887784"/>
-                  </a:lnTo>
-                  <a:lnTo>
-                    <a:pt x="2602939" y="1921139"/>
-                  </a:lnTo>
-                  <a:lnTo>
-                    <a:pt x="2680183" y="1953502"/>
-                  </a:lnTo>
-                  <a:lnTo>
-                    <a:pt x="2757426" y="1984904"/>
-                  </a:lnTo>
-                  <a:lnTo>
-                    <a:pt x="2834670" y="2015372"/>
-                  </a:lnTo>
-                  <a:lnTo>
-                    <a:pt x="2911914" y="2044935"/>
-                  </a:lnTo>
-                  <a:lnTo>
-                    <a:pt x="2989157" y="2073620"/>
-                  </a:lnTo>
-                  <a:lnTo>
-                    <a:pt x="3066401" y="2101452"/>
-                  </a:lnTo>
-                  <a:lnTo>
-                    <a:pt x="3143644" y="2128456"/>
-                  </a:lnTo>
-                  <a:lnTo>
-                    <a:pt x="3220888" y="2154659"/>
-                  </a:lnTo>
-                  <a:lnTo>
-                    <a:pt x="3298131" y="2180082"/>
-                  </a:lnTo>
-                  <a:lnTo>
-                    <a:pt x="3375375" y="2190822"/>
-                  </a:lnTo>
-                  <a:lnTo>
-                    <a:pt x="3452619" y="2201086"/>
-                  </a:lnTo>
-                  <a:lnTo>
-                    <a:pt x="3529862" y="2211221"/>
-                  </a:lnTo>
-                  <a:lnTo>
-                    <a:pt x="3607106" y="2221229"/>
-                  </a:lnTo>
-                  <a:lnTo>
-                    <a:pt x="3684349" y="2231112"/>
-                  </a:lnTo>
-                  <a:lnTo>
-                    <a:pt x="3761593" y="2240871"/>
-                  </a:lnTo>
-                  <a:lnTo>
-                    <a:pt x="3838836" y="2250507"/>
-                  </a:lnTo>
-                  <a:lnTo>
-                    <a:pt x="3916080" y="2260023"/>
-                  </a:lnTo>
-                  <a:lnTo>
-                    <a:pt x="3993324" y="2269420"/>
-                  </a:lnTo>
-                  <a:lnTo>
-                    <a:pt x="4070567" y="2278699"/>
-                  </a:lnTo>
-                  <a:lnTo>
-                    <a:pt x="4147811" y="2287862"/>
-                  </a:lnTo>
-                  <a:lnTo>
-                    <a:pt x="4225054" y="2296910"/>
-                  </a:lnTo>
-                  <a:lnTo>
-                    <a:pt x="4302298" y="2305845"/>
-                  </a:lnTo>
-                  <a:lnTo>
-                    <a:pt x="4379541" y="2314667"/>
-                  </a:lnTo>
-                  <a:lnTo>
-                    <a:pt x="4456785" y="2323380"/>
-                  </a:lnTo>
-                  <a:lnTo>
-                    <a:pt x="4534029" y="2331983"/>
-                  </a:lnTo>
-                  <a:lnTo>
-                    <a:pt x="4611272" y="2340478"/>
-                  </a:lnTo>
-                  <a:lnTo>
-                    <a:pt x="4688516" y="2348867"/>
-                  </a:lnTo>
-                  <a:lnTo>
-                    <a:pt x="4765759" y="2357151"/>
-                  </a:lnTo>
-                  <a:lnTo>
-                    <a:pt x="4843003" y="2365331"/>
-                  </a:lnTo>
-                  <a:lnTo>
-                    <a:pt x="4920246" y="2373408"/>
-                  </a:lnTo>
-                  <a:lnTo>
-                    <a:pt x="4997490" y="2381385"/>
-                  </a:lnTo>
-                  <a:lnTo>
-                    <a:pt x="5074734" y="2389261"/>
-                  </a:lnTo>
-                  <a:lnTo>
-                    <a:pt x="5151977" y="2397039"/>
-                  </a:lnTo>
-                  <a:lnTo>
-                    <a:pt x="5229221" y="2404719"/>
-                  </a:lnTo>
-                  <a:lnTo>
-                    <a:pt x="5306464" y="2412303"/>
-                  </a:lnTo>
-                  <a:lnTo>
-                    <a:pt x="5383708" y="2419792"/>
-                  </a:lnTo>
-                  <a:lnTo>
-                    <a:pt x="5460951" y="2427188"/>
-                  </a:lnTo>
-                  <a:lnTo>
-                    <a:pt x="5538195" y="2434490"/>
-                  </a:lnTo>
-                  <a:lnTo>
-                    <a:pt x="5615439" y="2441702"/>
-                  </a:lnTo>
-                  <a:lnTo>
-                    <a:pt x="5692682" y="2448822"/>
-                  </a:lnTo>
-                  <a:lnTo>
-                    <a:pt x="5769926" y="2455854"/>
-                  </a:lnTo>
-                  <a:lnTo>
-                    <a:pt x="5847169" y="2462798"/>
-                  </a:lnTo>
-                  <a:lnTo>
-                    <a:pt x="5924413" y="2469654"/>
-                  </a:lnTo>
-                  <a:lnTo>
-                    <a:pt x="6001656" y="2476425"/>
-                  </a:lnTo>
-                  <a:lnTo>
-                    <a:pt x="6078900" y="2483111"/>
-                  </a:lnTo>
-                  <a:lnTo>
-                    <a:pt x="6156144" y="2489713"/>
-                  </a:lnTo>
-                  <a:lnTo>
-                    <a:pt x="6233387" y="2496232"/>
-                  </a:lnTo>
-                  <a:lnTo>
-                    <a:pt x="6310631" y="2502670"/>
-                  </a:lnTo>
-                  <a:lnTo>
-                    <a:pt x="6387874" y="2509027"/>
-                  </a:lnTo>
-                  <a:lnTo>
-                    <a:pt x="6465118" y="2515305"/>
-                  </a:lnTo>
-                  <a:lnTo>
-                    <a:pt x="6542361" y="2521504"/>
-                  </a:lnTo>
-                  <a:lnTo>
-                    <a:pt x="6619605" y="2527625"/>
-                  </a:lnTo>
-                  <a:lnTo>
-                    <a:pt x="6696849" y="2533669"/>
-                  </a:lnTo>
-                  <a:lnTo>
-                    <a:pt x="6774092" y="2539638"/>
-                  </a:lnTo>
-                  <a:lnTo>
-                    <a:pt x="6851336" y="2545532"/>
-                  </a:lnTo>
-                  <a:lnTo>
-                    <a:pt x="6928579" y="2551352"/>
-                  </a:lnTo>
-                  <a:lnTo>
-                    <a:pt x="7005823" y="2557099"/>
-                  </a:lnTo>
-                  <a:lnTo>
-                    <a:pt x="7083066" y="2562775"/>
-                  </a:lnTo>
-                  <a:lnTo>
-                    <a:pt x="7160310" y="2568379"/>
-                  </a:lnTo>
-                  <a:lnTo>
-                    <a:pt x="7237554" y="2573913"/>
-                  </a:lnTo>
-                  <a:lnTo>
-                    <a:pt x="7314797" y="2579377"/>
-                  </a:lnTo>
-                  <a:lnTo>
-                    <a:pt x="7392041" y="2584774"/>
                   </a:lnTo>
                 </a:path>
               </a:pathLst>
@@ -3931,619 +4240,312 @@
           </p:nvSpPr>
           <p:spPr>
             <a:xfrm>
-              <a:off x="817517" y="4135915"/>
-              <a:ext cx="7392041" cy="1253573"/>
+              <a:off x="1172049" y="3337574"/>
+              <a:ext cx="7090630" cy="1952542"/>
             </a:xfrm>
             <a:custGeom>
               <a:avLst/>
               <a:pathLst>
-                <a:path w="7392041" h="1253573">
-                  <a:moveTo>
-                    <a:pt x="7392041" y="1253573"/>
-                  </a:moveTo>
-                  <a:lnTo>
-                    <a:pt x="7314797" y="1248435"/>
-                  </a:lnTo>
-                  <a:lnTo>
-                    <a:pt x="7237554" y="1243139"/>
-                  </a:lnTo>
-                  <a:lnTo>
-                    <a:pt x="7160310" y="1237681"/>
-                  </a:lnTo>
-                  <a:lnTo>
-                    <a:pt x="7083066" y="1232056"/>
-                  </a:lnTo>
-                  <a:lnTo>
-                    <a:pt x="7005823" y="1226259"/>
-                  </a:lnTo>
-                  <a:lnTo>
-                    <a:pt x="6928579" y="1220284"/>
-                  </a:lnTo>
-                  <a:lnTo>
-                    <a:pt x="6851336" y="1214126"/>
-                  </a:lnTo>
-                  <a:lnTo>
-                    <a:pt x="6774092" y="1207779"/>
-                  </a:lnTo>
-                  <a:lnTo>
-                    <a:pt x="6696849" y="1201239"/>
-                  </a:lnTo>
-                  <a:lnTo>
-                    <a:pt x="6619605" y="1194497"/>
-                  </a:lnTo>
-                  <a:lnTo>
-                    <a:pt x="6542361" y="1187550"/>
-                  </a:lnTo>
-                  <a:lnTo>
-                    <a:pt x="6465118" y="1180389"/>
-                  </a:lnTo>
-                  <a:lnTo>
-                    <a:pt x="6387874" y="1173009"/>
-                  </a:lnTo>
-                  <a:lnTo>
-                    <a:pt x="6310631" y="1165403"/>
-                  </a:lnTo>
-                  <a:lnTo>
-                    <a:pt x="6233387" y="1157565"/>
-                  </a:lnTo>
-                  <a:lnTo>
-                    <a:pt x="6156144" y="1149486"/>
-                  </a:lnTo>
-                  <a:lnTo>
-                    <a:pt x="6078900" y="1141159"/>
-                  </a:lnTo>
-                  <a:lnTo>
-                    <a:pt x="6001656" y="1132578"/>
-                  </a:lnTo>
-                  <a:lnTo>
-                    <a:pt x="5924413" y="1123734"/>
-                  </a:lnTo>
-                  <a:lnTo>
-                    <a:pt x="5847169" y="1114619"/>
-                  </a:lnTo>
-                  <a:lnTo>
-                    <a:pt x="5769926" y="1105224"/>
-                  </a:lnTo>
-                  <a:lnTo>
-                    <a:pt x="5692682" y="1095542"/>
-                  </a:lnTo>
-                  <a:lnTo>
-                    <a:pt x="5615439" y="1085564"/>
-                  </a:lnTo>
-                  <a:lnTo>
-                    <a:pt x="5538195" y="1075280"/>
-                  </a:lnTo>
-                  <a:lnTo>
-                    <a:pt x="5460951" y="1064680"/>
-                  </a:lnTo>
-                  <a:lnTo>
-                    <a:pt x="5383708" y="1053757"/>
-                  </a:lnTo>
-                  <a:lnTo>
-                    <a:pt x="5306464" y="1042498"/>
-                  </a:lnTo>
-                  <a:lnTo>
-                    <a:pt x="5229221" y="1030895"/>
-                  </a:lnTo>
-                  <a:lnTo>
-                    <a:pt x="5151977" y="1018936"/>
-                  </a:lnTo>
-                  <a:lnTo>
-                    <a:pt x="5074734" y="1006611"/>
-                  </a:lnTo>
-                  <a:lnTo>
-                    <a:pt x="4997490" y="993909"/>
-                  </a:lnTo>
-                  <a:lnTo>
-                    <a:pt x="4920246" y="980818"/>
-                  </a:lnTo>
-                  <a:lnTo>
-                    <a:pt x="4843003" y="967325"/>
-                  </a:lnTo>
-                  <a:lnTo>
-                    <a:pt x="4765759" y="953419"/>
-                  </a:lnTo>
-                  <a:lnTo>
-                    <a:pt x="4688516" y="939088"/>
-                  </a:lnTo>
-                  <a:lnTo>
-                    <a:pt x="4611272" y="924317"/>
-                  </a:lnTo>
-                  <a:lnTo>
-                    <a:pt x="4534029" y="909094"/>
-                  </a:lnTo>
-                  <a:lnTo>
-                    <a:pt x="4456785" y="893405"/>
-                  </a:lnTo>
-                  <a:lnTo>
-                    <a:pt x="4379541" y="877235"/>
-                  </a:lnTo>
-                  <a:lnTo>
-                    <a:pt x="4302298" y="860570"/>
-                  </a:lnTo>
-                  <a:lnTo>
-                    <a:pt x="4225054" y="843395"/>
-                  </a:lnTo>
-                  <a:lnTo>
-                    <a:pt x="4147811" y="825693"/>
-                  </a:lnTo>
-                  <a:lnTo>
-                    <a:pt x="4070567" y="807450"/>
-                  </a:lnTo>
-                  <a:lnTo>
-                    <a:pt x="3993324" y="788647"/>
-                  </a:lnTo>
-                  <a:lnTo>
-                    <a:pt x="3916080" y="769269"/>
-                  </a:lnTo>
-                  <a:lnTo>
-                    <a:pt x="3838836" y="749297"/>
-                  </a:lnTo>
-                  <a:lnTo>
-                    <a:pt x="3761593" y="728713"/>
-                  </a:lnTo>
-                  <a:lnTo>
-                    <a:pt x="3684349" y="707499"/>
-                  </a:lnTo>
-                  <a:lnTo>
-                    <a:pt x="3607106" y="685636"/>
-                  </a:lnTo>
-                  <a:lnTo>
-                    <a:pt x="3529862" y="663102"/>
-                  </a:lnTo>
-                  <a:lnTo>
-                    <a:pt x="3452619" y="639878"/>
-                  </a:lnTo>
-                  <a:lnTo>
-                    <a:pt x="3375375" y="615943"/>
-                  </a:lnTo>
-                  <a:lnTo>
-                    <a:pt x="3298131" y="591622"/>
-                  </a:lnTo>
-                  <a:lnTo>
-                    <a:pt x="3220888" y="581096"/>
-                  </a:lnTo>
-                  <a:lnTo>
-                    <a:pt x="3143644" y="570437"/>
-                  </a:lnTo>
-                  <a:lnTo>
-                    <a:pt x="3066401" y="559642"/>
-                  </a:lnTo>
-                  <a:lnTo>
-                    <a:pt x="2989157" y="548711"/>
-                  </a:lnTo>
-                  <a:lnTo>
-                    <a:pt x="2911914" y="537641"/>
-                  </a:lnTo>
-                  <a:lnTo>
-                    <a:pt x="2834670" y="526430"/>
-                  </a:lnTo>
-                  <a:lnTo>
-                    <a:pt x="2757426" y="515078"/>
-                  </a:lnTo>
-                  <a:lnTo>
-                    <a:pt x="2680183" y="503581"/>
-                  </a:lnTo>
-                  <a:lnTo>
-                    <a:pt x="2602939" y="491938"/>
-                  </a:lnTo>
-                  <a:lnTo>
-                    <a:pt x="2525696" y="480148"/>
-                  </a:lnTo>
-                  <a:lnTo>
-                    <a:pt x="2448452" y="468208"/>
-                  </a:lnTo>
-                  <a:lnTo>
-                    <a:pt x="2371209" y="456117"/>
-                  </a:lnTo>
-                  <a:lnTo>
-                    <a:pt x="2293965" y="443872"/>
-                  </a:lnTo>
-                  <a:lnTo>
-                    <a:pt x="2216721" y="431472"/>
-                  </a:lnTo>
-                  <a:lnTo>
-                    <a:pt x="2139478" y="418915"/>
-                  </a:lnTo>
-                  <a:lnTo>
-                    <a:pt x="2062234" y="406198"/>
-                  </a:lnTo>
-                  <a:lnTo>
-                    <a:pt x="1984991" y="393320"/>
-                  </a:lnTo>
-                  <a:lnTo>
-                    <a:pt x="1907747" y="380279"/>
-                  </a:lnTo>
-                  <a:lnTo>
-                    <a:pt x="1830504" y="367072"/>
-                  </a:lnTo>
-                  <a:lnTo>
-                    <a:pt x="1753260" y="353698"/>
-                  </a:lnTo>
-                  <a:lnTo>
-                    <a:pt x="1676016" y="340154"/>
-                  </a:lnTo>
-                  <a:lnTo>
-                    <a:pt x="1598773" y="326438"/>
-                  </a:lnTo>
-                  <a:lnTo>
-                    <a:pt x="1521529" y="312548"/>
-                  </a:lnTo>
-                  <a:lnTo>
-                    <a:pt x="1444286" y="298482"/>
-                  </a:lnTo>
-                  <a:lnTo>
-                    <a:pt x="1367042" y="284238"/>
-                  </a:lnTo>
-                  <a:lnTo>
-                    <a:pt x="1289799" y="269813"/>
-                  </a:lnTo>
-                  <a:lnTo>
-                    <a:pt x="1212555" y="255204"/>
-                  </a:lnTo>
-                  <a:lnTo>
-                    <a:pt x="1135311" y="240411"/>
-                  </a:lnTo>
-                  <a:lnTo>
-                    <a:pt x="1058068" y="225430"/>
-                  </a:lnTo>
-                  <a:lnTo>
-                    <a:pt x="980824" y="210259"/>
-                  </a:lnTo>
-                  <a:lnTo>
-                    <a:pt x="903581" y="194895"/>
-                  </a:lnTo>
-                  <a:lnTo>
-                    <a:pt x="826337" y="179336"/>
-                  </a:lnTo>
-                  <a:lnTo>
-                    <a:pt x="749094" y="163580"/>
-                  </a:lnTo>
-                  <a:lnTo>
-                    <a:pt x="671850" y="147625"/>
-                  </a:lnTo>
-                  <a:lnTo>
-                    <a:pt x="594606" y="131466"/>
-                  </a:lnTo>
-                  <a:lnTo>
-                    <a:pt x="517363" y="115103"/>
-                  </a:lnTo>
-                  <a:lnTo>
-                    <a:pt x="440119" y="98532"/>
-                  </a:lnTo>
-                  <a:lnTo>
-                    <a:pt x="362876" y="81751"/>
-                  </a:lnTo>
-                  <a:lnTo>
-                    <a:pt x="285632" y="64758"/>
-                  </a:lnTo>
-                  <a:lnTo>
-                    <a:pt x="208389" y="47548"/>
-                  </a:lnTo>
-                  <a:lnTo>
-                    <a:pt x="131145" y="30120"/>
-                  </a:lnTo>
-                  <a:lnTo>
-                    <a:pt x="53901" y="12471"/>
-                  </a:lnTo>
-                  <a:lnTo>
-                    <a:pt x="0" y="0"/>
-                  </a:lnTo>
-                </a:path>
-              </a:pathLst>
-            </a:custGeom>
-          </p:spPr>
-          <p:txBody>
-            <a:bodyPr/>
-            <a:lstStyle/>
-            <a:p/>
-          </p:txBody>
-        </p:sp>
-        <p:sp>
-          <p:nvSpPr>
-            <p:cNvPr id="24" name="pl24"/>
-            <p:cNvSpPr/>
-            <p:nvPr/>
-          </p:nvSpPr>
-          <p:spPr>
-            <a:xfrm>
-              <a:off x="817517" y="3488833"/>
-              <a:ext cx="7392041" cy="1801283"/>
-            </a:xfrm>
-            <a:custGeom>
-              <a:avLst/>
-              <a:pathLst>
-                <a:path w="7392041" h="1801283">
+                <a:path w="7090630" h="1952542">
                   <a:moveTo>
                     <a:pt x="0" y="0"/>
                   </a:moveTo>
                   <a:lnTo>
-                    <a:pt x="53901" y="30739"/>
-                  </a:lnTo>
-                  <a:lnTo>
-                    <a:pt x="131145" y="73857"/>
-                  </a:lnTo>
-                  <a:lnTo>
-                    <a:pt x="208389" y="116063"/>
-                  </a:lnTo>
-                  <a:lnTo>
-                    <a:pt x="285632" y="157376"/>
-                  </a:lnTo>
-                  <a:lnTo>
-                    <a:pt x="362876" y="197814"/>
-                  </a:lnTo>
-                  <a:lnTo>
-                    <a:pt x="440119" y="237397"/>
-                  </a:lnTo>
-                  <a:lnTo>
-                    <a:pt x="517363" y="276142"/>
-                  </a:lnTo>
-                  <a:lnTo>
-                    <a:pt x="594606" y="314068"/>
-                  </a:lnTo>
-                  <a:lnTo>
-                    <a:pt x="671850" y="351191"/>
-                  </a:lnTo>
-                  <a:lnTo>
-                    <a:pt x="749094" y="387528"/>
-                  </a:lnTo>
-                  <a:lnTo>
-                    <a:pt x="826337" y="423096"/>
-                  </a:lnTo>
-                  <a:lnTo>
-                    <a:pt x="903581" y="457912"/>
-                  </a:lnTo>
-                  <a:lnTo>
-                    <a:pt x="980824" y="491991"/>
-                  </a:lnTo>
-                  <a:lnTo>
-                    <a:pt x="1058068" y="525349"/>
-                  </a:lnTo>
-                  <a:lnTo>
-                    <a:pt x="1135311" y="558001"/>
-                  </a:lnTo>
-                  <a:lnTo>
-                    <a:pt x="1212555" y="589962"/>
-                  </a:lnTo>
-                  <a:lnTo>
-                    <a:pt x="1289799" y="621247"/>
-                  </a:lnTo>
-                  <a:lnTo>
-                    <a:pt x="1367042" y="651870"/>
-                  </a:lnTo>
-                  <a:lnTo>
-                    <a:pt x="1444286" y="681845"/>
-                  </a:lnTo>
-                  <a:lnTo>
-                    <a:pt x="1521529" y="711185"/>
-                  </a:lnTo>
-                  <a:lnTo>
-                    <a:pt x="1598773" y="739905"/>
-                  </a:lnTo>
-                  <a:lnTo>
-                    <a:pt x="1676016" y="768017"/>
-                  </a:lnTo>
-                  <a:lnTo>
-                    <a:pt x="1753260" y="795534"/>
-                  </a:lnTo>
-                  <a:lnTo>
-                    <a:pt x="1830504" y="822469"/>
-                  </a:lnTo>
-                  <a:lnTo>
-                    <a:pt x="1907747" y="848834"/>
-                  </a:lnTo>
-                  <a:lnTo>
-                    <a:pt x="1984991" y="874641"/>
-                  </a:lnTo>
-                  <a:lnTo>
-                    <a:pt x="2062234" y="899901"/>
-                  </a:lnTo>
-                  <a:lnTo>
-                    <a:pt x="2139478" y="924628"/>
-                  </a:lnTo>
-                  <a:lnTo>
-                    <a:pt x="2216721" y="948831"/>
-                  </a:lnTo>
-                  <a:lnTo>
-                    <a:pt x="2293965" y="972522"/>
-                  </a:lnTo>
-                  <a:lnTo>
-                    <a:pt x="2371209" y="995712"/>
-                  </a:lnTo>
-                  <a:lnTo>
-                    <a:pt x="2448452" y="1018411"/>
-                  </a:lnTo>
-                  <a:lnTo>
-                    <a:pt x="2525696" y="1040629"/>
-                  </a:lnTo>
-                  <a:lnTo>
-                    <a:pt x="2602939" y="1062378"/>
-                  </a:lnTo>
-                  <a:lnTo>
-                    <a:pt x="2680183" y="1083666"/>
-                  </a:lnTo>
-                  <a:lnTo>
-                    <a:pt x="2757426" y="1104504"/>
-                  </a:lnTo>
-                  <a:lnTo>
-                    <a:pt x="2834670" y="1124901"/>
-                  </a:lnTo>
-                  <a:lnTo>
-                    <a:pt x="2911914" y="1144866"/>
-                  </a:lnTo>
-                  <a:lnTo>
-                    <a:pt x="2989157" y="1164409"/>
-                  </a:lnTo>
-                  <a:lnTo>
-                    <a:pt x="3066401" y="1183538"/>
-                  </a:lnTo>
-                  <a:lnTo>
-                    <a:pt x="3143644" y="1202262"/>
-                  </a:lnTo>
-                  <a:lnTo>
-                    <a:pt x="3220888" y="1220591"/>
-                  </a:lnTo>
-                  <a:lnTo>
-                    <a:pt x="3298131" y="1238531"/>
-                  </a:lnTo>
-                  <a:lnTo>
-                    <a:pt x="3375375" y="1256092"/>
-                  </a:lnTo>
-                  <a:lnTo>
-                    <a:pt x="3452619" y="1273281"/>
-                  </a:lnTo>
-                  <a:lnTo>
-                    <a:pt x="3529862" y="1290106"/>
-                  </a:lnTo>
-                  <a:lnTo>
-                    <a:pt x="3607106" y="1306576"/>
-                  </a:lnTo>
-                  <a:lnTo>
-                    <a:pt x="3684349" y="1322697"/>
-                  </a:lnTo>
-                  <a:lnTo>
-                    <a:pt x="3761593" y="1338476"/>
-                  </a:lnTo>
-                  <a:lnTo>
-                    <a:pt x="3838836" y="1353922"/>
-                  </a:lnTo>
-                  <a:lnTo>
-                    <a:pt x="3916080" y="1369041"/>
-                  </a:lnTo>
-                  <a:lnTo>
-                    <a:pt x="3993324" y="1383841"/>
-                  </a:lnTo>
-                  <a:lnTo>
-                    <a:pt x="4070567" y="1398326"/>
-                  </a:lnTo>
-                  <a:lnTo>
-                    <a:pt x="4147811" y="1412506"/>
-                  </a:lnTo>
-                  <a:lnTo>
-                    <a:pt x="4225054" y="1426385"/>
-                  </a:lnTo>
-                  <a:lnTo>
-                    <a:pt x="4302298" y="1439971"/>
-                  </a:lnTo>
-                  <a:lnTo>
-                    <a:pt x="4379541" y="1453269"/>
-                  </a:lnTo>
-                  <a:lnTo>
-                    <a:pt x="4456785" y="1466286"/>
-                  </a:lnTo>
-                  <a:lnTo>
-                    <a:pt x="4534029" y="1479027"/>
-                  </a:lnTo>
-                  <a:lnTo>
-                    <a:pt x="4611272" y="1491499"/>
-                  </a:lnTo>
-                  <a:lnTo>
-                    <a:pt x="4688516" y="1503707"/>
-                  </a:lnTo>
-                  <a:lnTo>
-                    <a:pt x="4765759" y="1515656"/>
-                  </a:lnTo>
-                  <a:lnTo>
-                    <a:pt x="4843003" y="1527353"/>
-                  </a:lnTo>
-                  <a:lnTo>
-                    <a:pt x="4920246" y="1538802"/>
-                  </a:lnTo>
-                  <a:lnTo>
-                    <a:pt x="4997490" y="1550009"/>
-                  </a:lnTo>
-                  <a:lnTo>
-                    <a:pt x="5074734" y="1560979"/>
-                  </a:lnTo>
-                  <a:lnTo>
-                    <a:pt x="5151977" y="1571717"/>
-                  </a:lnTo>
-                  <a:lnTo>
-                    <a:pt x="5229221" y="1582227"/>
-                  </a:lnTo>
-                  <a:lnTo>
-                    <a:pt x="5306464" y="1592515"/>
-                  </a:lnTo>
-                  <a:lnTo>
-                    <a:pt x="5383708" y="1602585"/>
-                  </a:lnTo>
-                  <a:lnTo>
-                    <a:pt x="5460951" y="1612442"/>
-                  </a:lnTo>
-                  <a:lnTo>
-                    <a:pt x="5538195" y="1622091"/>
-                  </a:lnTo>
-                  <a:lnTo>
-                    <a:pt x="5615439" y="1631536"/>
-                  </a:lnTo>
-                  <a:lnTo>
-                    <a:pt x="5692682" y="1640780"/>
-                  </a:lnTo>
-                  <a:lnTo>
-                    <a:pt x="5769926" y="1649829"/>
-                  </a:lnTo>
-                  <a:lnTo>
-                    <a:pt x="5847169" y="1658687"/>
-                  </a:lnTo>
-                  <a:lnTo>
-                    <a:pt x="5924413" y="1667357"/>
-                  </a:lnTo>
-                  <a:lnTo>
-                    <a:pt x="6001656" y="1675843"/>
-                  </a:lnTo>
-                  <a:lnTo>
-                    <a:pt x="6078900" y="1684150"/>
-                  </a:lnTo>
-                  <a:lnTo>
-                    <a:pt x="6156144" y="1692282"/>
-                  </a:lnTo>
-                  <a:lnTo>
-                    <a:pt x="6233387" y="1700241"/>
-                  </a:lnTo>
-                  <a:lnTo>
-                    <a:pt x="6310631" y="1708032"/>
-                  </a:lnTo>
-                  <a:lnTo>
-                    <a:pt x="6387874" y="1715657"/>
-                  </a:lnTo>
-                  <a:lnTo>
-                    <a:pt x="6465118" y="1723122"/>
-                  </a:lnTo>
-                  <a:lnTo>
-                    <a:pt x="6542361" y="1730429"/>
-                  </a:lnTo>
-                  <a:lnTo>
-                    <a:pt x="6619605" y="1737581"/>
-                  </a:lnTo>
-                  <a:lnTo>
-                    <a:pt x="6696849" y="1744581"/>
-                  </a:lnTo>
-                  <a:lnTo>
-                    <a:pt x="6774092" y="1751434"/>
-                  </a:lnTo>
-                  <a:lnTo>
-                    <a:pt x="6851336" y="1758141"/>
-                  </a:lnTo>
-                  <a:lnTo>
-                    <a:pt x="6928579" y="1764707"/>
-                  </a:lnTo>
-                  <a:lnTo>
-                    <a:pt x="7005823" y="1771133"/>
-                  </a:lnTo>
-                  <a:lnTo>
-                    <a:pt x="7083066" y="1777424"/>
-                  </a:lnTo>
-                  <a:lnTo>
-                    <a:pt x="7160310" y="1783582"/>
-                  </a:lnTo>
-                  <a:lnTo>
-                    <a:pt x="7237554" y="1789609"/>
-                  </a:lnTo>
-                  <a:lnTo>
-                    <a:pt x="7314797" y="1795509"/>
-                  </a:lnTo>
-                  <a:lnTo>
-                    <a:pt x="7392041" y="1801283"/>
+                    <a:pt x="71622" y="46969"/>
+                  </a:lnTo>
+                  <a:lnTo>
+                    <a:pt x="143245" y="92944"/>
+                  </a:lnTo>
+                  <a:lnTo>
+                    <a:pt x="214867" y="137947"/>
+                  </a:lnTo>
+                  <a:lnTo>
+                    <a:pt x="286490" y="181998"/>
+                  </a:lnTo>
+                  <a:lnTo>
+                    <a:pt x="358112" y="225116"/>
+                  </a:lnTo>
+                  <a:lnTo>
+                    <a:pt x="429735" y="267322"/>
+                  </a:lnTo>
+                  <a:lnTo>
+                    <a:pt x="501357" y="308634"/>
+                  </a:lnTo>
+                  <a:lnTo>
+                    <a:pt x="572980" y="349073"/>
+                  </a:lnTo>
+                  <a:lnTo>
+                    <a:pt x="644602" y="388656"/>
+                  </a:lnTo>
+                  <a:lnTo>
+                    <a:pt x="716225" y="427401"/>
+                  </a:lnTo>
+                  <a:lnTo>
+                    <a:pt x="787847" y="465327"/>
+                  </a:lnTo>
+                  <a:lnTo>
+                    <a:pt x="859470" y="502449"/>
+                  </a:lnTo>
+                  <a:lnTo>
+                    <a:pt x="931092" y="538787"/>
+                  </a:lnTo>
+                  <a:lnTo>
+                    <a:pt x="1002715" y="574355"/>
+                  </a:lnTo>
+                  <a:lnTo>
+                    <a:pt x="1074337" y="609171"/>
+                  </a:lnTo>
+                  <a:lnTo>
+                    <a:pt x="1145960" y="643250"/>
+                  </a:lnTo>
+                  <a:lnTo>
+                    <a:pt x="1217582" y="676608"/>
+                  </a:lnTo>
+                  <a:lnTo>
+                    <a:pt x="1289205" y="709260"/>
+                  </a:lnTo>
+                  <a:lnTo>
+                    <a:pt x="1360827" y="741221"/>
+                  </a:lnTo>
+                  <a:lnTo>
+                    <a:pt x="1432450" y="772506"/>
+                  </a:lnTo>
+                  <a:lnTo>
+                    <a:pt x="1504073" y="803129"/>
+                  </a:lnTo>
+                  <a:lnTo>
+                    <a:pt x="1575695" y="833104"/>
+                  </a:lnTo>
+                  <a:lnTo>
+                    <a:pt x="1647318" y="862444"/>
+                  </a:lnTo>
+                  <a:lnTo>
+                    <a:pt x="1718940" y="891164"/>
+                  </a:lnTo>
+                  <a:lnTo>
+                    <a:pt x="1790563" y="919276"/>
+                  </a:lnTo>
+                  <a:lnTo>
+                    <a:pt x="1862185" y="946793"/>
+                  </a:lnTo>
+                  <a:lnTo>
+                    <a:pt x="1933808" y="973728"/>
+                  </a:lnTo>
+                  <a:lnTo>
+                    <a:pt x="2005430" y="1000092"/>
+                  </a:lnTo>
+                  <a:lnTo>
+                    <a:pt x="2077053" y="1025899"/>
+                  </a:lnTo>
+                  <a:lnTo>
+                    <a:pt x="2148675" y="1051160"/>
+                  </a:lnTo>
+                  <a:lnTo>
+                    <a:pt x="2220298" y="1075887"/>
+                  </a:lnTo>
+                  <a:lnTo>
+                    <a:pt x="2291920" y="1100090"/>
+                  </a:lnTo>
+                  <a:lnTo>
+                    <a:pt x="2363543" y="1123781"/>
+                  </a:lnTo>
+                  <a:lnTo>
+                    <a:pt x="2435165" y="1146970"/>
+                  </a:lnTo>
+                  <a:lnTo>
+                    <a:pt x="2506788" y="1169669"/>
+                  </a:lnTo>
+                  <a:lnTo>
+                    <a:pt x="2578410" y="1191888"/>
+                  </a:lnTo>
+                  <a:lnTo>
+                    <a:pt x="2650033" y="1213637"/>
+                  </a:lnTo>
+                  <a:lnTo>
+                    <a:pt x="2721655" y="1234925"/>
+                  </a:lnTo>
+                  <a:lnTo>
+                    <a:pt x="2793278" y="1255763"/>
+                  </a:lnTo>
+                  <a:lnTo>
+                    <a:pt x="2864901" y="1276159"/>
+                  </a:lnTo>
+                  <a:lnTo>
+                    <a:pt x="2936523" y="1296125"/>
+                  </a:lnTo>
+                  <a:lnTo>
+                    <a:pt x="3008146" y="1315667"/>
+                  </a:lnTo>
+                  <a:lnTo>
+                    <a:pt x="3079768" y="1334797"/>
+                  </a:lnTo>
+                  <a:lnTo>
+                    <a:pt x="3151391" y="1353521"/>
+                  </a:lnTo>
+                  <a:lnTo>
+                    <a:pt x="3223013" y="1371849"/>
+                  </a:lnTo>
+                  <a:lnTo>
+                    <a:pt x="3294636" y="1389790"/>
+                  </a:lnTo>
+                  <a:lnTo>
+                    <a:pt x="3366258" y="1407351"/>
+                  </a:lnTo>
+                  <a:lnTo>
+                    <a:pt x="3437881" y="1424540"/>
+                  </a:lnTo>
+                  <a:lnTo>
+                    <a:pt x="3509503" y="1441365"/>
+                  </a:lnTo>
+                  <a:lnTo>
+                    <a:pt x="3581126" y="1457835"/>
+                  </a:lnTo>
+                  <a:lnTo>
+                    <a:pt x="3652748" y="1473956"/>
+                  </a:lnTo>
+                  <a:lnTo>
+                    <a:pt x="3724371" y="1489735"/>
+                  </a:lnTo>
+                  <a:lnTo>
+                    <a:pt x="3795993" y="1505181"/>
+                  </a:lnTo>
+                  <a:lnTo>
+                    <a:pt x="3867616" y="1520300"/>
+                  </a:lnTo>
+                  <a:lnTo>
+                    <a:pt x="3939238" y="1535099"/>
+                  </a:lnTo>
+                  <a:lnTo>
+                    <a:pt x="4010861" y="1549585"/>
+                  </a:lnTo>
+                  <a:lnTo>
+                    <a:pt x="4082483" y="1563765"/>
+                  </a:lnTo>
+                  <a:lnTo>
+                    <a:pt x="4154106" y="1577644"/>
+                  </a:lnTo>
+                  <a:lnTo>
+                    <a:pt x="4225729" y="1591230"/>
+                  </a:lnTo>
+                  <a:lnTo>
+                    <a:pt x="4297351" y="1604528"/>
+                  </a:lnTo>
+                  <a:lnTo>
+                    <a:pt x="4368974" y="1617545"/>
+                  </a:lnTo>
+                  <a:lnTo>
+                    <a:pt x="4440596" y="1630286"/>
+                  </a:lnTo>
+                  <a:lnTo>
+                    <a:pt x="4512219" y="1642758"/>
+                  </a:lnTo>
+                  <a:lnTo>
+                    <a:pt x="4583841" y="1654966"/>
+                  </a:lnTo>
+                  <a:lnTo>
+                    <a:pt x="4655464" y="1666915"/>
+                  </a:lnTo>
+                  <a:lnTo>
+                    <a:pt x="4727086" y="1678612"/>
+                  </a:lnTo>
+                  <a:lnTo>
+                    <a:pt x="4798709" y="1690061"/>
+                  </a:lnTo>
+                  <a:lnTo>
+                    <a:pt x="4870331" y="1701268"/>
+                  </a:lnTo>
+                  <a:lnTo>
+                    <a:pt x="4941954" y="1712238"/>
+                  </a:lnTo>
+                  <a:lnTo>
+                    <a:pt x="5013576" y="1722975"/>
+                  </a:lnTo>
+                  <a:lnTo>
+                    <a:pt x="5085199" y="1733486"/>
+                  </a:lnTo>
+                  <a:lnTo>
+                    <a:pt x="5156821" y="1743774"/>
+                  </a:lnTo>
+                  <a:lnTo>
+                    <a:pt x="5228444" y="1753844"/>
+                  </a:lnTo>
+                  <a:lnTo>
+                    <a:pt x="5300066" y="1763701"/>
+                  </a:lnTo>
+                  <a:lnTo>
+                    <a:pt x="5371689" y="1773350"/>
+                  </a:lnTo>
+                  <a:lnTo>
+                    <a:pt x="5443311" y="1782794"/>
+                  </a:lnTo>
+                  <a:lnTo>
+                    <a:pt x="5514934" y="1792039"/>
+                  </a:lnTo>
+                  <a:lnTo>
+                    <a:pt x="5586557" y="1801088"/>
+                  </a:lnTo>
+                  <a:lnTo>
+                    <a:pt x="5658179" y="1809946"/>
+                  </a:lnTo>
+                  <a:lnTo>
+                    <a:pt x="5729802" y="1818616"/>
+                  </a:lnTo>
+                  <a:lnTo>
+                    <a:pt x="5801424" y="1827102"/>
+                  </a:lnTo>
+                  <a:lnTo>
+                    <a:pt x="5873047" y="1835409"/>
+                  </a:lnTo>
+                  <a:lnTo>
+                    <a:pt x="5944669" y="1843540"/>
+                  </a:lnTo>
+                  <a:lnTo>
+                    <a:pt x="6016292" y="1851500"/>
+                  </a:lnTo>
+                  <a:lnTo>
+                    <a:pt x="6087914" y="1859290"/>
+                  </a:lnTo>
+                  <a:lnTo>
+                    <a:pt x="6159537" y="1866916"/>
+                  </a:lnTo>
+                  <a:lnTo>
+                    <a:pt x="6231159" y="1874381"/>
+                  </a:lnTo>
+                  <a:lnTo>
+                    <a:pt x="6302782" y="1881687"/>
+                  </a:lnTo>
+                  <a:lnTo>
+                    <a:pt x="6374404" y="1888839"/>
+                  </a:lnTo>
+                  <a:lnTo>
+                    <a:pt x="6446027" y="1895840"/>
+                  </a:lnTo>
+                  <a:lnTo>
+                    <a:pt x="6517649" y="1902693"/>
+                  </a:lnTo>
+                  <a:lnTo>
+                    <a:pt x="6589272" y="1909400"/>
+                  </a:lnTo>
+                  <a:lnTo>
+                    <a:pt x="6660894" y="1915966"/>
+                  </a:lnTo>
+                  <a:lnTo>
+                    <a:pt x="6732517" y="1922392"/>
+                  </a:lnTo>
+                  <a:lnTo>
+                    <a:pt x="6804139" y="1928683"/>
+                  </a:lnTo>
+                  <a:lnTo>
+                    <a:pt x="6875762" y="1934841"/>
+                  </a:lnTo>
+                  <a:lnTo>
+                    <a:pt x="6947385" y="1940868"/>
+                  </a:lnTo>
+                  <a:lnTo>
+                    <a:pt x="7019007" y="1946767"/>
+                  </a:lnTo>
+                  <a:lnTo>
+                    <a:pt x="7090630" y="1952542"/>
                   </a:lnTo>
                 </a:path>
               </a:pathLst>
@@ -4566,7 +4568,7 @@
         </p:sp>
         <p:sp>
           <p:nvSpPr>
-            <p:cNvPr id="25" name="pl25"/>
+            <p:cNvPr id="24" name="pl24"/>
             <p:cNvSpPr/>
             <p:nvPr/>
           </p:nvSpPr>
@@ -4609,13 +4611,13 @@
         </p:sp>
         <p:sp>
           <p:nvSpPr>
-            <p:cNvPr id="26" name="pl26"/>
+            <p:cNvPr id="25" name="pl25"/>
             <p:cNvSpPr/>
             <p:nvPr/>
           </p:nvSpPr>
           <p:spPr>
             <a:xfrm>
-              <a:off x="4117484" y="2073503"/>
+              <a:off x="4468386" y="2073503"/>
               <a:ext cx="0" cy="3649639"/>
             </a:xfrm>
             <a:custGeom>
@@ -4652,7 +4654,7 @@
         </p:sp>
         <p:sp>
           <p:nvSpPr>
-            <p:cNvPr id="27" name="tx27"/>
+            <p:cNvPr id="26" name="tx26"/>
             <p:cNvSpPr/>
             <p:nvPr/>
           </p:nvSpPr>
@@ -4698,7 +4700,7 @@
         </p:sp>
         <p:sp>
           <p:nvSpPr>
-            <p:cNvPr id="28" name="tx28"/>
+            <p:cNvPr id="27" name="tx27"/>
             <p:cNvSpPr/>
             <p:nvPr/>
           </p:nvSpPr>
@@ -4744,7 +4746,7 @@
         </p:sp>
         <p:sp>
           <p:nvSpPr>
-            <p:cNvPr id="29" name="tx29"/>
+            <p:cNvPr id="28" name="tx28"/>
             <p:cNvSpPr/>
             <p:nvPr/>
           </p:nvSpPr>
@@ -4790,7 +4792,7 @@
         </p:sp>
         <p:sp>
           <p:nvSpPr>
-            <p:cNvPr id="30" name="tx30"/>
+            <p:cNvPr id="29" name="tx29"/>
             <p:cNvSpPr/>
             <p:nvPr/>
           </p:nvSpPr>
@@ -4836,7 +4838,7 @@
         </p:sp>
         <p:sp>
           <p:nvSpPr>
-            <p:cNvPr id="31" name="tx31"/>
+            <p:cNvPr id="30" name="tx30"/>
             <p:cNvSpPr/>
             <p:nvPr/>
           </p:nvSpPr>
@@ -4882,14 +4884,14 @@
         </p:sp>
         <p:sp>
           <p:nvSpPr>
-            <p:cNvPr id="32" name="tx32"/>
+            <p:cNvPr id="31" name="tx31"/>
             <p:cNvSpPr/>
             <p:nvPr/>
           </p:nvSpPr>
           <p:spPr>
             <a:xfrm>
-              <a:off x="2423864" y="5785772"/>
-              <a:ext cx="155356" cy="80101"/>
+              <a:off x="2478335" y="5785772"/>
+              <a:ext cx="161574" cy="80101"/>
             </a:xfrm>
             <a:prstGeom prst="rect">
               <a:avLst/>
@@ -4921,21 +4923,21 @@
                   <a:latin typeface="Helvetica"/>
                   <a:cs typeface="Helvetica"/>
                 </a:rPr>
-                <a:t>0.8</a:t>
+                <a:t>-25</a:t>
               </a:r>
             </a:p>
           </p:txBody>
         </p:sp>
         <p:sp>
           <p:nvSpPr>
-            <p:cNvPr id="33" name="tx33"/>
+            <p:cNvPr id="32" name="tx32"/>
             <p:cNvSpPr/>
             <p:nvPr/>
           </p:nvSpPr>
           <p:spPr>
             <a:xfrm>
-              <a:off x="4196521" y="5785772"/>
-              <a:ext cx="155356" cy="80101"/>
+              <a:off x="4582608" y="5785772"/>
+              <a:ext cx="62179" cy="80101"/>
             </a:xfrm>
             <a:prstGeom prst="rect">
               <a:avLst/>
@@ -4967,21 +4969,21 @@
                   <a:latin typeface="Helvetica"/>
                   <a:cs typeface="Helvetica"/>
                 </a:rPr>
-                <a:t>1.0</a:t>
+                <a:t>0</a:t>
               </a:r>
             </a:p>
           </p:txBody>
         </p:sp>
         <p:sp>
           <p:nvSpPr>
-            <p:cNvPr id="34" name="tx34"/>
+            <p:cNvPr id="33" name="tx33"/>
             <p:cNvSpPr/>
             <p:nvPr/>
           </p:nvSpPr>
           <p:spPr>
             <a:xfrm>
-              <a:off x="5969179" y="5785772"/>
-              <a:ext cx="155356" cy="80101"/>
+              <a:off x="6606094" y="5785772"/>
+              <a:ext cx="124358" cy="80101"/>
             </a:xfrm>
             <a:prstGeom prst="rect">
               <a:avLst/>
@@ -5013,67 +5015,21 @@
                   <a:latin typeface="Helvetica"/>
                   <a:cs typeface="Helvetica"/>
                 </a:rPr>
-                <a:t>1.2</a:t>
+                <a:t>25</a:t>
               </a:r>
             </a:p>
           </p:txBody>
         </p:sp>
         <p:sp>
           <p:nvSpPr>
-            <p:cNvPr id="35" name="tx35"/>
+            <p:cNvPr id="34" name="tx34"/>
             <p:cNvSpPr/>
             <p:nvPr/>
           </p:nvSpPr>
           <p:spPr>
             <a:xfrm>
-              <a:off x="7741836" y="5785772"/>
-              <a:ext cx="155356" cy="80101"/>
-            </a:xfrm>
-            <a:prstGeom prst="rect">
-              <a:avLst/>
-            </a:prstGeom>
-            <a:noFill/>
-          </p:spPr>
-          <p:txBody>
-            <a:bodyPr lIns="0" rIns="0" tIns="0" bIns="0" anchorCtr="1" anchor="ctr" wrap="none"/>
-            <a:lstStyle/>
-            <a:p>
-              <a:pPr algn="l" marL="0" marR="0" indent="0">
-                <a:lnSpc>
-                  <a:spcPts val="880"/>
-                </a:lnSpc>
-                <a:spcBef>
-                  <a:spcPts val="0"/>
-                </a:spcBef>
-                <a:spcAft>
-                  <a:spcPts val="0"/>
-                </a:spcAft>
-              </a:pPr>
-              <a:r>
-                <a:rPr sz="880">
-                  <a:solidFill>
-                    <a:srgbClr val="4D4D4D">
-                      <a:alpha val="100000"/>
-                    </a:srgbClr>
-                  </a:solidFill>
-                  <a:latin typeface="Helvetica"/>
-                  <a:cs typeface="Helvetica"/>
-                </a:rPr>
-                <a:t>1.4</a:t>
-              </a:r>
-            </a:p>
-          </p:txBody>
-        </p:sp>
-        <p:sp>
-          <p:nvSpPr>
-            <p:cNvPr id="36" name="tx36"/>
-            <p:cNvSpPr/>
-            <p:nvPr/>
-          </p:nvSpPr>
-          <p:spPr>
-            <a:xfrm>
-              <a:off x="3879271" y="5925448"/>
-              <a:ext cx="1676186" cy="100218"/>
+              <a:off x="2928340" y="5925448"/>
+              <a:ext cx="3578047" cy="100218"/>
             </a:xfrm>
             <a:prstGeom prst="rect">
               <a:avLst/>
@@ -5105,14 +5061,14 @@
                   <a:latin typeface="Helvetica"/>
                   <a:cs typeface="Helvetica"/>
                 </a:rPr>
-                <a:t>CKD-EPI Cr-Cys / CG ratio</a:t>
+                <a:t>eGFR difference (%): 100 × (CKD-EPI Cr-Cys − CG) / CG</a:t>
               </a:r>
             </a:p>
           </p:txBody>
         </p:sp>
         <p:sp>
           <p:nvSpPr>
-            <p:cNvPr id="37" name="tx37"/>
+            <p:cNvPr id="35" name="tx35"/>
             <p:cNvSpPr/>
             <p:nvPr/>
           </p:nvSpPr>
@@ -5158,14 +5114,14 @@
         </p:sp>
         <p:sp>
           <p:nvSpPr>
-            <p:cNvPr id="38" name="tx38"/>
+            <p:cNvPr id="36" name="tx36"/>
             <p:cNvSpPr/>
             <p:nvPr/>
           </p:nvSpPr>
           <p:spPr>
             <a:xfrm>
               <a:off x="817517" y="1896563"/>
-              <a:ext cx="6899879" cy="82021"/>
+              <a:ext cx="7052127" cy="82021"/>
             </a:xfrm>
             <a:prstGeom prst="rect">
               <a:avLst/>
@@ -5197,14 +5153,14 @@
                   <a:latin typeface="Helvetica"/>
                   <a:cs typeface="Helvetica"/>
                 </a:rPr>
-                <a:t>subHR per 0.1 ratio decline: 1.28 (1.16-1.41), p_Bonf = &lt;0.001 (n = 6)  |  per IQR decline (Δ = 0.30): 2.06 (1.53-2.78)  |  IQR: [0.84, 1.14]</a:t>
+                <a:t>subHR per 10 % decline: 1.28 (1.16-1.41), p_Bonf = &lt;0.001 (n = 6)  |  per IQR decline (Δ = 29.5 %): 2.06 (1.53-2.78)  |  IQR: [-15.6, 13.9] %</a:t>
               </a:r>
             </a:p>
           </p:txBody>
         </p:sp>
         <p:sp>
           <p:nvSpPr>
-            <p:cNvPr id="39" name="tx39"/>
+            <p:cNvPr id="37" name="tx37"/>
             <p:cNvSpPr/>
             <p:nvPr/>
           </p:nvSpPr>

--- a/docs/pptx/auc3/jx-auc3-linsubhr-ratio-grade2.pptx
+++ b/docs/pptx/auc3/jx-auc3-linsubhr-ratio-grade2.pptx
@@ -2265,34 +2265,26 @@
         </p:sp>
         <p:sp>
           <p:nvSpPr>
-            <p:cNvPr id="4" name="pl4"/>
+            <p:cNvPr id="4" name="rc4"/>
             <p:cNvSpPr/>
             <p:nvPr/>
           </p:nvSpPr>
           <p:spPr>
             <a:xfrm>
-              <a:off x="817517" y="5142518"/>
-              <a:ext cx="7799693" cy="0"/>
+              <a:off x="457200" y="1600200"/>
+              <a:ext cx="8229600" cy="4525962"/>
             </a:xfrm>
-            <a:custGeom>
+            <a:prstGeom prst="rect">
               <a:avLst/>
-              <a:pathLst>
-                <a:path w="7799693" h="0">
-                  <a:moveTo>
-                    <a:pt x="0" y="0"/>
-                  </a:moveTo>
-                  <a:lnTo>
-                    <a:pt x="7799693" y="0"/>
-                  </a:lnTo>
-                  <a:lnTo>
-                    <a:pt x="7799693" y="0"/>
-                  </a:lnTo>
-                </a:path>
-              </a:pathLst>
-            </a:custGeom>
-            <a:ln w="6775" cap="flat">
+            </a:prstGeom>
+            <a:solidFill>
+              <a:srgbClr val="FFFFFF">
+                <a:alpha val="100000"/>
+              </a:srgbClr>
+            </a:solidFill>
+            <a:ln w="13550" cap="rnd">
               <a:solidFill>
-                <a:srgbClr val="EBEBEB">
+                <a:srgbClr val="FFFFFF">
                   <a:alpha val="100000"/>
                 </a:srgbClr>
               </a:solidFill>
@@ -2314,21 +2306,21 @@
           </p:nvSpPr>
           <p:spPr>
             <a:xfrm>
-              <a:off x="817517" y="4313054"/>
-              <a:ext cx="7799693" cy="0"/>
+              <a:off x="887106" y="3250627"/>
+              <a:ext cx="7660515" cy="0"/>
             </a:xfrm>
             <a:custGeom>
               <a:avLst/>
               <a:pathLst>
-                <a:path w="7799693" h="0">
+                <a:path w="7660515" h="0">
                   <a:moveTo>
                     <a:pt x="0" y="0"/>
                   </a:moveTo>
                   <a:lnTo>
-                    <a:pt x="7799693" y="0"/>
-                  </a:lnTo>
-                  <a:lnTo>
-                    <a:pt x="7799693" y="0"/>
+                    <a:pt x="7660515" y="0"/>
+                  </a:lnTo>
+                  <a:lnTo>
+                    <a:pt x="7660515" y="0"/>
                   </a:lnTo>
                 </a:path>
               </a:pathLst>
@@ -2357,21 +2349,21 @@
           </p:nvSpPr>
           <p:spPr>
             <a:xfrm>
-              <a:off x="817517" y="3483591"/>
-              <a:ext cx="7799693" cy="0"/>
+              <a:off x="887106" y="2951293"/>
+              <a:ext cx="7660515" cy="0"/>
             </a:xfrm>
             <a:custGeom>
               <a:avLst/>
               <a:pathLst>
-                <a:path w="7799693" h="0">
+                <a:path w="7660515" h="0">
                   <a:moveTo>
                     <a:pt x="0" y="0"/>
                   </a:moveTo>
                   <a:lnTo>
-                    <a:pt x="7799693" y="0"/>
-                  </a:lnTo>
-                  <a:lnTo>
-                    <a:pt x="7799693" y="0"/>
+                    <a:pt x="7660515" y="0"/>
+                  </a:lnTo>
+                  <a:lnTo>
+                    <a:pt x="7660515" y="0"/>
                   </a:lnTo>
                 </a:path>
               </a:pathLst>
@@ -2400,21 +2392,21 @@
           </p:nvSpPr>
           <p:spPr>
             <a:xfrm>
-              <a:off x="817517" y="2654127"/>
-              <a:ext cx="7799693" cy="0"/>
+              <a:off x="887106" y="2651959"/>
+              <a:ext cx="7660515" cy="0"/>
             </a:xfrm>
             <a:custGeom>
               <a:avLst/>
               <a:pathLst>
-                <a:path w="7799693" h="0">
+                <a:path w="7660515" h="0">
                   <a:moveTo>
                     <a:pt x="0" y="0"/>
                   </a:moveTo>
                   <a:lnTo>
-                    <a:pt x="7799693" y="0"/>
-                  </a:lnTo>
-                  <a:lnTo>
-                    <a:pt x="7799693" y="0"/>
+                    <a:pt x="7660515" y="0"/>
+                  </a:lnTo>
+                  <a:lnTo>
+                    <a:pt x="7660515" y="0"/>
                   </a:lnTo>
                 </a:path>
               </a:pathLst>
@@ -2443,21 +2435,21 @@
           </p:nvSpPr>
           <p:spPr>
             <a:xfrm>
-              <a:off x="1531834" y="2073503"/>
-              <a:ext cx="0" cy="3649639"/>
+              <a:off x="887106" y="2352625"/>
+              <a:ext cx="7660515" cy="0"/>
             </a:xfrm>
             <a:custGeom>
               <a:avLst/>
               <a:pathLst>
-                <a:path w="0" h="3649639">
+                <a:path w="7660515" h="0">
                   <a:moveTo>
-                    <a:pt x="0" y="3649639"/>
+                    <a:pt x="0" y="0"/>
                   </a:moveTo>
                   <a:lnTo>
-                    <a:pt x="0" y="0"/>
-                  </a:lnTo>
-                  <a:lnTo>
-                    <a:pt x="0" y="0"/>
+                    <a:pt x="7660515" y="0"/>
+                  </a:lnTo>
+                  <a:lnTo>
+                    <a:pt x="7660515" y="0"/>
                   </a:lnTo>
                 </a:path>
               </a:pathLst>
@@ -2486,15 +2478,15 @@
           </p:nvSpPr>
           <p:spPr>
             <a:xfrm>
-              <a:off x="3586410" y="2073503"/>
-              <a:ext cx="0" cy="3649639"/>
+              <a:off x="1588677" y="2143092"/>
+              <a:ext cx="0" cy="1317069"/>
             </a:xfrm>
             <a:custGeom>
               <a:avLst/>
               <a:pathLst>
-                <a:path w="0" h="3649639">
+                <a:path w="0" h="1317069">
                   <a:moveTo>
-                    <a:pt x="0" y="3649639"/>
+                    <a:pt x="0" y="1317069"/>
                   </a:moveTo>
                   <a:lnTo>
                     <a:pt x="0" y="0"/>
@@ -2529,15 +2521,15 @@
           </p:nvSpPr>
           <p:spPr>
             <a:xfrm>
-              <a:off x="5640985" y="2073503"/>
-              <a:ext cx="0" cy="3649639"/>
+              <a:off x="3606590" y="2143092"/>
+              <a:ext cx="0" cy="1317069"/>
             </a:xfrm>
             <a:custGeom>
               <a:avLst/>
               <a:pathLst>
-                <a:path w="0" h="3649639">
+                <a:path w="0" h="1317069">
                   <a:moveTo>
-                    <a:pt x="0" y="3649639"/>
+                    <a:pt x="0" y="1317069"/>
                   </a:moveTo>
                   <a:lnTo>
                     <a:pt x="0" y="0"/>
@@ -2572,15 +2564,15 @@
           </p:nvSpPr>
           <p:spPr>
             <a:xfrm>
-              <a:off x="7695561" y="2073503"/>
-              <a:ext cx="0" cy="3649639"/>
+              <a:off x="5624504" y="2143092"/>
+              <a:ext cx="0" cy="1317069"/>
             </a:xfrm>
             <a:custGeom>
               <a:avLst/>
               <a:pathLst>
-                <a:path w="0" h="3649639">
+                <a:path w="0" h="1317069">
                   <a:moveTo>
-                    <a:pt x="0" y="3649639"/>
+                    <a:pt x="0" y="1317069"/>
                   </a:moveTo>
                   <a:lnTo>
                     <a:pt x="0" y="0"/>
@@ -2615,26 +2607,26 @@
           </p:nvSpPr>
           <p:spPr>
             <a:xfrm>
-              <a:off x="817517" y="5557249"/>
-              <a:ext cx="7799693" cy="0"/>
+              <a:off x="7642418" y="2143092"/>
+              <a:ext cx="0" cy="1317069"/>
             </a:xfrm>
             <a:custGeom>
               <a:avLst/>
               <a:pathLst>
-                <a:path w="7799693" h="0">
+                <a:path w="0" h="1317069">
                   <a:moveTo>
+                    <a:pt x="0" y="1317069"/>
+                  </a:moveTo>
+                  <a:lnTo>
                     <a:pt x="0" y="0"/>
-                  </a:moveTo>
-                  <a:lnTo>
-                    <a:pt x="7799693" y="0"/>
-                  </a:lnTo>
-                  <a:lnTo>
-                    <a:pt x="7799693" y="0"/>
+                  </a:lnTo>
+                  <a:lnTo>
+                    <a:pt x="0" y="0"/>
                   </a:lnTo>
                 </a:path>
               </a:pathLst>
             </a:custGeom>
-            <a:ln w="13550" cap="flat">
+            <a:ln w="6775" cap="flat">
               <a:solidFill>
                 <a:srgbClr val="EBEBEB">
                   <a:alpha val="100000"/>
@@ -2658,21 +2650,21 @@
           </p:nvSpPr>
           <p:spPr>
             <a:xfrm>
-              <a:off x="817517" y="4727786"/>
-              <a:ext cx="7799693" cy="0"/>
+              <a:off x="887106" y="3400294"/>
+              <a:ext cx="7660515" cy="0"/>
             </a:xfrm>
             <a:custGeom>
               <a:avLst/>
               <a:pathLst>
-                <a:path w="7799693" h="0">
+                <a:path w="7660515" h="0">
                   <a:moveTo>
                     <a:pt x="0" y="0"/>
                   </a:moveTo>
                   <a:lnTo>
-                    <a:pt x="7799693" y="0"/>
-                  </a:lnTo>
-                  <a:lnTo>
-                    <a:pt x="7799693" y="0"/>
+                    <a:pt x="7660515" y="0"/>
+                  </a:lnTo>
+                  <a:lnTo>
+                    <a:pt x="7660515" y="0"/>
                   </a:lnTo>
                 </a:path>
               </a:pathLst>
@@ -2701,21 +2693,21 @@
           </p:nvSpPr>
           <p:spPr>
             <a:xfrm>
-              <a:off x="817517" y="3898322"/>
-              <a:ext cx="7799693" cy="0"/>
+              <a:off x="887106" y="3100960"/>
+              <a:ext cx="7660515" cy="0"/>
             </a:xfrm>
             <a:custGeom>
               <a:avLst/>
               <a:pathLst>
-                <a:path w="7799693" h="0">
+                <a:path w="7660515" h="0">
                   <a:moveTo>
                     <a:pt x="0" y="0"/>
                   </a:moveTo>
                   <a:lnTo>
-                    <a:pt x="7799693" y="0"/>
-                  </a:lnTo>
-                  <a:lnTo>
-                    <a:pt x="7799693" y="0"/>
+                    <a:pt x="7660515" y="0"/>
+                  </a:lnTo>
+                  <a:lnTo>
+                    <a:pt x="7660515" y="0"/>
                   </a:lnTo>
                 </a:path>
               </a:pathLst>
@@ -2744,21 +2736,21 @@
           </p:nvSpPr>
           <p:spPr>
             <a:xfrm>
-              <a:off x="817517" y="3068859"/>
-              <a:ext cx="7799693" cy="0"/>
+              <a:off x="887106" y="2801626"/>
+              <a:ext cx="7660515" cy="0"/>
             </a:xfrm>
             <a:custGeom>
               <a:avLst/>
               <a:pathLst>
-                <a:path w="7799693" h="0">
+                <a:path w="7660515" h="0">
                   <a:moveTo>
                     <a:pt x="0" y="0"/>
                   </a:moveTo>
                   <a:lnTo>
-                    <a:pt x="7799693" y="0"/>
-                  </a:lnTo>
-                  <a:lnTo>
-                    <a:pt x="7799693" y="0"/>
+                    <a:pt x="7660515" y="0"/>
+                  </a:lnTo>
+                  <a:lnTo>
+                    <a:pt x="7660515" y="0"/>
                   </a:lnTo>
                 </a:path>
               </a:pathLst>
@@ -2787,21 +2779,21 @@
           </p:nvSpPr>
           <p:spPr>
             <a:xfrm>
-              <a:off x="817517" y="2239395"/>
-              <a:ext cx="7799693" cy="0"/>
+              <a:off x="887106" y="2502292"/>
+              <a:ext cx="7660515" cy="0"/>
             </a:xfrm>
             <a:custGeom>
               <a:avLst/>
               <a:pathLst>
-                <a:path w="7799693" h="0">
+                <a:path w="7660515" h="0">
                   <a:moveTo>
                     <a:pt x="0" y="0"/>
                   </a:moveTo>
                   <a:lnTo>
-                    <a:pt x="7799693" y="0"/>
-                  </a:lnTo>
-                  <a:lnTo>
-                    <a:pt x="7799693" y="0"/>
+                    <a:pt x="7660515" y="0"/>
+                  </a:lnTo>
+                  <a:lnTo>
+                    <a:pt x="7660515" y="0"/>
                   </a:lnTo>
                 </a:path>
               </a:pathLst>
@@ -2830,21 +2822,21 @@
           </p:nvSpPr>
           <p:spPr>
             <a:xfrm>
-              <a:off x="2559122" y="2073503"/>
-              <a:ext cx="0" cy="3649639"/>
+              <a:off x="887106" y="2202958"/>
+              <a:ext cx="7660515" cy="0"/>
             </a:xfrm>
             <a:custGeom>
               <a:avLst/>
               <a:pathLst>
-                <a:path w="0" h="3649639">
+                <a:path w="7660515" h="0">
                   <a:moveTo>
-                    <a:pt x="0" y="3649639"/>
+                    <a:pt x="0" y="0"/>
                   </a:moveTo>
                   <a:lnTo>
-                    <a:pt x="0" y="0"/>
-                  </a:lnTo>
-                  <a:lnTo>
-                    <a:pt x="0" y="0"/>
+                    <a:pt x="7660515" y="0"/>
+                  </a:lnTo>
+                  <a:lnTo>
+                    <a:pt x="7660515" y="0"/>
                   </a:lnTo>
                 </a:path>
               </a:pathLst>
@@ -2873,15 +2865,15 @@
           </p:nvSpPr>
           <p:spPr>
             <a:xfrm>
-              <a:off x="4613698" y="2073503"/>
-              <a:ext cx="0" cy="3649639"/>
+              <a:off x="2597634" y="2143092"/>
+              <a:ext cx="0" cy="1317069"/>
             </a:xfrm>
             <a:custGeom>
               <a:avLst/>
               <a:pathLst>
-                <a:path w="0" h="3649639">
+                <a:path w="0" h="1317069">
                   <a:moveTo>
-                    <a:pt x="0" y="3649639"/>
+                    <a:pt x="0" y="1317069"/>
                   </a:moveTo>
                   <a:lnTo>
                     <a:pt x="0" y="0"/>
@@ -2916,15 +2908,15 @@
           </p:nvSpPr>
           <p:spPr>
             <a:xfrm>
-              <a:off x="6668273" y="2073503"/>
-              <a:ext cx="0" cy="3649639"/>
+              <a:off x="4615547" y="2143092"/>
+              <a:ext cx="0" cy="1317069"/>
             </a:xfrm>
             <a:custGeom>
               <a:avLst/>
               <a:pathLst>
-                <a:path w="0" h="3649639">
+                <a:path w="0" h="1317069">
                   <a:moveTo>
-                    <a:pt x="0" y="3649639"/>
+                    <a:pt x="0" y="1317069"/>
                   </a:moveTo>
                   <a:lnTo>
                     <a:pt x="0" y="0"/>
@@ -2953,618 +2945,661 @@
         </p:sp>
         <p:sp>
           <p:nvSpPr>
-            <p:cNvPr id="20" name="pg20"/>
+            <p:cNvPr id="20" name="pl20"/>
             <p:cNvSpPr/>
             <p:nvPr/>
           </p:nvSpPr>
           <p:spPr>
             <a:xfrm>
-              <a:off x="1172049" y="2232099"/>
-              <a:ext cx="7090630" cy="3157389"/>
+              <a:off x="6633461" y="2143092"/>
+              <a:ext cx="0" cy="1317069"/>
             </a:xfrm>
             <a:custGeom>
               <a:avLst/>
               <a:pathLst>
-                <a:path w="7090630" h="3157389">
+                <a:path w="0" h="1317069">
+                  <a:moveTo>
+                    <a:pt x="0" y="1317069"/>
+                  </a:moveTo>
+                  <a:lnTo>
+                    <a:pt x="0" y="0"/>
+                  </a:lnTo>
+                  <a:lnTo>
+                    <a:pt x="0" y="0"/>
+                  </a:lnTo>
+                </a:path>
+              </a:pathLst>
+            </a:custGeom>
+            <a:ln w="13550" cap="flat">
+              <a:solidFill>
+                <a:srgbClr val="EBEBEB">
+                  <a:alpha val="100000"/>
+                </a:srgbClr>
+              </a:solidFill>
+              <a:prstDash val="solid"/>
+              <a:round/>
+            </a:ln>
+          </p:spPr>
+          <p:txBody>
+            <a:bodyPr/>
+            <a:lstStyle/>
+            <a:p/>
+          </p:txBody>
+        </p:sp>
+        <p:sp>
+          <p:nvSpPr>
+            <p:cNvPr id="21" name="pg21"/>
+            <p:cNvSpPr/>
+            <p:nvPr/>
+          </p:nvSpPr>
+          <p:spPr>
+            <a:xfrm>
+              <a:off x="1235312" y="2200325"/>
+              <a:ext cx="6964104" cy="1139427"/>
+            </a:xfrm>
+            <a:custGeom>
+              <a:avLst/>
+              <a:pathLst>
+                <a:path w="6964104" h="1139427">
                   <a:moveTo>
                     <a:pt x="0" y="0"/>
                   </a:moveTo>
                   <a:lnTo>
-                    <a:pt x="71622" y="98818"/>
-                  </a:lnTo>
-                  <a:lnTo>
-                    <a:pt x="143245" y="194700"/>
-                  </a:lnTo>
-                  <a:lnTo>
-                    <a:pt x="214867" y="287732"/>
-                  </a:lnTo>
-                  <a:lnTo>
-                    <a:pt x="286490" y="377999"/>
-                  </a:lnTo>
-                  <a:lnTo>
-                    <a:pt x="358112" y="465584"/>
-                  </a:lnTo>
-                  <a:lnTo>
-                    <a:pt x="429735" y="550566"/>
-                  </a:lnTo>
-                  <a:lnTo>
-                    <a:pt x="501357" y="633022"/>
-                  </a:lnTo>
-                  <a:lnTo>
-                    <a:pt x="572980" y="713028"/>
-                  </a:lnTo>
-                  <a:lnTo>
-                    <a:pt x="644602" y="790656"/>
-                  </a:lnTo>
-                  <a:lnTo>
-                    <a:pt x="716225" y="865978"/>
-                  </a:lnTo>
-                  <a:lnTo>
-                    <a:pt x="787847" y="939060"/>
-                  </a:lnTo>
-                  <a:lnTo>
-                    <a:pt x="859470" y="1009971"/>
-                  </a:lnTo>
-                  <a:lnTo>
-                    <a:pt x="931092" y="1078775"/>
-                  </a:lnTo>
-                  <a:lnTo>
-                    <a:pt x="1002715" y="1145534"/>
-                  </a:lnTo>
-                  <a:lnTo>
-                    <a:pt x="1074337" y="1210309"/>
-                  </a:lnTo>
-                  <a:lnTo>
-                    <a:pt x="1145960" y="1273158"/>
-                  </a:lnTo>
-                  <a:lnTo>
-                    <a:pt x="1217582" y="1334140"/>
-                  </a:lnTo>
-                  <a:lnTo>
-                    <a:pt x="1289205" y="1393310"/>
-                  </a:lnTo>
-                  <a:lnTo>
-                    <a:pt x="1360827" y="1450721"/>
-                  </a:lnTo>
-                  <a:lnTo>
-                    <a:pt x="1432450" y="1506427"/>
-                  </a:lnTo>
-                  <a:lnTo>
-                    <a:pt x="1504073" y="1560476"/>
-                  </a:lnTo>
-                  <a:lnTo>
-                    <a:pt x="1575695" y="1612920"/>
-                  </a:lnTo>
-                  <a:lnTo>
-                    <a:pt x="1647318" y="1663805"/>
-                  </a:lnTo>
-                  <a:lnTo>
-                    <a:pt x="1718940" y="1713177"/>
-                  </a:lnTo>
-                  <a:lnTo>
-                    <a:pt x="1790563" y="1761083"/>
-                  </a:lnTo>
-                  <a:lnTo>
-                    <a:pt x="1862185" y="1807564"/>
-                  </a:lnTo>
-                  <a:lnTo>
-                    <a:pt x="1933808" y="1852665"/>
-                  </a:lnTo>
-                  <a:lnTo>
-                    <a:pt x="2005430" y="1896425"/>
-                  </a:lnTo>
-                  <a:lnTo>
-                    <a:pt x="2077053" y="1938884"/>
-                  </a:lnTo>
-                  <a:lnTo>
-                    <a:pt x="2148675" y="1980082"/>
-                  </a:lnTo>
-                  <a:lnTo>
-                    <a:pt x="2220298" y="2020055"/>
-                  </a:lnTo>
-                  <a:lnTo>
-                    <a:pt x="2291920" y="2058840"/>
-                  </a:lnTo>
-                  <a:lnTo>
-                    <a:pt x="2363543" y="2096473"/>
-                  </a:lnTo>
-                  <a:lnTo>
-                    <a:pt x="2435165" y="2132988"/>
-                  </a:lnTo>
-                  <a:lnTo>
-                    <a:pt x="2506788" y="2168417"/>
-                  </a:lnTo>
-                  <a:lnTo>
-                    <a:pt x="2578410" y="2202793"/>
-                  </a:lnTo>
-                  <a:lnTo>
-                    <a:pt x="2650033" y="2236148"/>
-                  </a:lnTo>
-                  <a:lnTo>
-                    <a:pt x="2721655" y="2268511"/>
-                  </a:lnTo>
-                  <a:lnTo>
-                    <a:pt x="2793278" y="2299913"/>
-                  </a:lnTo>
-                  <a:lnTo>
-                    <a:pt x="2864901" y="2330382"/>
-                  </a:lnTo>
-                  <a:lnTo>
-                    <a:pt x="2936523" y="2359945"/>
-                  </a:lnTo>
-                  <a:lnTo>
-                    <a:pt x="3008146" y="2388629"/>
-                  </a:lnTo>
-                  <a:lnTo>
-                    <a:pt x="3079768" y="2416461"/>
-                  </a:lnTo>
-                  <a:lnTo>
-                    <a:pt x="3151391" y="2443466"/>
-                  </a:lnTo>
-                  <a:lnTo>
-                    <a:pt x="3223013" y="2469668"/>
-                  </a:lnTo>
-                  <a:lnTo>
-                    <a:pt x="3294636" y="2495092"/>
-                  </a:lnTo>
-                  <a:lnTo>
-                    <a:pt x="3366258" y="2505832"/>
-                  </a:lnTo>
-                  <a:lnTo>
-                    <a:pt x="3437881" y="2516095"/>
-                  </a:lnTo>
-                  <a:lnTo>
-                    <a:pt x="3509503" y="2526230"/>
-                  </a:lnTo>
-                  <a:lnTo>
-                    <a:pt x="3581126" y="2536238"/>
-                  </a:lnTo>
-                  <a:lnTo>
-                    <a:pt x="3652748" y="2546121"/>
-                  </a:lnTo>
-                  <a:lnTo>
-                    <a:pt x="3724371" y="2555880"/>
-                  </a:lnTo>
-                  <a:lnTo>
-                    <a:pt x="3795993" y="2565517"/>
-                  </a:lnTo>
-                  <a:lnTo>
-                    <a:pt x="3867616" y="2575033"/>
-                  </a:lnTo>
-                  <a:lnTo>
-                    <a:pt x="3939238" y="2584429"/>
-                  </a:lnTo>
-                  <a:lnTo>
-                    <a:pt x="4010861" y="2593709"/>
-                  </a:lnTo>
-                  <a:lnTo>
-                    <a:pt x="4082483" y="2602871"/>
-                  </a:lnTo>
-                  <a:lnTo>
-                    <a:pt x="4154106" y="2611919"/>
-                  </a:lnTo>
-                  <a:lnTo>
-                    <a:pt x="4225729" y="2620854"/>
-                  </a:lnTo>
-                  <a:lnTo>
-                    <a:pt x="4297351" y="2629677"/>
-                  </a:lnTo>
-                  <a:lnTo>
-                    <a:pt x="4368974" y="2638389"/>
-                  </a:lnTo>
-                  <a:lnTo>
-                    <a:pt x="4440596" y="2646992"/>
-                  </a:lnTo>
-                  <a:lnTo>
-                    <a:pt x="4512219" y="2655487"/>
-                  </a:lnTo>
-                  <a:lnTo>
-                    <a:pt x="4583841" y="2663876"/>
-                  </a:lnTo>
-                  <a:lnTo>
-                    <a:pt x="4655464" y="2672160"/>
-                  </a:lnTo>
-                  <a:lnTo>
-                    <a:pt x="4727086" y="2680340"/>
-                  </a:lnTo>
-                  <a:lnTo>
-                    <a:pt x="4798709" y="2688418"/>
-                  </a:lnTo>
-                  <a:lnTo>
-                    <a:pt x="4870331" y="2696394"/>
-                  </a:lnTo>
-                  <a:lnTo>
-                    <a:pt x="4941954" y="2704270"/>
-                  </a:lnTo>
-                  <a:lnTo>
-                    <a:pt x="5013576" y="2712048"/>
-                  </a:lnTo>
-                  <a:lnTo>
-                    <a:pt x="5085199" y="2719729"/>
-                  </a:lnTo>
-                  <a:lnTo>
-                    <a:pt x="5156821" y="2727313"/>
-                  </a:lnTo>
-                  <a:lnTo>
-                    <a:pt x="5228444" y="2734802"/>
-                  </a:lnTo>
-                  <a:lnTo>
-                    <a:pt x="5300066" y="2742197"/>
-                  </a:lnTo>
-                  <a:lnTo>
-                    <a:pt x="5371689" y="2749500"/>
-                  </a:lnTo>
-                  <a:lnTo>
-                    <a:pt x="5443311" y="2756711"/>
-                  </a:lnTo>
-                  <a:lnTo>
-                    <a:pt x="5514934" y="2763832"/>
-                  </a:lnTo>
-                  <a:lnTo>
-                    <a:pt x="5586557" y="2770864"/>
-                  </a:lnTo>
-                  <a:lnTo>
-                    <a:pt x="5658179" y="2777807"/>
-                  </a:lnTo>
-                  <a:lnTo>
-                    <a:pt x="5729802" y="2784664"/>
-                  </a:lnTo>
-                  <a:lnTo>
-                    <a:pt x="5801424" y="2791434"/>
-                  </a:lnTo>
-                  <a:lnTo>
-                    <a:pt x="5873047" y="2798120"/>
-                  </a:lnTo>
-                  <a:lnTo>
-                    <a:pt x="5944669" y="2804722"/>
-                  </a:lnTo>
-                  <a:lnTo>
-                    <a:pt x="6016292" y="2811242"/>
-                  </a:lnTo>
-                  <a:lnTo>
-                    <a:pt x="6087914" y="2817680"/>
-                  </a:lnTo>
-                  <a:lnTo>
-                    <a:pt x="6159537" y="2824037"/>
-                  </a:lnTo>
-                  <a:lnTo>
-                    <a:pt x="6231159" y="2830314"/>
-                  </a:lnTo>
-                  <a:lnTo>
-                    <a:pt x="6302782" y="2836513"/>
-                  </a:lnTo>
-                  <a:lnTo>
-                    <a:pt x="6374404" y="2842634"/>
-                  </a:lnTo>
-                  <a:lnTo>
-                    <a:pt x="6446027" y="2848679"/>
-                  </a:lnTo>
-                  <a:lnTo>
-                    <a:pt x="6517649" y="2854647"/>
-                  </a:lnTo>
-                  <a:lnTo>
-                    <a:pt x="6589272" y="2860541"/>
-                  </a:lnTo>
-                  <a:lnTo>
-                    <a:pt x="6660894" y="2866362"/>
-                  </a:lnTo>
-                  <a:lnTo>
-                    <a:pt x="6732517" y="2872109"/>
-                  </a:lnTo>
-                  <a:lnTo>
-                    <a:pt x="6804139" y="2877784"/>
-                  </a:lnTo>
-                  <a:lnTo>
-                    <a:pt x="6875762" y="2883388"/>
-                  </a:lnTo>
-                  <a:lnTo>
-                    <a:pt x="6947385" y="2888922"/>
-                  </a:lnTo>
-                  <a:lnTo>
-                    <a:pt x="7019007" y="2894387"/>
-                  </a:lnTo>
-                  <a:lnTo>
-                    <a:pt x="7090630" y="2899783"/>
-                  </a:lnTo>
-                  <a:lnTo>
-                    <a:pt x="7090630" y="3157389"/>
-                  </a:lnTo>
-                  <a:lnTo>
-                    <a:pt x="7019007" y="3152251"/>
-                  </a:lnTo>
-                  <a:lnTo>
-                    <a:pt x="6947385" y="3146955"/>
-                  </a:lnTo>
-                  <a:lnTo>
-                    <a:pt x="6875762" y="3141497"/>
-                  </a:lnTo>
-                  <a:lnTo>
-                    <a:pt x="6804139" y="3135872"/>
-                  </a:lnTo>
-                  <a:lnTo>
-                    <a:pt x="6732517" y="3130075"/>
-                  </a:lnTo>
-                  <a:lnTo>
-                    <a:pt x="6660894" y="3124100"/>
-                  </a:lnTo>
-                  <a:lnTo>
-                    <a:pt x="6589272" y="3117942"/>
-                  </a:lnTo>
-                  <a:lnTo>
-                    <a:pt x="6517649" y="3111596"/>
-                  </a:lnTo>
-                  <a:lnTo>
-                    <a:pt x="6446027" y="3105055"/>
-                  </a:lnTo>
-                  <a:lnTo>
-                    <a:pt x="6374404" y="3098314"/>
-                  </a:lnTo>
-                  <a:lnTo>
-                    <a:pt x="6302782" y="3091366"/>
-                  </a:lnTo>
-                  <a:lnTo>
-                    <a:pt x="6231159" y="3084205"/>
-                  </a:lnTo>
-                  <a:lnTo>
-                    <a:pt x="6159537" y="3076826"/>
-                  </a:lnTo>
-                  <a:lnTo>
-                    <a:pt x="6087914" y="3069220"/>
-                  </a:lnTo>
-                  <a:lnTo>
-                    <a:pt x="6016292" y="3061381"/>
-                  </a:lnTo>
-                  <a:lnTo>
-                    <a:pt x="5944669" y="3053302"/>
-                  </a:lnTo>
-                  <a:lnTo>
-                    <a:pt x="5873047" y="3044976"/>
-                  </a:lnTo>
-                  <a:lnTo>
-                    <a:pt x="5801424" y="3036394"/>
-                  </a:lnTo>
-                  <a:lnTo>
-                    <a:pt x="5729802" y="3027550"/>
-                  </a:lnTo>
-                  <a:lnTo>
-                    <a:pt x="5658179" y="3018435"/>
-                  </a:lnTo>
-                  <a:lnTo>
-                    <a:pt x="5586557" y="3009041"/>
-                  </a:lnTo>
-                  <a:lnTo>
-                    <a:pt x="5514934" y="2999359"/>
-                  </a:lnTo>
-                  <a:lnTo>
-                    <a:pt x="5443311" y="2989380"/>
-                  </a:lnTo>
-                  <a:lnTo>
-                    <a:pt x="5371689" y="2979096"/>
-                  </a:lnTo>
-                  <a:lnTo>
-                    <a:pt x="5300066" y="2968497"/>
-                  </a:lnTo>
-                  <a:lnTo>
-                    <a:pt x="5228444" y="2957573"/>
-                  </a:lnTo>
-                  <a:lnTo>
-                    <a:pt x="5156821" y="2946314"/>
-                  </a:lnTo>
-                  <a:lnTo>
-                    <a:pt x="5085199" y="2934711"/>
-                  </a:lnTo>
-                  <a:lnTo>
-                    <a:pt x="5013576" y="2922753"/>
-                  </a:lnTo>
-                  <a:lnTo>
-                    <a:pt x="4941954" y="2910428"/>
-                  </a:lnTo>
-                  <a:lnTo>
-                    <a:pt x="4870331" y="2897725"/>
-                  </a:lnTo>
-                  <a:lnTo>
-                    <a:pt x="4798709" y="2884634"/>
-                  </a:lnTo>
-                  <a:lnTo>
-                    <a:pt x="4727086" y="2871141"/>
-                  </a:lnTo>
-                  <a:lnTo>
-                    <a:pt x="4655464" y="2857236"/>
-                  </a:lnTo>
-                  <a:lnTo>
-                    <a:pt x="4583841" y="2842904"/>
-                  </a:lnTo>
-                  <a:lnTo>
-                    <a:pt x="4512219" y="2828134"/>
-                  </a:lnTo>
-                  <a:lnTo>
-                    <a:pt x="4440596" y="2812911"/>
-                  </a:lnTo>
-                  <a:lnTo>
-                    <a:pt x="4368974" y="2797221"/>
-                  </a:lnTo>
-                  <a:lnTo>
-                    <a:pt x="4297351" y="2781052"/>
-                  </a:lnTo>
-                  <a:lnTo>
-                    <a:pt x="4225729" y="2764387"/>
-                  </a:lnTo>
-                  <a:lnTo>
-                    <a:pt x="4154106" y="2747211"/>
-                  </a:lnTo>
-                  <a:lnTo>
-                    <a:pt x="4082483" y="2729510"/>
-                  </a:lnTo>
-                  <a:lnTo>
-                    <a:pt x="4010861" y="2711266"/>
-                  </a:lnTo>
-                  <a:lnTo>
-                    <a:pt x="3939238" y="2692464"/>
-                  </a:lnTo>
-                  <a:lnTo>
-                    <a:pt x="3867616" y="2673085"/>
-                  </a:lnTo>
-                  <a:lnTo>
-                    <a:pt x="3795993" y="2653113"/>
-                  </a:lnTo>
-                  <a:lnTo>
-                    <a:pt x="3724371" y="2632530"/>
-                  </a:lnTo>
-                  <a:lnTo>
-                    <a:pt x="3652748" y="2611316"/>
-                  </a:lnTo>
-                  <a:lnTo>
-                    <a:pt x="3581126" y="2589452"/>
-                  </a:lnTo>
-                  <a:lnTo>
-                    <a:pt x="3509503" y="2566918"/>
-                  </a:lnTo>
-                  <a:lnTo>
-                    <a:pt x="3437881" y="2543695"/>
-                  </a:lnTo>
-                  <a:lnTo>
-                    <a:pt x="3366258" y="2519760"/>
-                  </a:lnTo>
-                  <a:lnTo>
-                    <a:pt x="3294636" y="2495438"/>
-                  </a:lnTo>
-                  <a:lnTo>
-                    <a:pt x="3223013" y="2484912"/>
-                  </a:lnTo>
-                  <a:lnTo>
-                    <a:pt x="3151391" y="2474253"/>
-                  </a:lnTo>
-                  <a:lnTo>
-                    <a:pt x="3079768" y="2463458"/>
-                  </a:lnTo>
-                  <a:lnTo>
-                    <a:pt x="3008146" y="2452527"/>
-                  </a:lnTo>
-                  <a:lnTo>
-                    <a:pt x="2936523" y="2441457"/>
-                  </a:lnTo>
-                  <a:lnTo>
-                    <a:pt x="2864901" y="2430247"/>
-                  </a:lnTo>
-                  <a:lnTo>
-                    <a:pt x="2793278" y="2418894"/>
-                  </a:lnTo>
-                  <a:lnTo>
-                    <a:pt x="2721655" y="2407397"/>
-                  </a:lnTo>
-                  <a:lnTo>
-                    <a:pt x="2650033" y="2395755"/>
-                  </a:lnTo>
-                  <a:lnTo>
-                    <a:pt x="2578410" y="2383964"/>
-                  </a:lnTo>
-                  <a:lnTo>
-                    <a:pt x="2506788" y="2372024"/>
-                  </a:lnTo>
-                  <a:lnTo>
-                    <a:pt x="2435165" y="2359933"/>
-                  </a:lnTo>
-                  <a:lnTo>
-                    <a:pt x="2363543" y="2347688"/>
-                  </a:lnTo>
-                  <a:lnTo>
-                    <a:pt x="2291920" y="2335288"/>
-                  </a:lnTo>
-                  <a:lnTo>
-                    <a:pt x="2220298" y="2322731"/>
-                  </a:lnTo>
-                  <a:lnTo>
-                    <a:pt x="2148675" y="2310014"/>
-                  </a:lnTo>
-                  <a:lnTo>
-                    <a:pt x="2077053" y="2297136"/>
-                  </a:lnTo>
-                  <a:lnTo>
-                    <a:pt x="2005430" y="2284095"/>
-                  </a:lnTo>
-                  <a:lnTo>
-                    <a:pt x="1933808" y="2270888"/>
-                  </a:lnTo>
-                  <a:lnTo>
-                    <a:pt x="1862185" y="2257514"/>
-                  </a:lnTo>
-                  <a:lnTo>
-                    <a:pt x="1790563" y="2243970"/>
-                  </a:lnTo>
-                  <a:lnTo>
-                    <a:pt x="1718940" y="2230254"/>
-                  </a:lnTo>
-                  <a:lnTo>
-                    <a:pt x="1647318" y="2216364"/>
-                  </a:lnTo>
-                  <a:lnTo>
-                    <a:pt x="1575695" y="2202298"/>
-                  </a:lnTo>
-                  <a:lnTo>
-                    <a:pt x="1504073" y="2188054"/>
-                  </a:lnTo>
-                  <a:lnTo>
-                    <a:pt x="1432450" y="2173629"/>
-                  </a:lnTo>
-                  <a:lnTo>
-                    <a:pt x="1360827" y="2159021"/>
-                  </a:lnTo>
-                  <a:lnTo>
-                    <a:pt x="1289205" y="2144227"/>
-                  </a:lnTo>
-                  <a:lnTo>
-                    <a:pt x="1217582" y="2129246"/>
-                  </a:lnTo>
-                  <a:lnTo>
-                    <a:pt x="1145960" y="2114075"/>
-                  </a:lnTo>
-                  <a:lnTo>
-                    <a:pt x="1074337" y="2098711"/>
-                  </a:lnTo>
-                  <a:lnTo>
-                    <a:pt x="1002715" y="2083153"/>
-                  </a:lnTo>
-                  <a:lnTo>
-                    <a:pt x="931092" y="2067397"/>
-                  </a:lnTo>
-                  <a:lnTo>
-                    <a:pt x="859470" y="2051441"/>
-                  </a:lnTo>
-                  <a:lnTo>
-                    <a:pt x="787847" y="2035283"/>
-                  </a:lnTo>
-                  <a:lnTo>
-                    <a:pt x="716225" y="2018919"/>
-                  </a:lnTo>
-                  <a:lnTo>
-                    <a:pt x="644602" y="2002349"/>
-                  </a:lnTo>
-                  <a:lnTo>
-                    <a:pt x="572980" y="1985568"/>
-                  </a:lnTo>
-                  <a:lnTo>
-                    <a:pt x="501357" y="1968574"/>
-                  </a:lnTo>
-                  <a:lnTo>
-                    <a:pt x="429735" y="1951364"/>
-                  </a:lnTo>
-                  <a:lnTo>
-                    <a:pt x="358112" y="1933937"/>
-                  </a:lnTo>
-                  <a:lnTo>
-                    <a:pt x="286490" y="1916288"/>
-                  </a:lnTo>
-                  <a:lnTo>
-                    <a:pt x="214867" y="1898415"/>
-                  </a:lnTo>
-                  <a:lnTo>
-                    <a:pt x="143245" y="1880315"/>
-                  </a:lnTo>
-                  <a:lnTo>
-                    <a:pt x="71622" y="1861986"/>
-                  </a:lnTo>
-                  <a:lnTo>
-                    <a:pt x="0" y="1843425"/>
+                    <a:pt x="70344" y="35661"/>
+                  </a:lnTo>
+                  <a:lnTo>
+                    <a:pt x="140688" y="70262"/>
+                  </a:lnTo>
+                  <a:lnTo>
+                    <a:pt x="211033" y="103835"/>
+                  </a:lnTo>
+                  <a:lnTo>
+                    <a:pt x="281377" y="136411"/>
+                  </a:lnTo>
+                  <a:lnTo>
+                    <a:pt x="351722" y="168018"/>
+                  </a:lnTo>
+                  <a:lnTo>
+                    <a:pt x="422066" y="198686"/>
+                  </a:lnTo>
+                  <a:lnTo>
+                    <a:pt x="492411" y="228442"/>
+                  </a:lnTo>
+                  <a:lnTo>
+                    <a:pt x="562755" y="257315"/>
+                  </a:lnTo>
+                  <a:lnTo>
+                    <a:pt x="633100" y="285329"/>
+                  </a:lnTo>
+                  <a:lnTo>
+                    <a:pt x="703444" y="312511"/>
+                  </a:lnTo>
+                  <a:lnTo>
+                    <a:pt x="773789" y="338884"/>
+                  </a:lnTo>
+                  <a:lnTo>
+                    <a:pt x="844133" y="364475"/>
+                  </a:lnTo>
+                  <a:lnTo>
+                    <a:pt x="914478" y="389304"/>
+                  </a:lnTo>
+                  <a:lnTo>
+                    <a:pt x="984822" y="413396"/>
+                  </a:lnTo>
+                  <a:lnTo>
+                    <a:pt x="1055167" y="436772"/>
+                  </a:lnTo>
+                  <a:lnTo>
+                    <a:pt x="1125511" y="459453"/>
+                  </a:lnTo>
+                  <a:lnTo>
+                    <a:pt x="1195856" y="481460"/>
+                  </a:lnTo>
+                  <a:lnTo>
+                    <a:pt x="1266200" y="502813"/>
+                  </a:lnTo>
+                  <a:lnTo>
+                    <a:pt x="1336545" y="523531"/>
+                  </a:lnTo>
+                  <a:lnTo>
+                    <a:pt x="1406889" y="543634"/>
+                  </a:lnTo>
+                  <a:lnTo>
+                    <a:pt x="1477234" y="563139"/>
+                  </a:lnTo>
+                  <a:lnTo>
+                    <a:pt x="1547578" y="582064"/>
+                  </a:lnTo>
+                  <a:lnTo>
+                    <a:pt x="1617923" y="600428"/>
+                  </a:lnTo>
+                  <a:lnTo>
+                    <a:pt x="1688267" y="618245"/>
+                  </a:lnTo>
+                  <a:lnTo>
+                    <a:pt x="1758612" y="635533"/>
+                  </a:lnTo>
+                  <a:lnTo>
+                    <a:pt x="1828956" y="652307"/>
+                  </a:lnTo>
+                  <a:lnTo>
+                    <a:pt x="1899301" y="668583"/>
+                  </a:lnTo>
+                  <a:lnTo>
+                    <a:pt x="1969645" y="684375"/>
+                  </a:lnTo>
+                  <a:lnTo>
+                    <a:pt x="2039990" y="699697"/>
+                  </a:lnTo>
+                  <a:lnTo>
+                    <a:pt x="2110334" y="714565"/>
+                  </a:lnTo>
+                  <a:lnTo>
+                    <a:pt x="2180679" y="728990"/>
+                  </a:lnTo>
+                  <a:lnTo>
+                    <a:pt x="2251023" y="742987"/>
+                  </a:lnTo>
+                  <a:lnTo>
+                    <a:pt x="2321368" y="756568"/>
+                  </a:lnTo>
+                  <a:lnTo>
+                    <a:pt x="2391712" y="769745"/>
+                  </a:lnTo>
+                  <a:lnTo>
+                    <a:pt x="2462057" y="782530"/>
+                  </a:lnTo>
+                  <a:lnTo>
+                    <a:pt x="2532401" y="794936"/>
+                  </a:lnTo>
+                  <a:lnTo>
+                    <a:pt x="2602746" y="806973"/>
+                  </a:lnTo>
+                  <a:lnTo>
+                    <a:pt x="2673090" y="818652"/>
+                  </a:lnTo>
+                  <a:lnTo>
+                    <a:pt x="2743435" y="829984"/>
+                  </a:lnTo>
+                  <a:lnTo>
+                    <a:pt x="2813779" y="840980"/>
+                  </a:lnTo>
+                  <a:lnTo>
+                    <a:pt x="2884124" y="851648"/>
+                  </a:lnTo>
+                  <a:lnTo>
+                    <a:pt x="2954468" y="862000"/>
+                  </a:lnTo>
+                  <a:lnTo>
+                    <a:pt x="3024813" y="872044"/>
+                  </a:lnTo>
+                  <a:lnTo>
+                    <a:pt x="3095157" y="881789"/>
+                  </a:lnTo>
+                  <a:lnTo>
+                    <a:pt x="3165502" y="891245"/>
+                  </a:lnTo>
+                  <a:lnTo>
+                    <a:pt x="3235846" y="900420"/>
+                  </a:lnTo>
+                  <a:lnTo>
+                    <a:pt x="3306191" y="904295"/>
+                  </a:lnTo>
+                  <a:lnTo>
+                    <a:pt x="3376535" y="907999"/>
+                  </a:lnTo>
+                  <a:lnTo>
+                    <a:pt x="3446880" y="911657"/>
+                  </a:lnTo>
+                  <a:lnTo>
+                    <a:pt x="3517224" y="915268"/>
+                  </a:lnTo>
+                  <a:lnTo>
+                    <a:pt x="3587569" y="918835"/>
+                  </a:lnTo>
+                  <a:lnTo>
+                    <a:pt x="3657913" y="922357"/>
+                  </a:lnTo>
+                  <a:lnTo>
+                    <a:pt x="3728257" y="925834"/>
+                  </a:lnTo>
+                  <a:lnTo>
+                    <a:pt x="3798602" y="929268"/>
+                  </a:lnTo>
+                  <a:lnTo>
+                    <a:pt x="3868946" y="932659"/>
+                  </a:lnTo>
+                  <a:lnTo>
+                    <a:pt x="3939291" y="936008"/>
+                  </a:lnTo>
+                  <a:lnTo>
+                    <a:pt x="4009635" y="939315"/>
+                  </a:lnTo>
+                  <a:lnTo>
+                    <a:pt x="4079980" y="942580"/>
+                  </a:lnTo>
+                  <a:lnTo>
+                    <a:pt x="4150324" y="945804"/>
+                  </a:lnTo>
+                  <a:lnTo>
+                    <a:pt x="4220669" y="948988"/>
+                  </a:lnTo>
+                  <a:lnTo>
+                    <a:pt x="4291013" y="952132"/>
+                  </a:lnTo>
+                  <a:lnTo>
+                    <a:pt x="4361358" y="955237"/>
+                  </a:lnTo>
+                  <a:lnTo>
+                    <a:pt x="4431702" y="958303"/>
+                  </a:lnTo>
+                  <a:lnTo>
+                    <a:pt x="4502047" y="961330"/>
+                  </a:lnTo>
+                  <a:lnTo>
+                    <a:pt x="4572391" y="964319"/>
+                  </a:lnTo>
+                  <a:lnTo>
+                    <a:pt x="4642736" y="967271"/>
+                  </a:lnTo>
+                  <a:lnTo>
+                    <a:pt x="4713080" y="970186"/>
+                  </a:lnTo>
+                  <a:lnTo>
+                    <a:pt x="4783425" y="973065"/>
+                  </a:lnTo>
+                  <a:lnTo>
+                    <a:pt x="4853769" y="975907"/>
+                  </a:lnTo>
+                  <a:lnTo>
+                    <a:pt x="4924114" y="978714"/>
+                  </a:lnTo>
+                  <a:lnTo>
+                    <a:pt x="4994458" y="981486"/>
+                  </a:lnTo>
+                  <a:lnTo>
+                    <a:pt x="5064803" y="984223"/>
+                  </a:lnTo>
+                  <a:lnTo>
+                    <a:pt x="5135147" y="986925"/>
+                  </a:lnTo>
+                  <a:lnTo>
+                    <a:pt x="5205492" y="989594"/>
+                  </a:lnTo>
+                  <a:lnTo>
+                    <a:pt x="5275836" y="992229"/>
+                  </a:lnTo>
+                  <a:lnTo>
+                    <a:pt x="5346181" y="994832"/>
+                  </a:lnTo>
+                  <a:lnTo>
+                    <a:pt x="5416525" y="997402"/>
+                  </a:lnTo>
+                  <a:lnTo>
+                    <a:pt x="5486870" y="999939"/>
+                  </a:lnTo>
+                  <a:lnTo>
+                    <a:pt x="5557214" y="1002445"/>
+                  </a:lnTo>
+                  <a:lnTo>
+                    <a:pt x="5627559" y="1004919"/>
+                  </a:lnTo>
+                  <a:lnTo>
+                    <a:pt x="5697903" y="1007363"/>
+                  </a:lnTo>
+                  <a:lnTo>
+                    <a:pt x="5768248" y="1009775"/>
+                  </a:lnTo>
+                  <a:lnTo>
+                    <a:pt x="5838592" y="1012158"/>
+                  </a:lnTo>
+                  <a:lnTo>
+                    <a:pt x="5908937" y="1014511"/>
+                  </a:lnTo>
+                  <a:lnTo>
+                    <a:pt x="5979281" y="1016834"/>
+                  </a:lnTo>
+                  <a:lnTo>
+                    <a:pt x="6049626" y="1019128"/>
+                  </a:lnTo>
+                  <a:lnTo>
+                    <a:pt x="6119970" y="1021393"/>
+                  </a:lnTo>
+                  <a:lnTo>
+                    <a:pt x="6190315" y="1023630"/>
+                  </a:lnTo>
+                  <a:lnTo>
+                    <a:pt x="6260659" y="1025839"/>
+                  </a:lnTo>
+                  <a:lnTo>
+                    <a:pt x="6331004" y="1028021"/>
+                  </a:lnTo>
+                  <a:lnTo>
+                    <a:pt x="6401348" y="1030175"/>
+                  </a:lnTo>
+                  <a:lnTo>
+                    <a:pt x="6471693" y="1032302"/>
+                  </a:lnTo>
+                  <a:lnTo>
+                    <a:pt x="6542037" y="1034402"/>
+                  </a:lnTo>
+                  <a:lnTo>
+                    <a:pt x="6612382" y="1036476"/>
+                  </a:lnTo>
+                  <a:lnTo>
+                    <a:pt x="6682726" y="1038524"/>
+                  </a:lnTo>
+                  <a:lnTo>
+                    <a:pt x="6753071" y="1040547"/>
+                  </a:lnTo>
+                  <a:lnTo>
+                    <a:pt x="6823415" y="1042544"/>
+                  </a:lnTo>
+                  <a:lnTo>
+                    <a:pt x="6893760" y="1044516"/>
+                  </a:lnTo>
+                  <a:lnTo>
+                    <a:pt x="6964104" y="1046463"/>
+                  </a:lnTo>
+                  <a:lnTo>
+                    <a:pt x="6964104" y="1139427"/>
+                  </a:lnTo>
+                  <a:lnTo>
+                    <a:pt x="6893760" y="1137573"/>
+                  </a:lnTo>
+                  <a:lnTo>
+                    <a:pt x="6823415" y="1135662"/>
+                  </a:lnTo>
+                  <a:lnTo>
+                    <a:pt x="6753071" y="1133692"/>
+                  </a:lnTo>
+                  <a:lnTo>
+                    <a:pt x="6682726" y="1131662"/>
+                  </a:lnTo>
+                  <a:lnTo>
+                    <a:pt x="6612382" y="1129570"/>
+                  </a:lnTo>
+                  <a:lnTo>
+                    <a:pt x="6542037" y="1127414"/>
+                  </a:lnTo>
+                  <a:lnTo>
+                    <a:pt x="6471693" y="1125192"/>
+                  </a:lnTo>
+                  <a:lnTo>
+                    <a:pt x="6401348" y="1122901"/>
+                  </a:lnTo>
+                  <a:lnTo>
+                    <a:pt x="6331004" y="1120541"/>
+                  </a:lnTo>
+                  <a:lnTo>
+                    <a:pt x="6260659" y="1118108"/>
+                  </a:lnTo>
+                  <a:lnTo>
+                    <a:pt x="6190315" y="1115601"/>
+                  </a:lnTo>
+                  <a:lnTo>
+                    <a:pt x="6119970" y="1113017"/>
+                  </a:lnTo>
+                  <a:lnTo>
+                    <a:pt x="6049626" y="1110354"/>
+                  </a:lnTo>
+                  <a:lnTo>
+                    <a:pt x="5979281" y="1107609"/>
+                  </a:lnTo>
+                  <a:lnTo>
+                    <a:pt x="5908937" y="1104780"/>
+                  </a:lnTo>
+                  <a:lnTo>
+                    <a:pt x="5838592" y="1101865"/>
+                  </a:lnTo>
+                  <a:lnTo>
+                    <a:pt x="5768248" y="1098860"/>
+                  </a:lnTo>
+                  <a:lnTo>
+                    <a:pt x="5697903" y="1095763"/>
+                  </a:lnTo>
+                  <a:lnTo>
+                    <a:pt x="5627559" y="1092571"/>
+                  </a:lnTo>
+                  <a:lnTo>
+                    <a:pt x="5557214" y="1089282"/>
+                  </a:lnTo>
+                  <a:lnTo>
+                    <a:pt x="5486870" y="1085892"/>
+                  </a:lnTo>
+                  <a:lnTo>
+                    <a:pt x="5416525" y="1082398"/>
+                  </a:lnTo>
+                  <a:lnTo>
+                    <a:pt x="5346181" y="1078797"/>
+                  </a:lnTo>
+                  <a:lnTo>
+                    <a:pt x="5275836" y="1075085"/>
+                  </a:lnTo>
+                  <a:lnTo>
+                    <a:pt x="5205492" y="1071260"/>
+                  </a:lnTo>
+                  <a:lnTo>
+                    <a:pt x="5135147" y="1067318"/>
+                  </a:lnTo>
+                  <a:lnTo>
+                    <a:pt x="5064803" y="1063255"/>
+                  </a:lnTo>
+                  <a:lnTo>
+                    <a:pt x="4994458" y="1059068"/>
+                  </a:lnTo>
+                  <a:lnTo>
+                    <a:pt x="4924114" y="1054752"/>
+                  </a:lnTo>
+                  <a:lnTo>
+                    <a:pt x="4853769" y="1050305"/>
+                  </a:lnTo>
+                  <a:lnTo>
+                    <a:pt x="4783425" y="1045721"/>
+                  </a:lnTo>
+                  <a:lnTo>
+                    <a:pt x="4713080" y="1040996"/>
+                  </a:lnTo>
+                  <a:lnTo>
+                    <a:pt x="4642736" y="1036127"/>
+                  </a:lnTo>
+                  <a:lnTo>
+                    <a:pt x="4572391" y="1031109"/>
+                  </a:lnTo>
+                  <a:lnTo>
+                    <a:pt x="4502047" y="1025937"/>
+                  </a:lnTo>
+                  <a:lnTo>
+                    <a:pt x="4431702" y="1020607"/>
+                  </a:lnTo>
+                  <a:lnTo>
+                    <a:pt x="4361358" y="1015113"/>
+                  </a:lnTo>
+                  <a:lnTo>
+                    <a:pt x="4291013" y="1009451"/>
+                  </a:lnTo>
+                  <a:lnTo>
+                    <a:pt x="4220669" y="1003616"/>
+                  </a:lnTo>
+                  <a:lnTo>
+                    <a:pt x="4150324" y="997602"/>
+                  </a:lnTo>
+                  <a:lnTo>
+                    <a:pt x="4079980" y="991404"/>
+                  </a:lnTo>
+                  <a:lnTo>
+                    <a:pt x="4009635" y="985016"/>
+                  </a:lnTo>
+                  <a:lnTo>
+                    <a:pt x="3939291" y="978432"/>
+                  </a:lnTo>
+                  <a:lnTo>
+                    <a:pt x="3868946" y="971646"/>
+                  </a:lnTo>
+                  <a:lnTo>
+                    <a:pt x="3798602" y="964653"/>
+                  </a:lnTo>
+                  <a:lnTo>
+                    <a:pt x="3728257" y="957446"/>
+                  </a:lnTo>
+                  <a:lnTo>
+                    <a:pt x="3657913" y="950018"/>
+                  </a:lnTo>
+                  <a:lnTo>
+                    <a:pt x="3587569" y="942362"/>
+                  </a:lnTo>
+                  <a:lnTo>
+                    <a:pt x="3517224" y="934472"/>
+                  </a:lnTo>
+                  <a:lnTo>
+                    <a:pt x="3446880" y="926340"/>
+                  </a:lnTo>
+                  <a:lnTo>
+                    <a:pt x="3376535" y="917959"/>
+                  </a:lnTo>
+                  <a:lnTo>
+                    <a:pt x="3306191" y="909322"/>
+                  </a:lnTo>
+                  <a:lnTo>
+                    <a:pt x="3235846" y="900544"/>
+                  </a:lnTo>
+                  <a:lnTo>
+                    <a:pt x="3165502" y="896746"/>
+                  </a:lnTo>
+                  <a:lnTo>
+                    <a:pt x="3095157" y="892899"/>
+                  </a:lnTo>
+                  <a:lnTo>
+                    <a:pt x="3024813" y="889004"/>
+                  </a:lnTo>
+                  <a:lnTo>
+                    <a:pt x="2954468" y="885059"/>
+                  </a:lnTo>
+                  <a:lnTo>
+                    <a:pt x="2884124" y="881064"/>
+                  </a:lnTo>
+                  <a:lnTo>
+                    <a:pt x="2813779" y="877018"/>
+                  </a:lnTo>
+                  <a:lnTo>
+                    <a:pt x="2743435" y="872922"/>
+                  </a:lnTo>
+                  <a:lnTo>
+                    <a:pt x="2673090" y="868773"/>
+                  </a:lnTo>
+                  <a:lnTo>
+                    <a:pt x="2602746" y="864571"/>
+                  </a:lnTo>
+                  <a:lnTo>
+                    <a:pt x="2532401" y="860316"/>
+                  </a:lnTo>
+                  <a:lnTo>
+                    <a:pt x="2462057" y="856007"/>
+                  </a:lnTo>
+                  <a:lnTo>
+                    <a:pt x="2391712" y="851644"/>
+                  </a:lnTo>
+                  <a:lnTo>
+                    <a:pt x="2321368" y="847225"/>
+                  </a:lnTo>
+                  <a:lnTo>
+                    <a:pt x="2251023" y="842750"/>
+                  </a:lnTo>
+                  <a:lnTo>
+                    <a:pt x="2180679" y="838219"/>
+                  </a:lnTo>
+                  <a:lnTo>
+                    <a:pt x="2110334" y="833630"/>
+                  </a:lnTo>
+                  <a:lnTo>
+                    <a:pt x="2039990" y="828982"/>
+                  </a:lnTo>
+                  <a:lnTo>
+                    <a:pt x="1969645" y="824276"/>
+                  </a:lnTo>
+                  <a:lnTo>
+                    <a:pt x="1899301" y="819510"/>
+                  </a:lnTo>
+                  <a:lnTo>
+                    <a:pt x="1828956" y="814683"/>
+                  </a:lnTo>
+                  <a:lnTo>
+                    <a:pt x="1758612" y="809796"/>
+                  </a:lnTo>
+                  <a:lnTo>
+                    <a:pt x="1688267" y="804846"/>
+                  </a:lnTo>
+                  <a:lnTo>
+                    <a:pt x="1617923" y="799833"/>
+                  </a:lnTo>
+                  <a:lnTo>
+                    <a:pt x="1547578" y="794757"/>
+                  </a:lnTo>
+                  <a:lnTo>
+                    <a:pt x="1477234" y="789617"/>
+                  </a:lnTo>
+                  <a:lnTo>
+                    <a:pt x="1406889" y="784411"/>
+                  </a:lnTo>
+                  <a:lnTo>
+                    <a:pt x="1336545" y="779139"/>
+                  </a:lnTo>
+                  <a:lnTo>
+                    <a:pt x="1266200" y="773801"/>
+                  </a:lnTo>
+                  <a:lnTo>
+                    <a:pt x="1195856" y="768394"/>
+                  </a:lnTo>
+                  <a:lnTo>
+                    <a:pt x="1125511" y="762920"/>
+                  </a:lnTo>
+                  <a:lnTo>
+                    <a:pt x="1055167" y="757375"/>
+                  </a:lnTo>
+                  <a:lnTo>
+                    <a:pt x="984822" y="751760"/>
+                  </a:lnTo>
+                  <a:lnTo>
+                    <a:pt x="914478" y="746075"/>
+                  </a:lnTo>
+                  <a:lnTo>
+                    <a:pt x="844133" y="740316"/>
+                  </a:lnTo>
+                  <a:lnTo>
+                    <a:pt x="773789" y="734485"/>
+                  </a:lnTo>
+                  <a:lnTo>
+                    <a:pt x="703444" y="728580"/>
+                  </a:lnTo>
+                  <a:lnTo>
+                    <a:pt x="633100" y="722600"/>
+                  </a:lnTo>
+                  <a:lnTo>
+                    <a:pt x="562755" y="716544"/>
+                  </a:lnTo>
+                  <a:lnTo>
+                    <a:pt x="492411" y="710412"/>
+                  </a:lnTo>
+                  <a:lnTo>
+                    <a:pt x="422066" y="704201"/>
+                  </a:lnTo>
+                  <a:lnTo>
+                    <a:pt x="351722" y="697912"/>
+                  </a:lnTo>
+                  <a:lnTo>
+                    <a:pt x="281377" y="691543"/>
+                  </a:lnTo>
+                  <a:lnTo>
+                    <a:pt x="211033" y="685093"/>
+                  </a:lnTo>
+                  <a:lnTo>
+                    <a:pt x="140688" y="678561"/>
+                  </a:lnTo>
+                  <a:lnTo>
+                    <a:pt x="70344" y="671947"/>
+                  </a:lnTo>
+                  <a:lnTo>
+                    <a:pt x="0" y="665248"/>
                   </a:lnTo>
                   <a:close/>
                 </a:path>
@@ -3584,643 +3619,318 @@
         </p:sp>
         <p:sp>
           <p:nvSpPr>
-            <p:cNvPr id="21" name="pl21"/>
-            <p:cNvSpPr/>
-            <p:nvPr/>
-          </p:nvSpPr>
-          <p:spPr>
-            <a:xfrm>
-              <a:off x="1172049" y="2232099"/>
-              <a:ext cx="7090630" cy="2899783"/>
-            </a:xfrm>
-            <a:custGeom>
-              <a:avLst/>
-              <a:pathLst>
-                <a:path w="7090630" h="2899783">
-                  <a:moveTo>
-                    <a:pt x="0" y="0"/>
-                  </a:moveTo>
-                  <a:lnTo>
-                    <a:pt x="71622" y="98818"/>
-                  </a:lnTo>
-                  <a:lnTo>
-                    <a:pt x="143245" y="194700"/>
-                  </a:lnTo>
-                  <a:lnTo>
-                    <a:pt x="214867" y="287732"/>
-                  </a:lnTo>
-                  <a:lnTo>
-                    <a:pt x="286490" y="377999"/>
-                  </a:lnTo>
-                  <a:lnTo>
-                    <a:pt x="358112" y="465584"/>
-                  </a:lnTo>
-                  <a:lnTo>
-                    <a:pt x="429735" y="550566"/>
-                  </a:lnTo>
-                  <a:lnTo>
-                    <a:pt x="501357" y="633022"/>
-                  </a:lnTo>
-                  <a:lnTo>
-                    <a:pt x="572980" y="713028"/>
-                  </a:lnTo>
-                  <a:lnTo>
-                    <a:pt x="644602" y="790656"/>
-                  </a:lnTo>
-                  <a:lnTo>
-                    <a:pt x="716225" y="865978"/>
-                  </a:lnTo>
-                  <a:lnTo>
-                    <a:pt x="787847" y="939060"/>
-                  </a:lnTo>
-                  <a:lnTo>
-                    <a:pt x="859470" y="1009971"/>
-                  </a:lnTo>
-                  <a:lnTo>
-                    <a:pt x="931092" y="1078775"/>
-                  </a:lnTo>
-                  <a:lnTo>
-                    <a:pt x="1002715" y="1145534"/>
-                  </a:lnTo>
-                  <a:lnTo>
-                    <a:pt x="1074337" y="1210309"/>
-                  </a:lnTo>
-                  <a:lnTo>
-                    <a:pt x="1145960" y="1273158"/>
-                  </a:lnTo>
-                  <a:lnTo>
-                    <a:pt x="1217582" y="1334140"/>
-                  </a:lnTo>
-                  <a:lnTo>
-                    <a:pt x="1289205" y="1393310"/>
-                  </a:lnTo>
-                  <a:lnTo>
-                    <a:pt x="1360827" y="1450721"/>
-                  </a:lnTo>
-                  <a:lnTo>
-                    <a:pt x="1432450" y="1506427"/>
-                  </a:lnTo>
-                  <a:lnTo>
-                    <a:pt x="1504073" y="1560476"/>
-                  </a:lnTo>
-                  <a:lnTo>
-                    <a:pt x="1575695" y="1612920"/>
-                  </a:lnTo>
-                  <a:lnTo>
-                    <a:pt x="1647318" y="1663805"/>
-                  </a:lnTo>
-                  <a:lnTo>
-                    <a:pt x="1718940" y="1713177"/>
-                  </a:lnTo>
-                  <a:lnTo>
-                    <a:pt x="1790563" y="1761083"/>
-                  </a:lnTo>
-                  <a:lnTo>
-                    <a:pt x="1862185" y="1807564"/>
-                  </a:lnTo>
-                  <a:lnTo>
-                    <a:pt x="1933808" y="1852665"/>
-                  </a:lnTo>
-                  <a:lnTo>
-                    <a:pt x="2005430" y="1896425"/>
-                  </a:lnTo>
-                  <a:lnTo>
-                    <a:pt x="2077053" y="1938884"/>
-                  </a:lnTo>
-                  <a:lnTo>
-                    <a:pt x="2148675" y="1980082"/>
-                  </a:lnTo>
-                  <a:lnTo>
-                    <a:pt x="2220298" y="2020055"/>
-                  </a:lnTo>
-                  <a:lnTo>
-                    <a:pt x="2291920" y="2058840"/>
-                  </a:lnTo>
-                  <a:lnTo>
-                    <a:pt x="2363543" y="2096473"/>
-                  </a:lnTo>
-                  <a:lnTo>
-                    <a:pt x="2435165" y="2132988"/>
-                  </a:lnTo>
-                  <a:lnTo>
-                    <a:pt x="2506788" y="2168417"/>
-                  </a:lnTo>
-                  <a:lnTo>
-                    <a:pt x="2578410" y="2202793"/>
-                  </a:lnTo>
-                  <a:lnTo>
-                    <a:pt x="2650033" y="2236148"/>
-                  </a:lnTo>
-                  <a:lnTo>
-                    <a:pt x="2721655" y="2268511"/>
-                  </a:lnTo>
-                  <a:lnTo>
-                    <a:pt x="2793278" y="2299913"/>
-                  </a:lnTo>
-                  <a:lnTo>
-                    <a:pt x="2864901" y="2330382"/>
-                  </a:lnTo>
-                  <a:lnTo>
-                    <a:pt x="2936523" y="2359945"/>
-                  </a:lnTo>
-                  <a:lnTo>
-                    <a:pt x="3008146" y="2388629"/>
-                  </a:lnTo>
-                  <a:lnTo>
-                    <a:pt x="3079768" y="2416461"/>
-                  </a:lnTo>
-                  <a:lnTo>
-                    <a:pt x="3151391" y="2443466"/>
-                  </a:lnTo>
-                  <a:lnTo>
-                    <a:pt x="3223013" y="2469668"/>
-                  </a:lnTo>
-                  <a:lnTo>
-                    <a:pt x="3294636" y="2495092"/>
-                  </a:lnTo>
-                  <a:lnTo>
-                    <a:pt x="3366258" y="2505832"/>
-                  </a:lnTo>
-                  <a:lnTo>
-                    <a:pt x="3437881" y="2516095"/>
-                  </a:lnTo>
-                  <a:lnTo>
-                    <a:pt x="3509503" y="2526230"/>
-                  </a:lnTo>
-                  <a:lnTo>
-                    <a:pt x="3581126" y="2536238"/>
-                  </a:lnTo>
-                  <a:lnTo>
-                    <a:pt x="3652748" y="2546121"/>
-                  </a:lnTo>
-                  <a:lnTo>
-                    <a:pt x="3724371" y="2555880"/>
-                  </a:lnTo>
-                  <a:lnTo>
-                    <a:pt x="3795993" y="2565517"/>
-                  </a:lnTo>
-                  <a:lnTo>
-                    <a:pt x="3867616" y="2575033"/>
-                  </a:lnTo>
-                  <a:lnTo>
-                    <a:pt x="3939238" y="2584429"/>
-                  </a:lnTo>
-                  <a:lnTo>
-                    <a:pt x="4010861" y="2593709"/>
-                  </a:lnTo>
-                  <a:lnTo>
-                    <a:pt x="4082483" y="2602871"/>
-                  </a:lnTo>
-                  <a:lnTo>
-                    <a:pt x="4154106" y="2611919"/>
-                  </a:lnTo>
-                  <a:lnTo>
-                    <a:pt x="4225729" y="2620854"/>
-                  </a:lnTo>
-                  <a:lnTo>
-                    <a:pt x="4297351" y="2629677"/>
-                  </a:lnTo>
-                  <a:lnTo>
-                    <a:pt x="4368974" y="2638389"/>
-                  </a:lnTo>
-                  <a:lnTo>
-                    <a:pt x="4440596" y="2646992"/>
-                  </a:lnTo>
-                  <a:lnTo>
-                    <a:pt x="4512219" y="2655487"/>
-                  </a:lnTo>
-                  <a:lnTo>
-                    <a:pt x="4583841" y="2663876"/>
-                  </a:lnTo>
-                  <a:lnTo>
-                    <a:pt x="4655464" y="2672160"/>
-                  </a:lnTo>
-                  <a:lnTo>
-                    <a:pt x="4727086" y="2680340"/>
-                  </a:lnTo>
-                  <a:lnTo>
-                    <a:pt x="4798709" y="2688418"/>
-                  </a:lnTo>
-                  <a:lnTo>
-                    <a:pt x="4870331" y="2696394"/>
-                  </a:lnTo>
-                  <a:lnTo>
-                    <a:pt x="4941954" y="2704270"/>
-                  </a:lnTo>
-                  <a:lnTo>
-                    <a:pt x="5013576" y="2712048"/>
-                  </a:lnTo>
-                  <a:lnTo>
-                    <a:pt x="5085199" y="2719729"/>
-                  </a:lnTo>
-                  <a:lnTo>
-                    <a:pt x="5156821" y="2727313"/>
-                  </a:lnTo>
-                  <a:lnTo>
-                    <a:pt x="5228444" y="2734802"/>
-                  </a:lnTo>
-                  <a:lnTo>
-                    <a:pt x="5300066" y="2742197"/>
-                  </a:lnTo>
-                  <a:lnTo>
-                    <a:pt x="5371689" y="2749500"/>
-                  </a:lnTo>
-                  <a:lnTo>
-                    <a:pt x="5443311" y="2756711"/>
-                  </a:lnTo>
-                  <a:lnTo>
-                    <a:pt x="5514934" y="2763832"/>
-                  </a:lnTo>
-                  <a:lnTo>
-                    <a:pt x="5586557" y="2770864"/>
-                  </a:lnTo>
-                  <a:lnTo>
-                    <a:pt x="5658179" y="2777807"/>
-                  </a:lnTo>
-                  <a:lnTo>
-                    <a:pt x="5729802" y="2784664"/>
-                  </a:lnTo>
-                  <a:lnTo>
-                    <a:pt x="5801424" y="2791434"/>
-                  </a:lnTo>
-                  <a:lnTo>
-                    <a:pt x="5873047" y="2798120"/>
-                  </a:lnTo>
-                  <a:lnTo>
-                    <a:pt x="5944669" y="2804722"/>
-                  </a:lnTo>
-                  <a:lnTo>
-                    <a:pt x="6016292" y="2811242"/>
-                  </a:lnTo>
-                  <a:lnTo>
-                    <a:pt x="6087914" y="2817680"/>
-                  </a:lnTo>
-                  <a:lnTo>
-                    <a:pt x="6159537" y="2824037"/>
-                  </a:lnTo>
-                  <a:lnTo>
-                    <a:pt x="6231159" y="2830314"/>
-                  </a:lnTo>
-                  <a:lnTo>
-                    <a:pt x="6302782" y="2836513"/>
-                  </a:lnTo>
-                  <a:lnTo>
-                    <a:pt x="6374404" y="2842634"/>
-                  </a:lnTo>
-                  <a:lnTo>
-                    <a:pt x="6446027" y="2848679"/>
-                  </a:lnTo>
-                  <a:lnTo>
-                    <a:pt x="6517649" y="2854647"/>
-                  </a:lnTo>
-                  <a:lnTo>
-                    <a:pt x="6589272" y="2860541"/>
-                  </a:lnTo>
-                  <a:lnTo>
-                    <a:pt x="6660894" y="2866362"/>
-                  </a:lnTo>
-                  <a:lnTo>
-                    <a:pt x="6732517" y="2872109"/>
-                  </a:lnTo>
-                  <a:lnTo>
-                    <a:pt x="6804139" y="2877784"/>
-                  </a:lnTo>
-                  <a:lnTo>
-                    <a:pt x="6875762" y="2883388"/>
-                  </a:lnTo>
-                  <a:lnTo>
-                    <a:pt x="6947385" y="2888922"/>
-                  </a:lnTo>
-                  <a:lnTo>
-                    <a:pt x="7019007" y="2894387"/>
-                  </a:lnTo>
-                  <a:lnTo>
-                    <a:pt x="7090630" y="2899783"/>
-                  </a:lnTo>
-                </a:path>
-              </a:pathLst>
-            </a:custGeom>
-          </p:spPr>
-          <p:txBody>
-            <a:bodyPr/>
-            <a:lstStyle/>
-            <a:p/>
-          </p:txBody>
-        </p:sp>
-        <p:sp>
-          <p:nvSpPr>
             <p:cNvPr id="22" name="pl22"/>
             <p:cNvSpPr/>
             <p:nvPr/>
           </p:nvSpPr>
           <p:spPr>
             <a:xfrm>
-              <a:off x="1172049" y="4075524"/>
-              <a:ext cx="7090630" cy="1313964"/>
+              <a:off x="1235312" y="2200325"/>
+              <a:ext cx="6964104" cy="1046463"/>
             </a:xfrm>
             <a:custGeom>
               <a:avLst/>
               <a:pathLst>
-                <a:path w="7090630" h="1313964">
+                <a:path w="6964104" h="1046463">
                   <a:moveTo>
-                    <a:pt x="7090630" y="1313964"/>
+                    <a:pt x="0" y="0"/>
                   </a:moveTo>
                   <a:lnTo>
-                    <a:pt x="7019007" y="1308826"/>
-                  </a:lnTo>
-                  <a:lnTo>
-                    <a:pt x="6947385" y="1303530"/>
-                  </a:lnTo>
-                  <a:lnTo>
-                    <a:pt x="6875762" y="1298072"/>
-                  </a:lnTo>
-                  <a:lnTo>
-                    <a:pt x="6804139" y="1292447"/>
-                  </a:lnTo>
-                  <a:lnTo>
-                    <a:pt x="6732517" y="1286650"/>
-                  </a:lnTo>
-                  <a:lnTo>
-                    <a:pt x="6660894" y="1280675"/>
-                  </a:lnTo>
-                  <a:lnTo>
-                    <a:pt x="6589272" y="1274517"/>
-                  </a:lnTo>
-                  <a:lnTo>
-                    <a:pt x="6517649" y="1268170"/>
-                  </a:lnTo>
-                  <a:lnTo>
-                    <a:pt x="6446027" y="1261630"/>
-                  </a:lnTo>
-                  <a:lnTo>
-                    <a:pt x="6374404" y="1254888"/>
-                  </a:lnTo>
-                  <a:lnTo>
-                    <a:pt x="6302782" y="1247941"/>
-                  </a:lnTo>
-                  <a:lnTo>
-                    <a:pt x="6231159" y="1240780"/>
-                  </a:lnTo>
-                  <a:lnTo>
-                    <a:pt x="6159537" y="1233400"/>
-                  </a:lnTo>
-                  <a:lnTo>
-                    <a:pt x="6087914" y="1225794"/>
-                  </a:lnTo>
-                  <a:lnTo>
-                    <a:pt x="6016292" y="1217956"/>
-                  </a:lnTo>
-                  <a:lnTo>
-                    <a:pt x="5944669" y="1209877"/>
-                  </a:lnTo>
-                  <a:lnTo>
-                    <a:pt x="5873047" y="1201550"/>
-                  </a:lnTo>
-                  <a:lnTo>
-                    <a:pt x="5801424" y="1192969"/>
-                  </a:lnTo>
-                  <a:lnTo>
-                    <a:pt x="5729802" y="1184125"/>
-                  </a:lnTo>
-                  <a:lnTo>
-                    <a:pt x="5658179" y="1175010"/>
-                  </a:lnTo>
-                  <a:lnTo>
-                    <a:pt x="5586557" y="1165615"/>
-                  </a:lnTo>
-                  <a:lnTo>
-                    <a:pt x="5514934" y="1155933"/>
-                  </a:lnTo>
-                  <a:lnTo>
-                    <a:pt x="5443311" y="1145955"/>
-                  </a:lnTo>
-                  <a:lnTo>
-                    <a:pt x="5371689" y="1135671"/>
-                  </a:lnTo>
-                  <a:lnTo>
-                    <a:pt x="5300066" y="1125072"/>
-                  </a:lnTo>
-                  <a:lnTo>
-                    <a:pt x="5228444" y="1114148"/>
-                  </a:lnTo>
-                  <a:lnTo>
-                    <a:pt x="5156821" y="1102889"/>
-                  </a:lnTo>
-                  <a:lnTo>
-                    <a:pt x="5085199" y="1091286"/>
-                  </a:lnTo>
-                  <a:lnTo>
-                    <a:pt x="5013576" y="1079327"/>
-                  </a:lnTo>
-                  <a:lnTo>
-                    <a:pt x="4941954" y="1067003"/>
-                  </a:lnTo>
-                  <a:lnTo>
-                    <a:pt x="4870331" y="1054300"/>
-                  </a:lnTo>
-                  <a:lnTo>
-                    <a:pt x="4798709" y="1041209"/>
-                  </a:lnTo>
-                  <a:lnTo>
-                    <a:pt x="4727086" y="1027716"/>
-                  </a:lnTo>
-                  <a:lnTo>
-                    <a:pt x="4655464" y="1013811"/>
-                  </a:lnTo>
-                  <a:lnTo>
-                    <a:pt x="4583841" y="999479"/>
-                  </a:lnTo>
-                  <a:lnTo>
-                    <a:pt x="4512219" y="984708"/>
-                  </a:lnTo>
-                  <a:lnTo>
-                    <a:pt x="4440596" y="969485"/>
-                  </a:lnTo>
-                  <a:lnTo>
-                    <a:pt x="4368974" y="953796"/>
-                  </a:lnTo>
-                  <a:lnTo>
-                    <a:pt x="4297351" y="937626"/>
-                  </a:lnTo>
-                  <a:lnTo>
-                    <a:pt x="4225729" y="920961"/>
-                  </a:lnTo>
-                  <a:lnTo>
-                    <a:pt x="4154106" y="903786"/>
-                  </a:lnTo>
-                  <a:lnTo>
-                    <a:pt x="4082483" y="886084"/>
-                  </a:lnTo>
-                  <a:lnTo>
-                    <a:pt x="4010861" y="867841"/>
-                  </a:lnTo>
-                  <a:lnTo>
-                    <a:pt x="3939238" y="849038"/>
-                  </a:lnTo>
-                  <a:lnTo>
-                    <a:pt x="3867616" y="829660"/>
-                  </a:lnTo>
-                  <a:lnTo>
-                    <a:pt x="3795993" y="809688"/>
-                  </a:lnTo>
-                  <a:lnTo>
-                    <a:pt x="3724371" y="789104"/>
-                  </a:lnTo>
-                  <a:lnTo>
-                    <a:pt x="3652748" y="767890"/>
-                  </a:lnTo>
-                  <a:lnTo>
-                    <a:pt x="3581126" y="746027"/>
-                  </a:lnTo>
-                  <a:lnTo>
-                    <a:pt x="3509503" y="723493"/>
-                  </a:lnTo>
-                  <a:lnTo>
-                    <a:pt x="3437881" y="700269"/>
-                  </a:lnTo>
-                  <a:lnTo>
-                    <a:pt x="3366258" y="676335"/>
-                  </a:lnTo>
-                  <a:lnTo>
-                    <a:pt x="3294636" y="652013"/>
-                  </a:lnTo>
-                  <a:lnTo>
-                    <a:pt x="3223013" y="641487"/>
-                  </a:lnTo>
-                  <a:lnTo>
-                    <a:pt x="3151391" y="630828"/>
-                  </a:lnTo>
-                  <a:lnTo>
-                    <a:pt x="3079768" y="620033"/>
-                  </a:lnTo>
-                  <a:lnTo>
-                    <a:pt x="3008146" y="609102"/>
-                  </a:lnTo>
-                  <a:lnTo>
-                    <a:pt x="2936523" y="598032"/>
-                  </a:lnTo>
-                  <a:lnTo>
-                    <a:pt x="2864901" y="586821"/>
-                  </a:lnTo>
-                  <a:lnTo>
-                    <a:pt x="2793278" y="575469"/>
-                  </a:lnTo>
-                  <a:lnTo>
-                    <a:pt x="2721655" y="563972"/>
-                  </a:lnTo>
-                  <a:lnTo>
-                    <a:pt x="2650033" y="552329"/>
-                  </a:lnTo>
-                  <a:lnTo>
-                    <a:pt x="2578410" y="540539"/>
-                  </a:lnTo>
-                  <a:lnTo>
-                    <a:pt x="2506788" y="528599"/>
-                  </a:lnTo>
-                  <a:lnTo>
-                    <a:pt x="2435165" y="516508"/>
-                  </a:lnTo>
-                  <a:lnTo>
-                    <a:pt x="2363543" y="504263"/>
-                  </a:lnTo>
-                  <a:lnTo>
-                    <a:pt x="2291920" y="491863"/>
-                  </a:lnTo>
-                  <a:lnTo>
-                    <a:pt x="2220298" y="479306"/>
-                  </a:lnTo>
-                  <a:lnTo>
-                    <a:pt x="2148675" y="466589"/>
-                  </a:lnTo>
-                  <a:lnTo>
-                    <a:pt x="2077053" y="453711"/>
-                  </a:lnTo>
-                  <a:lnTo>
-                    <a:pt x="2005430" y="440670"/>
-                  </a:lnTo>
-                  <a:lnTo>
-                    <a:pt x="1933808" y="427463"/>
-                  </a:lnTo>
-                  <a:lnTo>
-                    <a:pt x="1862185" y="414089"/>
-                  </a:lnTo>
-                  <a:lnTo>
-                    <a:pt x="1790563" y="400545"/>
-                  </a:lnTo>
-                  <a:lnTo>
-                    <a:pt x="1718940" y="386829"/>
-                  </a:lnTo>
-                  <a:lnTo>
-                    <a:pt x="1647318" y="372939"/>
-                  </a:lnTo>
-                  <a:lnTo>
-                    <a:pt x="1575695" y="358873"/>
-                  </a:lnTo>
-                  <a:lnTo>
-                    <a:pt x="1504073" y="344629"/>
-                  </a:lnTo>
-                  <a:lnTo>
-                    <a:pt x="1432450" y="330204"/>
-                  </a:lnTo>
-                  <a:lnTo>
-                    <a:pt x="1360827" y="315595"/>
-                  </a:lnTo>
-                  <a:lnTo>
-                    <a:pt x="1289205" y="300802"/>
-                  </a:lnTo>
-                  <a:lnTo>
-                    <a:pt x="1217582" y="285821"/>
-                  </a:lnTo>
-                  <a:lnTo>
-                    <a:pt x="1145960" y="270650"/>
-                  </a:lnTo>
-                  <a:lnTo>
-                    <a:pt x="1074337" y="255286"/>
-                  </a:lnTo>
-                  <a:lnTo>
-                    <a:pt x="1002715" y="239727"/>
-                  </a:lnTo>
-                  <a:lnTo>
-                    <a:pt x="931092" y="223972"/>
-                  </a:lnTo>
-                  <a:lnTo>
-                    <a:pt x="859470" y="208016"/>
-                  </a:lnTo>
-                  <a:lnTo>
-                    <a:pt x="787847" y="191858"/>
-                  </a:lnTo>
-                  <a:lnTo>
-                    <a:pt x="716225" y="175494"/>
-                  </a:lnTo>
-                  <a:lnTo>
-                    <a:pt x="644602" y="158924"/>
-                  </a:lnTo>
-                  <a:lnTo>
-                    <a:pt x="572980" y="142143"/>
-                  </a:lnTo>
-                  <a:lnTo>
-                    <a:pt x="501357" y="125149"/>
-                  </a:lnTo>
-                  <a:lnTo>
-                    <a:pt x="429735" y="107939"/>
-                  </a:lnTo>
-                  <a:lnTo>
-                    <a:pt x="358112" y="90511"/>
-                  </a:lnTo>
-                  <a:lnTo>
-                    <a:pt x="286490" y="72863"/>
-                  </a:lnTo>
-                  <a:lnTo>
-                    <a:pt x="214867" y="54990"/>
-                  </a:lnTo>
-                  <a:lnTo>
-                    <a:pt x="143245" y="36890"/>
-                  </a:lnTo>
-                  <a:lnTo>
-                    <a:pt x="71622" y="18561"/>
-                  </a:lnTo>
-                  <a:lnTo>
-                    <a:pt x="0" y="0"/>
+                    <a:pt x="70344" y="35661"/>
+                  </a:lnTo>
+                  <a:lnTo>
+                    <a:pt x="140688" y="70262"/>
+                  </a:lnTo>
+                  <a:lnTo>
+                    <a:pt x="211033" y="103835"/>
+                  </a:lnTo>
+                  <a:lnTo>
+                    <a:pt x="281377" y="136411"/>
+                  </a:lnTo>
+                  <a:lnTo>
+                    <a:pt x="351722" y="168018"/>
+                  </a:lnTo>
+                  <a:lnTo>
+                    <a:pt x="422066" y="198686"/>
+                  </a:lnTo>
+                  <a:lnTo>
+                    <a:pt x="492411" y="228442"/>
+                  </a:lnTo>
+                  <a:lnTo>
+                    <a:pt x="562755" y="257315"/>
+                  </a:lnTo>
+                  <a:lnTo>
+                    <a:pt x="633100" y="285329"/>
+                  </a:lnTo>
+                  <a:lnTo>
+                    <a:pt x="703444" y="312511"/>
+                  </a:lnTo>
+                  <a:lnTo>
+                    <a:pt x="773789" y="338884"/>
+                  </a:lnTo>
+                  <a:lnTo>
+                    <a:pt x="844133" y="364475"/>
+                  </a:lnTo>
+                  <a:lnTo>
+                    <a:pt x="914478" y="389304"/>
+                  </a:lnTo>
+                  <a:lnTo>
+                    <a:pt x="984822" y="413396"/>
+                  </a:lnTo>
+                  <a:lnTo>
+                    <a:pt x="1055167" y="436772"/>
+                  </a:lnTo>
+                  <a:lnTo>
+                    <a:pt x="1125511" y="459453"/>
+                  </a:lnTo>
+                  <a:lnTo>
+                    <a:pt x="1195856" y="481460"/>
+                  </a:lnTo>
+                  <a:lnTo>
+                    <a:pt x="1266200" y="502813"/>
+                  </a:lnTo>
+                  <a:lnTo>
+                    <a:pt x="1336545" y="523531"/>
+                  </a:lnTo>
+                  <a:lnTo>
+                    <a:pt x="1406889" y="543634"/>
+                  </a:lnTo>
+                  <a:lnTo>
+                    <a:pt x="1477234" y="563139"/>
+                  </a:lnTo>
+                  <a:lnTo>
+                    <a:pt x="1547578" y="582064"/>
+                  </a:lnTo>
+                  <a:lnTo>
+                    <a:pt x="1617923" y="600428"/>
+                  </a:lnTo>
+                  <a:lnTo>
+                    <a:pt x="1688267" y="618245"/>
+                  </a:lnTo>
+                  <a:lnTo>
+                    <a:pt x="1758612" y="635533"/>
+                  </a:lnTo>
+                  <a:lnTo>
+                    <a:pt x="1828956" y="652307"/>
+                  </a:lnTo>
+                  <a:lnTo>
+                    <a:pt x="1899301" y="668583"/>
+                  </a:lnTo>
+                  <a:lnTo>
+                    <a:pt x="1969645" y="684375"/>
+                  </a:lnTo>
+                  <a:lnTo>
+                    <a:pt x="2039990" y="699697"/>
+                  </a:lnTo>
+                  <a:lnTo>
+                    <a:pt x="2110334" y="714565"/>
+                  </a:lnTo>
+                  <a:lnTo>
+                    <a:pt x="2180679" y="728990"/>
+                  </a:lnTo>
+                  <a:lnTo>
+                    <a:pt x="2251023" y="742987"/>
+                  </a:lnTo>
+                  <a:lnTo>
+                    <a:pt x="2321368" y="756568"/>
+                  </a:lnTo>
+                  <a:lnTo>
+                    <a:pt x="2391712" y="769745"/>
+                  </a:lnTo>
+                  <a:lnTo>
+                    <a:pt x="2462057" y="782530"/>
+                  </a:lnTo>
+                  <a:lnTo>
+                    <a:pt x="2532401" y="794936"/>
+                  </a:lnTo>
+                  <a:lnTo>
+                    <a:pt x="2602746" y="806973"/>
+                  </a:lnTo>
+                  <a:lnTo>
+                    <a:pt x="2673090" y="818652"/>
+                  </a:lnTo>
+                  <a:lnTo>
+                    <a:pt x="2743435" y="829984"/>
+                  </a:lnTo>
+                  <a:lnTo>
+                    <a:pt x="2813779" y="840980"/>
+                  </a:lnTo>
+                  <a:lnTo>
+                    <a:pt x="2884124" y="851648"/>
+                  </a:lnTo>
+                  <a:lnTo>
+                    <a:pt x="2954468" y="862000"/>
+                  </a:lnTo>
+                  <a:lnTo>
+                    <a:pt x="3024813" y="872044"/>
+                  </a:lnTo>
+                  <a:lnTo>
+                    <a:pt x="3095157" y="881789"/>
+                  </a:lnTo>
+                  <a:lnTo>
+                    <a:pt x="3165502" y="891245"/>
+                  </a:lnTo>
+                  <a:lnTo>
+                    <a:pt x="3235846" y="900420"/>
+                  </a:lnTo>
+                  <a:lnTo>
+                    <a:pt x="3306191" y="904295"/>
+                  </a:lnTo>
+                  <a:lnTo>
+                    <a:pt x="3376535" y="907999"/>
+                  </a:lnTo>
+                  <a:lnTo>
+                    <a:pt x="3446880" y="911657"/>
+                  </a:lnTo>
+                  <a:lnTo>
+                    <a:pt x="3517224" y="915268"/>
+                  </a:lnTo>
+                  <a:lnTo>
+                    <a:pt x="3587569" y="918835"/>
+                  </a:lnTo>
+                  <a:lnTo>
+                    <a:pt x="3657913" y="922357"/>
+                  </a:lnTo>
+                  <a:lnTo>
+                    <a:pt x="3728257" y="925834"/>
+                  </a:lnTo>
+                  <a:lnTo>
+                    <a:pt x="3798602" y="929268"/>
+                  </a:lnTo>
+                  <a:lnTo>
+                    <a:pt x="3868946" y="932659"/>
+                  </a:lnTo>
+                  <a:lnTo>
+                    <a:pt x="3939291" y="936008"/>
+                  </a:lnTo>
+                  <a:lnTo>
+                    <a:pt x="4009635" y="939315"/>
+                  </a:lnTo>
+                  <a:lnTo>
+                    <a:pt x="4079980" y="942580"/>
+                  </a:lnTo>
+                  <a:lnTo>
+                    <a:pt x="4150324" y="945804"/>
+                  </a:lnTo>
+                  <a:lnTo>
+                    <a:pt x="4220669" y="948988"/>
+                  </a:lnTo>
+                  <a:lnTo>
+                    <a:pt x="4291013" y="952132"/>
+                  </a:lnTo>
+                  <a:lnTo>
+                    <a:pt x="4361358" y="955237"/>
+                  </a:lnTo>
+                  <a:lnTo>
+                    <a:pt x="4431702" y="958303"/>
+                  </a:lnTo>
+                  <a:lnTo>
+                    <a:pt x="4502047" y="961330"/>
+                  </a:lnTo>
+                  <a:lnTo>
+                    <a:pt x="4572391" y="964319"/>
+                  </a:lnTo>
+                  <a:lnTo>
+                    <a:pt x="4642736" y="967271"/>
+                  </a:lnTo>
+                  <a:lnTo>
+                    <a:pt x="4713080" y="970186"/>
+                  </a:lnTo>
+                  <a:lnTo>
+                    <a:pt x="4783425" y="973065"/>
+                  </a:lnTo>
+                  <a:lnTo>
+                    <a:pt x="4853769" y="975907"/>
+                  </a:lnTo>
+                  <a:lnTo>
+                    <a:pt x="4924114" y="978714"/>
+                  </a:lnTo>
+                  <a:lnTo>
+                    <a:pt x="4994458" y="981486"/>
+                  </a:lnTo>
+                  <a:lnTo>
+                    <a:pt x="5064803" y="984223"/>
+                  </a:lnTo>
+                  <a:lnTo>
+                    <a:pt x="5135147" y="986925"/>
+                  </a:lnTo>
+                  <a:lnTo>
+                    <a:pt x="5205492" y="989594"/>
+                  </a:lnTo>
+                  <a:lnTo>
+                    <a:pt x="5275836" y="992229"/>
+                  </a:lnTo>
+                  <a:lnTo>
+                    <a:pt x="5346181" y="994832"/>
+                  </a:lnTo>
+                  <a:lnTo>
+                    <a:pt x="5416525" y="997402"/>
+                  </a:lnTo>
+                  <a:lnTo>
+                    <a:pt x="5486870" y="999939"/>
+                  </a:lnTo>
+                  <a:lnTo>
+                    <a:pt x="5557214" y="1002445"/>
+                  </a:lnTo>
+                  <a:lnTo>
+                    <a:pt x="5627559" y="1004919"/>
+                  </a:lnTo>
+                  <a:lnTo>
+                    <a:pt x="5697903" y="1007363"/>
+                  </a:lnTo>
+                  <a:lnTo>
+                    <a:pt x="5768248" y="1009775"/>
+                  </a:lnTo>
+                  <a:lnTo>
+                    <a:pt x="5838592" y="1012158"/>
+                  </a:lnTo>
+                  <a:lnTo>
+                    <a:pt x="5908937" y="1014511"/>
+                  </a:lnTo>
+                  <a:lnTo>
+                    <a:pt x="5979281" y="1016834"/>
+                  </a:lnTo>
+                  <a:lnTo>
+                    <a:pt x="6049626" y="1019128"/>
+                  </a:lnTo>
+                  <a:lnTo>
+                    <a:pt x="6119970" y="1021393"/>
+                  </a:lnTo>
+                  <a:lnTo>
+                    <a:pt x="6190315" y="1023630"/>
+                  </a:lnTo>
+                  <a:lnTo>
+                    <a:pt x="6260659" y="1025839"/>
+                  </a:lnTo>
+                  <a:lnTo>
+                    <a:pt x="6331004" y="1028021"/>
+                  </a:lnTo>
+                  <a:lnTo>
+                    <a:pt x="6401348" y="1030175"/>
+                  </a:lnTo>
+                  <a:lnTo>
+                    <a:pt x="6471693" y="1032302"/>
+                  </a:lnTo>
+                  <a:lnTo>
+                    <a:pt x="6542037" y="1034402"/>
+                  </a:lnTo>
+                  <a:lnTo>
+                    <a:pt x="6612382" y="1036476"/>
+                  </a:lnTo>
+                  <a:lnTo>
+                    <a:pt x="6682726" y="1038524"/>
+                  </a:lnTo>
+                  <a:lnTo>
+                    <a:pt x="6753071" y="1040547"/>
+                  </a:lnTo>
+                  <a:lnTo>
+                    <a:pt x="6823415" y="1042544"/>
+                  </a:lnTo>
+                  <a:lnTo>
+                    <a:pt x="6893760" y="1044516"/>
+                  </a:lnTo>
+                  <a:lnTo>
+                    <a:pt x="6964104" y="1046463"/>
                   </a:lnTo>
                 </a:path>
               </a:pathLst>
@@ -4240,312 +3950,637 @@
           </p:nvSpPr>
           <p:spPr>
             <a:xfrm>
-              <a:off x="1172049" y="3337574"/>
-              <a:ext cx="7090630" cy="1952542"/>
+              <a:off x="1235312" y="2865574"/>
+              <a:ext cx="6964104" cy="474178"/>
             </a:xfrm>
             <a:custGeom>
               <a:avLst/>
               <a:pathLst>
-                <a:path w="7090630" h="1952542">
+                <a:path w="6964104" h="474178">
+                  <a:moveTo>
+                    <a:pt x="6964104" y="474178"/>
+                  </a:moveTo>
+                  <a:lnTo>
+                    <a:pt x="6893760" y="472324"/>
+                  </a:lnTo>
+                  <a:lnTo>
+                    <a:pt x="6823415" y="470413"/>
+                  </a:lnTo>
+                  <a:lnTo>
+                    <a:pt x="6753071" y="468443"/>
+                  </a:lnTo>
+                  <a:lnTo>
+                    <a:pt x="6682726" y="466413"/>
+                  </a:lnTo>
+                  <a:lnTo>
+                    <a:pt x="6612382" y="464321"/>
+                  </a:lnTo>
+                  <a:lnTo>
+                    <a:pt x="6542037" y="462165"/>
+                  </a:lnTo>
+                  <a:lnTo>
+                    <a:pt x="6471693" y="459943"/>
+                  </a:lnTo>
+                  <a:lnTo>
+                    <a:pt x="6401348" y="457653"/>
+                  </a:lnTo>
+                  <a:lnTo>
+                    <a:pt x="6331004" y="455292"/>
+                  </a:lnTo>
+                  <a:lnTo>
+                    <a:pt x="6260659" y="452859"/>
+                  </a:lnTo>
+                  <a:lnTo>
+                    <a:pt x="6190315" y="450352"/>
+                  </a:lnTo>
+                  <a:lnTo>
+                    <a:pt x="6119970" y="447768"/>
+                  </a:lnTo>
+                  <a:lnTo>
+                    <a:pt x="6049626" y="445105"/>
+                  </a:lnTo>
+                  <a:lnTo>
+                    <a:pt x="5979281" y="442360"/>
+                  </a:lnTo>
+                  <a:lnTo>
+                    <a:pt x="5908937" y="439531"/>
+                  </a:lnTo>
+                  <a:lnTo>
+                    <a:pt x="5838592" y="436616"/>
+                  </a:lnTo>
+                  <a:lnTo>
+                    <a:pt x="5768248" y="433611"/>
+                  </a:lnTo>
+                  <a:lnTo>
+                    <a:pt x="5697903" y="430514"/>
+                  </a:lnTo>
+                  <a:lnTo>
+                    <a:pt x="5627559" y="427322"/>
+                  </a:lnTo>
+                  <a:lnTo>
+                    <a:pt x="5557214" y="424033"/>
+                  </a:lnTo>
+                  <a:lnTo>
+                    <a:pt x="5486870" y="420643"/>
+                  </a:lnTo>
+                  <a:lnTo>
+                    <a:pt x="5416525" y="417149"/>
+                  </a:lnTo>
+                  <a:lnTo>
+                    <a:pt x="5346181" y="413548"/>
+                  </a:lnTo>
+                  <a:lnTo>
+                    <a:pt x="5275836" y="409837"/>
+                  </a:lnTo>
+                  <a:lnTo>
+                    <a:pt x="5205492" y="406012"/>
+                  </a:lnTo>
+                  <a:lnTo>
+                    <a:pt x="5135147" y="402069"/>
+                  </a:lnTo>
+                  <a:lnTo>
+                    <a:pt x="5064803" y="398006"/>
+                  </a:lnTo>
+                  <a:lnTo>
+                    <a:pt x="4994458" y="393819"/>
+                  </a:lnTo>
+                  <a:lnTo>
+                    <a:pt x="4924114" y="389504"/>
+                  </a:lnTo>
+                  <a:lnTo>
+                    <a:pt x="4853769" y="385056"/>
+                  </a:lnTo>
+                  <a:lnTo>
+                    <a:pt x="4783425" y="380472"/>
+                  </a:lnTo>
+                  <a:lnTo>
+                    <a:pt x="4713080" y="375747"/>
+                  </a:lnTo>
+                  <a:lnTo>
+                    <a:pt x="4642736" y="370878"/>
+                  </a:lnTo>
+                  <a:lnTo>
+                    <a:pt x="4572391" y="365860"/>
+                  </a:lnTo>
+                  <a:lnTo>
+                    <a:pt x="4502047" y="360688"/>
+                  </a:lnTo>
+                  <a:lnTo>
+                    <a:pt x="4431702" y="355358"/>
+                  </a:lnTo>
+                  <a:lnTo>
+                    <a:pt x="4361358" y="349864"/>
+                  </a:lnTo>
+                  <a:lnTo>
+                    <a:pt x="4291013" y="344202"/>
+                  </a:lnTo>
+                  <a:lnTo>
+                    <a:pt x="4220669" y="338367"/>
+                  </a:lnTo>
+                  <a:lnTo>
+                    <a:pt x="4150324" y="332353"/>
+                  </a:lnTo>
+                  <a:lnTo>
+                    <a:pt x="4079980" y="326155"/>
+                  </a:lnTo>
+                  <a:lnTo>
+                    <a:pt x="4009635" y="319767"/>
+                  </a:lnTo>
+                  <a:lnTo>
+                    <a:pt x="3939291" y="313183"/>
+                  </a:lnTo>
+                  <a:lnTo>
+                    <a:pt x="3868946" y="306398"/>
+                  </a:lnTo>
+                  <a:lnTo>
+                    <a:pt x="3798602" y="299404"/>
+                  </a:lnTo>
+                  <a:lnTo>
+                    <a:pt x="3728257" y="292197"/>
+                  </a:lnTo>
+                  <a:lnTo>
+                    <a:pt x="3657913" y="284769"/>
+                  </a:lnTo>
+                  <a:lnTo>
+                    <a:pt x="3587569" y="277113"/>
+                  </a:lnTo>
+                  <a:lnTo>
+                    <a:pt x="3517224" y="269223"/>
+                  </a:lnTo>
+                  <a:lnTo>
+                    <a:pt x="3446880" y="261091"/>
+                  </a:lnTo>
+                  <a:lnTo>
+                    <a:pt x="3376535" y="252710"/>
+                  </a:lnTo>
+                  <a:lnTo>
+                    <a:pt x="3306191" y="244073"/>
+                  </a:lnTo>
+                  <a:lnTo>
+                    <a:pt x="3235846" y="235296"/>
+                  </a:lnTo>
+                  <a:lnTo>
+                    <a:pt x="3165502" y="231497"/>
+                  </a:lnTo>
+                  <a:lnTo>
+                    <a:pt x="3095157" y="227651"/>
+                  </a:lnTo>
+                  <a:lnTo>
+                    <a:pt x="3024813" y="223755"/>
+                  </a:lnTo>
+                  <a:lnTo>
+                    <a:pt x="2954468" y="219810"/>
+                  </a:lnTo>
+                  <a:lnTo>
+                    <a:pt x="2884124" y="215815"/>
+                  </a:lnTo>
+                  <a:lnTo>
+                    <a:pt x="2813779" y="211770"/>
+                  </a:lnTo>
+                  <a:lnTo>
+                    <a:pt x="2743435" y="207673"/>
+                  </a:lnTo>
+                  <a:lnTo>
+                    <a:pt x="2673090" y="203524"/>
+                  </a:lnTo>
+                  <a:lnTo>
+                    <a:pt x="2602746" y="199322"/>
+                  </a:lnTo>
+                  <a:lnTo>
+                    <a:pt x="2532401" y="195068"/>
+                  </a:lnTo>
+                  <a:lnTo>
+                    <a:pt x="2462057" y="190759"/>
+                  </a:lnTo>
+                  <a:lnTo>
+                    <a:pt x="2391712" y="186395"/>
+                  </a:lnTo>
+                  <a:lnTo>
+                    <a:pt x="2321368" y="181976"/>
+                  </a:lnTo>
+                  <a:lnTo>
+                    <a:pt x="2251023" y="177502"/>
+                  </a:lnTo>
+                  <a:lnTo>
+                    <a:pt x="2180679" y="172970"/>
+                  </a:lnTo>
+                  <a:lnTo>
+                    <a:pt x="2110334" y="168381"/>
+                  </a:lnTo>
+                  <a:lnTo>
+                    <a:pt x="2039990" y="163733"/>
+                  </a:lnTo>
+                  <a:lnTo>
+                    <a:pt x="1969645" y="159027"/>
+                  </a:lnTo>
+                  <a:lnTo>
+                    <a:pt x="1899301" y="154261"/>
+                  </a:lnTo>
+                  <a:lnTo>
+                    <a:pt x="1828956" y="149435"/>
+                  </a:lnTo>
+                  <a:lnTo>
+                    <a:pt x="1758612" y="144547"/>
+                  </a:lnTo>
+                  <a:lnTo>
+                    <a:pt x="1688267" y="139597"/>
+                  </a:lnTo>
+                  <a:lnTo>
+                    <a:pt x="1617923" y="134585"/>
+                  </a:lnTo>
+                  <a:lnTo>
+                    <a:pt x="1547578" y="129509"/>
+                  </a:lnTo>
+                  <a:lnTo>
+                    <a:pt x="1477234" y="124368"/>
+                  </a:lnTo>
+                  <a:lnTo>
+                    <a:pt x="1406889" y="119162"/>
+                  </a:lnTo>
+                  <a:lnTo>
+                    <a:pt x="1336545" y="113891"/>
+                  </a:lnTo>
+                  <a:lnTo>
+                    <a:pt x="1266200" y="108552"/>
+                  </a:lnTo>
+                  <a:lnTo>
+                    <a:pt x="1195856" y="103146"/>
+                  </a:lnTo>
+                  <a:lnTo>
+                    <a:pt x="1125511" y="97671"/>
+                  </a:lnTo>
+                  <a:lnTo>
+                    <a:pt x="1055167" y="92126"/>
+                  </a:lnTo>
+                  <a:lnTo>
+                    <a:pt x="984822" y="86512"/>
+                  </a:lnTo>
+                  <a:lnTo>
+                    <a:pt x="914478" y="80826"/>
+                  </a:lnTo>
+                  <a:lnTo>
+                    <a:pt x="844133" y="75068"/>
+                  </a:lnTo>
+                  <a:lnTo>
+                    <a:pt x="773789" y="69237"/>
+                  </a:lnTo>
+                  <a:lnTo>
+                    <a:pt x="703444" y="63331"/>
+                  </a:lnTo>
+                  <a:lnTo>
+                    <a:pt x="633100" y="57351"/>
+                  </a:lnTo>
+                  <a:lnTo>
+                    <a:pt x="562755" y="51296"/>
+                  </a:lnTo>
+                  <a:lnTo>
+                    <a:pt x="492411" y="45163"/>
+                  </a:lnTo>
+                  <a:lnTo>
+                    <a:pt x="422066" y="38952"/>
+                  </a:lnTo>
+                  <a:lnTo>
+                    <a:pt x="351722" y="32663"/>
+                  </a:lnTo>
+                  <a:lnTo>
+                    <a:pt x="281377" y="26294"/>
+                  </a:lnTo>
+                  <a:lnTo>
+                    <a:pt x="211033" y="19844"/>
+                  </a:lnTo>
+                  <a:lnTo>
+                    <a:pt x="140688" y="13313"/>
+                  </a:lnTo>
+                  <a:lnTo>
+                    <a:pt x="70344" y="6698"/>
+                  </a:lnTo>
+                  <a:lnTo>
+                    <a:pt x="0" y="0"/>
+                  </a:lnTo>
+                </a:path>
+              </a:pathLst>
+            </a:custGeom>
+          </p:spPr>
+          <p:txBody>
+            <a:bodyPr/>
+            <a:lstStyle/>
+            <a:p/>
+          </p:txBody>
+        </p:sp>
+        <p:sp>
+          <p:nvSpPr>
+            <p:cNvPr id="24" name="pl24"/>
+            <p:cNvSpPr/>
+            <p:nvPr/>
+          </p:nvSpPr>
+          <p:spPr>
+            <a:xfrm>
+              <a:off x="1235312" y="2599265"/>
+              <a:ext cx="6964104" cy="704626"/>
+            </a:xfrm>
+            <a:custGeom>
+              <a:avLst/>
+              <a:pathLst>
+                <a:path w="6964104" h="704626">
                   <a:moveTo>
                     <a:pt x="0" y="0"/>
                   </a:moveTo>
                   <a:lnTo>
-                    <a:pt x="71622" y="46969"/>
-                  </a:lnTo>
-                  <a:lnTo>
-                    <a:pt x="143245" y="92944"/>
-                  </a:lnTo>
-                  <a:lnTo>
-                    <a:pt x="214867" y="137947"/>
-                  </a:lnTo>
-                  <a:lnTo>
-                    <a:pt x="286490" y="181998"/>
-                  </a:lnTo>
-                  <a:lnTo>
-                    <a:pt x="358112" y="225116"/>
-                  </a:lnTo>
-                  <a:lnTo>
-                    <a:pt x="429735" y="267322"/>
-                  </a:lnTo>
-                  <a:lnTo>
-                    <a:pt x="501357" y="308634"/>
-                  </a:lnTo>
-                  <a:lnTo>
-                    <a:pt x="572980" y="349073"/>
-                  </a:lnTo>
-                  <a:lnTo>
-                    <a:pt x="644602" y="388656"/>
-                  </a:lnTo>
-                  <a:lnTo>
-                    <a:pt x="716225" y="427401"/>
-                  </a:lnTo>
-                  <a:lnTo>
-                    <a:pt x="787847" y="465327"/>
-                  </a:lnTo>
-                  <a:lnTo>
-                    <a:pt x="859470" y="502449"/>
-                  </a:lnTo>
-                  <a:lnTo>
-                    <a:pt x="931092" y="538787"/>
-                  </a:lnTo>
-                  <a:lnTo>
-                    <a:pt x="1002715" y="574355"/>
-                  </a:lnTo>
-                  <a:lnTo>
-                    <a:pt x="1074337" y="609171"/>
-                  </a:lnTo>
-                  <a:lnTo>
-                    <a:pt x="1145960" y="643250"/>
-                  </a:lnTo>
-                  <a:lnTo>
-                    <a:pt x="1217582" y="676608"/>
-                  </a:lnTo>
-                  <a:lnTo>
-                    <a:pt x="1289205" y="709260"/>
-                  </a:lnTo>
-                  <a:lnTo>
-                    <a:pt x="1360827" y="741221"/>
-                  </a:lnTo>
-                  <a:lnTo>
-                    <a:pt x="1432450" y="772506"/>
-                  </a:lnTo>
-                  <a:lnTo>
-                    <a:pt x="1504073" y="803129"/>
-                  </a:lnTo>
-                  <a:lnTo>
-                    <a:pt x="1575695" y="833104"/>
-                  </a:lnTo>
-                  <a:lnTo>
-                    <a:pt x="1647318" y="862444"/>
-                  </a:lnTo>
-                  <a:lnTo>
-                    <a:pt x="1718940" y="891164"/>
-                  </a:lnTo>
-                  <a:lnTo>
-                    <a:pt x="1790563" y="919276"/>
-                  </a:lnTo>
-                  <a:lnTo>
-                    <a:pt x="1862185" y="946793"/>
-                  </a:lnTo>
-                  <a:lnTo>
-                    <a:pt x="1933808" y="973728"/>
-                  </a:lnTo>
-                  <a:lnTo>
-                    <a:pt x="2005430" y="1000092"/>
-                  </a:lnTo>
-                  <a:lnTo>
-                    <a:pt x="2077053" y="1025899"/>
-                  </a:lnTo>
-                  <a:lnTo>
-                    <a:pt x="2148675" y="1051160"/>
-                  </a:lnTo>
-                  <a:lnTo>
-                    <a:pt x="2220298" y="1075887"/>
-                  </a:lnTo>
-                  <a:lnTo>
-                    <a:pt x="2291920" y="1100090"/>
-                  </a:lnTo>
-                  <a:lnTo>
-                    <a:pt x="2363543" y="1123781"/>
-                  </a:lnTo>
-                  <a:lnTo>
-                    <a:pt x="2435165" y="1146970"/>
-                  </a:lnTo>
-                  <a:lnTo>
-                    <a:pt x="2506788" y="1169669"/>
-                  </a:lnTo>
-                  <a:lnTo>
-                    <a:pt x="2578410" y="1191888"/>
-                  </a:lnTo>
-                  <a:lnTo>
-                    <a:pt x="2650033" y="1213637"/>
-                  </a:lnTo>
-                  <a:lnTo>
-                    <a:pt x="2721655" y="1234925"/>
-                  </a:lnTo>
-                  <a:lnTo>
-                    <a:pt x="2793278" y="1255763"/>
-                  </a:lnTo>
-                  <a:lnTo>
-                    <a:pt x="2864901" y="1276159"/>
-                  </a:lnTo>
-                  <a:lnTo>
-                    <a:pt x="2936523" y="1296125"/>
-                  </a:lnTo>
-                  <a:lnTo>
-                    <a:pt x="3008146" y="1315667"/>
-                  </a:lnTo>
-                  <a:lnTo>
-                    <a:pt x="3079768" y="1334797"/>
-                  </a:lnTo>
-                  <a:lnTo>
-                    <a:pt x="3151391" y="1353521"/>
-                  </a:lnTo>
-                  <a:lnTo>
-                    <a:pt x="3223013" y="1371849"/>
-                  </a:lnTo>
-                  <a:lnTo>
-                    <a:pt x="3294636" y="1389790"/>
-                  </a:lnTo>
-                  <a:lnTo>
-                    <a:pt x="3366258" y="1407351"/>
-                  </a:lnTo>
-                  <a:lnTo>
-                    <a:pt x="3437881" y="1424540"/>
-                  </a:lnTo>
-                  <a:lnTo>
-                    <a:pt x="3509503" y="1441365"/>
-                  </a:lnTo>
-                  <a:lnTo>
-                    <a:pt x="3581126" y="1457835"/>
-                  </a:lnTo>
-                  <a:lnTo>
-                    <a:pt x="3652748" y="1473956"/>
-                  </a:lnTo>
-                  <a:lnTo>
-                    <a:pt x="3724371" y="1489735"/>
-                  </a:lnTo>
-                  <a:lnTo>
-                    <a:pt x="3795993" y="1505181"/>
-                  </a:lnTo>
-                  <a:lnTo>
-                    <a:pt x="3867616" y="1520300"/>
-                  </a:lnTo>
-                  <a:lnTo>
-                    <a:pt x="3939238" y="1535099"/>
-                  </a:lnTo>
-                  <a:lnTo>
-                    <a:pt x="4010861" y="1549585"/>
-                  </a:lnTo>
-                  <a:lnTo>
-                    <a:pt x="4082483" y="1563765"/>
-                  </a:lnTo>
-                  <a:lnTo>
-                    <a:pt x="4154106" y="1577644"/>
-                  </a:lnTo>
-                  <a:lnTo>
-                    <a:pt x="4225729" y="1591230"/>
-                  </a:lnTo>
-                  <a:lnTo>
-                    <a:pt x="4297351" y="1604528"/>
-                  </a:lnTo>
-                  <a:lnTo>
-                    <a:pt x="4368974" y="1617545"/>
-                  </a:lnTo>
-                  <a:lnTo>
-                    <a:pt x="4440596" y="1630286"/>
-                  </a:lnTo>
-                  <a:lnTo>
-                    <a:pt x="4512219" y="1642758"/>
-                  </a:lnTo>
-                  <a:lnTo>
-                    <a:pt x="4583841" y="1654966"/>
-                  </a:lnTo>
-                  <a:lnTo>
-                    <a:pt x="4655464" y="1666915"/>
-                  </a:lnTo>
-                  <a:lnTo>
-                    <a:pt x="4727086" y="1678612"/>
-                  </a:lnTo>
-                  <a:lnTo>
-                    <a:pt x="4798709" y="1690061"/>
-                  </a:lnTo>
-                  <a:lnTo>
-                    <a:pt x="4870331" y="1701268"/>
-                  </a:lnTo>
-                  <a:lnTo>
-                    <a:pt x="4941954" y="1712238"/>
-                  </a:lnTo>
-                  <a:lnTo>
-                    <a:pt x="5013576" y="1722975"/>
-                  </a:lnTo>
-                  <a:lnTo>
-                    <a:pt x="5085199" y="1733486"/>
-                  </a:lnTo>
-                  <a:lnTo>
-                    <a:pt x="5156821" y="1743774"/>
-                  </a:lnTo>
-                  <a:lnTo>
-                    <a:pt x="5228444" y="1753844"/>
-                  </a:lnTo>
-                  <a:lnTo>
-                    <a:pt x="5300066" y="1763701"/>
-                  </a:lnTo>
-                  <a:lnTo>
-                    <a:pt x="5371689" y="1773350"/>
-                  </a:lnTo>
-                  <a:lnTo>
-                    <a:pt x="5443311" y="1782794"/>
-                  </a:lnTo>
-                  <a:lnTo>
-                    <a:pt x="5514934" y="1792039"/>
-                  </a:lnTo>
-                  <a:lnTo>
-                    <a:pt x="5586557" y="1801088"/>
-                  </a:lnTo>
-                  <a:lnTo>
-                    <a:pt x="5658179" y="1809946"/>
-                  </a:lnTo>
-                  <a:lnTo>
-                    <a:pt x="5729802" y="1818616"/>
-                  </a:lnTo>
-                  <a:lnTo>
-                    <a:pt x="5801424" y="1827102"/>
-                  </a:lnTo>
-                  <a:lnTo>
-                    <a:pt x="5873047" y="1835409"/>
-                  </a:lnTo>
-                  <a:lnTo>
-                    <a:pt x="5944669" y="1843540"/>
-                  </a:lnTo>
-                  <a:lnTo>
-                    <a:pt x="6016292" y="1851500"/>
-                  </a:lnTo>
-                  <a:lnTo>
-                    <a:pt x="6087914" y="1859290"/>
-                  </a:lnTo>
-                  <a:lnTo>
-                    <a:pt x="6159537" y="1866916"/>
-                  </a:lnTo>
-                  <a:lnTo>
-                    <a:pt x="6231159" y="1874381"/>
-                  </a:lnTo>
-                  <a:lnTo>
-                    <a:pt x="6302782" y="1881687"/>
-                  </a:lnTo>
-                  <a:lnTo>
-                    <a:pt x="6374404" y="1888839"/>
-                  </a:lnTo>
-                  <a:lnTo>
-                    <a:pt x="6446027" y="1895840"/>
-                  </a:lnTo>
-                  <a:lnTo>
-                    <a:pt x="6517649" y="1902693"/>
-                  </a:lnTo>
-                  <a:lnTo>
-                    <a:pt x="6589272" y="1909400"/>
-                  </a:lnTo>
-                  <a:lnTo>
-                    <a:pt x="6660894" y="1915966"/>
-                  </a:lnTo>
-                  <a:lnTo>
-                    <a:pt x="6732517" y="1922392"/>
-                  </a:lnTo>
-                  <a:lnTo>
-                    <a:pt x="6804139" y="1928683"/>
-                  </a:lnTo>
-                  <a:lnTo>
-                    <a:pt x="6875762" y="1934841"/>
-                  </a:lnTo>
-                  <a:lnTo>
-                    <a:pt x="6947385" y="1940868"/>
-                  </a:lnTo>
-                  <a:lnTo>
-                    <a:pt x="7019007" y="1946767"/>
-                  </a:lnTo>
-                  <a:lnTo>
-                    <a:pt x="7090630" y="1952542"/>
+                    <a:pt x="70344" y="16950"/>
+                  </a:lnTo>
+                  <a:lnTo>
+                    <a:pt x="140688" y="33541"/>
+                  </a:lnTo>
+                  <a:lnTo>
+                    <a:pt x="211033" y="49782"/>
+                  </a:lnTo>
+                  <a:lnTo>
+                    <a:pt x="281377" y="65678"/>
+                  </a:lnTo>
+                  <a:lnTo>
+                    <a:pt x="351722" y="81239"/>
+                  </a:lnTo>
+                  <a:lnTo>
+                    <a:pt x="422066" y="96470"/>
+                  </a:lnTo>
+                  <a:lnTo>
+                    <a:pt x="492411" y="111379"/>
+                  </a:lnTo>
+                  <a:lnTo>
+                    <a:pt x="562755" y="125972"/>
+                  </a:lnTo>
+                  <a:lnTo>
+                    <a:pt x="633100" y="140256"/>
+                  </a:lnTo>
+                  <a:lnTo>
+                    <a:pt x="703444" y="154239"/>
+                  </a:lnTo>
+                  <a:lnTo>
+                    <a:pt x="773789" y="167925"/>
+                  </a:lnTo>
+                  <a:lnTo>
+                    <a:pt x="844133" y="181322"/>
+                  </a:lnTo>
+                  <a:lnTo>
+                    <a:pt x="914478" y="194435"/>
+                  </a:lnTo>
+                  <a:lnTo>
+                    <a:pt x="984822" y="207271"/>
+                  </a:lnTo>
+                  <a:lnTo>
+                    <a:pt x="1055167" y="219835"/>
+                  </a:lnTo>
+                  <a:lnTo>
+                    <a:pt x="1125511" y="232133"/>
+                  </a:lnTo>
+                  <a:lnTo>
+                    <a:pt x="1195856" y="244172"/>
+                  </a:lnTo>
+                  <a:lnTo>
+                    <a:pt x="1266200" y="255955"/>
+                  </a:lnTo>
+                  <a:lnTo>
+                    <a:pt x="1336545" y="267489"/>
+                  </a:lnTo>
+                  <a:lnTo>
+                    <a:pt x="1406889" y="278779"/>
+                  </a:lnTo>
+                  <a:lnTo>
+                    <a:pt x="1477234" y="289830"/>
+                  </a:lnTo>
+                  <a:lnTo>
+                    <a:pt x="1547578" y="300647"/>
+                  </a:lnTo>
+                  <a:lnTo>
+                    <a:pt x="1617923" y="311235"/>
+                  </a:lnTo>
+                  <a:lnTo>
+                    <a:pt x="1688267" y="321600"/>
+                  </a:lnTo>
+                  <a:lnTo>
+                    <a:pt x="1758612" y="331745"/>
+                  </a:lnTo>
+                  <a:lnTo>
+                    <a:pt x="1828956" y="341675"/>
+                  </a:lnTo>
+                  <a:lnTo>
+                    <a:pt x="1899301" y="351395"/>
+                  </a:lnTo>
+                  <a:lnTo>
+                    <a:pt x="1969645" y="360910"/>
+                  </a:lnTo>
+                  <a:lnTo>
+                    <a:pt x="2039990" y="370223"/>
+                  </a:lnTo>
+                  <a:lnTo>
+                    <a:pt x="2110334" y="379339"/>
+                  </a:lnTo>
+                  <a:lnTo>
+                    <a:pt x="2180679" y="388262"/>
+                  </a:lnTo>
+                  <a:lnTo>
+                    <a:pt x="2251023" y="396996"/>
+                  </a:lnTo>
+                  <a:lnTo>
+                    <a:pt x="2321368" y="405546"/>
+                  </a:lnTo>
+                  <a:lnTo>
+                    <a:pt x="2391712" y="413914"/>
+                  </a:lnTo>
+                  <a:lnTo>
+                    <a:pt x="2462057" y="422106"/>
+                  </a:lnTo>
+                  <a:lnTo>
+                    <a:pt x="2532401" y="430124"/>
+                  </a:lnTo>
+                  <a:lnTo>
+                    <a:pt x="2602746" y="437973"/>
+                  </a:lnTo>
+                  <a:lnTo>
+                    <a:pt x="2673090" y="445655"/>
+                  </a:lnTo>
+                  <a:lnTo>
+                    <a:pt x="2743435" y="453175"/>
+                  </a:lnTo>
+                  <a:lnTo>
+                    <a:pt x="2813779" y="460536"/>
+                  </a:lnTo>
+                  <a:lnTo>
+                    <a:pt x="2884124" y="467741"/>
+                  </a:lnTo>
+                  <a:lnTo>
+                    <a:pt x="2954468" y="474793"/>
+                  </a:lnTo>
+                  <a:lnTo>
+                    <a:pt x="3024813" y="481696"/>
+                  </a:lnTo>
+                  <a:lnTo>
+                    <a:pt x="3095157" y="488454"/>
+                  </a:lnTo>
+                  <a:lnTo>
+                    <a:pt x="3165502" y="495068"/>
+                  </a:lnTo>
+                  <a:lnTo>
+                    <a:pt x="3235846" y="501542"/>
+                  </a:lnTo>
+                  <a:lnTo>
+                    <a:pt x="3306191" y="507879"/>
+                  </a:lnTo>
+                  <a:lnTo>
+                    <a:pt x="3376535" y="514083"/>
+                  </a:lnTo>
+                  <a:lnTo>
+                    <a:pt x="3446880" y="520154"/>
+                  </a:lnTo>
+                  <a:lnTo>
+                    <a:pt x="3517224" y="526098"/>
+                  </a:lnTo>
+                  <a:lnTo>
+                    <a:pt x="3587569" y="531916"/>
+                  </a:lnTo>
+                  <a:lnTo>
+                    <a:pt x="3657913" y="537610"/>
+                  </a:lnTo>
+                  <a:lnTo>
+                    <a:pt x="3728257" y="543184"/>
+                  </a:lnTo>
+                  <a:lnTo>
+                    <a:pt x="3798602" y="548640"/>
+                  </a:lnTo>
+                  <a:lnTo>
+                    <a:pt x="3868946" y="553981"/>
+                  </a:lnTo>
+                  <a:lnTo>
+                    <a:pt x="3939291" y="559209"/>
+                  </a:lnTo>
+                  <a:lnTo>
+                    <a:pt x="4009635" y="564326"/>
+                  </a:lnTo>
+                  <a:lnTo>
+                    <a:pt x="4079980" y="569334"/>
+                  </a:lnTo>
+                  <a:lnTo>
+                    <a:pt x="4150324" y="574237"/>
+                  </a:lnTo>
+                  <a:lnTo>
+                    <a:pt x="4220669" y="579036"/>
+                  </a:lnTo>
+                  <a:lnTo>
+                    <a:pt x="4291013" y="583734"/>
+                  </a:lnTo>
+                  <a:lnTo>
+                    <a:pt x="4361358" y="588332"/>
+                  </a:lnTo>
+                  <a:lnTo>
+                    <a:pt x="4431702" y="592832"/>
+                  </a:lnTo>
+                  <a:lnTo>
+                    <a:pt x="4502047" y="597238"/>
+                  </a:lnTo>
+                  <a:lnTo>
+                    <a:pt x="4572391" y="601550"/>
+                  </a:lnTo>
+                  <a:lnTo>
+                    <a:pt x="4642736" y="605771"/>
+                  </a:lnTo>
+                  <a:lnTo>
+                    <a:pt x="4713080" y="609903"/>
+                  </a:lnTo>
+                  <a:lnTo>
+                    <a:pt x="4783425" y="613947"/>
+                  </a:lnTo>
+                  <a:lnTo>
+                    <a:pt x="4853769" y="617906"/>
+                  </a:lnTo>
+                  <a:lnTo>
+                    <a:pt x="4924114" y="621781"/>
+                  </a:lnTo>
+                  <a:lnTo>
+                    <a:pt x="4994458" y="625574"/>
+                  </a:lnTo>
+                  <a:lnTo>
+                    <a:pt x="5064803" y="629287"/>
+                  </a:lnTo>
+                  <a:lnTo>
+                    <a:pt x="5135147" y="632921"/>
+                  </a:lnTo>
+                  <a:lnTo>
+                    <a:pt x="5205492" y="636478"/>
+                  </a:lnTo>
+                  <a:lnTo>
+                    <a:pt x="5275836" y="639960"/>
+                  </a:lnTo>
+                  <a:lnTo>
+                    <a:pt x="5346181" y="643368"/>
+                  </a:lnTo>
+                  <a:lnTo>
+                    <a:pt x="5416525" y="646704"/>
+                  </a:lnTo>
+                  <a:lnTo>
+                    <a:pt x="5486870" y="649970"/>
+                  </a:lnTo>
+                  <a:lnTo>
+                    <a:pt x="5557214" y="653166"/>
+                  </a:lnTo>
+                  <a:lnTo>
+                    <a:pt x="5627559" y="656295"/>
+                  </a:lnTo>
+                  <a:lnTo>
+                    <a:pt x="5697903" y="659358"/>
+                  </a:lnTo>
+                  <a:lnTo>
+                    <a:pt x="5768248" y="662356"/>
+                  </a:lnTo>
+                  <a:lnTo>
+                    <a:pt x="5838592" y="665290"/>
+                  </a:lnTo>
+                  <a:lnTo>
+                    <a:pt x="5908937" y="668162"/>
+                  </a:lnTo>
+                  <a:lnTo>
+                    <a:pt x="5979281" y="670974"/>
+                  </a:lnTo>
+                  <a:lnTo>
+                    <a:pt x="6049626" y="673726"/>
+                  </a:lnTo>
+                  <a:lnTo>
+                    <a:pt x="6119970" y="676420"/>
+                  </a:lnTo>
+                  <a:lnTo>
+                    <a:pt x="6190315" y="679056"/>
+                  </a:lnTo>
+                  <a:lnTo>
+                    <a:pt x="6260659" y="681637"/>
+                  </a:lnTo>
+                  <a:lnTo>
+                    <a:pt x="6331004" y="684164"/>
+                  </a:lnTo>
+                  <a:lnTo>
+                    <a:pt x="6401348" y="686637"/>
+                  </a:lnTo>
+                  <a:lnTo>
+                    <a:pt x="6471693" y="689057"/>
+                  </a:lnTo>
+                  <a:lnTo>
+                    <a:pt x="6542037" y="691427"/>
+                  </a:lnTo>
+                  <a:lnTo>
+                    <a:pt x="6612382" y="693746"/>
+                  </a:lnTo>
+                  <a:lnTo>
+                    <a:pt x="6682726" y="696016"/>
+                  </a:lnTo>
+                  <a:lnTo>
+                    <a:pt x="6753071" y="698238"/>
+                  </a:lnTo>
+                  <a:lnTo>
+                    <a:pt x="6823415" y="700413"/>
+                  </a:lnTo>
+                  <a:lnTo>
+                    <a:pt x="6893760" y="702542"/>
+                  </a:lnTo>
+                  <a:lnTo>
+                    <a:pt x="6964104" y="704626"/>
                   </a:lnTo>
                 </a:path>
               </a:pathLst>
@@ -4568,27 +4603,27 @@
         </p:sp>
         <p:sp>
           <p:nvSpPr>
-            <p:cNvPr id="24" name="pl24"/>
+            <p:cNvPr id="25" name="pl25"/>
             <p:cNvSpPr/>
             <p:nvPr/>
           </p:nvSpPr>
           <p:spPr>
             <a:xfrm>
-              <a:off x="817517" y="4727786"/>
-              <a:ext cx="7799693" cy="0"/>
+              <a:off x="887106" y="3100960"/>
+              <a:ext cx="7660515" cy="0"/>
             </a:xfrm>
             <a:custGeom>
               <a:avLst/>
               <a:pathLst>
-                <a:path w="7799693" h="0">
+                <a:path w="7660515" h="0">
                   <a:moveTo>
                     <a:pt x="0" y="0"/>
                   </a:moveTo>
                   <a:lnTo>
-                    <a:pt x="7799693" y="0"/>
-                  </a:lnTo>
-                  <a:lnTo>
-                    <a:pt x="7799693" y="0"/>
+                    <a:pt x="7660515" y="0"/>
+                  </a:lnTo>
+                  <a:lnTo>
+                    <a:pt x="7660515" y="0"/>
                   </a:lnTo>
                 </a:path>
               </a:pathLst>
@@ -4611,21 +4646,21 @@
         </p:sp>
         <p:sp>
           <p:nvSpPr>
-            <p:cNvPr id="25" name="pl25"/>
+            <p:cNvPr id="26" name="pl26"/>
             <p:cNvSpPr/>
             <p:nvPr/>
           </p:nvSpPr>
           <p:spPr>
             <a:xfrm>
-              <a:off x="4468386" y="2073503"/>
-              <a:ext cx="0" cy="3649639"/>
+              <a:off x="4472829" y="2143092"/>
+              <a:ext cx="0" cy="1317069"/>
             </a:xfrm>
             <a:custGeom>
               <a:avLst/>
               <a:pathLst>
-                <a:path w="0" h="3649639">
+                <a:path w="0" h="1317069">
                   <a:moveTo>
-                    <a:pt x="0" y="3649639"/>
+                    <a:pt x="0" y="1317069"/>
                   </a:moveTo>
                   <a:lnTo>
                     <a:pt x="0" y="0"/>
@@ -4654,13 +4689,13 @@
         </p:sp>
         <p:sp>
           <p:nvSpPr>
-            <p:cNvPr id="26" name="tx26"/>
+            <p:cNvPr id="27" name="tx27"/>
             <p:cNvSpPr/>
             <p:nvPr/>
           </p:nvSpPr>
           <p:spPr>
             <a:xfrm>
-              <a:off x="692708" y="5517199"/>
+              <a:off x="762297" y="3360243"/>
               <a:ext cx="62179" cy="80101"/>
             </a:xfrm>
             <a:prstGeom prst="rect">
@@ -4700,13 +4735,13 @@
         </p:sp>
         <p:sp>
           <p:nvSpPr>
-            <p:cNvPr id="27" name="tx27"/>
+            <p:cNvPr id="28" name="tx28"/>
             <p:cNvSpPr/>
             <p:nvPr/>
           </p:nvSpPr>
           <p:spPr>
             <a:xfrm>
-              <a:off x="692708" y="4687735"/>
+              <a:off x="762297" y="3060909"/>
               <a:ext cx="62179" cy="80101"/>
             </a:xfrm>
             <a:prstGeom prst="rect">
@@ -4746,13 +4781,13 @@
         </p:sp>
         <p:sp>
           <p:nvSpPr>
-            <p:cNvPr id="28" name="tx28"/>
+            <p:cNvPr id="29" name="tx29"/>
             <p:cNvSpPr/>
             <p:nvPr/>
           </p:nvSpPr>
           <p:spPr>
             <a:xfrm>
-              <a:off x="692708" y="3858272"/>
+              <a:off x="762297" y="2761575"/>
               <a:ext cx="62179" cy="80101"/>
             </a:xfrm>
             <a:prstGeom prst="rect">
@@ -4792,13 +4827,13 @@
         </p:sp>
         <p:sp>
           <p:nvSpPr>
-            <p:cNvPr id="29" name="tx29"/>
+            <p:cNvPr id="30" name="tx30"/>
             <p:cNvSpPr/>
             <p:nvPr/>
           </p:nvSpPr>
           <p:spPr>
             <a:xfrm>
-              <a:off x="692708" y="3028808"/>
+              <a:off x="762297" y="2462242"/>
               <a:ext cx="62179" cy="80101"/>
             </a:xfrm>
             <a:prstGeom prst="rect">
@@ -4838,13 +4873,13 @@
         </p:sp>
         <p:sp>
           <p:nvSpPr>
-            <p:cNvPr id="30" name="tx30"/>
+            <p:cNvPr id="31" name="tx31"/>
             <p:cNvSpPr/>
             <p:nvPr/>
           </p:nvSpPr>
           <p:spPr>
             <a:xfrm>
-              <a:off x="692708" y="2199345"/>
+              <a:off x="762297" y="2162908"/>
               <a:ext cx="62179" cy="80101"/>
             </a:xfrm>
             <a:prstGeom prst="rect">
@@ -4884,13 +4919,13 @@
         </p:sp>
         <p:sp>
           <p:nvSpPr>
-            <p:cNvPr id="31" name="tx31"/>
+            <p:cNvPr id="32" name="tx32"/>
             <p:cNvSpPr/>
             <p:nvPr/>
           </p:nvSpPr>
           <p:spPr>
             <a:xfrm>
-              <a:off x="2478335" y="5785772"/>
+              <a:off x="2516846" y="3522791"/>
               <a:ext cx="161574" cy="80101"/>
             </a:xfrm>
             <a:prstGeom prst="rect">
@@ -4930,13 +4965,13 @@
         </p:sp>
         <p:sp>
           <p:nvSpPr>
-            <p:cNvPr id="32" name="tx32"/>
+            <p:cNvPr id="33" name="tx33"/>
             <p:cNvSpPr/>
             <p:nvPr/>
           </p:nvSpPr>
           <p:spPr>
             <a:xfrm>
-              <a:off x="4582608" y="5785772"/>
+              <a:off x="4584458" y="3522791"/>
               <a:ext cx="62179" cy="80101"/>
             </a:xfrm>
             <a:prstGeom prst="rect">
@@ -4976,13 +5011,13 @@
         </p:sp>
         <p:sp>
           <p:nvSpPr>
-            <p:cNvPr id="33" name="tx33"/>
+            <p:cNvPr id="34" name="tx34"/>
             <p:cNvSpPr/>
             <p:nvPr/>
           </p:nvSpPr>
           <p:spPr>
             <a:xfrm>
-              <a:off x="6606094" y="5785772"/>
+              <a:off x="6571282" y="3522791"/>
               <a:ext cx="124358" cy="80101"/>
             </a:xfrm>
             <a:prstGeom prst="rect">
@@ -5022,13 +5057,13 @@
         </p:sp>
         <p:sp>
           <p:nvSpPr>
-            <p:cNvPr id="34" name="tx34"/>
+            <p:cNvPr id="35" name="tx35"/>
             <p:cNvSpPr/>
             <p:nvPr/>
           </p:nvSpPr>
           <p:spPr>
             <a:xfrm>
-              <a:off x="2928340" y="5925448"/>
+              <a:off x="2928340" y="3662467"/>
               <a:ext cx="3578047" cy="100218"/>
             </a:xfrm>
             <a:prstGeom prst="rect">
@@ -5068,13 +5103,13 @@
         </p:sp>
         <p:sp>
           <p:nvSpPr>
-            <p:cNvPr id="35" name="tx35"/>
+            <p:cNvPr id="36" name="tx36"/>
             <p:cNvSpPr/>
             <p:nvPr/>
           </p:nvSpPr>
           <p:spPr>
             <a:xfrm rot="-5400000">
-              <a:off x="68446" y="3848213"/>
+              <a:off x="138035" y="2751517"/>
               <a:ext cx="1016904" cy="100218"/>
             </a:xfrm>
             <a:prstGeom prst="rect">
@@ -5114,13 +5149,13 @@
         </p:sp>
         <p:sp>
           <p:nvSpPr>
-            <p:cNvPr id="36" name="tx36"/>
+            <p:cNvPr id="37" name="tx37"/>
             <p:cNvSpPr/>
             <p:nvPr/>
           </p:nvSpPr>
           <p:spPr>
             <a:xfrm>
-              <a:off x="817517" y="1896563"/>
+              <a:off x="887106" y="1966152"/>
               <a:ext cx="7052127" cy="82021"/>
             </a:xfrm>
             <a:prstGeom prst="rect">
@@ -5160,13 +5195,3746 @@
         </p:sp>
         <p:sp>
           <p:nvSpPr>
-            <p:cNvPr id="37" name="tx37"/>
+            <p:cNvPr id="38" name="tx38"/>
             <p:cNvSpPr/>
             <p:nvPr/>
           </p:nvSpPr>
           <p:spPr>
             <a:xfrm>
-              <a:off x="817517" y="1669789"/>
+              <a:off x="887106" y="1739378"/>
+              <a:ext cx="3499683" cy="120152"/>
+            </a:xfrm>
+            <a:prstGeom prst="rect">
+              <a:avLst/>
+            </a:prstGeom>
+            <a:noFill/>
+          </p:spPr>
+          <p:txBody>
+            <a:bodyPr lIns="0" rIns="0" tIns="0" bIns="0" anchorCtr="1" anchor="ctr" wrap="none"/>
+            <a:lstStyle/>
+            <a:p>
+              <a:pPr algn="l" marL="0" marR="0" indent="0">
+                <a:lnSpc>
+                  <a:spcPts val="1320"/>
+                </a:lnSpc>
+                <a:spcBef>
+                  <a:spcPts val="0"/>
+                </a:spcBef>
+                <a:spcAft>
+                  <a:spcPts val="0"/>
+                </a:spcAft>
+              </a:pPr>
+              <a:r>
+                <a:rPr sz="1320">
+                  <a:solidFill>
+                    <a:srgbClr val="000000">
+                      <a:alpha val="100000"/>
+                    </a:srgbClr>
+                  </a:solidFill>
+                  <a:latin typeface="Helvetica"/>
+                  <a:cs typeface="Helvetica"/>
+                </a:rPr>
+                <a:t>Composite Grade 2 AEs (Carboplatin AUC ≥ 3)</a:t>
+              </a:r>
+            </a:p>
+          </p:txBody>
+        </p:sp>
+        <p:sp>
+          <p:nvSpPr>
+            <p:cNvPr id="39" name="pl39"/>
+            <p:cNvSpPr/>
+            <p:nvPr/>
+          </p:nvSpPr>
+          <p:spPr>
+            <a:xfrm>
+              <a:off x="887106" y="5444019"/>
+              <a:ext cx="7660515" cy="0"/>
+            </a:xfrm>
+            <a:custGeom>
+              <a:avLst/>
+              <a:pathLst>
+                <a:path w="7660515" h="0">
+                  <a:moveTo>
+                    <a:pt x="0" y="0"/>
+                  </a:moveTo>
+                  <a:lnTo>
+                    <a:pt x="7660515" y="0"/>
+                  </a:lnTo>
+                  <a:lnTo>
+                    <a:pt x="7660515" y="0"/>
+                  </a:lnTo>
+                </a:path>
+              </a:pathLst>
+            </a:custGeom>
+            <a:ln w="6775" cap="flat">
+              <a:solidFill>
+                <a:srgbClr val="EBEBEB">
+                  <a:alpha val="100000"/>
+                </a:srgbClr>
+              </a:solidFill>
+              <a:prstDash val="solid"/>
+              <a:round/>
+            </a:ln>
+          </p:spPr>
+          <p:txBody>
+            <a:bodyPr/>
+            <a:lstStyle/>
+            <a:p/>
+          </p:txBody>
+        </p:sp>
+        <p:sp>
+          <p:nvSpPr>
+            <p:cNvPr id="40" name="pl40"/>
+            <p:cNvSpPr/>
+            <p:nvPr/>
+          </p:nvSpPr>
+          <p:spPr>
+            <a:xfrm>
+              <a:off x="887106" y="5144686"/>
+              <a:ext cx="7660515" cy="0"/>
+            </a:xfrm>
+            <a:custGeom>
+              <a:avLst/>
+              <a:pathLst>
+                <a:path w="7660515" h="0">
+                  <a:moveTo>
+                    <a:pt x="0" y="0"/>
+                  </a:moveTo>
+                  <a:lnTo>
+                    <a:pt x="7660515" y="0"/>
+                  </a:lnTo>
+                  <a:lnTo>
+                    <a:pt x="7660515" y="0"/>
+                  </a:lnTo>
+                </a:path>
+              </a:pathLst>
+            </a:custGeom>
+            <a:ln w="6775" cap="flat">
+              <a:solidFill>
+                <a:srgbClr val="EBEBEB">
+                  <a:alpha val="100000"/>
+                </a:srgbClr>
+              </a:solidFill>
+              <a:prstDash val="solid"/>
+              <a:round/>
+            </a:ln>
+          </p:spPr>
+          <p:txBody>
+            <a:bodyPr/>
+            <a:lstStyle/>
+            <a:p/>
+          </p:txBody>
+        </p:sp>
+        <p:sp>
+          <p:nvSpPr>
+            <p:cNvPr id="41" name="pl41"/>
+            <p:cNvSpPr/>
+            <p:nvPr/>
+          </p:nvSpPr>
+          <p:spPr>
+            <a:xfrm>
+              <a:off x="887106" y="4845352"/>
+              <a:ext cx="7660515" cy="0"/>
+            </a:xfrm>
+            <a:custGeom>
+              <a:avLst/>
+              <a:pathLst>
+                <a:path w="7660515" h="0">
+                  <a:moveTo>
+                    <a:pt x="0" y="0"/>
+                  </a:moveTo>
+                  <a:lnTo>
+                    <a:pt x="7660515" y="0"/>
+                  </a:lnTo>
+                  <a:lnTo>
+                    <a:pt x="7660515" y="0"/>
+                  </a:lnTo>
+                </a:path>
+              </a:pathLst>
+            </a:custGeom>
+            <a:ln w="6775" cap="flat">
+              <a:solidFill>
+                <a:srgbClr val="EBEBEB">
+                  <a:alpha val="100000"/>
+                </a:srgbClr>
+              </a:solidFill>
+              <a:prstDash val="solid"/>
+              <a:round/>
+            </a:ln>
+          </p:spPr>
+          <p:txBody>
+            <a:bodyPr/>
+            <a:lstStyle/>
+            <a:p/>
+          </p:txBody>
+        </p:sp>
+        <p:sp>
+          <p:nvSpPr>
+            <p:cNvPr id="42" name="pl42"/>
+            <p:cNvSpPr/>
+            <p:nvPr/>
+          </p:nvSpPr>
+          <p:spPr>
+            <a:xfrm>
+              <a:off x="887106" y="4546018"/>
+              <a:ext cx="7660515" cy="0"/>
+            </a:xfrm>
+            <a:custGeom>
+              <a:avLst/>
+              <a:pathLst>
+                <a:path w="7660515" h="0">
+                  <a:moveTo>
+                    <a:pt x="0" y="0"/>
+                  </a:moveTo>
+                  <a:lnTo>
+                    <a:pt x="7660515" y="0"/>
+                  </a:lnTo>
+                  <a:lnTo>
+                    <a:pt x="7660515" y="0"/>
+                  </a:lnTo>
+                </a:path>
+              </a:pathLst>
+            </a:custGeom>
+            <a:ln w="6775" cap="flat">
+              <a:solidFill>
+                <a:srgbClr val="EBEBEB">
+                  <a:alpha val="100000"/>
+                </a:srgbClr>
+              </a:solidFill>
+              <a:prstDash val="solid"/>
+              <a:round/>
+            </a:ln>
+          </p:spPr>
+          <p:txBody>
+            <a:bodyPr/>
+            <a:lstStyle/>
+            <a:p/>
+          </p:txBody>
+        </p:sp>
+        <p:sp>
+          <p:nvSpPr>
+            <p:cNvPr id="43" name="pl43"/>
+            <p:cNvSpPr/>
+            <p:nvPr/>
+          </p:nvSpPr>
+          <p:spPr>
+            <a:xfrm>
+              <a:off x="983303" y="4336484"/>
+              <a:ext cx="0" cy="1317069"/>
+            </a:xfrm>
+            <a:custGeom>
+              <a:avLst/>
+              <a:pathLst>
+                <a:path w="0" h="1317069">
+                  <a:moveTo>
+                    <a:pt x="0" y="1317069"/>
+                  </a:moveTo>
+                  <a:lnTo>
+                    <a:pt x="0" y="0"/>
+                  </a:lnTo>
+                  <a:lnTo>
+                    <a:pt x="0" y="0"/>
+                  </a:lnTo>
+                </a:path>
+              </a:pathLst>
+            </a:custGeom>
+            <a:ln w="6775" cap="flat">
+              <a:solidFill>
+                <a:srgbClr val="EBEBEB">
+                  <a:alpha val="100000"/>
+                </a:srgbClr>
+              </a:solidFill>
+              <a:prstDash val="solid"/>
+              <a:round/>
+            </a:ln>
+          </p:spPr>
+          <p:txBody>
+            <a:bodyPr/>
+            <a:lstStyle/>
+            <a:p/>
+          </p:txBody>
+        </p:sp>
+        <p:sp>
+          <p:nvSpPr>
+            <p:cNvPr id="44" name="pl44"/>
+            <p:cNvSpPr/>
+            <p:nvPr/>
+          </p:nvSpPr>
+          <p:spPr>
+            <a:xfrm>
+              <a:off x="1790468" y="4336484"/>
+              <a:ext cx="0" cy="1317069"/>
+            </a:xfrm>
+            <a:custGeom>
+              <a:avLst/>
+              <a:pathLst>
+                <a:path w="0" h="1317069">
+                  <a:moveTo>
+                    <a:pt x="0" y="1317069"/>
+                  </a:moveTo>
+                  <a:lnTo>
+                    <a:pt x="0" y="0"/>
+                  </a:lnTo>
+                  <a:lnTo>
+                    <a:pt x="0" y="0"/>
+                  </a:lnTo>
+                </a:path>
+              </a:pathLst>
+            </a:custGeom>
+            <a:ln w="6775" cap="flat">
+              <a:solidFill>
+                <a:srgbClr val="EBEBEB">
+                  <a:alpha val="100000"/>
+                </a:srgbClr>
+              </a:solidFill>
+              <a:prstDash val="solid"/>
+              <a:round/>
+            </a:ln>
+          </p:spPr>
+          <p:txBody>
+            <a:bodyPr/>
+            <a:lstStyle/>
+            <a:p/>
+          </p:txBody>
+        </p:sp>
+        <p:sp>
+          <p:nvSpPr>
+            <p:cNvPr id="45" name="pl45"/>
+            <p:cNvSpPr/>
+            <p:nvPr/>
+          </p:nvSpPr>
+          <p:spPr>
+            <a:xfrm>
+              <a:off x="2597634" y="4336484"/>
+              <a:ext cx="0" cy="1317069"/>
+            </a:xfrm>
+            <a:custGeom>
+              <a:avLst/>
+              <a:pathLst>
+                <a:path w="0" h="1317069">
+                  <a:moveTo>
+                    <a:pt x="0" y="1317069"/>
+                  </a:moveTo>
+                  <a:lnTo>
+                    <a:pt x="0" y="0"/>
+                  </a:lnTo>
+                  <a:lnTo>
+                    <a:pt x="0" y="0"/>
+                  </a:lnTo>
+                </a:path>
+              </a:pathLst>
+            </a:custGeom>
+            <a:ln w="6775" cap="flat">
+              <a:solidFill>
+                <a:srgbClr val="EBEBEB">
+                  <a:alpha val="100000"/>
+                </a:srgbClr>
+              </a:solidFill>
+              <a:prstDash val="solid"/>
+              <a:round/>
+            </a:ln>
+          </p:spPr>
+          <p:txBody>
+            <a:bodyPr/>
+            <a:lstStyle/>
+            <a:p/>
+          </p:txBody>
+        </p:sp>
+        <p:sp>
+          <p:nvSpPr>
+            <p:cNvPr id="46" name="pl46"/>
+            <p:cNvSpPr/>
+            <p:nvPr/>
+          </p:nvSpPr>
+          <p:spPr>
+            <a:xfrm>
+              <a:off x="3404799" y="4336484"/>
+              <a:ext cx="0" cy="1317069"/>
+            </a:xfrm>
+            <a:custGeom>
+              <a:avLst/>
+              <a:pathLst>
+                <a:path w="0" h="1317069">
+                  <a:moveTo>
+                    <a:pt x="0" y="1317069"/>
+                  </a:moveTo>
+                  <a:lnTo>
+                    <a:pt x="0" y="0"/>
+                  </a:lnTo>
+                  <a:lnTo>
+                    <a:pt x="0" y="0"/>
+                  </a:lnTo>
+                </a:path>
+              </a:pathLst>
+            </a:custGeom>
+            <a:ln w="6775" cap="flat">
+              <a:solidFill>
+                <a:srgbClr val="EBEBEB">
+                  <a:alpha val="100000"/>
+                </a:srgbClr>
+              </a:solidFill>
+              <a:prstDash val="solid"/>
+              <a:round/>
+            </a:ln>
+          </p:spPr>
+          <p:txBody>
+            <a:bodyPr/>
+            <a:lstStyle/>
+            <a:p/>
+          </p:txBody>
+        </p:sp>
+        <p:sp>
+          <p:nvSpPr>
+            <p:cNvPr id="47" name="pl47"/>
+            <p:cNvSpPr/>
+            <p:nvPr/>
+          </p:nvSpPr>
+          <p:spPr>
+            <a:xfrm>
+              <a:off x="4211965" y="4336484"/>
+              <a:ext cx="0" cy="1317069"/>
+            </a:xfrm>
+            <a:custGeom>
+              <a:avLst/>
+              <a:pathLst>
+                <a:path w="0" h="1317069">
+                  <a:moveTo>
+                    <a:pt x="0" y="1317069"/>
+                  </a:moveTo>
+                  <a:lnTo>
+                    <a:pt x="0" y="0"/>
+                  </a:lnTo>
+                  <a:lnTo>
+                    <a:pt x="0" y="0"/>
+                  </a:lnTo>
+                </a:path>
+              </a:pathLst>
+            </a:custGeom>
+            <a:ln w="6775" cap="flat">
+              <a:solidFill>
+                <a:srgbClr val="EBEBEB">
+                  <a:alpha val="100000"/>
+                </a:srgbClr>
+              </a:solidFill>
+              <a:prstDash val="solid"/>
+              <a:round/>
+            </a:ln>
+          </p:spPr>
+          <p:txBody>
+            <a:bodyPr/>
+            <a:lstStyle/>
+            <a:p/>
+          </p:txBody>
+        </p:sp>
+        <p:sp>
+          <p:nvSpPr>
+            <p:cNvPr id="48" name="pl48"/>
+            <p:cNvSpPr/>
+            <p:nvPr/>
+          </p:nvSpPr>
+          <p:spPr>
+            <a:xfrm>
+              <a:off x="5019130" y="4336484"/>
+              <a:ext cx="0" cy="1317069"/>
+            </a:xfrm>
+            <a:custGeom>
+              <a:avLst/>
+              <a:pathLst>
+                <a:path w="0" h="1317069">
+                  <a:moveTo>
+                    <a:pt x="0" y="1317069"/>
+                  </a:moveTo>
+                  <a:lnTo>
+                    <a:pt x="0" y="0"/>
+                  </a:lnTo>
+                  <a:lnTo>
+                    <a:pt x="0" y="0"/>
+                  </a:lnTo>
+                </a:path>
+              </a:pathLst>
+            </a:custGeom>
+            <a:ln w="6775" cap="flat">
+              <a:solidFill>
+                <a:srgbClr val="EBEBEB">
+                  <a:alpha val="100000"/>
+                </a:srgbClr>
+              </a:solidFill>
+              <a:prstDash val="solid"/>
+              <a:round/>
+            </a:ln>
+          </p:spPr>
+          <p:txBody>
+            <a:bodyPr/>
+            <a:lstStyle/>
+            <a:p/>
+          </p:txBody>
+        </p:sp>
+        <p:sp>
+          <p:nvSpPr>
+            <p:cNvPr id="49" name="pl49"/>
+            <p:cNvSpPr/>
+            <p:nvPr/>
+          </p:nvSpPr>
+          <p:spPr>
+            <a:xfrm>
+              <a:off x="5826296" y="4336484"/>
+              <a:ext cx="0" cy="1317069"/>
+            </a:xfrm>
+            <a:custGeom>
+              <a:avLst/>
+              <a:pathLst>
+                <a:path w="0" h="1317069">
+                  <a:moveTo>
+                    <a:pt x="0" y="1317069"/>
+                  </a:moveTo>
+                  <a:lnTo>
+                    <a:pt x="0" y="0"/>
+                  </a:lnTo>
+                  <a:lnTo>
+                    <a:pt x="0" y="0"/>
+                  </a:lnTo>
+                </a:path>
+              </a:pathLst>
+            </a:custGeom>
+            <a:ln w="6775" cap="flat">
+              <a:solidFill>
+                <a:srgbClr val="EBEBEB">
+                  <a:alpha val="100000"/>
+                </a:srgbClr>
+              </a:solidFill>
+              <a:prstDash val="solid"/>
+              <a:round/>
+            </a:ln>
+          </p:spPr>
+          <p:txBody>
+            <a:bodyPr/>
+            <a:lstStyle/>
+            <a:p/>
+          </p:txBody>
+        </p:sp>
+        <p:sp>
+          <p:nvSpPr>
+            <p:cNvPr id="50" name="pl50"/>
+            <p:cNvSpPr/>
+            <p:nvPr/>
+          </p:nvSpPr>
+          <p:spPr>
+            <a:xfrm>
+              <a:off x="6633461" y="4336484"/>
+              <a:ext cx="0" cy="1317069"/>
+            </a:xfrm>
+            <a:custGeom>
+              <a:avLst/>
+              <a:pathLst>
+                <a:path w="0" h="1317069">
+                  <a:moveTo>
+                    <a:pt x="0" y="1317069"/>
+                  </a:moveTo>
+                  <a:lnTo>
+                    <a:pt x="0" y="0"/>
+                  </a:lnTo>
+                  <a:lnTo>
+                    <a:pt x="0" y="0"/>
+                  </a:lnTo>
+                </a:path>
+              </a:pathLst>
+            </a:custGeom>
+            <a:ln w="6775" cap="flat">
+              <a:solidFill>
+                <a:srgbClr val="EBEBEB">
+                  <a:alpha val="100000"/>
+                </a:srgbClr>
+              </a:solidFill>
+              <a:prstDash val="solid"/>
+              <a:round/>
+            </a:ln>
+          </p:spPr>
+          <p:txBody>
+            <a:bodyPr/>
+            <a:lstStyle/>
+            <a:p/>
+          </p:txBody>
+        </p:sp>
+        <p:sp>
+          <p:nvSpPr>
+            <p:cNvPr id="51" name="pl51"/>
+            <p:cNvSpPr/>
+            <p:nvPr/>
+          </p:nvSpPr>
+          <p:spPr>
+            <a:xfrm>
+              <a:off x="7440627" y="4336484"/>
+              <a:ext cx="0" cy="1317069"/>
+            </a:xfrm>
+            <a:custGeom>
+              <a:avLst/>
+              <a:pathLst>
+                <a:path w="0" h="1317069">
+                  <a:moveTo>
+                    <a:pt x="0" y="1317069"/>
+                  </a:moveTo>
+                  <a:lnTo>
+                    <a:pt x="0" y="0"/>
+                  </a:lnTo>
+                  <a:lnTo>
+                    <a:pt x="0" y="0"/>
+                  </a:lnTo>
+                </a:path>
+              </a:pathLst>
+            </a:custGeom>
+            <a:ln w="6775" cap="flat">
+              <a:solidFill>
+                <a:srgbClr val="EBEBEB">
+                  <a:alpha val="100000"/>
+                </a:srgbClr>
+              </a:solidFill>
+              <a:prstDash val="solid"/>
+              <a:round/>
+            </a:ln>
+          </p:spPr>
+          <p:txBody>
+            <a:bodyPr/>
+            <a:lstStyle/>
+            <a:p/>
+          </p:txBody>
+        </p:sp>
+        <p:sp>
+          <p:nvSpPr>
+            <p:cNvPr id="52" name="pl52"/>
+            <p:cNvSpPr/>
+            <p:nvPr/>
+          </p:nvSpPr>
+          <p:spPr>
+            <a:xfrm>
+              <a:off x="8247792" y="4336484"/>
+              <a:ext cx="0" cy="1317069"/>
+            </a:xfrm>
+            <a:custGeom>
+              <a:avLst/>
+              <a:pathLst>
+                <a:path w="0" h="1317069">
+                  <a:moveTo>
+                    <a:pt x="0" y="1317069"/>
+                  </a:moveTo>
+                  <a:lnTo>
+                    <a:pt x="0" y="0"/>
+                  </a:lnTo>
+                  <a:lnTo>
+                    <a:pt x="0" y="0"/>
+                  </a:lnTo>
+                </a:path>
+              </a:pathLst>
+            </a:custGeom>
+            <a:ln w="6775" cap="flat">
+              <a:solidFill>
+                <a:srgbClr val="EBEBEB">
+                  <a:alpha val="100000"/>
+                </a:srgbClr>
+              </a:solidFill>
+              <a:prstDash val="solid"/>
+              <a:round/>
+            </a:ln>
+          </p:spPr>
+          <p:txBody>
+            <a:bodyPr/>
+            <a:lstStyle/>
+            <a:p/>
+          </p:txBody>
+        </p:sp>
+        <p:sp>
+          <p:nvSpPr>
+            <p:cNvPr id="53" name="pl53"/>
+            <p:cNvSpPr/>
+            <p:nvPr/>
+          </p:nvSpPr>
+          <p:spPr>
+            <a:xfrm>
+              <a:off x="887106" y="5593686"/>
+              <a:ext cx="7660515" cy="0"/>
+            </a:xfrm>
+            <a:custGeom>
+              <a:avLst/>
+              <a:pathLst>
+                <a:path w="7660515" h="0">
+                  <a:moveTo>
+                    <a:pt x="0" y="0"/>
+                  </a:moveTo>
+                  <a:lnTo>
+                    <a:pt x="7660515" y="0"/>
+                  </a:lnTo>
+                  <a:lnTo>
+                    <a:pt x="7660515" y="0"/>
+                  </a:lnTo>
+                </a:path>
+              </a:pathLst>
+            </a:custGeom>
+            <a:ln w="13550" cap="flat">
+              <a:solidFill>
+                <a:srgbClr val="EBEBEB">
+                  <a:alpha val="100000"/>
+                </a:srgbClr>
+              </a:solidFill>
+              <a:prstDash val="solid"/>
+              <a:round/>
+            </a:ln>
+          </p:spPr>
+          <p:txBody>
+            <a:bodyPr/>
+            <a:lstStyle/>
+            <a:p/>
+          </p:txBody>
+        </p:sp>
+        <p:sp>
+          <p:nvSpPr>
+            <p:cNvPr id="54" name="pl54"/>
+            <p:cNvSpPr/>
+            <p:nvPr/>
+          </p:nvSpPr>
+          <p:spPr>
+            <a:xfrm>
+              <a:off x="887106" y="5294352"/>
+              <a:ext cx="7660515" cy="0"/>
+            </a:xfrm>
+            <a:custGeom>
+              <a:avLst/>
+              <a:pathLst>
+                <a:path w="7660515" h="0">
+                  <a:moveTo>
+                    <a:pt x="0" y="0"/>
+                  </a:moveTo>
+                  <a:lnTo>
+                    <a:pt x="7660515" y="0"/>
+                  </a:lnTo>
+                  <a:lnTo>
+                    <a:pt x="7660515" y="0"/>
+                  </a:lnTo>
+                </a:path>
+              </a:pathLst>
+            </a:custGeom>
+            <a:ln w="13550" cap="flat">
+              <a:solidFill>
+                <a:srgbClr val="EBEBEB">
+                  <a:alpha val="100000"/>
+                </a:srgbClr>
+              </a:solidFill>
+              <a:prstDash val="solid"/>
+              <a:round/>
+            </a:ln>
+          </p:spPr>
+          <p:txBody>
+            <a:bodyPr/>
+            <a:lstStyle/>
+            <a:p/>
+          </p:txBody>
+        </p:sp>
+        <p:sp>
+          <p:nvSpPr>
+            <p:cNvPr id="55" name="pl55"/>
+            <p:cNvSpPr/>
+            <p:nvPr/>
+          </p:nvSpPr>
+          <p:spPr>
+            <a:xfrm>
+              <a:off x="887106" y="4995019"/>
+              <a:ext cx="7660515" cy="0"/>
+            </a:xfrm>
+            <a:custGeom>
+              <a:avLst/>
+              <a:pathLst>
+                <a:path w="7660515" h="0">
+                  <a:moveTo>
+                    <a:pt x="0" y="0"/>
+                  </a:moveTo>
+                  <a:lnTo>
+                    <a:pt x="7660515" y="0"/>
+                  </a:lnTo>
+                  <a:lnTo>
+                    <a:pt x="7660515" y="0"/>
+                  </a:lnTo>
+                </a:path>
+              </a:pathLst>
+            </a:custGeom>
+            <a:ln w="13550" cap="flat">
+              <a:solidFill>
+                <a:srgbClr val="EBEBEB">
+                  <a:alpha val="100000"/>
+                </a:srgbClr>
+              </a:solidFill>
+              <a:prstDash val="solid"/>
+              <a:round/>
+            </a:ln>
+          </p:spPr>
+          <p:txBody>
+            <a:bodyPr/>
+            <a:lstStyle/>
+            <a:p/>
+          </p:txBody>
+        </p:sp>
+        <p:sp>
+          <p:nvSpPr>
+            <p:cNvPr id="56" name="pl56"/>
+            <p:cNvSpPr/>
+            <p:nvPr/>
+          </p:nvSpPr>
+          <p:spPr>
+            <a:xfrm>
+              <a:off x="887106" y="4695685"/>
+              <a:ext cx="7660515" cy="0"/>
+            </a:xfrm>
+            <a:custGeom>
+              <a:avLst/>
+              <a:pathLst>
+                <a:path w="7660515" h="0">
+                  <a:moveTo>
+                    <a:pt x="0" y="0"/>
+                  </a:moveTo>
+                  <a:lnTo>
+                    <a:pt x="7660515" y="0"/>
+                  </a:lnTo>
+                  <a:lnTo>
+                    <a:pt x="7660515" y="0"/>
+                  </a:lnTo>
+                </a:path>
+              </a:pathLst>
+            </a:custGeom>
+            <a:ln w="13550" cap="flat">
+              <a:solidFill>
+                <a:srgbClr val="EBEBEB">
+                  <a:alpha val="100000"/>
+                </a:srgbClr>
+              </a:solidFill>
+              <a:prstDash val="solid"/>
+              <a:round/>
+            </a:ln>
+          </p:spPr>
+          <p:txBody>
+            <a:bodyPr/>
+            <a:lstStyle/>
+            <a:p/>
+          </p:txBody>
+        </p:sp>
+        <p:sp>
+          <p:nvSpPr>
+            <p:cNvPr id="57" name="pl57"/>
+            <p:cNvSpPr/>
+            <p:nvPr/>
+          </p:nvSpPr>
+          <p:spPr>
+            <a:xfrm>
+              <a:off x="887106" y="4396351"/>
+              <a:ext cx="7660515" cy="0"/>
+            </a:xfrm>
+            <a:custGeom>
+              <a:avLst/>
+              <a:pathLst>
+                <a:path w="7660515" h="0">
+                  <a:moveTo>
+                    <a:pt x="0" y="0"/>
+                  </a:moveTo>
+                  <a:lnTo>
+                    <a:pt x="7660515" y="0"/>
+                  </a:lnTo>
+                  <a:lnTo>
+                    <a:pt x="7660515" y="0"/>
+                  </a:lnTo>
+                </a:path>
+              </a:pathLst>
+            </a:custGeom>
+            <a:ln w="13550" cap="flat">
+              <a:solidFill>
+                <a:srgbClr val="EBEBEB">
+                  <a:alpha val="100000"/>
+                </a:srgbClr>
+              </a:solidFill>
+              <a:prstDash val="solid"/>
+              <a:round/>
+            </a:ln>
+          </p:spPr>
+          <p:txBody>
+            <a:bodyPr/>
+            <a:lstStyle/>
+            <a:p/>
+          </p:txBody>
+        </p:sp>
+        <p:sp>
+          <p:nvSpPr>
+            <p:cNvPr id="58" name="pl58"/>
+            <p:cNvSpPr/>
+            <p:nvPr/>
+          </p:nvSpPr>
+          <p:spPr>
+            <a:xfrm>
+              <a:off x="1386885" y="4336484"/>
+              <a:ext cx="0" cy="1317069"/>
+            </a:xfrm>
+            <a:custGeom>
+              <a:avLst/>
+              <a:pathLst>
+                <a:path w="0" h="1317069">
+                  <a:moveTo>
+                    <a:pt x="0" y="1317069"/>
+                  </a:moveTo>
+                  <a:lnTo>
+                    <a:pt x="0" y="0"/>
+                  </a:lnTo>
+                  <a:lnTo>
+                    <a:pt x="0" y="0"/>
+                  </a:lnTo>
+                </a:path>
+              </a:pathLst>
+            </a:custGeom>
+            <a:ln w="13550" cap="flat">
+              <a:solidFill>
+                <a:srgbClr val="EBEBEB">
+                  <a:alpha val="100000"/>
+                </a:srgbClr>
+              </a:solidFill>
+              <a:prstDash val="solid"/>
+              <a:round/>
+            </a:ln>
+          </p:spPr>
+          <p:txBody>
+            <a:bodyPr/>
+            <a:lstStyle/>
+            <a:p/>
+          </p:txBody>
+        </p:sp>
+        <p:sp>
+          <p:nvSpPr>
+            <p:cNvPr id="59" name="pl59"/>
+            <p:cNvSpPr/>
+            <p:nvPr/>
+          </p:nvSpPr>
+          <p:spPr>
+            <a:xfrm>
+              <a:off x="2194051" y="4336484"/>
+              <a:ext cx="0" cy="1317069"/>
+            </a:xfrm>
+            <a:custGeom>
+              <a:avLst/>
+              <a:pathLst>
+                <a:path w="0" h="1317069">
+                  <a:moveTo>
+                    <a:pt x="0" y="1317069"/>
+                  </a:moveTo>
+                  <a:lnTo>
+                    <a:pt x="0" y="0"/>
+                  </a:lnTo>
+                  <a:lnTo>
+                    <a:pt x="0" y="0"/>
+                  </a:lnTo>
+                </a:path>
+              </a:pathLst>
+            </a:custGeom>
+            <a:ln w="13550" cap="flat">
+              <a:solidFill>
+                <a:srgbClr val="EBEBEB">
+                  <a:alpha val="100000"/>
+                </a:srgbClr>
+              </a:solidFill>
+              <a:prstDash val="solid"/>
+              <a:round/>
+            </a:ln>
+          </p:spPr>
+          <p:txBody>
+            <a:bodyPr/>
+            <a:lstStyle/>
+            <a:p/>
+          </p:txBody>
+        </p:sp>
+        <p:sp>
+          <p:nvSpPr>
+            <p:cNvPr id="60" name="pl60"/>
+            <p:cNvSpPr/>
+            <p:nvPr/>
+          </p:nvSpPr>
+          <p:spPr>
+            <a:xfrm>
+              <a:off x="3001216" y="4336484"/>
+              <a:ext cx="0" cy="1317069"/>
+            </a:xfrm>
+            <a:custGeom>
+              <a:avLst/>
+              <a:pathLst>
+                <a:path w="0" h="1317069">
+                  <a:moveTo>
+                    <a:pt x="0" y="1317069"/>
+                  </a:moveTo>
+                  <a:lnTo>
+                    <a:pt x="0" y="0"/>
+                  </a:lnTo>
+                  <a:lnTo>
+                    <a:pt x="0" y="0"/>
+                  </a:lnTo>
+                </a:path>
+              </a:pathLst>
+            </a:custGeom>
+            <a:ln w="13550" cap="flat">
+              <a:solidFill>
+                <a:srgbClr val="EBEBEB">
+                  <a:alpha val="100000"/>
+                </a:srgbClr>
+              </a:solidFill>
+              <a:prstDash val="solid"/>
+              <a:round/>
+            </a:ln>
+          </p:spPr>
+          <p:txBody>
+            <a:bodyPr/>
+            <a:lstStyle/>
+            <a:p/>
+          </p:txBody>
+        </p:sp>
+        <p:sp>
+          <p:nvSpPr>
+            <p:cNvPr id="61" name="pl61"/>
+            <p:cNvSpPr/>
+            <p:nvPr/>
+          </p:nvSpPr>
+          <p:spPr>
+            <a:xfrm>
+              <a:off x="3808382" y="4336484"/>
+              <a:ext cx="0" cy="1317069"/>
+            </a:xfrm>
+            <a:custGeom>
+              <a:avLst/>
+              <a:pathLst>
+                <a:path w="0" h="1317069">
+                  <a:moveTo>
+                    <a:pt x="0" y="1317069"/>
+                  </a:moveTo>
+                  <a:lnTo>
+                    <a:pt x="0" y="0"/>
+                  </a:lnTo>
+                  <a:lnTo>
+                    <a:pt x="0" y="0"/>
+                  </a:lnTo>
+                </a:path>
+              </a:pathLst>
+            </a:custGeom>
+            <a:ln w="13550" cap="flat">
+              <a:solidFill>
+                <a:srgbClr val="EBEBEB">
+                  <a:alpha val="100000"/>
+                </a:srgbClr>
+              </a:solidFill>
+              <a:prstDash val="solid"/>
+              <a:round/>
+            </a:ln>
+          </p:spPr>
+          <p:txBody>
+            <a:bodyPr/>
+            <a:lstStyle/>
+            <a:p/>
+          </p:txBody>
+        </p:sp>
+        <p:sp>
+          <p:nvSpPr>
+            <p:cNvPr id="62" name="pl62"/>
+            <p:cNvSpPr/>
+            <p:nvPr/>
+          </p:nvSpPr>
+          <p:spPr>
+            <a:xfrm>
+              <a:off x="4615547" y="4336484"/>
+              <a:ext cx="0" cy="1317069"/>
+            </a:xfrm>
+            <a:custGeom>
+              <a:avLst/>
+              <a:pathLst>
+                <a:path w="0" h="1317069">
+                  <a:moveTo>
+                    <a:pt x="0" y="1317069"/>
+                  </a:moveTo>
+                  <a:lnTo>
+                    <a:pt x="0" y="0"/>
+                  </a:lnTo>
+                  <a:lnTo>
+                    <a:pt x="0" y="0"/>
+                  </a:lnTo>
+                </a:path>
+              </a:pathLst>
+            </a:custGeom>
+            <a:ln w="13550" cap="flat">
+              <a:solidFill>
+                <a:srgbClr val="EBEBEB">
+                  <a:alpha val="100000"/>
+                </a:srgbClr>
+              </a:solidFill>
+              <a:prstDash val="solid"/>
+              <a:round/>
+            </a:ln>
+          </p:spPr>
+          <p:txBody>
+            <a:bodyPr/>
+            <a:lstStyle/>
+            <a:p/>
+          </p:txBody>
+        </p:sp>
+        <p:sp>
+          <p:nvSpPr>
+            <p:cNvPr id="63" name="pl63"/>
+            <p:cNvSpPr/>
+            <p:nvPr/>
+          </p:nvSpPr>
+          <p:spPr>
+            <a:xfrm>
+              <a:off x="5422713" y="4336484"/>
+              <a:ext cx="0" cy="1317069"/>
+            </a:xfrm>
+            <a:custGeom>
+              <a:avLst/>
+              <a:pathLst>
+                <a:path w="0" h="1317069">
+                  <a:moveTo>
+                    <a:pt x="0" y="1317069"/>
+                  </a:moveTo>
+                  <a:lnTo>
+                    <a:pt x="0" y="0"/>
+                  </a:lnTo>
+                  <a:lnTo>
+                    <a:pt x="0" y="0"/>
+                  </a:lnTo>
+                </a:path>
+              </a:pathLst>
+            </a:custGeom>
+            <a:ln w="13550" cap="flat">
+              <a:solidFill>
+                <a:srgbClr val="EBEBEB">
+                  <a:alpha val="100000"/>
+                </a:srgbClr>
+              </a:solidFill>
+              <a:prstDash val="solid"/>
+              <a:round/>
+            </a:ln>
+          </p:spPr>
+          <p:txBody>
+            <a:bodyPr/>
+            <a:lstStyle/>
+            <a:p/>
+          </p:txBody>
+        </p:sp>
+        <p:sp>
+          <p:nvSpPr>
+            <p:cNvPr id="64" name="pl64"/>
+            <p:cNvSpPr/>
+            <p:nvPr/>
+          </p:nvSpPr>
+          <p:spPr>
+            <a:xfrm>
+              <a:off x="6229878" y="4336484"/>
+              <a:ext cx="0" cy="1317069"/>
+            </a:xfrm>
+            <a:custGeom>
+              <a:avLst/>
+              <a:pathLst>
+                <a:path w="0" h="1317069">
+                  <a:moveTo>
+                    <a:pt x="0" y="1317069"/>
+                  </a:moveTo>
+                  <a:lnTo>
+                    <a:pt x="0" y="0"/>
+                  </a:lnTo>
+                  <a:lnTo>
+                    <a:pt x="0" y="0"/>
+                  </a:lnTo>
+                </a:path>
+              </a:pathLst>
+            </a:custGeom>
+            <a:ln w="13550" cap="flat">
+              <a:solidFill>
+                <a:srgbClr val="EBEBEB">
+                  <a:alpha val="100000"/>
+                </a:srgbClr>
+              </a:solidFill>
+              <a:prstDash val="solid"/>
+              <a:round/>
+            </a:ln>
+          </p:spPr>
+          <p:txBody>
+            <a:bodyPr/>
+            <a:lstStyle/>
+            <a:p/>
+          </p:txBody>
+        </p:sp>
+        <p:sp>
+          <p:nvSpPr>
+            <p:cNvPr id="65" name="pl65"/>
+            <p:cNvSpPr/>
+            <p:nvPr/>
+          </p:nvSpPr>
+          <p:spPr>
+            <a:xfrm>
+              <a:off x="7037044" y="4336484"/>
+              <a:ext cx="0" cy="1317069"/>
+            </a:xfrm>
+            <a:custGeom>
+              <a:avLst/>
+              <a:pathLst>
+                <a:path w="0" h="1317069">
+                  <a:moveTo>
+                    <a:pt x="0" y="1317069"/>
+                  </a:moveTo>
+                  <a:lnTo>
+                    <a:pt x="0" y="0"/>
+                  </a:lnTo>
+                  <a:lnTo>
+                    <a:pt x="0" y="0"/>
+                  </a:lnTo>
+                </a:path>
+              </a:pathLst>
+            </a:custGeom>
+            <a:ln w="13550" cap="flat">
+              <a:solidFill>
+                <a:srgbClr val="EBEBEB">
+                  <a:alpha val="100000"/>
+                </a:srgbClr>
+              </a:solidFill>
+              <a:prstDash val="solid"/>
+              <a:round/>
+            </a:ln>
+          </p:spPr>
+          <p:txBody>
+            <a:bodyPr/>
+            <a:lstStyle/>
+            <a:p/>
+          </p:txBody>
+        </p:sp>
+        <p:sp>
+          <p:nvSpPr>
+            <p:cNvPr id="66" name="pl66"/>
+            <p:cNvSpPr/>
+            <p:nvPr/>
+          </p:nvSpPr>
+          <p:spPr>
+            <a:xfrm>
+              <a:off x="7844209" y="4336484"/>
+              <a:ext cx="0" cy="1317069"/>
+            </a:xfrm>
+            <a:custGeom>
+              <a:avLst/>
+              <a:pathLst>
+                <a:path w="0" h="1317069">
+                  <a:moveTo>
+                    <a:pt x="0" y="1317069"/>
+                  </a:moveTo>
+                  <a:lnTo>
+                    <a:pt x="0" y="0"/>
+                  </a:lnTo>
+                  <a:lnTo>
+                    <a:pt x="0" y="0"/>
+                  </a:lnTo>
+                </a:path>
+              </a:pathLst>
+            </a:custGeom>
+            <a:ln w="13550" cap="flat">
+              <a:solidFill>
+                <a:srgbClr val="EBEBEB">
+                  <a:alpha val="100000"/>
+                </a:srgbClr>
+              </a:solidFill>
+              <a:prstDash val="solid"/>
+              <a:round/>
+            </a:ln>
+          </p:spPr>
+          <p:txBody>
+            <a:bodyPr/>
+            <a:lstStyle/>
+            <a:p/>
+          </p:txBody>
+        </p:sp>
+        <p:sp>
+          <p:nvSpPr>
+            <p:cNvPr id="67" name="pg67"/>
+            <p:cNvSpPr/>
+            <p:nvPr/>
+          </p:nvSpPr>
+          <p:spPr>
+            <a:xfrm>
+              <a:off x="1235312" y="4393718"/>
+              <a:ext cx="6964104" cy="1139427"/>
+            </a:xfrm>
+            <a:custGeom>
+              <a:avLst/>
+              <a:pathLst>
+                <a:path w="6964104" h="1139427">
+                  <a:moveTo>
+                    <a:pt x="0" y="0"/>
+                  </a:moveTo>
+                  <a:lnTo>
+                    <a:pt x="70344" y="35661"/>
+                  </a:lnTo>
+                  <a:lnTo>
+                    <a:pt x="140688" y="70262"/>
+                  </a:lnTo>
+                  <a:lnTo>
+                    <a:pt x="211033" y="103835"/>
+                  </a:lnTo>
+                  <a:lnTo>
+                    <a:pt x="281377" y="136411"/>
+                  </a:lnTo>
+                  <a:lnTo>
+                    <a:pt x="351722" y="168018"/>
+                  </a:lnTo>
+                  <a:lnTo>
+                    <a:pt x="422066" y="198686"/>
+                  </a:lnTo>
+                  <a:lnTo>
+                    <a:pt x="492411" y="228442"/>
+                  </a:lnTo>
+                  <a:lnTo>
+                    <a:pt x="562755" y="257315"/>
+                  </a:lnTo>
+                  <a:lnTo>
+                    <a:pt x="633100" y="285329"/>
+                  </a:lnTo>
+                  <a:lnTo>
+                    <a:pt x="703444" y="312511"/>
+                  </a:lnTo>
+                  <a:lnTo>
+                    <a:pt x="773789" y="338884"/>
+                  </a:lnTo>
+                  <a:lnTo>
+                    <a:pt x="844133" y="364475"/>
+                  </a:lnTo>
+                  <a:lnTo>
+                    <a:pt x="914478" y="389304"/>
+                  </a:lnTo>
+                  <a:lnTo>
+                    <a:pt x="984822" y="413396"/>
+                  </a:lnTo>
+                  <a:lnTo>
+                    <a:pt x="1055167" y="436772"/>
+                  </a:lnTo>
+                  <a:lnTo>
+                    <a:pt x="1125511" y="459453"/>
+                  </a:lnTo>
+                  <a:lnTo>
+                    <a:pt x="1195856" y="481460"/>
+                  </a:lnTo>
+                  <a:lnTo>
+                    <a:pt x="1266200" y="502813"/>
+                  </a:lnTo>
+                  <a:lnTo>
+                    <a:pt x="1336545" y="523531"/>
+                  </a:lnTo>
+                  <a:lnTo>
+                    <a:pt x="1406889" y="543634"/>
+                  </a:lnTo>
+                  <a:lnTo>
+                    <a:pt x="1477234" y="563139"/>
+                  </a:lnTo>
+                  <a:lnTo>
+                    <a:pt x="1547578" y="582064"/>
+                  </a:lnTo>
+                  <a:lnTo>
+                    <a:pt x="1617923" y="600428"/>
+                  </a:lnTo>
+                  <a:lnTo>
+                    <a:pt x="1688267" y="618245"/>
+                  </a:lnTo>
+                  <a:lnTo>
+                    <a:pt x="1758612" y="635533"/>
+                  </a:lnTo>
+                  <a:lnTo>
+                    <a:pt x="1828956" y="652307"/>
+                  </a:lnTo>
+                  <a:lnTo>
+                    <a:pt x="1899301" y="668583"/>
+                  </a:lnTo>
+                  <a:lnTo>
+                    <a:pt x="1969645" y="684375"/>
+                  </a:lnTo>
+                  <a:lnTo>
+                    <a:pt x="2039990" y="699697"/>
+                  </a:lnTo>
+                  <a:lnTo>
+                    <a:pt x="2110334" y="714565"/>
+                  </a:lnTo>
+                  <a:lnTo>
+                    <a:pt x="2180679" y="728990"/>
+                  </a:lnTo>
+                  <a:lnTo>
+                    <a:pt x="2251023" y="742987"/>
+                  </a:lnTo>
+                  <a:lnTo>
+                    <a:pt x="2321368" y="756568"/>
+                  </a:lnTo>
+                  <a:lnTo>
+                    <a:pt x="2391712" y="769745"/>
+                  </a:lnTo>
+                  <a:lnTo>
+                    <a:pt x="2462057" y="782530"/>
+                  </a:lnTo>
+                  <a:lnTo>
+                    <a:pt x="2532401" y="794936"/>
+                  </a:lnTo>
+                  <a:lnTo>
+                    <a:pt x="2602746" y="806973"/>
+                  </a:lnTo>
+                  <a:lnTo>
+                    <a:pt x="2673090" y="818652"/>
+                  </a:lnTo>
+                  <a:lnTo>
+                    <a:pt x="2743435" y="829984"/>
+                  </a:lnTo>
+                  <a:lnTo>
+                    <a:pt x="2813779" y="840980"/>
+                  </a:lnTo>
+                  <a:lnTo>
+                    <a:pt x="2884124" y="851648"/>
+                  </a:lnTo>
+                  <a:lnTo>
+                    <a:pt x="2954468" y="862000"/>
+                  </a:lnTo>
+                  <a:lnTo>
+                    <a:pt x="3024813" y="872044"/>
+                  </a:lnTo>
+                  <a:lnTo>
+                    <a:pt x="3095157" y="881789"/>
+                  </a:lnTo>
+                  <a:lnTo>
+                    <a:pt x="3165502" y="891245"/>
+                  </a:lnTo>
+                  <a:lnTo>
+                    <a:pt x="3235846" y="900420"/>
+                  </a:lnTo>
+                  <a:lnTo>
+                    <a:pt x="3306191" y="904295"/>
+                  </a:lnTo>
+                  <a:lnTo>
+                    <a:pt x="3376535" y="907999"/>
+                  </a:lnTo>
+                  <a:lnTo>
+                    <a:pt x="3446880" y="911657"/>
+                  </a:lnTo>
+                  <a:lnTo>
+                    <a:pt x="3517224" y="915268"/>
+                  </a:lnTo>
+                  <a:lnTo>
+                    <a:pt x="3587569" y="918835"/>
+                  </a:lnTo>
+                  <a:lnTo>
+                    <a:pt x="3657913" y="922357"/>
+                  </a:lnTo>
+                  <a:lnTo>
+                    <a:pt x="3728257" y="925834"/>
+                  </a:lnTo>
+                  <a:lnTo>
+                    <a:pt x="3798602" y="929268"/>
+                  </a:lnTo>
+                  <a:lnTo>
+                    <a:pt x="3868946" y="932659"/>
+                  </a:lnTo>
+                  <a:lnTo>
+                    <a:pt x="3939291" y="936008"/>
+                  </a:lnTo>
+                  <a:lnTo>
+                    <a:pt x="4009635" y="939315"/>
+                  </a:lnTo>
+                  <a:lnTo>
+                    <a:pt x="4079980" y="942580"/>
+                  </a:lnTo>
+                  <a:lnTo>
+                    <a:pt x="4150324" y="945804"/>
+                  </a:lnTo>
+                  <a:lnTo>
+                    <a:pt x="4220669" y="948988"/>
+                  </a:lnTo>
+                  <a:lnTo>
+                    <a:pt x="4291013" y="952132"/>
+                  </a:lnTo>
+                  <a:lnTo>
+                    <a:pt x="4361358" y="955237"/>
+                  </a:lnTo>
+                  <a:lnTo>
+                    <a:pt x="4431702" y="958303"/>
+                  </a:lnTo>
+                  <a:lnTo>
+                    <a:pt x="4502047" y="961330"/>
+                  </a:lnTo>
+                  <a:lnTo>
+                    <a:pt x="4572391" y="964319"/>
+                  </a:lnTo>
+                  <a:lnTo>
+                    <a:pt x="4642736" y="967271"/>
+                  </a:lnTo>
+                  <a:lnTo>
+                    <a:pt x="4713080" y="970186"/>
+                  </a:lnTo>
+                  <a:lnTo>
+                    <a:pt x="4783425" y="973065"/>
+                  </a:lnTo>
+                  <a:lnTo>
+                    <a:pt x="4853769" y="975907"/>
+                  </a:lnTo>
+                  <a:lnTo>
+                    <a:pt x="4924114" y="978714"/>
+                  </a:lnTo>
+                  <a:lnTo>
+                    <a:pt x="4994458" y="981486"/>
+                  </a:lnTo>
+                  <a:lnTo>
+                    <a:pt x="5064803" y="984223"/>
+                  </a:lnTo>
+                  <a:lnTo>
+                    <a:pt x="5135147" y="986925"/>
+                  </a:lnTo>
+                  <a:lnTo>
+                    <a:pt x="5205492" y="989594"/>
+                  </a:lnTo>
+                  <a:lnTo>
+                    <a:pt x="5275836" y="992229"/>
+                  </a:lnTo>
+                  <a:lnTo>
+                    <a:pt x="5346181" y="994832"/>
+                  </a:lnTo>
+                  <a:lnTo>
+                    <a:pt x="5416525" y="997402"/>
+                  </a:lnTo>
+                  <a:lnTo>
+                    <a:pt x="5486870" y="999939"/>
+                  </a:lnTo>
+                  <a:lnTo>
+                    <a:pt x="5557214" y="1002445"/>
+                  </a:lnTo>
+                  <a:lnTo>
+                    <a:pt x="5627559" y="1004919"/>
+                  </a:lnTo>
+                  <a:lnTo>
+                    <a:pt x="5697903" y="1007363"/>
+                  </a:lnTo>
+                  <a:lnTo>
+                    <a:pt x="5768248" y="1009775"/>
+                  </a:lnTo>
+                  <a:lnTo>
+                    <a:pt x="5838592" y="1012158"/>
+                  </a:lnTo>
+                  <a:lnTo>
+                    <a:pt x="5908937" y="1014511"/>
+                  </a:lnTo>
+                  <a:lnTo>
+                    <a:pt x="5979281" y="1016834"/>
+                  </a:lnTo>
+                  <a:lnTo>
+                    <a:pt x="6049626" y="1019128"/>
+                  </a:lnTo>
+                  <a:lnTo>
+                    <a:pt x="6119970" y="1021393"/>
+                  </a:lnTo>
+                  <a:lnTo>
+                    <a:pt x="6190315" y="1023630"/>
+                  </a:lnTo>
+                  <a:lnTo>
+                    <a:pt x="6260659" y="1025839"/>
+                  </a:lnTo>
+                  <a:lnTo>
+                    <a:pt x="6331004" y="1028021"/>
+                  </a:lnTo>
+                  <a:lnTo>
+                    <a:pt x="6401348" y="1030175"/>
+                  </a:lnTo>
+                  <a:lnTo>
+                    <a:pt x="6471693" y="1032302"/>
+                  </a:lnTo>
+                  <a:lnTo>
+                    <a:pt x="6542037" y="1034402"/>
+                  </a:lnTo>
+                  <a:lnTo>
+                    <a:pt x="6612382" y="1036476"/>
+                  </a:lnTo>
+                  <a:lnTo>
+                    <a:pt x="6682726" y="1038524"/>
+                  </a:lnTo>
+                  <a:lnTo>
+                    <a:pt x="6753071" y="1040547"/>
+                  </a:lnTo>
+                  <a:lnTo>
+                    <a:pt x="6823415" y="1042544"/>
+                  </a:lnTo>
+                  <a:lnTo>
+                    <a:pt x="6893760" y="1044516"/>
+                  </a:lnTo>
+                  <a:lnTo>
+                    <a:pt x="6964104" y="1046463"/>
+                  </a:lnTo>
+                  <a:lnTo>
+                    <a:pt x="6964104" y="1139427"/>
+                  </a:lnTo>
+                  <a:lnTo>
+                    <a:pt x="6893760" y="1137573"/>
+                  </a:lnTo>
+                  <a:lnTo>
+                    <a:pt x="6823415" y="1135662"/>
+                  </a:lnTo>
+                  <a:lnTo>
+                    <a:pt x="6753071" y="1133692"/>
+                  </a:lnTo>
+                  <a:lnTo>
+                    <a:pt x="6682726" y="1131662"/>
+                  </a:lnTo>
+                  <a:lnTo>
+                    <a:pt x="6612382" y="1129570"/>
+                  </a:lnTo>
+                  <a:lnTo>
+                    <a:pt x="6542037" y="1127414"/>
+                  </a:lnTo>
+                  <a:lnTo>
+                    <a:pt x="6471693" y="1125192"/>
+                  </a:lnTo>
+                  <a:lnTo>
+                    <a:pt x="6401348" y="1122901"/>
+                  </a:lnTo>
+                  <a:lnTo>
+                    <a:pt x="6331004" y="1120541"/>
+                  </a:lnTo>
+                  <a:lnTo>
+                    <a:pt x="6260659" y="1118108"/>
+                  </a:lnTo>
+                  <a:lnTo>
+                    <a:pt x="6190315" y="1115601"/>
+                  </a:lnTo>
+                  <a:lnTo>
+                    <a:pt x="6119970" y="1113017"/>
+                  </a:lnTo>
+                  <a:lnTo>
+                    <a:pt x="6049626" y="1110354"/>
+                  </a:lnTo>
+                  <a:lnTo>
+                    <a:pt x="5979281" y="1107609"/>
+                  </a:lnTo>
+                  <a:lnTo>
+                    <a:pt x="5908937" y="1104780"/>
+                  </a:lnTo>
+                  <a:lnTo>
+                    <a:pt x="5838592" y="1101865"/>
+                  </a:lnTo>
+                  <a:lnTo>
+                    <a:pt x="5768248" y="1098860"/>
+                  </a:lnTo>
+                  <a:lnTo>
+                    <a:pt x="5697903" y="1095763"/>
+                  </a:lnTo>
+                  <a:lnTo>
+                    <a:pt x="5627559" y="1092571"/>
+                  </a:lnTo>
+                  <a:lnTo>
+                    <a:pt x="5557214" y="1089282"/>
+                  </a:lnTo>
+                  <a:lnTo>
+                    <a:pt x="5486870" y="1085892"/>
+                  </a:lnTo>
+                  <a:lnTo>
+                    <a:pt x="5416525" y="1082398"/>
+                  </a:lnTo>
+                  <a:lnTo>
+                    <a:pt x="5346181" y="1078797"/>
+                  </a:lnTo>
+                  <a:lnTo>
+                    <a:pt x="5275836" y="1075085"/>
+                  </a:lnTo>
+                  <a:lnTo>
+                    <a:pt x="5205492" y="1071260"/>
+                  </a:lnTo>
+                  <a:lnTo>
+                    <a:pt x="5135147" y="1067318"/>
+                  </a:lnTo>
+                  <a:lnTo>
+                    <a:pt x="5064803" y="1063255"/>
+                  </a:lnTo>
+                  <a:lnTo>
+                    <a:pt x="4994458" y="1059068"/>
+                  </a:lnTo>
+                  <a:lnTo>
+                    <a:pt x="4924114" y="1054752"/>
+                  </a:lnTo>
+                  <a:lnTo>
+                    <a:pt x="4853769" y="1050305"/>
+                  </a:lnTo>
+                  <a:lnTo>
+                    <a:pt x="4783425" y="1045721"/>
+                  </a:lnTo>
+                  <a:lnTo>
+                    <a:pt x="4713080" y="1040996"/>
+                  </a:lnTo>
+                  <a:lnTo>
+                    <a:pt x="4642736" y="1036127"/>
+                  </a:lnTo>
+                  <a:lnTo>
+                    <a:pt x="4572391" y="1031109"/>
+                  </a:lnTo>
+                  <a:lnTo>
+                    <a:pt x="4502047" y="1025937"/>
+                  </a:lnTo>
+                  <a:lnTo>
+                    <a:pt x="4431702" y="1020607"/>
+                  </a:lnTo>
+                  <a:lnTo>
+                    <a:pt x="4361358" y="1015113"/>
+                  </a:lnTo>
+                  <a:lnTo>
+                    <a:pt x="4291013" y="1009451"/>
+                  </a:lnTo>
+                  <a:lnTo>
+                    <a:pt x="4220669" y="1003616"/>
+                  </a:lnTo>
+                  <a:lnTo>
+                    <a:pt x="4150324" y="997602"/>
+                  </a:lnTo>
+                  <a:lnTo>
+                    <a:pt x="4079980" y="991404"/>
+                  </a:lnTo>
+                  <a:lnTo>
+                    <a:pt x="4009635" y="985016"/>
+                  </a:lnTo>
+                  <a:lnTo>
+                    <a:pt x="3939291" y="978432"/>
+                  </a:lnTo>
+                  <a:lnTo>
+                    <a:pt x="3868946" y="971646"/>
+                  </a:lnTo>
+                  <a:lnTo>
+                    <a:pt x="3798602" y="964653"/>
+                  </a:lnTo>
+                  <a:lnTo>
+                    <a:pt x="3728257" y="957446"/>
+                  </a:lnTo>
+                  <a:lnTo>
+                    <a:pt x="3657913" y="950018"/>
+                  </a:lnTo>
+                  <a:lnTo>
+                    <a:pt x="3587569" y="942362"/>
+                  </a:lnTo>
+                  <a:lnTo>
+                    <a:pt x="3517224" y="934472"/>
+                  </a:lnTo>
+                  <a:lnTo>
+                    <a:pt x="3446880" y="926340"/>
+                  </a:lnTo>
+                  <a:lnTo>
+                    <a:pt x="3376535" y="917959"/>
+                  </a:lnTo>
+                  <a:lnTo>
+                    <a:pt x="3306191" y="909322"/>
+                  </a:lnTo>
+                  <a:lnTo>
+                    <a:pt x="3235846" y="900544"/>
+                  </a:lnTo>
+                  <a:lnTo>
+                    <a:pt x="3165502" y="896746"/>
+                  </a:lnTo>
+                  <a:lnTo>
+                    <a:pt x="3095157" y="892899"/>
+                  </a:lnTo>
+                  <a:lnTo>
+                    <a:pt x="3024813" y="889004"/>
+                  </a:lnTo>
+                  <a:lnTo>
+                    <a:pt x="2954468" y="885059"/>
+                  </a:lnTo>
+                  <a:lnTo>
+                    <a:pt x="2884124" y="881064"/>
+                  </a:lnTo>
+                  <a:lnTo>
+                    <a:pt x="2813779" y="877018"/>
+                  </a:lnTo>
+                  <a:lnTo>
+                    <a:pt x="2743435" y="872922"/>
+                  </a:lnTo>
+                  <a:lnTo>
+                    <a:pt x="2673090" y="868773"/>
+                  </a:lnTo>
+                  <a:lnTo>
+                    <a:pt x="2602746" y="864571"/>
+                  </a:lnTo>
+                  <a:lnTo>
+                    <a:pt x="2532401" y="860316"/>
+                  </a:lnTo>
+                  <a:lnTo>
+                    <a:pt x="2462057" y="856007"/>
+                  </a:lnTo>
+                  <a:lnTo>
+                    <a:pt x="2391712" y="851644"/>
+                  </a:lnTo>
+                  <a:lnTo>
+                    <a:pt x="2321368" y="847225"/>
+                  </a:lnTo>
+                  <a:lnTo>
+                    <a:pt x="2251023" y="842750"/>
+                  </a:lnTo>
+                  <a:lnTo>
+                    <a:pt x="2180679" y="838219"/>
+                  </a:lnTo>
+                  <a:lnTo>
+                    <a:pt x="2110334" y="833630"/>
+                  </a:lnTo>
+                  <a:lnTo>
+                    <a:pt x="2039990" y="828982"/>
+                  </a:lnTo>
+                  <a:lnTo>
+                    <a:pt x="1969645" y="824276"/>
+                  </a:lnTo>
+                  <a:lnTo>
+                    <a:pt x="1899301" y="819510"/>
+                  </a:lnTo>
+                  <a:lnTo>
+                    <a:pt x="1828956" y="814683"/>
+                  </a:lnTo>
+                  <a:lnTo>
+                    <a:pt x="1758612" y="809796"/>
+                  </a:lnTo>
+                  <a:lnTo>
+                    <a:pt x="1688267" y="804846"/>
+                  </a:lnTo>
+                  <a:lnTo>
+                    <a:pt x="1617923" y="799833"/>
+                  </a:lnTo>
+                  <a:lnTo>
+                    <a:pt x="1547578" y="794757"/>
+                  </a:lnTo>
+                  <a:lnTo>
+                    <a:pt x="1477234" y="789617"/>
+                  </a:lnTo>
+                  <a:lnTo>
+                    <a:pt x="1406889" y="784411"/>
+                  </a:lnTo>
+                  <a:lnTo>
+                    <a:pt x="1336545" y="779139"/>
+                  </a:lnTo>
+                  <a:lnTo>
+                    <a:pt x="1266200" y="773801"/>
+                  </a:lnTo>
+                  <a:lnTo>
+                    <a:pt x="1195856" y="768394"/>
+                  </a:lnTo>
+                  <a:lnTo>
+                    <a:pt x="1125511" y="762920"/>
+                  </a:lnTo>
+                  <a:lnTo>
+                    <a:pt x="1055167" y="757375"/>
+                  </a:lnTo>
+                  <a:lnTo>
+                    <a:pt x="984822" y="751760"/>
+                  </a:lnTo>
+                  <a:lnTo>
+                    <a:pt x="914478" y="746075"/>
+                  </a:lnTo>
+                  <a:lnTo>
+                    <a:pt x="844133" y="740316"/>
+                  </a:lnTo>
+                  <a:lnTo>
+                    <a:pt x="773789" y="734485"/>
+                  </a:lnTo>
+                  <a:lnTo>
+                    <a:pt x="703444" y="728580"/>
+                  </a:lnTo>
+                  <a:lnTo>
+                    <a:pt x="633100" y="722600"/>
+                  </a:lnTo>
+                  <a:lnTo>
+                    <a:pt x="562755" y="716544"/>
+                  </a:lnTo>
+                  <a:lnTo>
+                    <a:pt x="492411" y="710412"/>
+                  </a:lnTo>
+                  <a:lnTo>
+                    <a:pt x="422066" y="704201"/>
+                  </a:lnTo>
+                  <a:lnTo>
+                    <a:pt x="351722" y="697912"/>
+                  </a:lnTo>
+                  <a:lnTo>
+                    <a:pt x="281377" y="691543"/>
+                  </a:lnTo>
+                  <a:lnTo>
+                    <a:pt x="211033" y="685093"/>
+                  </a:lnTo>
+                  <a:lnTo>
+                    <a:pt x="140688" y="678561"/>
+                  </a:lnTo>
+                  <a:lnTo>
+                    <a:pt x="70344" y="671947"/>
+                  </a:lnTo>
+                  <a:lnTo>
+                    <a:pt x="0" y="665248"/>
+                  </a:lnTo>
+                  <a:close/>
+                </a:path>
+              </a:pathLst>
+            </a:custGeom>
+            <a:solidFill>
+              <a:srgbClr val="FF8C00">
+                <a:alpha val="20000"/>
+              </a:srgbClr>
+            </a:solidFill>
+          </p:spPr>
+          <p:txBody>
+            <a:bodyPr/>
+            <a:lstStyle/>
+            <a:p/>
+          </p:txBody>
+        </p:sp>
+        <p:sp>
+          <p:nvSpPr>
+            <p:cNvPr id="68" name="pl68"/>
+            <p:cNvSpPr/>
+            <p:nvPr/>
+          </p:nvSpPr>
+          <p:spPr>
+            <a:xfrm>
+              <a:off x="1235312" y="4393718"/>
+              <a:ext cx="6964104" cy="1046463"/>
+            </a:xfrm>
+            <a:custGeom>
+              <a:avLst/>
+              <a:pathLst>
+                <a:path w="6964104" h="1046463">
+                  <a:moveTo>
+                    <a:pt x="0" y="0"/>
+                  </a:moveTo>
+                  <a:lnTo>
+                    <a:pt x="70344" y="35661"/>
+                  </a:lnTo>
+                  <a:lnTo>
+                    <a:pt x="140688" y="70262"/>
+                  </a:lnTo>
+                  <a:lnTo>
+                    <a:pt x="211033" y="103835"/>
+                  </a:lnTo>
+                  <a:lnTo>
+                    <a:pt x="281377" y="136411"/>
+                  </a:lnTo>
+                  <a:lnTo>
+                    <a:pt x="351722" y="168018"/>
+                  </a:lnTo>
+                  <a:lnTo>
+                    <a:pt x="422066" y="198686"/>
+                  </a:lnTo>
+                  <a:lnTo>
+                    <a:pt x="492411" y="228442"/>
+                  </a:lnTo>
+                  <a:lnTo>
+                    <a:pt x="562755" y="257315"/>
+                  </a:lnTo>
+                  <a:lnTo>
+                    <a:pt x="633100" y="285329"/>
+                  </a:lnTo>
+                  <a:lnTo>
+                    <a:pt x="703444" y="312511"/>
+                  </a:lnTo>
+                  <a:lnTo>
+                    <a:pt x="773789" y="338884"/>
+                  </a:lnTo>
+                  <a:lnTo>
+                    <a:pt x="844133" y="364475"/>
+                  </a:lnTo>
+                  <a:lnTo>
+                    <a:pt x="914478" y="389304"/>
+                  </a:lnTo>
+                  <a:lnTo>
+                    <a:pt x="984822" y="413396"/>
+                  </a:lnTo>
+                  <a:lnTo>
+                    <a:pt x="1055167" y="436772"/>
+                  </a:lnTo>
+                  <a:lnTo>
+                    <a:pt x="1125511" y="459453"/>
+                  </a:lnTo>
+                  <a:lnTo>
+                    <a:pt x="1195856" y="481460"/>
+                  </a:lnTo>
+                  <a:lnTo>
+                    <a:pt x="1266200" y="502813"/>
+                  </a:lnTo>
+                  <a:lnTo>
+                    <a:pt x="1336545" y="523531"/>
+                  </a:lnTo>
+                  <a:lnTo>
+                    <a:pt x="1406889" y="543634"/>
+                  </a:lnTo>
+                  <a:lnTo>
+                    <a:pt x="1477234" y="563139"/>
+                  </a:lnTo>
+                  <a:lnTo>
+                    <a:pt x="1547578" y="582064"/>
+                  </a:lnTo>
+                  <a:lnTo>
+                    <a:pt x="1617923" y="600428"/>
+                  </a:lnTo>
+                  <a:lnTo>
+                    <a:pt x="1688267" y="618245"/>
+                  </a:lnTo>
+                  <a:lnTo>
+                    <a:pt x="1758612" y="635533"/>
+                  </a:lnTo>
+                  <a:lnTo>
+                    <a:pt x="1828956" y="652307"/>
+                  </a:lnTo>
+                  <a:lnTo>
+                    <a:pt x="1899301" y="668583"/>
+                  </a:lnTo>
+                  <a:lnTo>
+                    <a:pt x="1969645" y="684375"/>
+                  </a:lnTo>
+                  <a:lnTo>
+                    <a:pt x="2039990" y="699697"/>
+                  </a:lnTo>
+                  <a:lnTo>
+                    <a:pt x="2110334" y="714565"/>
+                  </a:lnTo>
+                  <a:lnTo>
+                    <a:pt x="2180679" y="728990"/>
+                  </a:lnTo>
+                  <a:lnTo>
+                    <a:pt x="2251023" y="742987"/>
+                  </a:lnTo>
+                  <a:lnTo>
+                    <a:pt x="2321368" y="756568"/>
+                  </a:lnTo>
+                  <a:lnTo>
+                    <a:pt x="2391712" y="769745"/>
+                  </a:lnTo>
+                  <a:lnTo>
+                    <a:pt x="2462057" y="782530"/>
+                  </a:lnTo>
+                  <a:lnTo>
+                    <a:pt x="2532401" y="794936"/>
+                  </a:lnTo>
+                  <a:lnTo>
+                    <a:pt x="2602746" y="806973"/>
+                  </a:lnTo>
+                  <a:lnTo>
+                    <a:pt x="2673090" y="818652"/>
+                  </a:lnTo>
+                  <a:lnTo>
+                    <a:pt x="2743435" y="829984"/>
+                  </a:lnTo>
+                  <a:lnTo>
+                    <a:pt x="2813779" y="840980"/>
+                  </a:lnTo>
+                  <a:lnTo>
+                    <a:pt x="2884124" y="851648"/>
+                  </a:lnTo>
+                  <a:lnTo>
+                    <a:pt x="2954468" y="862000"/>
+                  </a:lnTo>
+                  <a:lnTo>
+                    <a:pt x="3024813" y="872044"/>
+                  </a:lnTo>
+                  <a:lnTo>
+                    <a:pt x="3095157" y="881789"/>
+                  </a:lnTo>
+                  <a:lnTo>
+                    <a:pt x="3165502" y="891245"/>
+                  </a:lnTo>
+                  <a:lnTo>
+                    <a:pt x="3235846" y="900420"/>
+                  </a:lnTo>
+                  <a:lnTo>
+                    <a:pt x="3306191" y="904295"/>
+                  </a:lnTo>
+                  <a:lnTo>
+                    <a:pt x="3376535" y="907999"/>
+                  </a:lnTo>
+                  <a:lnTo>
+                    <a:pt x="3446880" y="911657"/>
+                  </a:lnTo>
+                  <a:lnTo>
+                    <a:pt x="3517224" y="915268"/>
+                  </a:lnTo>
+                  <a:lnTo>
+                    <a:pt x="3587569" y="918835"/>
+                  </a:lnTo>
+                  <a:lnTo>
+                    <a:pt x="3657913" y="922357"/>
+                  </a:lnTo>
+                  <a:lnTo>
+                    <a:pt x="3728257" y="925834"/>
+                  </a:lnTo>
+                  <a:lnTo>
+                    <a:pt x="3798602" y="929268"/>
+                  </a:lnTo>
+                  <a:lnTo>
+                    <a:pt x="3868946" y="932659"/>
+                  </a:lnTo>
+                  <a:lnTo>
+                    <a:pt x="3939291" y="936008"/>
+                  </a:lnTo>
+                  <a:lnTo>
+                    <a:pt x="4009635" y="939315"/>
+                  </a:lnTo>
+                  <a:lnTo>
+                    <a:pt x="4079980" y="942580"/>
+                  </a:lnTo>
+                  <a:lnTo>
+                    <a:pt x="4150324" y="945804"/>
+                  </a:lnTo>
+                  <a:lnTo>
+                    <a:pt x="4220669" y="948988"/>
+                  </a:lnTo>
+                  <a:lnTo>
+                    <a:pt x="4291013" y="952132"/>
+                  </a:lnTo>
+                  <a:lnTo>
+                    <a:pt x="4361358" y="955237"/>
+                  </a:lnTo>
+                  <a:lnTo>
+                    <a:pt x="4431702" y="958303"/>
+                  </a:lnTo>
+                  <a:lnTo>
+                    <a:pt x="4502047" y="961330"/>
+                  </a:lnTo>
+                  <a:lnTo>
+                    <a:pt x="4572391" y="964319"/>
+                  </a:lnTo>
+                  <a:lnTo>
+                    <a:pt x="4642736" y="967271"/>
+                  </a:lnTo>
+                  <a:lnTo>
+                    <a:pt x="4713080" y="970186"/>
+                  </a:lnTo>
+                  <a:lnTo>
+                    <a:pt x="4783425" y="973065"/>
+                  </a:lnTo>
+                  <a:lnTo>
+                    <a:pt x="4853769" y="975907"/>
+                  </a:lnTo>
+                  <a:lnTo>
+                    <a:pt x="4924114" y="978714"/>
+                  </a:lnTo>
+                  <a:lnTo>
+                    <a:pt x="4994458" y="981486"/>
+                  </a:lnTo>
+                  <a:lnTo>
+                    <a:pt x="5064803" y="984223"/>
+                  </a:lnTo>
+                  <a:lnTo>
+                    <a:pt x="5135147" y="986925"/>
+                  </a:lnTo>
+                  <a:lnTo>
+                    <a:pt x="5205492" y="989594"/>
+                  </a:lnTo>
+                  <a:lnTo>
+                    <a:pt x="5275836" y="992229"/>
+                  </a:lnTo>
+                  <a:lnTo>
+                    <a:pt x="5346181" y="994832"/>
+                  </a:lnTo>
+                  <a:lnTo>
+                    <a:pt x="5416525" y="997402"/>
+                  </a:lnTo>
+                  <a:lnTo>
+                    <a:pt x="5486870" y="999939"/>
+                  </a:lnTo>
+                  <a:lnTo>
+                    <a:pt x="5557214" y="1002445"/>
+                  </a:lnTo>
+                  <a:lnTo>
+                    <a:pt x="5627559" y="1004919"/>
+                  </a:lnTo>
+                  <a:lnTo>
+                    <a:pt x="5697903" y="1007363"/>
+                  </a:lnTo>
+                  <a:lnTo>
+                    <a:pt x="5768248" y="1009775"/>
+                  </a:lnTo>
+                  <a:lnTo>
+                    <a:pt x="5838592" y="1012158"/>
+                  </a:lnTo>
+                  <a:lnTo>
+                    <a:pt x="5908937" y="1014511"/>
+                  </a:lnTo>
+                  <a:lnTo>
+                    <a:pt x="5979281" y="1016834"/>
+                  </a:lnTo>
+                  <a:lnTo>
+                    <a:pt x="6049626" y="1019128"/>
+                  </a:lnTo>
+                  <a:lnTo>
+                    <a:pt x="6119970" y="1021393"/>
+                  </a:lnTo>
+                  <a:lnTo>
+                    <a:pt x="6190315" y="1023630"/>
+                  </a:lnTo>
+                  <a:lnTo>
+                    <a:pt x="6260659" y="1025839"/>
+                  </a:lnTo>
+                  <a:lnTo>
+                    <a:pt x="6331004" y="1028021"/>
+                  </a:lnTo>
+                  <a:lnTo>
+                    <a:pt x="6401348" y="1030175"/>
+                  </a:lnTo>
+                  <a:lnTo>
+                    <a:pt x="6471693" y="1032302"/>
+                  </a:lnTo>
+                  <a:lnTo>
+                    <a:pt x="6542037" y="1034402"/>
+                  </a:lnTo>
+                  <a:lnTo>
+                    <a:pt x="6612382" y="1036476"/>
+                  </a:lnTo>
+                  <a:lnTo>
+                    <a:pt x="6682726" y="1038524"/>
+                  </a:lnTo>
+                  <a:lnTo>
+                    <a:pt x="6753071" y="1040547"/>
+                  </a:lnTo>
+                  <a:lnTo>
+                    <a:pt x="6823415" y="1042544"/>
+                  </a:lnTo>
+                  <a:lnTo>
+                    <a:pt x="6893760" y="1044516"/>
+                  </a:lnTo>
+                  <a:lnTo>
+                    <a:pt x="6964104" y="1046463"/>
+                  </a:lnTo>
+                </a:path>
+              </a:pathLst>
+            </a:custGeom>
+          </p:spPr>
+          <p:txBody>
+            <a:bodyPr/>
+            <a:lstStyle/>
+            <a:p/>
+          </p:txBody>
+        </p:sp>
+        <p:sp>
+          <p:nvSpPr>
+            <p:cNvPr id="69" name="pl69"/>
+            <p:cNvSpPr/>
+            <p:nvPr/>
+          </p:nvSpPr>
+          <p:spPr>
+            <a:xfrm>
+              <a:off x="1235312" y="5058967"/>
+              <a:ext cx="6964104" cy="474178"/>
+            </a:xfrm>
+            <a:custGeom>
+              <a:avLst/>
+              <a:pathLst>
+                <a:path w="6964104" h="474178">
+                  <a:moveTo>
+                    <a:pt x="6964104" y="474178"/>
+                  </a:moveTo>
+                  <a:lnTo>
+                    <a:pt x="6893760" y="472324"/>
+                  </a:lnTo>
+                  <a:lnTo>
+                    <a:pt x="6823415" y="470413"/>
+                  </a:lnTo>
+                  <a:lnTo>
+                    <a:pt x="6753071" y="468443"/>
+                  </a:lnTo>
+                  <a:lnTo>
+                    <a:pt x="6682726" y="466413"/>
+                  </a:lnTo>
+                  <a:lnTo>
+                    <a:pt x="6612382" y="464321"/>
+                  </a:lnTo>
+                  <a:lnTo>
+                    <a:pt x="6542037" y="462165"/>
+                  </a:lnTo>
+                  <a:lnTo>
+                    <a:pt x="6471693" y="459943"/>
+                  </a:lnTo>
+                  <a:lnTo>
+                    <a:pt x="6401348" y="457653"/>
+                  </a:lnTo>
+                  <a:lnTo>
+                    <a:pt x="6331004" y="455292"/>
+                  </a:lnTo>
+                  <a:lnTo>
+                    <a:pt x="6260659" y="452859"/>
+                  </a:lnTo>
+                  <a:lnTo>
+                    <a:pt x="6190315" y="450352"/>
+                  </a:lnTo>
+                  <a:lnTo>
+                    <a:pt x="6119970" y="447768"/>
+                  </a:lnTo>
+                  <a:lnTo>
+                    <a:pt x="6049626" y="445105"/>
+                  </a:lnTo>
+                  <a:lnTo>
+                    <a:pt x="5979281" y="442360"/>
+                  </a:lnTo>
+                  <a:lnTo>
+                    <a:pt x="5908937" y="439531"/>
+                  </a:lnTo>
+                  <a:lnTo>
+                    <a:pt x="5838592" y="436616"/>
+                  </a:lnTo>
+                  <a:lnTo>
+                    <a:pt x="5768248" y="433611"/>
+                  </a:lnTo>
+                  <a:lnTo>
+                    <a:pt x="5697903" y="430514"/>
+                  </a:lnTo>
+                  <a:lnTo>
+                    <a:pt x="5627559" y="427322"/>
+                  </a:lnTo>
+                  <a:lnTo>
+                    <a:pt x="5557214" y="424033"/>
+                  </a:lnTo>
+                  <a:lnTo>
+                    <a:pt x="5486870" y="420643"/>
+                  </a:lnTo>
+                  <a:lnTo>
+                    <a:pt x="5416525" y="417149"/>
+                  </a:lnTo>
+                  <a:lnTo>
+                    <a:pt x="5346181" y="413548"/>
+                  </a:lnTo>
+                  <a:lnTo>
+                    <a:pt x="5275836" y="409837"/>
+                  </a:lnTo>
+                  <a:lnTo>
+                    <a:pt x="5205492" y="406012"/>
+                  </a:lnTo>
+                  <a:lnTo>
+                    <a:pt x="5135147" y="402069"/>
+                  </a:lnTo>
+                  <a:lnTo>
+                    <a:pt x="5064803" y="398006"/>
+                  </a:lnTo>
+                  <a:lnTo>
+                    <a:pt x="4994458" y="393819"/>
+                  </a:lnTo>
+                  <a:lnTo>
+                    <a:pt x="4924114" y="389504"/>
+                  </a:lnTo>
+                  <a:lnTo>
+                    <a:pt x="4853769" y="385056"/>
+                  </a:lnTo>
+                  <a:lnTo>
+                    <a:pt x="4783425" y="380472"/>
+                  </a:lnTo>
+                  <a:lnTo>
+                    <a:pt x="4713080" y="375747"/>
+                  </a:lnTo>
+                  <a:lnTo>
+                    <a:pt x="4642736" y="370878"/>
+                  </a:lnTo>
+                  <a:lnTo>
+                    <a:pt x="4572391" y="365860"/>
+                  </a:lnTo>
+                  <a:lnTo>
+                    <a:pt x="4502047" y="360688"/>
+                  </a:lnTo>
+                  <a:lnTo>
+                    <a:pt x="4431702" y="355358"/>
+                  </a:lnTo>
+                  <a:lnTo>
+                    <a:pt x="4361358" y="349864"/>
+                  </a:lnTo>
+                  <a:lnTo>
+                    <a:pt x="4291013" y="344202"/>
+                  </a:lnTo>
+                  <a:lnTo>
+                    <a:pt x="4220669" y="338367"/>
+                  </a:lnTo>
+                  <a:lnTo>
+                    <a:pt x="4150324" y="332353"/>
+                  </a:lnTo>
+                  <a:lnTo>
+                    <a:pt x="4079980" y="326155"/>
+                  </a:lnTo>
+                  <a:lnTo>
+                    <a:pt x="4009635" y="319767"/>
+                  </a:lnTo>
+                  <a:lnTo>
+                    <a:pt x="3939291" y="313183"/>
+                  </a:lnTo>
+                  <a:lnTo>
+                    <a:pt x="3868946" y="306398"/>
+                  </a:lnTo>
+                  <a:lnTo>
+                    <a:pt x="3798602" y="299404"/>
+                  </a:lnTo>
+                  <a:lnTo>
+                    <a:pt x="3728257" y="292197"/>
+                  </a:lnTo>
+                  <a:lnTo>
+                    <a:pt x="3657913" y="284769"/>
+                  </a:lnTo>
+                  <a:lnTo>
+                    <a:pt x="3587569" y="277113"/>
+                  </a:lnTo>
+                  <a:lnTo>
+                    <a:pt x="3517224" y="269223"/>
+                  </a:lnTo>
+                  <a:lnTo>
+                    <a:pt x="3446880" y="261091"/>
+                  </a:lnTo>
+                  <a:lnTo>
+                    <a:pt x="3376535" y="252710"/>
+                  </a:lnTo>
+                  <a:lnTo>
+                    <a:pt x="3306191" y="244073"/>
+                  </a:lnTo>
+                  <a:lnTo>
+                    <a:pt x="3235846" y="235296"/>
+                  </a:lnTo>
+                  <a:lnTo>
+                    <a:pt x="3165502" y="231497"/>
+                  </a:lnTo>
+                  <a:lnTo>
+                    <a:pt x="3095157" y="227651"/>
+                  </a:lnTo>
+                  <a:lnTo>
+                    <a:pt x="3024813" y="223755"/>
+                  </a:lnTo>
+                  <a:lnTo>
+                    <a:pt x="2954468" y="219810"/>
+                  </a:lnTo>
+                  <a:lnTo>
+                    <a:pt x="2884124" y="215815"/>
+                  </a:lnTo>
+                  <a:lnTo>
+                    <a:pt x="2813779" y="211770"/>
+                  </a:lnTo>
+                  <a:lnTo>
+                    <a:pt x="2743435" y="207673"/>
+                  </a:lnTo>
+                  <a:lnTo>
+                    <a:pt x="2673090" y="203524"/>
+                  </a:lnTo>
+                  <a:lnTo>
+                    <a:pt x="2602746" y="199322"/>
+                  </a:lnTo>
+                  <a:lnTo>
+                    <a:pt x="2532401" y="195068"/>
+                  </a:lnTo>
+                  <a:lnTo>
+                    <a:pt x="2462057" y="190759"/>
+                  </a:lnTo>
+                  <a:lnTo>
+                    <a:pt x="2391712" y="186395"/>
+                  </a:lnTo>
+                  <a:lnTo>
+                    <a:pt x="2321368" y="181976"/>
+                  </a:lnTo>
+                  <a:lnTo>
+                    <a:pt x="2251023" y="177502"/>
+                  </a:lnTo>
+                  <a:lnTo>
+                    <a:pt x="2180679" y="172970"/>
+                  </a:lnTo>
+                  <a:lnTo>
+                    <a:pt x="2110334" y="168381"/>
+                  </a:lnTo>
+                  <a:lnTo>
+                    <a:pt x="2039990" y="163733"/>
+                  </a:lnTo>
+                  <a:lnTo>
+                    <a:pt x="1969645" y="159027"/>
+                  </a:lnTo>
+                  <a:lnTo>
+                    <a:pt x="1899301" y="154261"/>
+                  </a:lnTo>
+                  <a:lnTo>
+                    <a:pt x="1828956" y="149435"/>
+                  </a:lnTo>
+                  <a:lnTo>
+                    <a:pt x="1758612" y="144547"/>
+                  </a:lnTo>
+                  <a:lnTo>
+                    <a:pt x="1688267" y="139597"/>
+                  </a:lnTo>
+                  <a:lnTo>
+                    <a:pt x="1617923" y="134585"/>
+                  </a:lnTo>
+                  <a:lnTo>
+                    <a:pt x="1547578" y="129509"/>
+                  </a:lnTo>
+                  <a:lnTo>
+                    <a:pt x="1477234" y="124368"/>
+                  </a:lnTo>
+                  <a:lnTo>
+                    <a:pt x="1406889" y="119162"/>
+                  </a:lnTo>
+                  <a:lnTo>
+                    <a:pt x="1336545" y="113891"/>
+                  </a:lnTo>
+                  <a:lnTo>
+                    <a:pt x="1266200" y="108552"/>
+                  </a:lnTo>
+                  <a:lnTo>
+                    <a:pt x="1195856" y="103146"/>
+                  </a:lnTo>
+                  <a:lnTo>
+                    <a:pt x="1125511" y="97671"/>
+                  </a:lnTo>
+                  <a:lnTo>
+                    <a:pt x="1055167" y="92126"/>
+                  </a:lnTo>
+                  <a:lnTo>
+                    <a:pt x="984822" y="86512"/>
+                  </a:lnTo>
+                  <a:lnTo>
+                    <a:pt x="914478" y="80826"/>
+                  </a:lnTo>
+                  <a:lnTo>
+                    <a:pt x="844133" y="75068"/>
+                  </a:lnTo>
+                  <a:lnTo>
+                    <a:pt x="773789" y="69237"/>
+                  </a:lnTo>
+                  <a:lnTo>
+                    <a:pt x="703444" y="63331"/>
+                  </a:lnTo>
+                  <a:lnTo>
+                    <a:pt x="633100" y="57351"/>
+                  </a:lnTo>
+                  <a:lnTo>
+                    <a:pt x="562755" y="51296"/>
+                  </a:lnTo>
+                  <a:lnTo>
+                    <a:pt x="492411" y="45163"/>
+                  </a:lnTo>
+                  <a:lnTo>
+                    <a:pt x="422066" y="38952"/>
+                  </a:lnTo>
+                  <a:lnTo>
+                    <a:pt x="351722" y="32663"/>
+                  </a:lnTo>
+                  <a:lnTo>
+                    <a:pt x="281377" y="26294"/>
+                  </a:lnTo>
+                  <a:lnTo>
+                    <a:pt x="211033" y="19844"/>
+                  </a:lnTo>
+                  <a:lnTo>
+                    <a:pt x="140688" y="13313"/>
+                  </a:lnTo>
+                  <a:lnTo>
+                    <a:pt x="70344" y="6698"/>
+                  </a:lnTo>
+                  <a:lnTo>
+                    <a:pt x="0" y="0"/>
+                  </a:lnTo>
+                </a:path>
+              </a:pathLst>
+            </a:custGeom>
+          </p:spPr>
+          <p:txBody>
+            <a:bodyPr/>
+            <a:lstStyle/>
+            <a:p/>
+          </p:txBody>
+        </p:sp>
+        <p:sp>
+          <p:nvSpPr>
+            <p:cNvPr id="70" name="pl70"/>
+            <p:cNvSpPr/>
+            <p:nvPr/>
+          </p:nvSpPr>
+          <p:spPr>
+            <a:xfrm>
+              <a:off x="1235312" y="4792658"/>
+              <a:ext cx="6964104" cy="704626"/>
+            </a:xfrm>
+            <a:custGeom>
+              <a:avLst/>
+              <a:pathLst>
+                <a:path w="6964104" h="704626">
+                  <a:moveTo>
+                    <a:pt x="0" y="0"/>
+                  </a:moveTo>
+                  <a:lnTo>
+                    <a:pt x="70344" y="16950"/>
+                  </a:lnTo>
+                  <a:lnTo>
+                    <a:pt x="140688" y="33541"/>
+                  </a:lnTo>
+                  <a:lnTo>
+                    <a:pt x="211033" y="49782"/>
+                  </a:lnTo>
+                  <a:lnTo>
+                    <a:pt x="281377" y="65678"/>
+                  </a:lnTo>
+                  <a:lnTo>
+                    <a:pt x="351722" y="81239"/>
+                  </a:lnTo>
+                  <a:lnTo>
+                    <a:pt x="422066" y="96470"/>
+                  </a:lnTo>
+                  <a:lnTo>
+                    <a:pt x="492411" y="111379"/>
+                  </a:lnTo>
+                  <a:lnTo>
+                    <a:pt x="562755" y="125972"/>
+                  </a:lnTo>
+                  <a:lnTo>
+                    <a:pt x="633100" y="140256"/>
+                  </a:lnTo>
+                  <a:lnTo>
+                    <a:pt x="703444" y="154239"/>
+                  </a:lnTo>
+                  <a:lnTo>
+                    <a:pt x="773789" y="167925"/>
+                  </a:lnTo>
+                  <a:lnTo>
+                    <a:pt x="844133" y="181322"/>
+                  </a:lnTo>
+                  <a:lnTo>
+                    <a:pt x="914478" y="194435"/>
+                  </a:lnTo>
+                  <a:lnTo>
+                    <a:pt x="984822" y="207271"/>
+                  </a:lnTo>
+                  <a:lnTo>
+                    <a:pt x="1055167" y="219835"/>
+                  </a:lnTo>
+                  <a:lnTo>
+                    <a:pt x="1125511" y="232133"/>
+                  </a:lnTo>
+                  <a:lnTo>
+                    <a:pt x="1195856" y="244172"/>
+                  </a:lnTo>
+                  <a:lnTo>
+                    <a:pt x="1266200" y="255955"/>
+                  </a:lnTo>
+                  <a:lnTo>
+                    <a:pt x="1336545" y="267489"/>
+                  </a:lnTo>
+                  <a:lnTo>
+                    <a:pt x="1406889" y="278779"/>
+                  </a:lnTo>
+                  <a:lnTo>
+                    <a:pt x="1477234" y="289830"/>
+                  </a:lnTo>
+                  <a:lnTo>
+                    <a:pt x="1547578" y="300647"/>
+                  </a:lnTo>
+                  <a:lnTo>
+                    <a:pt x="1617923" y="311235"/>
+                  </a:lnTo>
+                  <a:lnTo>
+                    <a:pt x="1688267" y="321600"/>
+                  </a:lnTo>
+                  <a:lnTo>
+                    <a:pt x="1758612" y="331745"/>
+                  </a:lnTo>
+                  <a:lnTo>
+                    <a:pt x="1828956" y="341675"/>
+                  </a:lnTo>
+                  <a:lnTo>
+                    <a:pt x="1899301" y="351395"/>
+                  </a:lnTo>
+                  <a:lnTo>
+                    <a:pt x="1969645" y="360910"/>
+                  </a:lnTo>
+                  <a:lnTo>
+                    <a:pt x="2039990" y="370223"/>
+                  </a:lnTo>
+                  <a:lnTo>
+                    <a:pt x="2110334" y="379339"/>
+                  </a:lnTo>
+                  <a:lnTo>
+                    <a:pt x="2180679" y="388262"/>
+                  </a:lnTo>
+                  <a:lnTo>
+                    <a:pt x="2251023" y="396996"/>
+                  </a:lnTo>
+                  <a:lnTo>
+                    <a:pt x="2321368" y="405546"/>
+                  </a:lnTo>
+                  <a:lnTo>
+                    <a:pt x="2391712" y="413914"/>
+                  </a:lnTo>
+                  <a:lnTo>
+                    <a:pt x="2462057" y="422106"/>
+                  </a:lnTo>
+                  <a:lnTo>
+                    <a:pt x="2532401" y="430124"/>
+                  </a:lnTo>
+                  <a:lnTo>
+                    <a:pt x="2602746" y="437973"/>
+                  </a:lnTo>
+                  <a:lnTo>
+                    <a:pt x="2673090" y="445655"/>
+                  </a:lnTo>
+                  <a:lnTo>
+                    <a:pt x="2743435" y="453175"/>
+                  </a:lnTo>
+                  <a:lnTo>
+                    <a:pt x="2813779" y="460536"/>
+                  </a:lnTo>
+                  <a:lnTo>
+                    <a:pt x="2884124" y="467741"/>
+                  </a:lnTo>
+                  <a:lnTo>
+                    <a:pt x="2954468" y="474793"/>
+                  </a:lnTo>
+                  <a:lnTo>
+                    <a:pt x="3024813" y="481696"/>
+                  </a:lnTo>
+                  <a:lnTo>
+                    <a:pt x="3095157" y="488454"/>
+                  </a:lnTo>
+                  <a:lnTo>
+                    <a:pt x="3165502" y="495068"/>
+                  </a:lnTo>
+                  <a:lnTo>
+                    <a:pt x="3235846" y="501542"/>
+                  </a:lnTo>
+                  <a:lnTo>
+                    <a:pt x="3306191" y="507879"/>
+                  </a:lnTo>
+                  <a:lnTo>
+                    <a:pt x="3376535" y="514083"/>
+                  </a:lnTo>
+                  <a:lnTo>
+                    <a:pt x="3446880" y="520154"/>
+                  </a:lnTo>
+                  <a:lnTo>
+                    <a:pt x="3517224" y="526098"/>
+                  </a:lnTo>
+                  <a:lnTo>
+                    <a:pt x="3587569" y="531916"/>
+                  </a:lnTo>
+                  <a:lnTo>
+                    <a:pt x="3657913" y="537610"/>
+                  </a:lnTo>
+                  <a:lnTo>
+                    <a:pt x="3728257" y="543184"/>
+                  </a:lnTo>
+                  <a:lnTo>
+                    <a:pt x="3798602" y="548640"/>
+                  </a:lnTo>
+                  <a:lnTo>
+                    <a:pt x="3868946" y="553981"/>
+                  </a:lnTo>
+                  <a:lnTo>
+                    <a:pt x="3939291" y="559209"/>
+                  </a:lnTo>
+                  <a:lnTo>
+                    <a:pt x="4009635" y="564326"/>
+                  </a:lnTo>
+                  <a:lnTo>
+                    <a:pt x="4079980" y="569334"/>
+                  </a:lnTo>
+                  <a:lnTo>
+                    <a:pt x="4150324" y="574237"/>
+                  </a:lnTo>
+                  <a:lnTo>
+                    <a:pt x="4220669" y="579036"/>
+                  </a:lnTo>
+                  <a:lnTo>
+                    <a:pt x="4291013" y="583734"/>
+                  </a:lnTo>
+                  <a:lnTo>
+                    <a:pt x="4361358" y="588332"/>
+                  </a:lnTo>
+                  <a:lnTo>
+                    <a:pt x="4431702" y="592832"/>
+                  </a:lnTo>
+                  <a:lnTo>
+                    <a:pt x="4502047" y="597238"/>
+                  </a:lnTo>
+                  <a:lnTo>
+                    <a:pt x="4572391" y="601550"/>
+                  </a:lnTo>
+                  <a:lnTo>
+                    <a:pt x="4642736" y="605771"/>
+                  </a:lnTo>
+                  <a:lnTo>
+                    <a:pt x="4713080" y="609903"/>
+                  </a:lnTo>
+                  <a:lnTo>
+                    <a:pt x="4783425" y="613947"/>
+                  </a:lnTo>
+                  <a:lnTo>
+                    <a:pt x="4853769" y="617906"/>
+                  </a:lnTo>
+                  <a:lnTo>
+                    <a:pt x="4924114" y="621781"/>
+                  </a:lnTo>
+                  <a:lnTo>
+                    <a:pt x="4994458" y="625574"/>
+                  </a:lnTo>
+                  <a:lnTo>
+                    <a:pt x="5064803" y="629287"/>
+                  </a:lnTo>
+                  <a:lnTo>
+                    <a:pt x="5135147" y="632921"/>
+                  </a:lnTo>
+                  <a:lnTo>
+                    <a:pt x="5205492" y="636478"/>
+                  </a:lnTo>
+                  <a:lnTo>
+                    <a:pt x="5275836" y="639960"/>
+                  </a:lnTo>
+                  <a:lnTo>
+                    <a:pt x="5346181" y="643368"/>
+                  </a:lnTo>
+                  <a:lnTo>
+                    <a:pt x="5416525" y="646704"/>
+                  </a:lnTo>
+                  <a:lnTo>
+                    <a:pt x="5486870" y="649970"/>
+                  </a:lnTo>
+                  <a:lnTo>
+                    <a:pt x="5557214" y="653166"/>
+                  </a:lnTo>
+                  <a:lnTo>
+                    <a:pt x="5627559" y="656295"/>
+                  </a:lnTo>
+                  <a:lnTo>
+                    <a:pt x="5697903" y="659358"/>
+                  </a:lnTo>
+                  <a:lnTo>
+                    <a:pt x="5768248" y="662356"/>
+                  </a:lnTo>
+                  <a:lnTo>
+                    <a:pt x="5838592" y="665290"/>
+                  </a:lnTo>
+                  <a:lnTo>
+                    <a:pt x="5908937" y="668162"/>
+                  </a:lnTo>
+                  <a:lnTo>
+                    <a:pt x="5979281" y="670974"/>
+                  </a:lnTo>
+                  <a:lnTo>
+                    <a:pt x="6049626" y="673726"/>
+                  </a:lnTo>
+                  <a:lnTo>
+                    <a:pt x="6119970" y="676420"/>
+                  </a:lnTo>
+                  <a:lnTo>
+                    <a:pt x="6190315" y="679056"/>
+                  </a:lnTo>
+                  <a:lnTo>
+                    <a:pt x="6260659" y="681637"/>
+                  </a:lnTo>
+                  <a:lnTo>
+                    <a:pt x="6331004" y="684164"/>
+                  </a:lnTo>
+                  <a:lnTo>
+                    <a:pt x="6401348" y="686637"/>
+                  </a:lnTo>
+                  <a:lnTo>
+                    <a:pt x="6471693" y="689057"/>
+                  </a:lnTo>
+                  <a:lnTo>
+                    <a:pt x="6542037" y="691427"/>
+                  </a:lnTo>
+                  <a:lnTo>
+                    <a:pt x="6612382" y="693746"/>
+                  </a:lnTo>
+                  <a:lnTo>
+                    <a:pt x="6682726" y="696016"/>
+                  </a:lnTo>
+                  <a:lnTo>
+                    <a:pt x="6753071" y="698238"/>
+                  </a:lnTo>
+                  <a:lnTo>
+                    <a:pt x="6823415" y="700413"/>
+                  </a:lnTo>
+                  <a:lnTo>
+                    <a:pt x="6893760" y="702542"/>
+                  </a:lnTo>
+                  <a:lnTo>
+                    <a:pt x="6964104" y="704626"/>
+                  </a:lnTo>
+                </a:path>
+              </a:pathLst>
+            </a:custGeom>
+            <a:ln w="27101" cap="flat">
+              <a:solidFill>
+                <a:srgbClr val="FF8C00">
+                  <a:alpha val="100000"/>
+                </a:srgbClr>
+              </a:solidFill>
+              <a:prstDash val="solid"/>
+              <a:round/>
+            </a:ln>
+          </p:spPr>
+          <p:txBody>
+            <a:bodyPr/>
+            <a:lstStyle/>
+            <a:p/>
+          </p:txBody>
+        </p:sp>
+        <p:sp>
+          <p:nvSpPr>
+            <p:cNvPr id="71" name="pl71"/>
+            <p:cNvSpPr/>
+            <p:nvPr/>
+          </p:nvSpPr>
+          <p:spPr>
+            <a:xfrm>
+              <a:off x="887106" y="5294352"/>
+              <a:ext cx="7660515" cy="0"/>
+            </a:xfrm>
+            <a:custGeom>
+              <a:avLst/>
+              <a:pathLst>
+                <a:path w="7660515" h="0">
+                  <a:moveTo>
+                    <a:pt x="0" y="0"/>
+                  </a:moveTo>
+                  <a:lnTo>
+                    <a:pt x="7660515" y="0"/>
+                  </a:lnTo>
+                  <a:lnTo>
+                    <a:pt x="7660515" y="0"/>
+                  </a:lnTo>
+                </a:path>
+              </a:pathLst>
+            </a:custGeom>
+            <a:ln w="13550" cap="flat">
+              <a:solidFill>
+                <a:srgbClr val="7F7F7F">
+                  <a:alpha val="100000"/>
+                </a:srgbClr>
+              </a:solidFill>
+              <a:prstDash val="dash"/>
+              <a:round/>
+            </a:ln>
+          </p:spPr>
+          <p:txBody>
+            <a:bodyPr/>
+            <a:lstStyle/>
+            <a:p/>
+          </p:txBody>
+        </p:sp>
+        <p:sp>
+          <p:nvSpPr>
+            <p:cNvPr id="72" name="pl72"/>
+            <p:cNvSpPr/>
+            <p:nvPr/>
+          </p:nvSpPr>
+          <p:spPr>
+            <a:xfrm>
+              <a:off x="4472829" y="4336484"/>
+              <a:ext cx="0" cy="1317069"/>
+            </a:xfrm>
+            <a:custGeom>
+              <a:avLst/>
+              <a:pathLst>
+                <a:path w="0" h="1317069">
+                  <a:moveTo>
+                    <a:pt x="0" y="1317069"/>
+                  </a:moveTo>
+                  <a:lnTo>
+                    <a:pt x="0" y="0"/>
+                  </a:lnTo>
+                  <a:lnTo>
+                    <a:pt x="0" y="0"/>
+                  </a:lnTo>
+                </a:path>
+              </a:pathLst>
+            </a:custGeom>
+            <a:ln w="13550" cap="flat">
+              <a:solidFill>
+                <a:srgbClr val="666666">
+                  <a:alpha val="100000"/>
+                </a:srgbClr>
+              </a:solidFill>
+              <a:prstDash val="dot"/>
+              <a:round/>
+            </a:ln>
+          </p:spPr>
+          <p:txBody>
+            <a:bodyPr/>
+            <a:lstStyle/>
+            <a:p/>
+          </p:txBody>
+        </p:sp>
+        <p:sp>
+          <p:nvSpPr>
+            <p:cNvPr id="73" name="tx73"/>
+            <p:cNvSpPr/>
+            <p:nvPr/>
+          </p:nvSpPr>
+          <p:spPr>
+            <a:xfrm>
+              <a:off x="762297" y="5553636"/>
+              <a:ext cx="62179" cy="80101"/>
+            </a:xfrm>
+            <a:prstGeom prst="rect">
+              <a:avLst/>
+            </a:prstGeom>
+            <a:noFill/>
+          </p:spPr>
+          <p:txBody>
+            <a:bodyPr lIns="0" rIns="0" tIns="0" bIns="0" anchorCtr="1" anchor="ctr" wrap="none"/>
+            <a:lstStyle/>
+            <a:p>
+              <a:pPr algn="l" marL="0" marR="0" indent="0">
+                <a:lnSpc>
+                  <a:spcPts val="880"/>
+                </a:lnSpc>
+                <a:spcBef>
+                  <a:spcPts val="0"/>
+                </a:spcBef>
+                <a:spcAft>
+                  <a:spcPts val="0"/>
+                </a:spcAft>
+              </a:pPr>
+              <a:r>
+                <a:rPr sz="880">
+                  <a:solidFill>
+                    <a:srgbClr val="4D4D4D">
+                      <a:alpha val="100000"/>
+                    </a:srgbClr>
+                  </a:solidFill>
+                  <a:latin typeface="Helvetica"/>
+                  <a:cs typeface="Helvetica"/>
+                </a:rPr>
+                <a:t>0</a:t>
+              </a:r>
+            </a:p>
+          </p:txBody>
+        </p:sp>
+        <p:sp>
+          <p:nvSpPr>
+            <p:cNvPr id="74" name="tx74"/>
+            <p:cNvSpPr/>
+            <p:nvPr/>
+          </p:nvSpPr>
+          <p:spPr>
+            <a:xfrm>
+              <a:off x="762297" y="5254302"/>
+              <a:ext cx="62179" cy="80101"/>
+            </a:xfrm>
+            <a:prstGeom prst="rect">
+              <a:avLst/>
+            </a:prstGeom>
+            <a:noFill/>
+          </p:spPr>
+          <p:txBody>
+            <a:bodyPr lIns="0" rIns="0" tIns="0" bIns="0" anchorCtr="1" anchor="ctr" wrap="none"/>
+            <a:lstStyle/>
+            <a:p>
+              <a:pPr algn="l" marL="0" marR="0" indent="0">
+                <a:lnSpc>
+                  <a:spcPts val="880"/>
+                </a:lnSpc>
+                <a:spcBef>
+                  <a:spcPts val="0"/>
+                </a:spcBef>
+                <a:spcAft>
+                  <a:spcPts val="0"/>
+                </a:spcAft>
+              </a:pPr>
+              <a:r>
+                <a:rPr sz="880">
+                  <a:solidFill>
+                    <a:srgbClr val="4D4D4D">
+                      <a:alpha val="100000"/>
+                    </a:srgbClr>
+                  </a:solidFill>
+                  <a:latin typeface="Helvetica"/>
+                  <a:cs typeface="Helvetica"/>
+                </a:rPr>
+                <a:t>1</a:t>
+              </a:r>
+            </a:p>
+          </p:txBody>
+        </p:sp>
+        <p:sp>
+          <p:nvSpPr>
+            <p:cNvPr id="75" name="tx75"/>
+            <p:cNvSpPr/>
+            <p:nvPr/>
+          </p:nvSpPr>
+          <p:spPr>
+            <a:xfrm>
+              <a:off x="762297" y="4954968"/>
+              <a:ext cx="62179" cy="80101"/>
+            </a:xfrm>
+            <a:prstGeom prst="rect">
+              <a:avLst/>
+            </a:prstGeom>
+            <a:noFill/>
+          </p:spPr>
+          <p:txBody>
+            <a:bodyPr lIns="0" rIns="0" tIns="0" bIns="0" anchorCtr="1" anchor="ctr" wrap="none"/>
+            <a:lstStyle/>
+            <a:p>
+              <a:pPr algn="l" marL="0" marR="0" indent="0">
+                <a:lnSpc>
+                  <a:spcPts val="880"/>
+                </a:lnSpc>
+                <a:spcBef>
+                  <a:spcPts val="0"/>
+                </a:spcBef>
+                <a:spcAft>
+                  <a:spcPts val="0"/>
+                </a:spcAft>
+              </a:pPr>
+              <a:r>
+                <a:rPr sz="880">
+                  <a:solidFill>
+                    <a:srgbClr val="4D4D4D">
+                      <a:alpha val="100000"/>
+                    </a:srgbClr>
+                  </a:solidFill>
+                  <a:latin typeface="Helvetica"/>
+                  <a:cs typeface="Helvetica"/>
+                </a:rPr>
+                <a:t>2</a:t>
+              </a:r>
+            </a:p>
+          </p:txBody>
+        </p:sp>
+        <p:sp>
+          <p:nvSpPr>
+            <p:cNvPr id="76" name="tx76"/>
+            <p:cNvSpPr/>
+            <p:nvPr/>
+          </p:nvSpPr>
+          <p:spPr>
+            <a:xfrm>
+              <a:off x="762297" y="4655634"/>
+              <a:ext cx="62179" cy="80101"/>
+            </a:xfrm>
+            <a:prstGeom prst="rect">
+              <a:avLst/>
+            </a:prstGeom>
+            <a:noFill/>
+          </p:spPr>
+          <p:txBody>
+            <a:bodyPr lIns="0" rIns="0" tIns="0" bIns="0" anchorCtr="1" anchor="ctr" wrap="none"/>
+            <a:lstStyle/>
+            <a:p>
+              <a:pPr algn="l" marL="0" marR="0" indent="0">
+                <a:lnSpc>
+                  <a:spcPts val="880"/>
+                </a:lnSpc>
+                <a:spcBef>
+                  <a:spcPts val="0"/>
+                </a:spcBef>
+                <a:spcAft>
+                  <a:spcPts val="0"/>
+                </a:spcAft>
+              </a:pPr>
+              <a:r>
+                <a:rPr sz="880">
+                  <a:solidFill>
+                    <a:srgbClr val="4D4D4D">
+                      <a:alpha val="100000"/>
+                    </a:srgbClr>
+                  </a:solidFill>
+                  <a:latin typeface="Helvetica"/>
+                  <a:cs typeface="Helvetica"/>
+                </a:rPr>
+                <a:t>3</a:t>
+              </a:r>
+            </a:p>
+          </p:txBody>
+        </p:sp>
+        <p:sp>
+          <p:nvSpPr>
+            <p:cNvPr id="77" name="tx77"/>
+            <p:cNvSpPr/>
+            <p:nvPr/>
+          </p:nvSpPr>
+          <p:spPr>
+            <a:xfrm>
+              <a:off x="762297" y="4356300"/>
+              <a:ext cx="62179" cy="80101"/>
+            </a:xfrm>
+            <a:prstGeom prst="rect">
+              <a:avLst/>
+            </a:prstGeom>
+            <a:noFill/>
+          </p:spPr>
+          <p:txBody>
+            <a:bodyPr lIns="0" rIns="0" tIns="0" bIns="0" anchorCtr="1" anchor="ctr" wrap="none"/>
+            <a:lstStyle/>
+            <a:p>
+              <a:pPr algn="l" marL="0" marR="0" indent="0">
+                <a:lnSpc>
+                  <a:spcPts val="880"/>
+                </a:lnSpc>
+                <a:spcBef>
+                  <a:spcPts val="0"/>
+                </a:spcBef>
+                <a:spcAft>
+                  <a:spcPts val="0"/>
+                </a:spcAft>
+              </a:pPr>
+              <a:r>
+                <a:rPr sz="880">
+                  <a:solidFill>
+                    <a:srgbClr val="4D4D4D">
+                      <a:alpha val="100000"/>
+                    </a:srgbClr>
+                  </a:solidFill>
+                  <a:latin typeface="Helvetica"/>
+                  <a:cs typeface="Helvetica"/>
+                </a:rPr>
+                <a:t>4</a:t>
+              </a:r>
+            </a:p>
+          </p:txBody>
+        </p:sp>
+        <p:sp>
+          <p:nvSpPr>
+            <p:cNvPr id="78" name="tx78"/>
+            <p:cNvSpPr/>
+            <p:nvPr/>
+          </p:nvSpPr>
+          <p:spPr>
+            <a:xfrm>
+              <a:off x="1306098" y="5716183"/>
+              <a:ext cx="161574" cy="80101"/>
+            </a:xfrm>
+            <a:prstGeom prst="rect">
+              <a:avLst/>
+            </a:prstGeom>
+            <a:noFill/>
+          </p:spPr>
+          <p:txBody>
+            <a:bodyPr lIns="0" rIns="0" tIns="0" bIns="0" anchorCtr="1" anchor="ctr" wrap="none"/>
+            <a:lstStyle/>
+            <a:p>
+              <a:pPr algn="l" marL="0" marR="0" indent="0">
+                <a:lnSpc>
+                  <a:spcPts val="880"/>
+                </a:lnSpc>
+                <a:spcBef>
+                  <a:spcPts val="0"/>
+                </a:spcBef>
+                <a:spcAft>
+                  <a:spcPts val="0"/>
+                </a:spcAft>
+              </a:pPr>
+              <a:r>
+                <a:rPr sz="880">
+                  <a:solidFill>
+                    <a:srgbClr val="4D4D4D">
+                      <a:alpha val="100000"/>
+                    </a:srgbClr>
+                  </a:solidFill>
+                  <a:latin typeface="Helvetica"/>
+                  <a:cs typeface="Helvetica"/>
+                </a:rPr>
+                <a:t>-40</a:t>
+              </a:r>
+            </a:p>
+          </p:txBody>
+        </p:sp>
+        <p:sp>
+          <p:nvSpPr>
+            <p:cNvPr id="79" name="tx79"/>
+            <p:cNvSpPr/>
+            <p:nvPr/>
+          </p:nvSpPr>
+          <p:spPr>
+            <a:xfrm>
+              <a:off x="2113264" y="5716183"/>
+              <a:ext cx="161574" cy="80101"/>
+            </a:xfrm>
+            <a:prstGeom prst="rect">
+              <a:avLst/>
+            </a:prstGeom>
+            <a:noFill/>
+          </p:spPr>
+          <p:txBody>
+            <a:bodyPr lIns="0" rIns="0" tIns="0" bIns="0" anchorCtr="1" anchor="ctr" wrap="none"/>
+            <a:lstStyle/>
+            <a:p>
+              <a:pPr algn="l" marL="0" marR="0" indent="0">
+                <a:lnSpc>
+                  <a:spcPts val="880"/>
+                </a:lnSpc>
+                <a:spcBef>
+                  <a:spcPts val="0"/>
+                </a:spcBef>
+                <a:spcAft>
+                  <a:spcPts val="0"/>
+                </a:spcAft>
+              </a:pPr>
+              <a:r>
+                <a:rPr sz="880">
+                  <a:solidFill>
+                    <a:srgbClr val="4D4D4D">
+                      <a:alpha val="100000"/>
+                    </a:srgbClr>
+                  </a:solidFill>
+                  <a:latin typeface="Helvetica"/>
+                  <a:cs typeface="Helvetica"/>
+                </a:rPr>
+                <a:t>-30</a:t>
+              </a:r>
+            </a:p>
+          </p:txBody>
+        </p:sp>
+        <p:sp>
+          <p:nvSpPr>
+            <p:cNvPr id="80" name="tx80"/>
+            <p:cNvSpPr/>
+            <p:nvPr/>
+          </p:nvSpPr>
+          <p:spPr>
+            <a:xfrm>
+              <a:off x="2920429" y="5716183"/>
+              <a:ext cx="161574" cy="80101"/>
+            </a:xfrm>
+            <a:prstGeom prst="rect">
+              <a:avLst/>
+            </a:prstGeom>
+            <a:noFill/>
+          </p:spPr>
+          <p:txBody>
+            <a:bodyPr lIns="0" rIns="0" tIns="0" bIns="0" anchorCtr="1" anchor="ctr" wrap="none"/>
+            <a:lstStyle/>
+            <a:p>
+              <a:pPr algn="l" marL="0" marR="0" indent="0">
+                <a:lnSpc>
+                  <a:spcPts val="880"/>
+                </a:lnSpc>
+                <a:spcBef>
+                  <a:spcPts val="0"/>
+                </a:spcBef>
+                <a:spcAft>
+                  <a:spcPts val="0"/>
+                </a:spcAft>
+              </a:pPr>
+              <a:r>
+                <a:rPr sz="880">
+                  <a:solidFill>
+                    <a:srgbClr val="4D4D4D">
+                      <a:alpha val="100000"/>
+                    </a:srgbClr>
+                  </a:solidFill>
+                  <a:latin typeface="Helvetica"/>
+                  <a:cs typeface="Helvetica"/>
+                </a:rPr>
+                <a:t>-20</a:t>
+              </a:r>
+            </a:p>
+          </p:txBody>
+        </p:sp>
+        <p:sp>
+          <p:nvSpPr>
+            <p:cNvPr id="81" name="tx81"/>
+            <p:cNvSpPr/>
+            <p:nvPr/>
+          </p:nvSpPr>
+          <p:spPr>
+            <a:xfrm>
+              <a:off x="3727595" y="5716183"/>
+              <a:ext cx="161574" cy="80101"/>
+            </a:xfrm>
+            <a:prstGeom prst="rect">
+              <a:avLst/>
+            </a:prstGeom>
+            <a:noFill/>
+          </p:spPr>
+          <p:txBody>
+            <a:bodyPr lIns="0" rIns="0" tIns="0" bIns="0" anchorCtr="1" anchor="ctr" wrap="none"/>
+            <a:lstStyle/>
+            <a:p>
+              <a:pPr algn="l" marL="0" marR="0" indent="0">
+                <a:lnSpc>
+                  <a:spcPts val="880"/>
+                </a:lnSpc>
+                <a:spcBef>
+                  <a:spcPts val="0"/>
+                </a:spcBef>
+                <a:spcAft>
+                  <a:spcPts val="0"/>
+                </a:spcAft>
+              </a:pPr>
+              <a:r>
+                <a:rPr sz="880">
+                  <a:solidFill>
+                    <a:srgbClr val="4D4D4D">
+                      <a:alpha val="100000"/>
+                    </a:srgbClr>
+                  </a:solidFill>
+                  <a:latin typeface="Helvetica"/>
+                  <a:cs typeface="Helvetica"/>
+                </a:rPr>
+                <a:t>-10</a:t>
+              </a:r>
+            </a:p>
+          </p:txBody>
+        </p:sp>
+        <p:sp>
+          <p:nvSpPr>
+            <p:cNvPr id="82" name="tx82"/>
+            <p:cNvSpPr/>
+            <p:nvPr/>
+          </p:nvSpPr>
+          <p:spPr>
+            <a:xfrm>
+              <a:off x="4584458" y="5716183"/>
+              <a:ext cx="62179" cy="80101"/>
+            </a:xfrm>
+            <a:prstGeom prst="rect">
+              <a:avLst/>
+            </a:prstGeom>
+            <a:noFill/>
+          </p:spPr>
+          <p:txBody>
+            <a:bodyPr lIns="0" rIns="0" tIns="0" bIns="0" anchorCtr="1" anchor="ctr" wrap="none"/>
+            <a:lstStyle/>
+            <a:p>
+              <a:pPr algn="l" marL="0" marR="0" indent="0">
+                <a:lnSpc>
+                  <a:spcPts val="880"/>
+                </a:lnSpc>
+                <a:spcBef>
+                  <a:spcPts val="0"/>
+                </a:spcBef>
+                <a:spcAft>
+                  <a:spcPts val="0"/>
+                </a:spcAft>
+              </a:pPr>
+              <a:r>
+                <a:rPr sz="880">
+                  <a:solidFill>
+                    <a:srgbClr val="4D4D4D">
+                      <a:alpha val="100000"/>
+                    </a:srgbClr>
+                  </a:solidFill>
+                  <a:latin typeface="Helvetica"/>
+                  <a:cs typeface="Helvetica"/>
+                </a:rPr>
+                <a:t>0</a:t>
+              </a:r>
+            </a:p>
+          </p:txBody>
+        </p:sp>
+        <p:sp>
+          <p:nvSpPr>
+            <p:cNvPr id="83" name="tx83"/>
+            <p:cNvSpPr/>
+            <p:nvPr/>
+          </p:nvSpPr>
+          <p:spPr>
+            <a:xfrm>
+              <a:off x="5360534" y="5716183"/>
+              <a:ext cx="124358" cy="80101"/>
+            </a:xfrm>
+            <a:prstGeom prst="rect">
+              <a:avLst/>
+            </a:prstGeom>
+            <a:noFill/>
+          </p:spPr>
+          <p:txBody>
+            <a:bodyPr lIns="0" rIns="0" tIns="0" bIns="0" anchorCtr="1" anchor="ctr" wrap="none"/>
+            <a:lstStyle/>
+            <a:p>
+              <a:pPr algn="l" marL="0" marR="0" indent="0">
+                <a:lnSpc>
+                  <a:spcPts val="880"/>
+                </a:lnSpc>
+                <a:spcBef>
+                  <a:spcPts val="0"/>
+                </a:spcBef>
+                <a:spcAft>
+                  <a:spcPts val="0"/>
+                </a:spcAft>
+              </a:pPr>
+              <a:r>
+                <a:rPr sz="880">
+                  <a:solidFill>
+                    <a:srgbClr val="4D4D4D">
+                      <a:alpha val="100000"/>
+                    </a:srgbClr>
+                  </a:solidFill>
+                  <a:latin typeface="Helvetica"/>
+                  <a:cs typeface="Helvetica"/>
+                </a:rPr>
+                <a:t>10</a:t>
+              </a:r>
+            </a:p>
+          </p:txBody>
+        </p:sp>
+        <p:sp>
+          <p:nvSpPr>
+            <p:cNvPr id="84" name="tx84"/>
+            <p:cNvSpPr/>
+            <p:nvPr/>
+          </p:nvSpPr>
+          <p:spPr>
+            <a:xfrm>
+              <a:off x="6167699" y="5716183"/>
+              <a:ext cx="124358" cy="80101"/>
+            </a:xfrm>
+            <a:prstGeom prst="rect">
+              <a:avLst/>
+            </a:prstGeom>
+            <a:noFill/>
+          </p:spPr>
+          <p:txBody>
+            <a:bodyPr lIns="0" rIns="0" tIns="0" bIns="0" anchorCtr="1" anchor="ctr" wrap="none"/>
+            <a:lstStyle/>
+            <a:p>
+              <a:pPr algn="l" marL="0" marR="0" indent="0">
+                <a:lnSpc>
+                  <a:spcPts val="880"/>
+                </a:lnSpc>
+                <a:spcBef>
+                  <a:spcPts val="0"/>
+                </a:spcBef>
+                <a:spcAft>
+                  <a:spcPts val="0"/>
+                </a:spcAft>
+              </a:pPr>
+              <a:r>
+                <a:rPr sz="880">
+                  <a:solidFill>
+                    <a:srgbClr val="4D4D4D">
+                      <a:alpha val="100000"/>
+                    </a:srgbClr>
+                  </a:solidFill>
+                  <a:latin typeface="Helvetica"/>
+                  <a:cs typeface="Helvetica"/>
+                </a:rPr>
+                <a:t>20</a:t>
+              </a:r>
+            </a:p>
+          </p:txBody>
+        </p:sp>
+        <p:sp>
+          <p:nvSpPr>
+            <p:cNvPr id="85" name="tx85"/>
+            <p:cNvSpPr/>
+            <p:nvPr/>
+          </p:nvSpPr>
+          <p:spPr>
+            <a:xfrm>
+              <a:off x="6974865" y="5716183"/>
+              <a:ext cx="124358" cy="80101"/>
+            </a:xfrm>
+            <a:prstGeom prst="rect">
+              <a:avLst/>
+            </a:prstGeom>
+            <a:noFill/>
+          </p:spPr>
+          <p:txBody>
+            <a:bodyPr lIns="0" rIns="0" tIns="0" bIns="0" anchorCtr="1" anchor="ctr" wrap="none"/>
+            <a:lstStyle/>
+            <a:p>
+              <a:pPr algn="l" marL="0" marR="0" indent="0">
+                <a:lnSpc>
+                  <a:spcPts val="880"/>
+                </a:lnSpc>
+                <a:spcBef>
+                  <a:spcPts val="0"/>
+                </a:spcBef>
+                <a:spcAft>
+                  <a:spcPts val="0"/>
+                </a:spcAft>
+              </a:pPr>
+              <a:r>
+                <a:rPr sz="880">
+                  <a:solidFill>
+                    <a:srgbClr val="4D4D4D">
+                      <a:alpha val="100000"/>
+                    </a:srgbClr>
+                  </a:solidFill>
+                  <a:latin typeface="Helvetica"/>
+                  <a:cs typeface="Helvetica"/>
+                </a:rPr>
+                <a:t>30</a:t>
+              </a:r>
+            </a:p>
+          </p:txBody>
+        </p:sp>
+        <p:sp>
+          <p:nvSpPr>
+            <p:cNvPr id="86" name="tx86"/>
+            <p:cNvSpPr/>
+            <p:nvPr/>
+          </p:nvSpPr>
+          <p:spPr>
+            <a:xfrm>
+              <a:off x="7782030" y="5716183"/>
+              <a:ext cx="124358" cy="80101"/>
+            </a:xfrm>
+            <a:prstGeom prst="rect">
+              <a:avLst/>
+            </a:prstGeom>
+            <a:noFill/>
+          </p:spPr>
+          <p:txBody>
+            <a:bodyPr lIns="0" rIns="0" tIns="0" bIns="0" anchorCtr="1" anchor="ctr" wrap="none"/>
+            <a:lstStyle/>
+            <a:p>
+              <a:pPr algn="l" marL="0" marR="0" indent="0">
+                <a:lnSpc>
+                  <a:spcPts val="880"/>
+                </a:lnSpc>
+                <a:spcBef>
+                  <a:spcPts val="0"/>
+                </a:spcBef>
+                <a:spcAft>
+                  <a:spcPts val="0"/>
+                </a:spcAft>
+              </a:pPr>
+              <a:r>
+                <a:rPr sz="880">
+                  <a:solidFill>
+                    <a:srgbClr val="4D4D4D">
+                      <a:alpha val="100000"/>
+                    </a:srgbClr>
+                  </a:solidFill>
+                  <a:latin typeface="Helvetica"/>
+                  <a:cs typeface="Helvetica"/>
+                </a:rPr>
+                <a:t>40</a:t>
+              </a:r>
+            </a:p>
+          </p:txBody>
+        </p:sp>
+        <p:sp>
+          <p:nvSpPr>
+            <p:cNvPr id="87" name="tx87"/>
+            <p:cNvSpPr/>
+            <p:nvPr/>
+          </p:nvSpPr>
+          <p:spPr>
+            <a:xfrm>
+              <a:off x="2928340" y="5855859"/>
+              <a:ext cx="3578047" cy="100218"/>
+            </a:xfrm>
+            <a:prstGeom prst="rect">
+              <a:avLst/>
+            </a:prstGeom>
+            <a:noFill/>
+          </p:spPr>
+          <p:txBody>
+            <a:bodyPr lIns="0" rIns="0" tIns="0" bIns="0" anchorCtr="1" anchor="ctr" wrap="none"/>
+            <a:lstStyle/>
+            <a:p>
+              <a:pPr algn="l" marL="0" marR="0" indent="0">
+                <a:lnSpc>
+                  <a:spcPts val="1100"/>
+                </a:lnSpc>
+                <a:spcBef>
+                  <a:spcPts val="0"/>
+                </a:spcBef>
+                <a:spcAft>
+                  <a:spcPts val="0"/>
+                </a:spcAft>
+              </a:pPr>
+              <a:r>
+                <a:rPr sz="1100">
+                  <a:solidFill>
+                    <a:srgbClr val="000000">
+                      <a:alpha val="100000"/>
+                    </a:srgbClr>
+                  </a:solidFill>
+                  <a:latin typeface="Helvetica"/>
+                  <a:cs typeface="Helvetica"/>
+                </a:rPr>
+                <a:t>eGFR difference (%): 100 × (CKD-EPI Cr-Cys − CG) / CG</a:t>
+              </a:r>
+            </a:p>
+          </p:txBody>
+        </p:sp>
+        <p:sp>
+          <p:nvSpPr>
+            <p:cNvPr id="88" name="tx88"/>
+            <p:cNvSpPr/>
+            <p:nvPr/>
+          </p:nvSpPr>
+          <p:spPr>
+            <a:xfrm rot="-5400000">
+              <a:off x="138035" y="4944909"/>
+              <a:ext cx="1016904" cy="100218"/>
+            </a:xfrm>
+            <a:prstGeom prst="rect">
+              <a:avLst/>
+            </a:prstGeom>
+            <a:noFill/>
+          </p:spPr>
+          <p:txBody>
+            <a:bodyPr lIns="0" rIns="0" tIns="0" bIns="0" anchorCtr="1" anchor="ctr" wrap="none"/>
+            <a:lstStyle/>
+            <a:p>
+              <a:pPr algn="l" marL="0" marR="0" indent="0">
+                <a:lnSpc>
+                  <a:spcPts val="1100"/>
+                </a:lnSpc>
+                <a:spcBef>
+                  <a:spcPts val="0"/>
+                </a:spcBef>
+                <a:spcAft>
+                  <a:spcPts val="0"/>
+                </a:spcAft>
+              </a:pPr>
+              <a:r>
+                <a:rPr sz="1100">
+                  <a:solidFill>
+                    <a:srgbClr val="000000">
+                      <a:alpha val="100000"/>
+                    </a:srgbClr>
+                  </a:solidFill>
+                  <a:latin typeface="Helvetica"/>
+                  <a:cs typeface="Helvetica"/>
+                </a:rPr>
+                <a:t>subHR (95% CI)</a:t>
+              </a:r>
+            </a:p>
+          </p:txBody>
+        </p:sp>
+        <p:sp>
+          <p:nvSpPr>
+            <p:cNvPr id="89" name="tx89"/>
+            <p:cNvSpPr/>
+            <p:nvPr/>
+          </p:nvSpPr>
+          <p:spPr>
+            <a:xfrm>
+              <a:off x="887106" y="4159544"/>
+              <a:ext cx="7052127" cy="82021"/>
+            </a:xfrm>
+            <a:prstGeom prst="rect">
+              <a:avLst/>
+            </a:prstGeom>
+            <a:noFill/>
+          </p:spPr>
+          <p:txBody>
+            <a:bodyPr lIns="0" rIns="0" tIns="0" bIns="0" anchorCtr="1" anchor="ctr" wrap="none"/>
+            <a:lstStyle/>
+            <a:p>
+              <a:pPr algn="l" marL="0" marR="0" indent="0">
+                <a:lnSpc>
+                  <a:spcPts val="900"/>
+                </a:lnSpc>
+                <a:spcBef>
+                  <a:spcPts val="0"/>
+                </a:spcBef>
+                <a:spcAft>
+                  <a:spcPts val="0"/>
+                </a:spcAft>
+              </a:pPr>
+              <a:r>
+                <a:rPr sz="900">
+                  <a:solidFill>
+                    <a:srgbClr val="404040">
+                      <a:alpha val="100000"/>
+                    </a:srgbClr>
+                  </a:solidFill>
+                  <a:latin typeface="Helvetica"/>
+                  <a:cs typeface="Helvetica"/>
+                </a:rPr>
+                <a:t>subHR per 10 % decline: 1.28 (1.16-1.41), p_Bonf = &lt;0.001 (n = 6)  |  per IQR decline (Δ = 29.5 %): 2.06 (1.53-2.78)  |  IQR: [-15.6, 13.9] %</a:t>
+              </a:r>
+            </a:p>
+          </p:txBody>
+        </p:sp>
+        <p:sp>
+          <p:nvSpPr>
+            <p:cNvPr id="90" name="tx90"/>
+            <p:cNvSpPr/>
+            <p:nvPr/>
+          </p:nvSpPr>
+          <p:spPr>
+            <a:xfrm>
+              <a:off x="887106" y="3932770"/>
               <a:ext cx="3499683" cy="120152"/>
             </a:xfrm>
             <a:prstGeom prst="rect">
